--- a/Dot Net/2_DB.pptx
+++ b/Dot Net/2_DB.pptx
@@ -20225,9 +20225,16 @@
             <p:ph type="title"/>
           </p:nvPr>
         </p:nvSpPr>
-        <p:spPr/>
+        <p:spPr>
+          <a:xfrm>
+            <a:off x="838200" y="365126"/>
+            <a:ext cx="10515600" cy="693208"/>
+          </a:xfrm>
+        </p:spPr>
         <p:txBody>
-          <a:bodyPr/>
+          <a:bodyPr>
+            <a:normAutofit fontScale="90000"/>
+          </a:bodyPr>
           <a:lstStyle/>
           <a:p>
             <a:endParaRPr lang="en-US"/>
@@ -20258,8 +20265,8 @@
         </p:blipFill>
         <p:spPr>
           <a:xfrm>
-            <a:off x="737293" y="2016531"/>
-            <a:ext cx="3741573" cy="4308478"/>
+            <a:off x="737293" y="1752600"/>
+            <a:ext cx="3936307" cy="4796647"/>
           </a:xfrm>
           <a:prstGeom prst="rect">
             <a:avLst/>

--- a/Dot Net/2_DB.pptx
+++ b/Dot Net/2_DB.pptx
@@ -5,7 +5,7 @@
     <p:sldMasterId id="2147483763" r:id="rId1"/>
   </p:sldMasterIdLst>
   <p:notesMasterIdLst>
-    <p:notesMasterId r:id="rId148"/>
+    <p:notesMasterId r:id="rId168"/>
   </p:notesMasterIdLst>
   <p:sldIdLst>
     <p:sldId id="256" r:id="rId2"/>
@@ -142,18 +142,38 @@
     <p:sldId id="274" r:id="rId133"/>
     <p:sldId id="286" r:id="rId134"/>
     <p:sldId id="339" r:id="rId135"/>
-    <p:sldId id="405" r:id="rId136"/>
-    <p:sldId id="408" r:id="rId137"/>
-    <p:sldId id="409" r:id="rId138"/>
-    <p:sldId id="407" r:id="rId139"/>
-    <p:sldId id="412" r:id="rId140"/>
-    <p:sldId id="414" r:id="rId141"/>
-    <p:sldId id="415" r:id="rId142"/>
-    <p:sldId id="413" r:id="rId143"/>
-    <p:sldId id="417" r:id="rId144"/>
-    <p:sldId id="419" r:id="rId145"/>
-    <p:sldId id="420" r:id="rId146"/>
-    <p:sldId id="418" r:id="rId147"/>
+    <p:sldId id="432" r:id="rId136"/>
+    <p:sldId id="433" r:id="rId137"/>
+    <p:sldId id="434" r:id="rId138"/>
+    <p:sldId id="435" r:id="rId139"/>
+    <p:sldId id="442" r:id="rId140"/>
+    <p:sldId id="405" r:id="rId141"/>
+    <p:sldId id="431" r:id="rId142"/>
+    <p:sldId id="408" r:id="rId143"/>
+    <p:sldId id="409" r:id="rId144"/>
+    <p:sldId id="407" r:id="rId145"/>
+    <p:sldId id="412" r:id="rId146"/>
+    <p:sldId id="414" r:id="rId147"/>
+    <p:sldId id="415" r:id="rId148"/>
+    <p:sldId id="413" r:id="rId149"/>
+    <p:sldId id="417" r:id="rId150"/>
+    <p:sldId id="419" r:id="rId151"/>
+    <p:sldId id="420" r:id="rId152"/>
+    <p:sldId id="430" r:id="rId153"/>
+    <p:sldId id="418" r:id="rId154"/>
+    <p:sldId id="425" r:id="rId155"/>
+    <p:sldId id="424" r:id="rId156"/>
+    <p:sldId id="427" r:id="rId157"/>
+    <p:sldId id="426" r:id="rId158"/>
+    <p:sldId id="422" r:id="rId159"/>
+    <p:sldId id="421" r:id="rId160"/>
+    <p:sldId id="428" r:id="rId161"/>
+    <p:sldId id="429" r:id="rId162"/>
+    <p:sldId id="423" r:id="rId163"/>
+    <p:sldId id="437" r:id="rId164"/>
+    <p:sldId id="440" r:id="rId165"/>
+    <p:sldId id="441" r:id="rId166"/>
+    <p:sldId id="439" r:id="rId167"/>
   </p:sldIdLst>
   <p:sldSz cx="12192000" cy="6858000"/>
   <p:notesSz cx="6858000" cy="9144000"/>
@@ -342,7 +362,7 @@
           <a:p>
             <a:fld id="{47CE4E9B-B1A4-423C-87E2-9C8168E3DB1B}" type="datetimeFigureOut">
               <a:rPr lang="en-US" smtClean="0"/>
-              <a:t>6/28/2026</a:t>
+              <a:t>7/22/2026</a:t>
             </a:fld>
             <a:endParaRPr lang="en-US"/>
           </a:p>
@@ -824,7 +844,7 @@
           <a:p>
             <a:fld id="{3783D483-079C-477D-B170-494E0861DC93}" type="datetimeFigureOut">
               <a:rPr lang="en-US" smtClean="0"/>
-              <a:t>6/28/2026</a:t>
+              <a:t>7/22/2026</a:t>
             </a:fld>
             <a:endParaRPr lang="en-US"/>
           </a:p>
@@ -994,7 +1014,7 @@
           <a:p>
             <a:fld id="{3783D483-079C-477D-B170-494E0861DC93}" type="datetimeFigureOut">
               <a:rPr lang="en-US" smtClean="0"/>
-              <a:t>6/28/2026</a:t>
+              <a:t>7/22/2026</a:t>
             </a:fld>
             <a:endParaRPr lang="en-US"/>
           </a:p>
@@ -1174,7 +1194,7 @@
           <a:p>
             <a:fld id="{3783D483-079C-477D-B170-494E0861DC93}" type="datetimeFigureOut">
               <a:rPr lang="en-US" smtClean="0"/>
-              <a:t>6/28/2026</a:t>
+              <a:t>7/22/2026</a:t>
             </a:fld>
             <a:endParaRPr lang="en-US"/>
           </a:p>
@@ -1344,7 +1364,7 @@
           <a:p>
             <a:fld id="{3783D483-079C-477D-B170-494E0861DC93}" type="datetimeFigureOut">
               <a:rPr lang="en-US" smtClean="0"/>
-              <a:t>6/28/2026</a:t>
+              <a:t>7/22/2026</a:t>
             </a:fld>
             <a:endParaRPr lang="en-US"/>
           </a:p>
@@ -1590,7 +1610,7 @@
           <a:p>
             <a:fld id="{3783D483-079C-477D-B170-494E0861DC93}" type="datetimeFigureOut">
               <a:rPr lang="en-US" smtClean="0"/>
-              <a:t>6/28/2026</a:t>
+              <a:t>7/22/2026</a:t>
             </a:fld>
             <a:endParaRPr lang="en-US"/>
           </a:p>
@@ -1822,7 +1842,7 @@
           <a:p>
             <a:fld id="{3783D483-079C-477D-B170-494E0861DC93}" type="datetimeFigureOut">
               <a:rPr lang="en-US" smtClean="0"/>
-              <a:t>6/28/2026</a:t>
+              <a:t>7/22/2026</a:t>
             </a:fld>
             <a:endParaRPr lang="en-US"/>
           </a:p>
@@ -2189,7 +2209,7 @@
           <a:p>
             <a:fld id="{3783D483-079C-477D-B170-494E0861DC93}" type="datetimeFigureOut">
               <a:rPr lang="en-US" smtClean="0"/>
-              <a:t>6/28/2026</a:t>
+              <a:t>7/22/2026</a:t>
             </a:fld>
             <a:endParaRPr lang="en-US"/>
           </a:p>
@@ -2307,7 +2327,7 @@
           <a:p>
             <a:fld id="{3783D483-079C-477D-B170-494E0861DC93}" type="datetimeFigureOut">
               <a:rPr lang="en-US" smtClean="0"/>
-              <a:t>6/28/2026</a:t>
+              <a:t>7/22/2026</a:t>
             </a:fld>
             <a:endParaRPr lang="en-US"/>
           </a:p>
@@ -2402,7 +2422,7 @@
           <a:p>
             <a:fld id="{3783D483-079C-477D-B170-494E0861DC93}" type="datetimeFigureOut">
               <a:rPr lang="en-US" smtClean="0"/>
-              <a:t>6/28/2026</a:t>
+              <a:t>7/22/2026</a:t>
             </a:fld>
             <a:endParaRPr lang="en-US"/>
           </a:p>
@@ -2679,7 +2699,7 @@
           <a:p>
             <a:fld id="{3783D483-079C-477D-B170-494E0861DC93}" type="datetimeFigureOut">
               <a:rPr lang="en-US" smtClean="0"/>
-              <a:t>6/28/2026</a:t>
+              <a:t>7/22/2026</a:t>
             </a:fld>
             <a:endParaRPr lang="en-US"/>
           </a:p>
@@ -2936,7 +2956,7 @@
           <a:p>
             <a:fld id="{3783D483-079C-477D-B170-494E0861DC93}" type="datetimeFigureOut">
               <a:rPr lang="en-US" smtClean="0"/>
-              <a:t>6/28/2026</a:t>
+              <a:t>7/22/2026</a:t>
             </a:fld>
             <a:endParaRPr lang="en-US"/>
           </a:p>
@@ -3149,7 +3169,7 @@
           <a:p>
             <a:fld id="{3783D483-079C-477D-B170-494E0861DC93}" type="datetimeFigureOut">
               <a:rPr lang="en-US" smtClean="0"/>
-              <a:t>6/28/2026</a:t>
+              <a:t>7/22/2026</a:t>
             </a:fld>
             <a:endParaRPr lang="en-US"/>
           </a:p>
@@ -18491,7 +18511,13 @@
   <p:cSld>
     <p:spTree>
       <p:nvGrpSpPr>
-        <p:cNvPr id="1" name=""/>
+        <p:cNvPr id="1" name="">
+          <a:extLst>
+            <a:ext uri="{FF2B5EF4-FFF2-40B4-BE49-F238E27FC236}">
+              <a16:creationId xmlns:a16="http://schemas.microsoft.com/office/drawing/2014/main" id="{88588C92-7240-BD14-A22D-012CF703906A}"/>
+            </a:ext>
+          </a:extLst>
+        </p:cNvPr>
         <p:cNvGrpSpPr/>
         <p:nvPr/>
       </p:nvGrpSpPr>
@@ -18508,7 +18534,7 @@
           <p:cNvPr id="2" name="Title 1">
             <a:extLst>
               <a:ext uri="{FF2B5EF4-FFF2-40B4-BE49-F238E27FC236}">
-                <a16:creationId xmlns:a16="http://schemas.microsoft.com/office/drawing/2014/main" id="{BA575EF9-430B-0533-5963-E8AFDD00FAD5}"/>
+                <a16:creationId xmlns:a16="http://schemas.microsoft.com/office/drawing/2014/main" id="{F8D8B644-D161-3B4D-C7F4-D6860BFC5274}"/>
               </a:ext>
             </a:extLst>
           </p:cNvPr>
@@ -18538,7 +18564,7 @@
                   <a:srgbClr val="FF0000"/>
                 </a:solidFill>
               </a:rPr>
-              <a:t>Start CASE </a:t>
+              <a:t>Start Select </a:t>
             </a:r>
           </a:p>
         </p:txBody>
@@ -18546,7 +18572,7 @@
     </p:spTree>
     <p:extLst>
       <p:ext uri="{BB962C8B-B14F-4D97-AF65-F5344CB8AC3E}">
-        <p14:creationId xmlns:p14="http://schemas.microsoft.com/office/powerpoint/2010/main" val="818038930"/>
+        <p14:creationId xmlns:p14="http://schemas.microsoft.com/office/powerpoint/2010/main" val="1829582675"/>
       </p:ext>
     </p:extLst>
   </p:cSld>
@@ -18578,7 +18604,7 @@
           <p:cNvPr id="2" name="Title 1">
             <a:extLst>
               <a:ext uri="{FF2B5EF4-FFF2-40B4-BE49-F238E27FC236}">
-                <a16:creationId xmlns:a16="http://schemas.microsoft.com/office/drawing/2014/main" id="{6BCAEFA2-D4C7-7BB3-9C0C-5C2425BC8D80}"/>
+                <a16:creationId xmlns:a16="http://schemas.microsoft.com/office/drawing/2014/main" id="{605A69E6-2E9C-D432-B8B8-BA15F3B4C7CE}"/>
               </a:ext>
             </a:extLst>
           </p:cNvPr>
@@ -18591,20 +18617,17 @@
         </p:nvSpPr>
         <p:spPr>
           <a:xfrm>
-            <a:off x="838200" y="18256"/>
-            <a:ext cx="10515600" cy="530384"/>
+            <a:off x="838200" y="0"/>
+            <a:ext cx="10515600" cy="739775"/>
           </a:xfrm>
         </p:spPr>
         <p:txBody>
-          <a:bodyPr>
-            <a:normAutofit fontScale="90000"/>
-          </a:bodyPr>
+          <a:bodyPr/>
           <a:lstStyle/>
           <a:p>
-            <a:pPr algn="ctr"/>
-            <a:r>
-              <a:rPr lang="en-US" b="1"/>
-              <a:t>CASE 1 </a:t>
+            <a:r>
+              <a:rPr lang="en-US"/>
+              <a:t>Subquery select</a:t>
             </a:r>
           </a:p>
         </p:txBody>
@@ -18614,7 +18637,7 @@
           <p:cNvPr id="3" name="Content Placeholder 2">
             <a:extLst>
               <a:ext uri="{FF2B5EF4-FFF2-40B4-BE49-F238E27FC236}">
-                <a16:creationId xmlns:a16="http://schemas.microsoft.com/office/drawing/2014/main" id="{5505DC83-DEF4-EBB2-A77C-41C9E4FD9BBB}"/>
+                <a16:creationId xmlns:a16="http://schemas.microsoft.com/office/drawing/2014/main" id="{0EDBEDEF-5C07-DD63-746B-8A0750CB0331}"/>
               </a:ext>
             </a:extLst>
           </p:cNvPr>
@@ -18627,8 +18650,8 @@
         </p:nvSpPr>
         <p:spPr>
           <a:xfrm>
-            <a:off x="182880" y="548640"/>
-            <a:ext cx="11826240" cy="6126480"/>
+            <a:off x="419100" y="739775"/>
+            <a:ext cx="10934700" cy="5437188"/>
           </a:xfrm>
         </p:spPr>
         <p:txBody>
@@ -18638,115 +18661,15 @@
           <a:lstStyle/>
           <a:p>
             <a:r>
-              <a:rPr lang="en-US">
-                <a:solidFill>
-                  <a:srgbClr val="7030A0"/>
-                </a:solidFill>
-              </a:rPr>
-              <a:t>CASE</a:t>
-            </a:r>
-            <a:r>
-              <a:rPr lang="en-US"/>
-              <a:t> </a:t>
-            </a:r>
-            <a:br>
-              <a:rPr lang="en-US"/>
-            </a:br>
-            <a:r>
-              <a:rPr lang="en-US"/>
-              <a:t>	</a:t>
-            </a:r>
-            <a:r>
-              <a:rPr lang="en-US" b="1">
-                <a:solidFill>
-                  <a:srgbClr val="00B0F0"/>
-                </a:solidFill>
-              </a:rPr>
-              <a:t>WHEN</a:t>
-            </a:r>
-            <a:r>
-              <a:rPr lang="en-US"/>
-              <a:t> condition </a:t>
-            </a:r>
-            <a:r>
-              <a:rPr lang="en-US" b="1">
-                <a:solidFill>
-                  <a:srgbClr val="00B0F0"/>
-                </a:solidFill>
-              </a:rPr>
-              <a:t>THEN</a:t>
-            </a:r>
-            <a:r>
-              <a:rPr lang="en-US"/>
-              <a:t> result</a:t>
-            </a:r>
-            <a:br>
-              <a:rPr lang="en-US"/>
-            </a:br>
-            <a:r>
-              <a:rPr lang="en-US"/>
-              <a:t>	</a:t>
-            </a:r>
-            <a:r>
-              <a:rPr lang="en-US" b="1">
-                <a:solidFill>
-                  <a:srgbClr val="00B0F0"/>
-                </a:solidFill>
-              </a:rPr>
-              <a:t>WHEN</a:t>
-            </a:r>
-            <a:r>
-              <a:rPr lang="en-US"/>
-              <a:t> condition </a:t>
-            </a:r>
-            <a:r>
-              <a:rPr lang="en-US" b="1">
-                <a:solidFill>
-                  <a:srgbClr val="00B0F0"/>
-                </a:solidFill>
-              </a:rPr>
-              <a:t>THEN</a:t>
-            </a:r>
-            <a:r>
-              <a:rPr lang="en-US"/>
-              <a:t> result</a:t>
-            </a:r>
-            <a:br>
-              <a:rPr lang="en-US"/>
-            </a:br>
-            <a:r>
-              <a:rPr lang="en-US"/>
-              <a:t>	</a:t>
-            </a:r>
-            <a:r>
-              <a:rPr lang="en-US" b="1">
-                <a:solidFill>
-                  <a:srgbClr val="00B0F0"/>
-                </a:solidFill>
-              </a:rPr>
-              <a:t>ELSE</a:t>
-            </a:r>
-            <a:r>
-              <a:rPr lang="en-US"/>
-              <a:t> default_result</a:t>
-            </a:r>
-            <a:br>
-              <a:rPr lang="en-US"/>
-            </a:br>
-            <a:r>
-              <a:rPr lang="en-US">
-                <a:solidFill>
-                  <a:srgbClr val="7030A0"/>
-                </a:solidFill>
-              </a:rPr>
-              <a:t>END</a:t>
-            </a:r>
-          </a:p>
-          <a:p>
-            <a:endParaRPr lang="en-US"/>
-          </a:p>
-          <a:p>
-            <a:endParaRPr lang="en-US"/>
+              <a:rPr lang="en-US" sz="2400"/>
+              <a:t>Subquery inside the select statement also called scalar subquery</a:t>
+            </a:r>
+          </a:p>
+          <a:p>
+            <a:r>
+              <a:rPr lang="en-US" sz="2400"/>
+              <a:t>Select inside select must return one column</a:t>
+            </a:r>
           </a:p>
         </p:txBody>
       </p:sp>
@@ -18755,7 +18678,7 @@
           <p:cNvPr id="5" name="Picture 4">
             <a:extLst>
               <a:ext uri="{FF2B5EF4-FFF2-40B4-BE49-F238E27FC236}">
-                <a16:creationId xmlns:a16="http://schemas.microsoft.com/office/drawing/2014/main" id="{5E002685-DB16-1D5E-D52E-CB3FF148D82A}"/>
+                <a16:creationId xmlns:a16="http://schemas.microsoft.com/office/drawing/2014/main" id="{CF4A2194-47D1-D90B-CE7E-0C2754904AB8}"/>
               </a:ext>
             </a:extLst>
           </p:cNvPr>
@@ -18772,8 +18695,8 @@
         </p:blipFill>
         <p:spPr>
           <a:xfrm>
-            <a:off x="182880" y="2806654"/>
-            <a:ext cx="4287520" cy="2634606"/>
+            <a:off x="97009" y="1560183"/>
+            <a:ext cx="4313065" cy="5200485"/>
           </a:xfrm>
           <a:prstGeom prst="rect">
             <a:avLst/>
@@ -18785,7 +18708,7 @@
           <p:cNvPr id="7" name="Picture 6">
             <a:extLst>
               <a:ext uri="{FF2B5EF4-FFF2-40B4-BE49-F238E27FC236}">
-                <a16:creationId xmlns:a16="http://schemas.microsoft.com/office/drawing/2014/main" id="{700DDB27-9059-549D-CFD6-363437948C3E}"/>
+                <a16:creationId xmlns:a16="http://schemas.microsoft.com/office/drawing/2014/main" id="{D129E1BB-3B6A-4261-E443-184814A6F350}"/>
               </a:ext>
             </a:extLst>
           </p:cNvPr>
@@ -18802,53 +18725,18 @@
         </p:blipFill>
         <p:spPr>
           <a:xfrm>
-            <a:off x="4815842" y="2821246"/>
-            <a:ext cx="3423918" cy="2634606"/>
+            <a:off x="4501281" y="2701201"/>
+            <a:ext cx="6157193" cy="2319849"/>
           </a:xfrm>
           <a:prstGeom prst="rect">
             <a:avLst/>
           </a:prstGeom>
         </p:spPr>
       </p:pic>
-      <p:sp>
-        <p:nvSpPr>
-          <p:cNvPr id="8" name="TextBox 7">
-            <a:extLst>
-              <a:ext uri="{FF2B5EF4-FFF2-40B4-BE49-F238E27FC236}">
-                <a16:creationId xmlns:a16="http://schemas.microsoft.com/office/drawing/2014/main" id="{27549754-E610-E77E-3A54-30C1D84930BB}"/>
-              </a:ext>
-            </a:extLst>
-          </p:cNvPr>
-          <p:cNvSpPr txBox="1"/>
-          <p:nvPr/>
-        </p:nvSpPr>
-        <p:spPr>
-          <a:xfrm>
-            <a:off x="4815842" y="5511488"/>
-            <a:ext cx="3423918" cy="369332"/>
-          </a:xfrm>
-          <a:prstGeom prst="rect">
-            <a:avLst/>
-          </a:prstGeom>
-          <a:noFill/>
-        </p:spPr>
-        <p:txBody>
-          <a:bodyPr wrap="square" rtlCol="0">
-            <a:spAutoFit/>
-          </a:bodyPr>
-          <a:lstStyle/>
-          <a:p>
-            <a:r>
-              <a:rPr lang="en-US" b="1"/>
-              <a:t>Order by HR then IT </a:t>
-            </a:r>
-          </a:p>
-        </p:txBody>
-      </p:sp>
     </p:spTree>
     <p:extLst>
       <p:ext uri="{BB962C8B-B14F-4D97-AF65-F5344CB8AC3E}">
-        <p14:creationId xmlns:p14="http://schemas.microsoft.com/office/powerpoint/2010/main" val="2936714736"/>
+        <p14:creationId xmlns:p14="http://schemas.microsoft.com/office/powerpoint/2010/main" val="4217834380"/>
       </p:ext>
     </p:extLst>
   </p:cSld>
@@ -18880,7 +18768,7 @@
           <p:cNvPr id="2" name="Title 1">
             <a:extLst>
               <a:ext uri="{FF2B5EF4-FFF2-40B4-BE49-F238E27FC236}">
-                <a16:creationId xmlns:a16="http://schemas.microsoft.com/office/drawing/2014/main" id="{18A34623-4719-14D9-E066-19D5127D611B}"/>
+                <a16:creationId xmlns:a16="http://schemas.microsoft.com/office/drawing/2014/main" id="{D0971D68-AD5A-A4E1-8CA9-4AC061B3A465}"/>
               </a:ext>
             </a:extLst>
           </p:cNvPr>
@@ -18893,302 +18781,59 @@
         </p:nvSpPr>
         <p:spPr>
           <a:xfrm>
-            <a:off x="838200" y="0"/>
-            <a:ext cx="10515600" cy="823595"/>
-          </a:xfrm>
-        </p:spPr>
-        <p:txBody>
-          <a:bodyPr/>
-          <a:lstStyle/>
-          <a:p>
-            <a:r>
-              <a:rPr lang="en-US"/>
-              <a:t>CASE with count &amp; sum</a:t>
-            </a:r>
-          </a:p>
-        </p:txBody>
-      </p:sp>
-      <p:sp>
-        <p:nvSpPr>
-          <p:cNvPr id="3" name="Content Placeholder 2">
-            <a:extLst>
-              <a:ext uri="{FF2B5EF4-FFF2-40B4-BE49-F238E27FC236}">
-                <a16:creationId xmlns:a16="http://schemas.microsoft.com/office/drawing/2014/main" id="{A9DA74CD-2107-B593-B5D3-8CB10C9EAB89}"/>
-              </a:ext>
-            </a:extLst>
-          </p:cNvPr>
-          <p:cNvSpPr>
-            <a:spLocks noGrp="1"/>
-          </p:cNvSpPr>
-          <p:nvPr>
-            <p:ph idx="1"/>
-          </p:nvPr>
-        </p:nvSpPr>
-        <p:spPr>
-          <a:xfrm>
-            <a:off x="111760" y="823595"/>
-            <a:ext cx="11927840" cy="5353368"/>
+            <a:off x="838200" y="1"/>
+            <a:ext cx="10515600" cy="609600"/>
           </a:xfrm>
         </p:spPr>
         <p:txBody>
           <a:bodyPr>
-            <a:normAutofit/>
+            <a:normAutofit fontScale="90000"/>
           </a:bodyPr>
           <a:lstStyle/>
           <a:p>
             <a:r>
-              <a:rPr lang="en-US" sz="2400" b="1">
-                <a:solidFill>
-                  <a:srgbClr val="00B0F0"/>
-                </a:solidFill>
-              </a:rPr>
-              <a:t>Count without condition</a:t>
-            </a:r>
-          </a:p>
-          <a:p>
-            <a:pPr lvl="1"/>
-            <a:r>
-              <a:rPr lang="en-US" sz="2000" b="1">
-                <a:solidFill>
-                  <a:srgbClr val="00B0F0"/>
-                </a:solidFill>
-              </a:rPr>
-              <a:t>SELECT</a:t>
-            </a:r>
-            <a:r>
-              <a:rPr lang="en-US" sz="2000" b="1"/>
-              <a:t> COUNT(*) AS sd FROM TWF.Flow_Funding_request;</a:t>
-            </a:r>
-          </a:p>
-          <a:p>
-            <a:pPr lvl="1"/>
-            <a:r>
-              <a:rPr lang="en-US" sz="2000" b="1"/>
-              <a:t>Count(*) == count(1) == count(0)</a:t>
-            </a:r>
-          </a:p>
-          <a:p>
-            <a:r>
-              <a:rPr lang="en-US" sz="2400" b="1"/>
-              <a:t>Count with condition</a:t>
-            </a:r>
-          </a:p>
-          <a:p>
-            <a:pPr lvl="1"/>
-            <a:r>
-              <a:rPr lang="en-US" sz="1800" b="1">
-                <a:solidFill>
-                  <a:srgbClr val="00B0F0"/>
-                </a:solidFill>
-                <a:latin typeface="Arial" panose="020B0604020202020204" pitchFamily="34" charset="0"/>
-                <a:cs typeface="Arial" panose="020B0604020202020204" pitchFamily="34" charset="0"/>
-              </a:rPr>
-              <a:t>SELECT</a:t>
-            </a:r>
-            <a:r>
-              <a:rPr lang="en-US" sz="1800" b="1">
-                <a:latin typeface="Arial" panose="020B0604020202020204" pitchFamily="34" charset="0"/>
-                <a:cs typeface="Arial" panose="020B0604020202020204" pitchFamily="34" charset="0"/>
-              </a:rPr>
-              <a:t> </a:t>
-            </a:r>
-            <a:r>
-              <a:rPr lang="en-US" sz="1800" b="1">
-                <a:solidFill>
-                  <a:srgbClr val="FF66FF"/>
-                </a:solidFill>
-                <a:latin typeface="Arial" panose="020B0604020202020204" pitchFamily="34" charset="0"/>
-                <a:cs typeface="Arial" panose="020B0604020202020204" pitchFamily="34" charset="0"/>
-              </a:rPr>
-              <a:t>COUNT </a:t>
-            </a:r>
-            <a:r>
-              <a:rPr lang="en-US" sz="1800" b="1">
-                <a:latin typeface="Arial" panose="020B0604020202020204" pitchFamily="34" charset="0"/>
-                <a:cs typeface="Arial" panose="020B0604020202020204" pitchFamily="34" charset="0"/>
-              </a:rPr>
-              <a:t>( </a:t>
-            </a:r>
-            <a:r>
-              <a:rPr lang="en-US" sz="1800" b="1">
-                <a:solidFill>
-                  <a:srgbClr val="00B0F0"/>
-                </a:solidFill>
-                <a:latin typeface="Arial" panose="020B0604020202020204" pitchFamily="34" charset="0"/>
-                <a:cs typeface="Arial" panose="020B0604020202020204" pitchFamily="34" charset="0"/>
-              </a:rPr>
-              <a:t>CASE</a:t>
-            </a:r>
-            <a:r>
-              <a:rPr lang="en-US" sz="1800" b="1">
-                <a:latin typeface="Arial" panose="020B0604020202020204" pitchFamily="34" charset="0"/>
-                <a:cs typeface="Arial" panose="020B0604020202020204" pitchFamily="34" charset="0"/>
-              </a:rPr>
-              <a:t> </a:t>
-            </a:r>
-            <a:r>
-              <a:rPr lang="en-US" sz="1800" b="1">
-                <a:solidFill>
-                  <a:srgbClr val="FF66FF"/>
-                </a:solidFill>
-                <a:latin typeface="Arial" panose="020B0604020202020204" pitchFamily="34" charset="0"/>
-                <a:cs typeface="Arial" panose="020B0604020202020204" pitchFamily="34" charset="0"/>
-              </a:rPr>
-              <a:t>WHEN</a:t>
-            </a:r>
-            <a:r>
-              <a:rPr lang="en-US" sz="1800" b="1">
-                <a:latin typeface="Arial" panose="020B0604020202020204" pitchFamily="34" charset="0"/>
-                <a:cs typeface="Arial" panose="020B0604020202020204" pitchFamily="34" charset="0"/>
-              </a:rPr>
-              <a:t> status_code = 9 </a:t>
-            </a:r>
-            <a:r>
-              <a:rPr lang="en-US" sz="1800" b="1">
-                <a:solidFill>
-                  <a:srgbClr val="FF66FF"/>
-                </a:solidFill>
-                <a:latin typeface="Arial" panose="020B0604020202020204" pitchFamily="34" charset="0"/>
-                <a:cs typeface="Arial" panose="020B0604020202020204" pitchFamily="34" charset="0"/>
-              </a:rPr>
-              <a:t>THEN</a:t>
-            </a:r>
-            <a:r>
-              <a:rPr lang="en-US" sz="1800" b="1">
-                <a:latin typeface="Arial" panose="020B0604020202020204" pitchFamily="34" charset="0"/>
-                <a:cs typeface="Arial" panose="020B0604020202020204" pitchFamily="34" charset="0"/>
-              </a:rPr>
-              <a:t> 1 </a:t>
-            </a:r>
-            <a:r>
-              <a:rPr lang="en-US" sz="1800" b="1">
-                <a:solidFill>
-                  <a:srgbClr val="00B0F0"/>
-                </a:solidFill>
-                <a:latin typeface="Arial" panose="020B0604020202020204" pitchFamily="34" charset="0"/>
-                <a:cs typeface="Arial" panose="020B0604020202020204" pitchFamily="34" charset="0"/>
-              </a:rPr>
-              <a:t>END</a:t>
-            </a:r>
-            <a:r>
-              <a:rPr lang="en-US" sz="1800" b="1">
-                <a:latin typeface="Arial" panose="020B0604020202020204" pitchFamily="34" charset="0"/>
-                <a:cs typeface="Arial" panose="020B0604020202020204" pitchFamily="34" charset="0"/>
-              </a:rPr>
-              <a:t> ) [ num ] FROM </a:t>
-            </a:r>
-            <a:r>
-              <a:rPr lang="en-US" sz="1800" b="1">
-                <a:solidFill>
-                  <a:schemeClr val="accent1">
-                    <a:lumMod val="75000"/>
-                  </a:schemeClr>
-                </a:solidFill>
-                <a:latin typeface="Arial" panose="020B0604020202020204" pitchFamily="34" charset="0"/>
-                <a:cs typeface="Arial" panose="020B0604020202020204" pitchFamily="34" charset="0"/>
-              </a:rPr>
-              <a:t>Flow_Funding_request</a:t>
-            </a:r>
-            <a:r>
-              <a:rPr lang="en-US" sz="1800" b="1">
-                <a:latin typeface="Arial" panose="020B0604020202020204" pitchFamily="34" charset="0"/>
-                <a:cs typeface="Arial" panose="020B0604020202020204" pitchFamily="34" charset="0"/>
-              </a:rPr>
-              <a:t>;</a:t>
-            </a:r>
-          </a:p>
-          <a:p>
-            <a:pPr lvl="1"/>
-            <a:r>
-              <a:rPr lang="en-US" sz="2000" b="1"/>
-              <a:t>As long as the  value is not null it will be included in count (aggregate function)</a:t>
-            </a:r>
-          </a:p>
-          <a:p>
-            <a:pPr lvl="1"/>
-            <a:endParaRPr lang="en-US" sz="2000" b="1"/>
-          </a:p>
-          <a:p>
-            <a:r>
-              <a:rPr lang="en-US" sz="2400" b="1"/>
-              <a:t>Sum with condition</a:t>
-            </a:r>
-          </a:p>
-          <a:p>
-            <a:pPr lvl="1"/>
-            <a:r>
-              <a:rPr lang="en-US" sz="2000" b="1">
-                <a:solidFill>
-                  <a:srgbClr val="FF66FF"/>
-                </a:solidFill>
-              </a:rPr>
-              <a:t>SUM </a:t>
-            </a:r>
-            <a:r>
-              <a:rPr lang="en-US" sz="1800" b="1"/>
-              <a:t>( </a:t>
-            </a:r>
-            <a:r>
-              <a:rPr lang="en-US" sz="1800" b="1">
-                <a:solidFill>
-                  <a:srgbClr val="00B0F0"/>
-                </a:solidFill>
-                <a:latin typeface="Arial" panose="020B0604020202020204" pitchFamily="34" charset="0"/>
-                <a:cs typeface="Arial" panose="020B0604020202020204" pitchFamily="34" charset="0"/>
-              </a:rPr>
-              <a:t>CASE</a:t>
-            </a:r>
-            <a:r>
-              <a:rPr lang="en-US" sz="1800" b="1"/>
-              <a:t> </a:t>
-            </a:r>
-            <a:r>
-              <a:rPr lang="en-US" sz="1800" b="1">
-                <a:solidFill>
-                  <a:srgbClr val="FF66FF"/>
-                </a:solidFill>
-              </a:rPr>
-              <a:t>WHEN</a:t>
-            </a:r>
-            <a:r>
-              <a:rPr lang="en-US" sz="1800" b="1"/>
-              <a:t> status_code = 9 </a:t>
-            </a:r>
-            <a:r>
-              <a:rPr lang="en-US" sz="1800" b="1">
-                <a:solidFill>
-                  <a:srgbClr val="FF66FF"/>
-                </a:solidFill>
-              </a:rPr>
-              <a:t>THEN</a:t>
-            </a:r>
-            <a:r>
-              <a:rPr lang="en-US" sz="1800" b="1"/>
-              <a:t> 1 ELSE 0 </a:t>
-            </a:r>
-            <a:r>
-              <a:rPr lang="en-US" sz="1800" b="1">
-                <a:solidFill>
-                  <a:srgbClr val="00B0F0"/>
-                </a:solidFill>
-              </a:rPr>
-              <a:t>END</a:t>
-            </a:r>
-            <a:r>
-              <a:rPr lang="en-US" sz="1800" b="1"/>
-              <a:t>) AS Approved,</a:t>
-            </a:r>
-            <a:endParaRPr lang="en-US" sz="1800" b="1">
-              <a:latin typeface="Arial" panose="020B0604020202020204" pitchFamily="34" charset="0"/>
-              <a:cs typeface="Arial" panose="020B0604020202020204" pitchFamily="34" charset="0"/>
-            </a:endParaRPr>
+              <a:rPr lang="en-US"/>
+              <a:t>Select with insert</a:t>
+            </a:r>
           </a:p>
         </p:txBody>
       </p:sp>
+      <p:pic>
+        <p:nvPicPr>
+          <p:cNvPr id="5" name="Content Placeholder 4">
+            <a:extLst>
+              <a:ext uri="{FF2B5EF4-FFF2-40B4-BE49-F238E27FC236}">
+                <a16:creationId xmlns:a16="http://schemas.microsoft.com/office/drawing/2014/main" id="{6B68C869-C0DE-E101-21ED-B10A5BD88C4E}"/>
+              </a:ext>
+            </a:extLst>
+          </p:cNvPr>
+          <p:cNvPicPr>
+            <a:picLocks noGrp="1" noChangeAspect="1"/>
+          </p:cNvPicPr>
+          <p:nvPr>
+            <p:ph idx="1"/>
+          </p:nvPr>
+        </p:nvPicPr>
+        <p:blipFill>
+          <a:blip r:embed="rId2"/>
+          <a:stretch>
+            <a:fillRect/>
+          </a:stretch>
+        </p:blipFill>
+        <p:spPr>
+          <a:xfrm>
+            <a:off x="681791" y="796185"/>
+            <a:ext cx="7595434" cy="3993606"/>
+          </a:xfrm>
+          <a:prstGeom prst="rect">
+            <a:avLst/>
+          </a:prstGeom>
+        </p:spPr>
+      </p:pic>
     </p:spTree>
     <p:extLst>
       <p:ext uri="{BB962C8B-B14F-4D97-AF65-F5344CB8AC3E}">
-        <p14:creationId xmlns:p14="http://schemas.microsoft.com/office/powerpoint/2010/main" val="2254394025"/>
+        <p14:creationId xmlns:p14="http://schemas.microsoft.com/office/powerpoint/2010/main" val="1706348807"/>
       </p:ext>
     </p:extLst>
   </p:cSld>
@@ -19220,7 +18865,7 @@
           <p:cNvPr id="2" name="Title 1">
             <a:extLst>
               <a:ext uri="{FF2B5EF4-FFF2-40B4-BE49-F238E27FC236}">
-                <a16:creationId xmlns:a16="http://schemas.microsoft.com/office/drawing/2014/main" id="{FBC7328E-1571-719D-BC99-8654EF33FE4D}"/>
+                <a16:creationId xmlns:a16="http://schemas.microsoft.com/office/drawing/2014/main" id="{EBED0D0B-3E53-ADDB-DAA0-A80E7D0F1CF5}"/>
               </a:ext>
             </a:extLst>
           </p:cNvPr>
@@ -19231,35 +18876,54 @@
             <p:ph type="title"/>
           </p:nvPr>
         </p:nvSpPr>
+        <p:spPr/>
+        <p:txBody>
+          <a:bodyPr/>
+          <a:lstStyle/>
+          <a:p>
+            <a:r>
+              <a:rPr lang="en-US"/>
+              <a:t>Select insert join</a:t>
+            </a:r>
+          </a:p>
+        </p:txBody>
+      </p:sp>
+      <p:pic>
+        <p:nvPicPr>
+          <p:cNvPr id="5" name="Content Placeholder 4">
+            <a:extLst>
+              <a:ext uri="{FF2B5EF4-FFF2-40B4-BE49-F238E27FC236}">
+                <a16:creationId xmlns:a16="http://schemas.microsoft.com/office/drawing/2014/main" id="{1DCBC852-A487-3D6A-C494-C889594B965C}"/>
+              </a:ext>
+            </a:extLst>
+          </p:cNvPr>
+          <p:cNvPicPr>
+            <a:picLocks noGrp="1" noChangeAspect="1"/>
+          </p:cNvPicPr>
+          <p:nvPr>
+            <p:ph idx="1"/>
+          </p:nvPr>
+        </p:nvPicPr>
+        <p:blipFill>
+          <a:blip r:embed="rId2"/>
+          <a:stretch>
+            <a:fillRect/>
+          </a:stretch>
+        </p:blipFill>
         <p:spPr>
           <a:xfrm>
-            <a:off x="838200" y="365125"/>
-            <a:ext cx="10515600" cy="5151755"/>
+            <a:off x="662469" y="1690688"/>
+            <a:ext cx="6890856" cy="4126782"/>
           </a:xfrm>
+          <a:prstGeom prst="rect">
+            <a:avLst/>
+          </a:prstGeom>
         </p:spPr>
-        <p:txBody>
-          <a:bodyPr>
-            <a:normAutofit/>
-          </a:bodyPr>
-          <a:lstStyle/>
-          <a:p>
-            <a:pPr algn="ctr"/>
-            <a:r>
-              <a:rPr lang="en-US" sz="8000" b="1">
-                <a:solidFill>
-                  <a:srgbClr val="FF0000"/>
-                </a:solidFill>
-              </a:rPr>
-              <a:t>END CASE </a:t>
-            </a:r>
-            <a:endParaRPr lang="en-US" sz="8000"/>
-          </a:p>
-        </p:txBody>
-      </p:sp>
+      </p:pic>
     </p:spTree>
     <p:extLst>
       <p:ext uri="{BB962C8B-B14F-4D97-AF65-F5344CB8AC3E}">
-        <p14:creationId xmlns:p14="http://schemas.microsoft.com/office/powerpoint/2010/main" val="3202700173"/>
+        <p14:creationId xmlns:p14="http://schemas.microsoft.com/office/powerpoint/2010/main" val="854464040"/>
       </p:ext>
     </p:extLst>
   </p:cSld>
@@ -19274,13 +18938,7 @@
   <p:cSld>
     <p:spTree>
       <p:nvGrpSpPr>
-        <p:cNvPr id="1" name="">
-          <a:extLst>
-            <a:ext uri="{FF2B5EF4-FFF2-40B4-BE49-F238E27FC236}">
-              <a16:creationId xmlns:a16="http://schemas.microsoft.com/office/drawing/2014/main" id="{19DE9890-2B09-53AF-F5BC-66389EDAF25D}"/>
-            </a:ext>
-          </a:extLst>
-        </p:cNvPr>
+        <p:cNvPr id="1" name=""/>
         <p:cNvGrpSpPr/>
         <p:nvPr/>
       </p:nvGrpSpPr>
@@ -19297,7 +18955,7 @@
           <p:cNvPr id="2" name="Title 1">
             <a:extLst>
               <a:ext uri="{FF2B5EF4-FFF2-40B4-BE49-F238E27FC236}">
-                <a16:creationId xmlns:a16="http://schemas.microsoft.com/office/drawing/2014/main" id="{8BD385D2-A9DB-9FDA-41E6-6580FD114BF4}"/>
+                <a16:creationId xmlns:a16="http://schemas.microsoft.com/office/drawing/2014/main" id="{3832F644-88A7-C373-7644-575978A6F955}"/>
               </a:ext>
             </a:extLst>
           </p:cNvPr>
@@ -19310,47 +18968,305 @@
         </p:nvSpPr>
         <p:spPr>
           <a:xfrm>
-            <a:off x="838200" y="1787525"/>
-            <a:ext cx="10515600" cy="2662555"/>
+            <a:off x="838200" y="88127"/>
+            <a:ext cx="10801350" cy="863600"/>
           </a:xfrm>
         </p:spPr>
         <p:txBody>
-          <a:bodyPr>
-            <a:noAutofit/>
+          <a:bodyPr/>
+          <a:lstStyle/>
+          <a:p>
+            <a:r>
+              <a:rPr lang="en-US"/>
+              <a:t>Give value to variable via select</a:t>
+            </a:r>
+          </a:p>
+        </p:txBody>
+      </p:sp>
+      <p:sp>
+        <p:nvSpPr>
+          <p:cNvPr id="5" name="TextBox 4">
+            <a:extLst>
+              <a:ext uri="{FF2B5EF4-FFF2-40B4-BE49-F238E27FC236}">
+                <a16:creationId xmlns:a16="http://schemas.microsoft.com/office/drawing/2014/main" id="{36496A97-4945-7927-ED4C-48D11FE08708}"/>
+              </a:ext>
+            </a:extLst>
+          </p:cNvPr>
+          <p:cNvSpPr txBox="1"/>
+          <p:nvPr/>
+        </p:nvSpPr>
+        <p:spPr>
+          <a:xfrm>
+            <a:off x="428624" y="1142613"/>
+            <a:ext cx="8134351" cy="369332"/>
+          </a:xfrm>
+          <a:prstGeom prst="rect">
+            <a:avLst/>
+          </a:prstGeom>
+          <a:noFill/>
+        </p:spPr>
+        <p:txBody>
+          <a:bodyPr wrap="square">
+            <a:spAutoFit/>
           </a:bodyPr>
           <a:lstStyle/>
           <a:p>
-            <a:pPr algn="ctr"/>
-            <a:r>
-              <a:rPr lang="en-US" sz="6000" b="1">
-                <a:solidFill>
-                  <a:srgbClr val="FF0000"/>
-                </a:solidFill>
-              </a:rPr>
-              <a:t>Start</a:t>
-            </a:r>
-            <a:br>
-              <a:rPr lang="en-US" sz="6000" b="1">
-                <a:solidFill>
-                  <a:srgbClr val="FF0000"/>
-                </a:solidFill>
-              </a:rPr>
-            </a:br>
-            <a:r>
-              <a:rPr lang="en-US" sz="6000" b="1">
-                <a:solidFill>
-                  <a:srgbClr val="FF0000"/>
-                </a:solidFill>
-              </a:rPr>
-              <a:t>Common Table Expression (CTE).</a:t>
-            </a:r>
+            <a:r>
+              <a:rPr lang="en-US">
+                <a:solidFill>
+                  <a:srgbClr val="0000FF"/>
+                </a:solidFill>
+                <a:latin typeface="Consolas" panose="020B0609020204030204" pitchFamily="49" charset="0"/>
+              </a:rPr>
+              <a:t>DECLARE</a:t>
+            </a:r>
+            <a:r>
+              <a:rPr lang="en-US">
+                <a:solidFill>
+                  <a:srgbClr val="000000"/>
+                </a:solidFill>
+                <a:latin typeface="Consolas" panose="020B0609020204030204" pitchFamily="49" charset="0"/>
+              </a:rPr>
+              <a:t> @CustomerId </a:t>
+            </a:r>
+            <a:r>
+              <a:rPr lang="en-US">
+                <a:solidFill>
+                  <a:srgbClr val="0000FF"/>
+                </a:solidFill>
+                <a:latin typeface="Consolas" panose="020B0609020204030204" pitchFamily="49" charset="0"/>
+              </a:rPr>
+              <a:t>DECIMAL</a:t>
+            </a:r>
+            <a:r>
+              <a:rPr lang="en-US">
+                <a:solidFill>
+                  <a:srgbClr val="808080"/>
+                </a:solidFill>
+                <a:latin typeface="Consolas" panose="020B0609020204030204" pitchFamily="49" charset="0"/>
+              </a:rPr>
+              <a:t>(</a:t>
+            </a:r>
+            <a:r>
+              <a:rPr lang="en-US">
+                <a:solidFill>
+                  <a:srgbClr val="000000"/>
+                </a:solidFill>
+                <a:latin typeface="Consolas" panose="020B0609020204030204" pitchFamily="49" charset="0"/>
+              </a:rPr>
+              <a:t>18</a:t>
+            </a:r>
+            <a:r>
+              <a:rPr lang="en-US">
+                <a:solidFill>
+                  <a:srgbClr val="808080"/>
+                </a:solidFill>
+                <a:latin typeface="Consolas" panose="020B0609020204030204" pitchFamily="49" charset="0"/>
+              </a:rPr>
+              <a:t>,</a:t>
+            </a:r>
+            <a:r>
+              <a:rPr lang="en-US">
+                <a:solidFill>
+                  <a:srgbClr val="000000"/>
+                </a:solidFill>
+                <a:latin typeface="Consolas" panose="020B0609020204030204" pitchFamily="49" charset="0"/>
+              </a:rPr>
+              <a:t>0</a:t>
+            </a:r>
+            <a:r>
+              <a:rPr lang="en-US">
+                <a:solidFill>
+                  <a:srgbClr val="808080"/>
+                </a:solidFill>
+                <a:latin typeface="Consolas" panose="020B0609020204030204" pitchFamily="49" charset="0"/>
+              </a:rPr>
+              <a:t>);</a:t>
+            </a:r>
+            <a:endParaRPr lang="en-US">
+              <a:solidFill>
+                <a:srgbClr val="000000"/>
+              </a:solidFill>
+              <a:latin typeface="Consolas" panose="020B0609020204030204" pitchFamily="49" charset="0"/>
+            </a:endParaRPr>
+          </a:p>
+        </p:txBody>
+      </p:sp>
+      <p:sp>
+        <p:nvSpPr>
+          <p:cNvPr id="7" name="TextBox 6">
+            <a:extLst>
+              <a:ext uri="{FF2B5EF4-FFF2-40B4-BE49-F238E27FC236}">
+                <a16:creationId xmlns:a16="http://schemas.microsoft.com/office/drawing/2014/main" id="{ABB313EA-F96F-37A3-6E73-DABCC1307C4A}"/>
+              </a:ext>
+            </a:extLst>
+          </p:cNvPr>
+          <p:cNvSpPr txBox="1"/>
+          <p:nvPr/>
+        </p:nvSpPr>
+        <p:spPr>
+          <a:xfrm>
+            <a:off x="428624" y="1702831"/>
+            <a:ext cx="6096000" cy="1015663"/>
+          </a:xfrm>
+          <a:prstGeom prst="rect">
+            <a:avLst/>
+          </a:prstGeom>
+          <a:noFill/>
+        </p:spPr>
+        <p:txBody>
+          <a:bodyPr wrap="square">
+            <a:spAutoFit/>
+          </a:bodyPr>
+          <a:lstStyle/>
+          <a:p>
+            <a:r>
+              <a:rPr lang="en-US" sz="2000">
+                <a:solidFill>
+                  <a:srgbClr val="0000FF"/>
+                </a:solidFill>
+                <a:latin typeface="Consolas" panose="020B0609020204030204" pitchFamily="49" charset="0"/>
+              </a:rPr>
+              <a:t>SELECT</a:t>
+            </a:r>
+            <a:r>
+              <a:rPr lang="en-US" sz="2000">
+                <a:solidFill>
+                  <a:srgbClr val="000000"/>
+                </a:solidFill>
+                <a:latin typeface="Consolas" panose="020B0609020204030204" pitchFamily="49" charset="0"/>
+              </a:rPr>
+              <a:t>  @CustomerId </a:t>
+            </a:r>
+            <a:r>
+              <a:rPr lang="en-US" sz="2000">
+                <a:solidFill>
+                  <a:srgbClr val="808080"/>
+                </a:solidFill>
+                <a:latin typeface="Consolas" panose="020B0609020204030204" pitchFamily="49" charset="0"/>
+              </a:rPr>
+              <a:t>=</a:t>
+            </a:r>
+            <a:r>
+              <a:rPr lang="en-US" sz="2000">
+                <a:solidFill>
+                  <a:srgbClr val="000000"/>
+                </a:solidFill>
+                <a:latin typeface="Consolas" panose="020B0609020204030204" pitchFamily="49" charset="0"/>
+              </a:rPr>
+              <a:t> Customer_ID</a:t>
+            </a:r>
+          </a:p>
+          <a:p>
+            <a:r>
+              <a:rPr lang="en-US" sz="2000">
+                <a:solidFill>
+                  <a:srgbClr val="0000FF"/>
+                </a:solidFill>
+                <a:latin typeface="Consolas" panose="020B0609020204030204" pitchFamily="49" charset="0"/>
+              </a:rPr>
+              <a:t>FROM</a:t>
+            </a:r>
+            <a:r>
+              <a:rPr lang="en-US" sz="2000">
+                <a:solidFill>
+                  <a:srgbClr val="000000"/>
+                </a:solidFill>
+                <a:latin typeface="Consolas" panose="020B0609020204030204" pitchFamily="49" charset="0"/>
+              </a:rPr>
+              <a:t> SMEs_prod</a:t>
+            </a:r>
+            <a:r>
+              <a:rPr lang="en-US" sz="2000">
+                <a:solidFill>
+                  <a:srgbClr val="808080"/>
+                </a:solidFill>
+                <a:latin typeface="Consolas" panose="020B0609020204030204" pitchFamily="49" charset="0"/>
+              </a:rPr>
+              <a:t>.</a:t>
+            </a:r>
+            <a:r>
+              <a:rPr lang="en-US" sz="2000">
+                <a:solidFill>
+                  <a:srgbClr val="000000"/>
+                </a:solidFill>
+                <a:latin typeface="Consolas" panose="020B0609020204030204" pitchFamily="49" charset="0"/>
+              </a:rPr>
+              <a:t>TWF</a:t>
+            </a:r>
+            <a:r>
+              <a:rPr lang="en-US" sz="2000">
+                <a:solidFill>
+                  <a:srgbClr val="808080"/>
+                </a:solidFill>
+                <a:latin typeface="Consolas" panose="020B0609020204030204" pitchFamily="49" charset="0"/>
+              </a:rPr>
+              <a:t>.</a:t>
+            </a:r>
+            <a:r>
+              <a:rPr lang="en-US" sz="2000">
+                <a:solidFill>
+                  <a:srgbClr val="000000"/>
+                </a:solidFill>
+                <a:latin typeface="Consolas" panose="020B0609020204030204" pitchFamily="49" charset="0"/>
+              </a:rPr>
+              <a:t>Flow_Customers</a:t>
+            </a:r>
+          </a:p>
+          <a:p>
+            <a:r>
+              <a:rPr lang="en-US" sz="2000">
+                <a:solidFill>
+                  <a:srgbClr val="0000FF"/>
+                </a:solidFill>
+                <a:latin typeface="Consolas" panose="020B0609020204030204" pitchFamily="49" charset="0"/>
+              </a:rPr>
+              <a:t>WHERE</a:t>
+            </a:r>
+            <a:r>
+              <a:rPr lang="en-US" sz="2000">
+                <a:solidFill>
+                  <a:srgbClr val="000000"/>
+                </a:solidFill>
+                <a:latin typeface="Consolas" panose="020B0609020204030204" pitchFamily="49" charset="0"/>
+              </a:rPr>
+              <a:t> QID </a:t>
+            </a:r>
+            <a:r>
+              <a:rPr lang="en-US" sz="2000">
+                <a:solidFill>
+                  <a:srgbClr val="808080"/>
+                </a:solidFill>
+                <a:latin typeface="Consolas" panose="020B0609020204030204" pitchFamily="49" charset="0"/>
+              </a:rPr>
+              <a:t>=</a:t>
+            </a:r>
+            <a:r>
+              <a:rPr lang="en-US" sz="2000">
+                <a:solidFill>
+                  <a:srgbClr val="000000"/>
+                </a:solidFill>
+                <a:latin typeface="Consolas" panose="020B0609020204030204" pitchFamily="49" charset="0"/>
+              </a:rPr>
+              <a:t> @QId</a:t>
+            </a:r>
+            <a:r>
+              <a:rPr lang="en-US" sz="2000">
+                <a:solidFill>
+                  <a:srgbClr val="808080"/>
+                </a:solidFill>
+                <a:latin typeface="Consolas" panose="020B0609020204030204" pitchFamily="49" charset="0"/>
+              </a:rPr>
+              <a:t>;</a:t>
+            </a:r>
+            <a:endParaRPr lang="en-US" sz="4800"/>
           </a:p>
         </p:txBody>
       </p:sp>
     </p:spTree>
     <p:extLst>
       <p:ext uri="{BB962C8B-B14F-4D97-AF65-F5344CB8AC3E}">
-        <p14:creationId xmlns:p14="http://schemas.microsoft.com/office/powerpoint/2010/main" val="153199495"/>
+        <p14:creationId xmlns:p14="http://schemas.microsoft.com/office/powerpoint/2010/main" val="3951763578"/>
       </p:ext>
     </p:extLst>
   </p:cSld>
@@ -19536,6 +19452,956 @@
           <p:cNvPr id="2" name="Title 1">
             <a:extLst>
               <a:ext uri="{FF2B5EF4-FFF2-40B4-BE49-F238E27FC236}">
+                <a16:creationId xmlns:a16="http://schemas.microsoft.com/office/drawing/2014/main" id="{BA575EF9-430B-0533-5963-E8AFDD00FAD5}"/>
+              </a:ext>
+            </a:extLst>
+          </p:cNvPr>
+          <p:cNvSpPr>
+            <a:spLocks noGrp="1"/>
+          </p:cNvSpPr>
+          <p:nvPr>
+            <p:ph type="title"/>
+          </p:nvPr>
+        </p:nvSpPr>
+        <p:spPr>
+          <a:xfrm>
+            <a:off x="838200" y="1787525"/>
+            <a:ext cx="10515600" cy="2662555"/>
+          </a:xfrm>
+        </p:spPr>
+        <p:txBody>
+          <a:bodyPr>
+            <a:normAutofit/>
+          </a:bodyPr>
+          <a:lstStyle/>
+          <a:p>
+            <a:pPr algn="ctr"/>
+            <a:r>
+              <a:rPr lang="en-US" sz="8000" b="1">
+                <a:solidFill>
+                  <a:srgbClr val="FF0000"/>
+                </a:solidFill>
+              </a:rPr>
+              <a:t>End select </a:t>
+            </a:r>
+          </a:p>
+        </p:txBody>
+      </p:sp>
+    </p:spTree>
+    <p:extLst>
+      <p:ext uri="{BB962C8B-B14F-4D97-AF65-F5344CB8AC3E}">
+        <p14:creationId xmlns:p14="http://schemas.microsoft.com/office/powerpoint/2010/main" val="818038930"/>
+      </p:ext>
+    </p:extLst>
+  </p:cSld>
+  <p:clrMapOvr>
+    <a:masterClrMapping/>
+  </p:clrMapOvr>
+</p:sld>
+</file>
+
+<file path=ppt/slides/slide141.xml><?xml version="1.0" encoding="utf-8"?>
+<p:sld xmlns:a="http://schemas.openxmlformats.org/drawingml/2006/main" xmlns:r="http://schemas.openxmlformats.org/officeDocument/2006/relationships" xmlns:p="http://schemas.openxmlformats.org/presentationml/2006/main">
+  <p:cSld>
+    <p:spTree>
+      <p:nvGrpSpPr>
+        <p:cNvPr id="1" name="">
+          <a:extLst>
+            <a:ext uri="{FF2B5EF4-FFF2-40B4-BE49-F238E27FC236}">
+              <a16:creationId xmlns:a16="http://schemas.microsoft.com/office/drawing/2014/main" id="{A766D733-CD9B-6F0E-E7C7-30B520AD8B73}"/>
+            </a:ext>
+          </a:extLst>
+        </p:cNvPr>
+        <p:cNvGrpSpPr/>
+        <p:nvPr/>
+      </p:nvGrpSpPr>
+      <p:grpSpPr>
+        <a:xfrm>
+          <a:off x="0" y="0"/>
+          <a:ext cx="0" cy="0"/>
+          <a:chOff x="0" y="0"/>
+          <a:chExt cx="0" cy="0"/>
+        </a:xfrm>
+      </p:grpSpPr>
+      <p:sp>
+        <p:nvSpPr>
+          <p:cNvPr id="2" name="Title 1">
+            <a:extLst>
+              <a:ext uri="{FF2B5EF4-FFF2-40B4-BE49-F238E27FC236}">
+                <a16:creationId xmlns:a16="http://schemas.microsoft.com/office/drawing/2014/main" id="{24CA1DD1-135C-A81C-6785-AFBF80E15569}"/>
+              </a:ext>
+            </a:extLst>
+          </p:cNvPr>
+          <p:cNvSpPr>
+            <a:spLocks noGrp="1"/>
+          </p:cNvSpPr>
+          <p:nvPr>
+            <p:ph type="title"/>
+          </p:nvPr>
+        </p:nvSpPr>
+        <p:spPr>
+          <a:xfrm>
+            <a:off x="838200" y="1787525"/>
+            <a:ext cx="10515600" cy="2662555"/>
+          </a:xfrm>
+        </p:spPr>
+        <p:txBody>
+          <a:bodyPr>
+            <a:normAutofit/>
+          </a:bodyPr>
+          <a:lstStyle/>
+          <a:p>
+            <a:pPr algn="ctr"/>
+            <a:r>
+              <a:rPr lang="en-US" sz="8000" b="1">
+                <a:solidFill>
+                  <a:srgbClr val="FF0000"/>
+                </a:solidFill>
+              </a:rPr>
+              <a:t>CASE </a:t>
+            </a:r>
+          </a:p>
+        </p:txBody>
+      </p:sp>
+    </p:spTree>
+    <p:extLst>
+      <p:ext uri="{BB962C8B-B14F-4D97-AF65-F5344CB8AC3E}">
+        <p14:creationId xmlns:p14="http://schemas.microsoft.com/office/powerpoint/2010/main" val="1875053053"/>
+      </p:ext>
+    </p:extLst>
+  </p:cSld>
+  <p:clrMapOvr>
+    <a:masterClrMapping/>
+  </p:clrMapOvr>
+</p:sld>
+</file>
+
+<file path=ppt/slides/slide142.xml><?xml version="1.0" encoding="utf-8"?>
+<p:sld xmlns:a="http://schemas.openxmlformats.org/drawingml/2006/main" xmlns:r="http://schemas.openxmlformats.org/officeDocument/2006/relationships" xmlns:p="http://schemas.openxmlformats.org/presentationml/2006/main">
+  <p:cSld>
+    <p:spTree>
+      <p:nvGrpSpPr>
+        <p:cNvPr id="1" name=""/>
+        <p:cNvGrpSpPr/>
+        <p:nvPr/>
+      </p:nvGrpSpPr>
+      <p:grpSpPr>
+        <a:xfrm>
+          <a:off x="0" y="0"/>
+          <a:ext cx="0" cy="0"/>
+          <a:chOff x="0" y="0"/>
+          <a:chExt cx="0" cy="0"/>
+        </a:xfrm>
+      </p:grpSpPr>
+      <p:sp>
+        <p:nvSpPr>
+          <p:cNvPr id="2" name="Title 1">
+            <a:extLst>
+              <a:ext uri="{FF2B5EF4-FFF2-40B4-BE49-F238E27FC236}">
+                <a16:creationId xmlns:a16="http://schemas.microsoft.com/office/drawing/2014/main" id="{6BCAEFA2-D4C7-7BB3-9C0C-5C2425BC8D80}"/>
+              </a:ext>
+            </a:extLst>
+          </p:cNvPr>
+          <p:cNvSpPr>
+            <a:spLocks noGrp="1"/>
+          </p:cNvSpPr>
+          <p:nvPr>
+            <p:ph type="title"/>
+          </p:nvPr>
+        </p:nvSpPr>
+        <p:spPr>
+          <a:xfrm>
+            <a:off x="838200" y="18256"/>
+            <a:ext cx="10515600" cy="530384"/>
+          </a:xfrm>
+        </p:spPr>
+        <p:txBody>
+          <a:bodyPr>
+            <a:normAutofit fontScale="90000"/>
+          </a:bodyPr>
+          <a:lstStyle/>
+          <a:p>
+            <a:pPr algn="ctr"/>
+            <a:r>
+              <a:rPr lang="en-US" b="1"/>
+              <a:t>CASE 1 </a:t>
+            </a:r>
+          </a:p>
+        </p:txBody>
+      </p:sp>
+      <p:sp>
+        <p:nvSpPr>
+          <p:cNvPr id="3" name="Content Placeholder 2">
+            <a:extLst>
+              <a:ext uri="{FF2B5EF4-FFF2-40B4-BE49-F238E27FC236}">
+                <a16:creationId xmlns:a16="http://schemas.microsoft.com/office/drawing/2014/main" id="{5505DC83-DEF4-EBB2-A77C-41C9E4FD9BBB}"/>
+              </a:ext>
+            </a:extLst>
+          </p:cNvPr>
+          <p:cNvSpPr>
+            <a:spLocks noGrp="1"/>
+          </p:cNvSpPr>
+          <p:nvPr>
+            <p:ph idx="1"/>
+          </p:nvPr>
+        </p:nvSpPr>
+        <p:spPr>
+          <a:xfrm>
+            <a:off x="182880" y="548640"/>
+            <a:ext cx="11826240" cy="6126480"/>
+          </a:xfrm>
+        </p:spPr>
+        <p:txBody>
+          <a:bodyPr>
+            <a:normAutofit/>
+          </a:bodyPr>
+          <a:lstStyle/>
+          <a:p>
+            <a:r>
+              <a:rPr lang="en-US">
+                <a:solidFill>
+                  <a:srgbClr val="7030A0"/>
+                </a:solidFill>
+              </a:rPr>
+              <a:t>CASE</a:t>
+            </a:r>
+            <a:r>
+              <a:rPr lang="en-US"/>
+              <a:t> </a:t>
+            </a:r>
+            <a:br>
+              <a:rPr lang="en-US"/>
+            </a:br>
+            <a:r>
+              <a:rPr lang="en-US"/>
+              <a:t>	</a:t>
+            </a:r>
+            <a:r>
+              <a:rPr lang="en-US" b="1">
+                <a:solidFill>
+                  <a:srgbClr val="00B0F0"/>
+                </a:solidFill>
+              </a:rPr>
+              <a:t>WHEN</a:t>
+            </a:r>
+            <a:r>
+              <a:rPr lang="en-US"/>
+              <a:t> condition </a:t>
+            </a:r>
+            <a:r>
+              <a:rPr lang="en-US" b="1">
+                <a:solidFill>
+                  <a:srgbClr val="00B0F0"/>
+                </a:solidFill>
+              </a:rPr>
+              <a:t>THEN</a:t>
+            </a:r>
+            <a:r>
+              <a:rPr lang="en-US"/>
+              <a:t> result</a:t>
+            </a:r>
+            <a:br>
+              <a:rPr lang="en-US"/>
+            </a:br>
+            <a:r>
+              <a:rPr lang="en-US"/>
+              <a:t>	</a:t>
+            </a:r>
+            <a:r>
+              <a:rPr lang="en-US" b="1">
+                <a:solidFill>
+                  <a:srgbClr val="00B0F0"/>
+                </a:solidFill>
+              </a:rPr>
+              <a:t>WHEN</a:t>
+            </a:r>
+            <a:r>
+              <a:rPr lang="en-US"/>
+              <a:t> condition </a:t>
+            </a:r>
+            <a:r>
+              <a:rPr lang="en-US" b="1">
+                <a:solidFill>
+                  <a:srgbClr val="00B0F0"/>
+                </a:solidFill>
+              </a:rPr>
+              <a:t>THEN</a:t>
+            </a:r>
+            <a:r>
+              <a:rPr lang="en-US"/>
+              <a:t> result</a:t>
+            </a:r>
+            <a:br>
+              <a:rPr lang="en-US"/>
+            </a:br>
+            <a:r>
+              <a:rPr lang="en-US"/>
+              <a:t>	</a:t>
+            </a:r>
+            <a:r>
+              <a:rPr lang="en-US" b="1">
+                <a:solidFill>
+                  <a:srgbClr val="00B0F0"/>
+                </a:solidFill>
+              </a:rPr>
+              <a:t>ELSE</a:t>
+            </a:r>
+            <a:r>
+              <a:rPr lang="en-US"/>
+              <a:t> default_result</a:t>
+            </a:r>
+            <a:br>
+              <a:rPr lang="en-US"/>
+            </a:br>
+            <a:r>
+              <a:rPr lang="en-US">
+                <a:solidFill>
+                  <a:srgbClr val="7030A0"/>
+                </a:solidFill>
+              </a:rPr>
+              <a:t>END</a:t>
+            </a:r>
+          </a:p>
+          <a:p>
+            <a:endParaRPr lang="en-US"/>
+          </a:p>
+          <a:p>
+            <a:endParaRPr lang="en-US"/>
+          </a:p>
+        </p:txBody>
+      </p:sp>
+      <p:pic>
+        <p:nvPicPr>
+          <p:cNvPr id="5" name="Picture 4">
+            <a:extLst>
+              <a:ext uri="{FF2B5EF4-FFF2-40B4-BE49-F238E27FC236}">
+                <a16:creationId xmlns:a16="http://schemas.microsoft.com/office/drawing/2014/main" id="{5E002685-DB16-1D5E-D52E-CB3FF148D82A}"/>
+              </a:ext>
+            </a:extLst>
+          </p:cNvPr>
+          <p:cNvPicPr>
+            <a:picLocks noChangeAspect="1"/>
+          </p:cNvPicPr>
+          <p:nvPr/>
+        </p:nvPicPr>
+        <p:blipFill>
+          <a:blip r:embed="rId2"/>
+          <a:stretch>
+            <a:fillRect/>
+          </a:stretch>
+        </p:blipFill>
+        <p:spPr>
+          <a:xfrm>
+            <a:off x="182880" y="2806654"/>
+            <a:ext cx="4287520" cy="2634606"/>
+          </a:xfrm>
+          <a:prstGeom prst="rect">
+            <a:avLst/>
+          </a:prstGeom>
+        </p:spPr>
+      </p:pic>
+      <p:pic>
+        <p:nvPicPr>
+          <p:cNvPr id="7" name="Picture 6">
+            <a:extLst>
+              <a:ext uri="{FF2B5EF4-FFF2-40B4-BE49-F238E27FC236}">
+                <a16:creationId xmlns:a16="http://schemas.microsoft.com/office/drawing/2014/main" id="{700DDB27-9059-549D-CFD6-363437948C3E}"/>
+              </a:ext>
+            </a:extLst>
+          </p:cNvPr>
+          <p:cNvPicPr>
+            <a:picLocks noChangeAspect="1"/>
+          </p:cNvPicPr>
+          <p:nvPr/>
+        </p:nvPicPr>
+        <p:blipFill>
+          <a:blip r:embed="rId3"/>
+          <a:stretch>
+            <a:fillRect/>
+          </a:stretch>
+        </p:blipFill>
+        <p:spPr>
+          <a:xfrm>
+            <a:off x="4815842" y="2821246"/>
+            <a:ext cx="3423918" cy="2634606"/>
+          </a:xfrm>
+          <a:prstGeom prst="rect">
+            <a:avLst/>
+          </a:prstGeom>
+        </p:spPr>
+      </p:pic>
+      <p:sp>
+        <p:nvSpPr>
+          <p:cNvPr id="8" name="TextBox 7">
+            <a:extLst>
+              <a:ext uri="{FF2B5EF4-FFF2-40B4-BE49-F238E27FC236}">
+                <a16:creationId xmlns:a16="http://schemas.microsoft.com/office/drawing/2014/main" id="{27549754-E610-E77E-3A54-30C1D84930BB}"/>
+              </a:ext>
+            </a:extLst>
+          </p:cNvPr>
+          <p:cNvSpPr txBox="1"/>
+          <p:nvPr/>
+        </p:nvSpPr>
+        <p:spPr>
+          <a:xfrm>
+            <a:off x="4815842" y="5511488"/>
+            <a:ext cx="3423918" cy="369332"/>
+          </a:xfrm>
+          <a:prstGeom prst="rect">
+            <a:avLst/>
+          </a:prstGeom>
+          <a:noFill/>
+        </p:spPr>
+        <p:txBody>
+          <a:bodyPr wrap="square" rtlCol="0">
+            <a:spAutoFit/>
+          </a:bodyPr>
+          <a:lstStyle/>
+          <a:p>
+            <a:r>
+              <a:rPr lang="en-US" b="1"/>
+              <a:t>Order by HR then IT </a:t>
+            </a:r>
+          </a:p>
+        </p:txBody>
+      </p:sp>
+    </p:spTree>
+    <p:extLst>
+      <p:ext uri="{BB962C8B-B14F-4D97-AF65-F5344CB8AC3E}">
+        <p14:creationId xmlns:p14="http://schemas.microsoft.com/office/powerpoint/2010/main" val="2936714736"/>
+      </p:ext>
+    </p:extLst>
+  </p:cSld>
+  <p:clrMapOvr>
+    <a:masterClrMapping/>
+  </p:clrMapOvr>
+</p:sld>
+</file>
+
+<file path=ppt/slides/slide143.xml><?xml version="1.0" encoding="utf-8"?>
+<p:sld xmlns:a="http://schemas.openxmlformats.org/drawingml/2006/main" xmlns:r="http://schemas.openxmlformats.org/officeDocument/2006/relationships" xmlns:p="http://schemas.openxmlformats.org/presentationml/2006/main">
+  <p:cSld>
+    <p:spTree>
+      <p:nvGrpSpPr>
+        <p:cNvPr id="1" name=""/>
+        <p:cNvGrpSpPr/>
+        <p:nvPr/>
+      </p:nvGrpSpPr>
+      <p:grpSpPr>
+        <a:xfrm>
+          <a:off x="0" y="0"/>
+          <a:ext cx="0" cy="0"/>
+          <a:chOff x="0" y="0"/>
+          <a:chExt cx="0" cy="0"/>
+        </a:xfrm>
+      </p:grpSpPr>
+      <p:sp>
+        <p:nvSpPr>
+          <p:cNvPr id="2" name="Title 1">
+            <a:extLst>
+              <a:ext uri="{FF2B5EF4-FFF2-40B4-BE49-F238E27FC236}">
+                <a16:creationId xmlns:a16="http://schemas.microsoft.com/office/drawing/2014/main" id="{18A34623-4719-14D9-E066-19D5127D611B}"/>
+              </a:ext>
+            </a:extLst>
+          </p:cNvPr>
+          <p:cNvSpPr>
+            <a:spLocks noGrp="1"/>
+          </p:cNvSpPr>
+          <p:nvPr>
+            <p:ph type="title"/>
+          </p:nvPr>
+        </p:nvSpPr>
+        <p:spPr>
+          <a:xfrm>
+            <a:off x="838200" y="0"/>
+            <a:ext cx="10515600" cy="823595"/>
+          </a:xfrm>
+        </p:spPr>
+        <p:txBody>
+          <a:bodyPr/>
+          <a:lstStyle/>
+          <a:p>
+            <a:r>
+              <a:rPr lang="en-US"/>
+              <a:t>CASE with count &amp; sum</a:t>
+            </a:r>
+          </a:p>
+        </p:txBody>
+      </p:sp>
+      <p:sp>
+        <p:nvSpPr>
+          <p:cNvPr id="3" name="Content Placeholder 2">
+            <a:extLst>
+              <a:ext uri="{FF2B5EF4-FFF2-40B4-BE49-F238E27FC236}">
+                <a16:creationId xmlns:a16="http://schemas.microsoft.com/office/drawing/2014/main" id="{A9DA74CD-2107-B593-B5D3-8CB10C9EAB89}"/>
+              </a:ext>
+            </a:extLst>
+          </p:cNvPr>
+          <p:cNvSpPr>
+            <a:spLocks noGrp="1"/>
+          </p:cNvSpPr>
+          <p:nvPr>
+            <p:ph idx="1"/>
+          </p:nvPr>
+        </p:nvSpPr>
+        <p:spPr>
+          <a:xfrm>
+            <a:off x="111760" y="823595"/>
+            <a:ext cx="11927840" cy="5353368"/>
+          </a:xfrm>
+        </p:spPr>
+        <p:txBody>
+          <a:bodyPr>
+            <a:normAutofit/>
+          </a:bodyPr>
+          <a:lstStyle/>
+          <a:p>
+            <a:r>
+              <a:rPr lang="en-US" sz="2400" b="1">
+                <a:solidFill>
+                  <a:srgbClr val="00B0F0"/>
+                </a:solidFill>
+              </a:rPr>
+              <a:t>Count without condition</a:t>
+            </a:r>
+          </a:p>
+          <a:p>
+            <a:pPr lvl="1"/>
+            <a:r>
+              <a:rPr lang="en-US" sz="2000" b="1">
+                <a:solidFill>
+                  <a:srgbClr val="00B0F0"/>
+                </a:solidFill>
+              </a:rPr>
+              <a:t>SELECT</a:t>
+            </a:r>
+            <a:r>
+              <a:rPr lang="en-US" sz="2000" b="1"/>
+              <a:t> COUNT(*) AS sd FROM TWF.Flow_Funding_request;</a:t>
+            </a:r>
+          </a:p>
+          <a:p>
+            <a:pPr lvl="1"/>
+            <a:r>
+              <a:rPr lang="en-US" sz="2000" b="1"/>
+              <a:t>Count(*) == count(1) == count(0)</a:t>
+            </a:r>
+          </a:p>
+          <a:p>
+            <a:r>
+              <a:rPr lang="en-US" sz="2400" b="1"/>
+              <a:t>Count with condition</a:t>
+            </a:r>
+          </a:p>
+          <a:p>
+            <a:pPr lvl="1"/>
+            <a:r>
+              <a:rPr lang="en-US" sz="1800" b="1">
+                <a:solidFill>
+                  <a:srgbClr val="00B0F0"/>
+                </a:solidFill>
+                <a:latin typeface="Arial" panose="020B0604020202020204" pitchFamily="34" charset="0"/>
+                <a:cs typeface="Arial" panose="020B0604020202020204" pitchFamily="34" charset="0"/>
+              </a:rPr>
+              <a:t>SELECT</a:t>
+            </a:r>
+            <a:r>
+              <a:rPr lang="en-US" sz="1800" b="1">
+                <a:latin typeface="Arial" panose="020B0604020202020204" pitchFamily="34" charset="0"/>
+                <a:cs typeface="Arial" panose="020B0604020202020204" pitchFamily="34" charset="0"/>
+              </a:rPr>
+              <a:t> </a:t>
+            </a:r>
+            <a:r>
+              <a:rPr lang="en-US" sz="1800" b="1">
+                <a:solidFill>
+                  <a:srgbClr val="FF66FF"/>
+                </a:solidFill>
+                <a:latin typeface="Arial" panose="020B0604020202020204" pitchFamily="34" charset="0"/>
+                <a:cs typeface="Arial" panose="020B0604020202020204" pitchFamily="34" charset="0"/>
+              </a:rPr>
+              <a:t>COUNT </a:t>
+            </a:r>
+            <a:r>
+              <a:rPr lang="en-US" sz="1800" b="1">
+                <a:latin typeface="Arial" panose="020B0604020202020204" pitchFamily="34" charset="0"/>
+                <a:cs typeface="Arial" panose="020B0604020202020204" pitchFamily="34" charset="0"/>
+              </a:rPr>
+              <a:t>( </a:t>
+            </a:r>
+            <a:r>
+              <a:rPr lang="en-US" sz="1800" b="1">
+                <a:solidFill>
+                  <a:srgbClr val="00B0F0"/>
+                </a:solidFill>
+                <a:latin typeface="Arial" panose="020B0604020202020204" pitchFamily="34" charset="0"/>
+                <a:cs typeface="Arial" panose="020B0604020202020204" pitchFamily="34" charset="0"/>
+              </a:rPr>
+              <a:t>CASE</a:t>
+            </a:r>
+            <a:r>
+              <a:rPr lang="en-US" sz="1800" b="1">
+                <a:latin typeface="Arial" panose="020B0604020202020204" pitchFamily="34" charset="0"/>
+                <a:cs typeface="Arial" panose="020B0604020202020204" pitchFamily="34" charset="0"/>
+              </a:rPr>
+              <a:t> </a:t>
+            </a:r>
+            <a:r>
+              <a:rPr lang="en-US" sz="1800" b="1">
+                <a:solidFill>
+                  <a:srgbClr val="FF66FF"/>
+                </a:solidFill>
+                <a:latin typeface="Arial" panose="020B0604020202020204" pitchFamily="34" charset="0"/>
+                <a:cs typeface="Arial" panose="020B0604020202020204" pitchFamily="34" charset="0"/>
+              </a:rPr>
+              <a:t>WHEN</a:t>
+            </a:r>
+            <a:r>
+              <a:rPr lang="en-US" sz="1800" b="1">
+                <a:latin typeface="Arial" panose="020B0604020202020204" pitchFamily="34" charset="0"/>
+                <a:cs typeface="Arial" panose="020B0604020202020204" pitchFamily="34" charset="0"/>
+              </a:rPr>
+              <a:t> status_code = 9 </a:t>
+            </a:r>
+            <a:r>
+              <a:rPr lang="en-US" sz="1800" b="1">
+                <a:solidFill>
+                  <a:srgbClr val="FF66FF"/>
+                </a:solidFill>
+                <a:latin typeface="Arial" panose="020B0604020202020204" pitchFamily="34" charset="0"/>
+                <a:cs typeface="Arial" panose="020B0604020202020204" pitchFamily="34" charset="0"/>
+              </a:rPr>
+              <a:t>THEN</a:t>
+            </a:r>
+            <a:r>
+              <a:rPr lang="en-US" sz="1800" b="1">
+                <a:latin typeface="Arial" panose="020B0604020202020204" pitchFamily="34" charset="0"/>
+                <a:cs typeface="Arial" panose="020B0604020202020204" pitchFamily="34" charset="0"/>
+              </a:rPr>
+              <a:t> 1 </a:t>
+            </a:r>
+            <a:r>
+              <a:rPr lang="en-US" sz="1800" b="1">
+                <a:solidFill>
+                  <a:srgbClr val="00B0F0"/>
+                </a:solidFill>
+                <a:latin typeface="Arial" panose="020B0604020202020204" pitchFamily="34" charset="0"/>
+                <a:cs typeface="Arial" panose="020B0604020202020204" pitchFamily="34" charset="0"/>
+              </a:rPr>
+              <a:t>END</a:t>
+            </a:r>
+            <a:r>
+              <a:rPr lang="en-US" sz="1800" b="1">
+                <a:latin typeface="Arial" panose="020B0604020202020204" pitchFamily="34" charset="0"/>
+                <a:cs typeface="Arial" panose="020B0604020202020204" pitchFamily="34" charset="0"/>
+              </a:rPr>
+              <a:t> ) [ num ] FROM </a:t>
+            </a:r>
+            <a:r>
+              <a:rPr lang="en-US" sz="1800" b="1">
+                <a:solidFill>
+                  <a:schemeClr val="accent1">
+                    <a:lumMod val="75000"/>
+                  </a:schemeClr>
+                </a:solidFill>
+                <a:latin typeface="Arial" panose="020B0604020202020204" pitchFamily="34" charset="0"/>
+                <a:cs typeface="Arial" panose="020B0604020202020204" pitchFamily="34" charset="0"/>
+              </a:rPr>
+              <a:t>Flow_Funding_request</a:t>
+            </a:r>
+            <a:r>
+              <a:rPr lang="en-US" sz="1800" b="1">
+                <a:latin typeface="Arial" panose="020B0604020202020204" pitchFamily="34" charset="0"/>
+                <a:cs typeface="Arial" panose="020B0604020202020204" pitchFamily="34" charset="0"/>
+              </a:rPr>
+              <a:t>;</a:t>
+            </a:r>
+          </a:p>
+          <a:p>
+            <a:pPr lvl="1"/>
+            <a:r>
+              <a:rPr lang="en-US" sz="2000" b="1"/>
+              <a:t>As long as the  value is not null it will be included in count (aggregate function)</a:t>
+            </a:r>
+          </a:p>
+          <a:p>
+            <a:pPr lvl="1"/>
+            <a:endParaRPr lang="en-US" sz="2000" b="1"/>
+          </a:p>
+          <a:p>
+            <a:r>
+              <a:rPr lang="en-US" sz="2400" b="1"/>
+              <a:t>Sum with condition</a:t>
+            </a:r>
+          </a:p>
+          <a:p>
+            <a:pPr lvl="1"/>
+            <a:r>
+              <a:rPr lang="en-US" sz="2000" b="1">
+                <a:solidFill>
+                  <a:srgbClr val="FF66FF"/>
+                </a:solidFill>
+              </a:rPr>
+              <a:t>SUM </a:t>
+            </a:r>
+            <a:r>
+              <a:rPr lang="en-US" sz="1800" b="1"/>
+              <a:t>( </a:t>
+            </a:r>
+            <a:r>
+              <a:rPr lang="en-US" sz="1800" b="1">
+                <a:solidFill>
+                  <a:srgbClr val="00B0F0"/>
+                </a:solidFill>
+                <a:latin typeface="Arial" panose="020B0604020202020204" pitchFamily="34" charset="0"/>
+                <a:cs typeface="Arial" panose="020B0604020202020204" pitchFamily="34" charset="0"/>
+              </a:rPr>
+              <a:t>CASE</a:t>
+            </a:r>
+            <a:r>
+              <a:rPr lang="en-US" sz="1800" b="1"/>
+              <a:t> </a:t>
+            </a:r>
+            <a:r>
+              <a:rPr lang="en-US" sz="1800" b="1">
+                <a:solidFill>
+                  <a:srgbClr val="FF66FF"/>
+                </a:solidFill>
+              </a:rPr>
+              <a:t>WHEN</a:t>
+            </a:r>
+            <a:r>
+              <a:rPr lang="en-US" sz="1800" b="1"/>
+              <a:t> status_code = 9 </a:t>
+            </a:r>
+            <a:r>
+              <a:rPr lang="en-US" sz="1800" b="1">
+                <a:solidFill>
+                  <a:srgbClr val="FF66FF"/>
+                </a:solidFill>
+              </a:rPr>
+              <a:t>THEN</a:t>
+            </a:r>
+            <a:r>
+              <a:rPr lang="en-US" sz="1800" b="1"/>
+              <a:t> 1 ELSE 0 </a:t>
+            </a:r>
+            <a:r>
+              <a:rPr lang="en-US" sz="1800" b="1">
+                <a:solidFill>
+                  <a:srgbClr val="00B0F0"/>
+                </a:solidFill>
+              </a:rPr>
+              <a:t>END</a:t>
+            </a:r>
+            <a:r>
+              <a:rPr lang="en-US" sz="1800" b="1"/>
+              <a:t>) AS Approved,</a:t>
+            </a:r>
+            <a:endParaRPr lang="en-US" sz="1800" b="1">
+              <a:latin typeface="Arial" panose="020B0604020202020204" pitchFamily="34" charset="0"/>
+              <a:cs typeface="Arial" panose="020B0604020202020204" pitchFamily="34" charset="0"/>
+            </a:endParaRPr>
+          </a:p>
+        </p:txBody>
+      </p:sp>
+    </p:spTree>
+    <p:extLst>
+      <p:ext uri="{BB962C8B-B14F-4D97-AF65-F5344CB8AC3E}">
+        <p14:creationId xmlns:p14="http://schemas.microsoft.com/office/powerpoint/2010/main" val="2254394025"/>
+      </p:ext>
+    </p:extLst>
+  </p:cSld>
+  <p:clrMapOvr>
+    <a:masterClrMapping/>
+  </p:clrMapOvr>
+</p:sld>
+</file>
+
+<file path=ppt/slides/slide144.xml><?xml version="1.0" encoding="utf-8"?>
+<p:sld xmlns:a="http://schemas.openxmlformats.org/drawingml/2006/main" xmlns:r="http://schemas.openxmlformats.org/officeDocument/2006/relationships" xmlns:p="http://schemas.openxmlformats.org/presentationml/2006/main">
+  <p:cSld>
+    <p:spTree>
+      <p:nvGrpSpPr>
+        <p:cNvPr id="1" name=""/>
+        <p:cNvGrpSpPr/>
+        <p:nvPr/>
+      </p:nvGrpSpPr>
+      <p:grpSpPr>
+        <a:xfrm>
+          <a:off x="0" y="0"/>
+          <a:ext cx="0" cy="0"/>
+          <a:chOff x="0" y="0"/>
+          <a:chExt cx="0" cy="0"/>
+        </a:xfrm>
+      </p:grpSpPr>
+      <p:sp>
+        <p:nvSpPr>
+          <p:cNvPr id="2" name="Title 1">
+            <a:extLst>
+              <a:ext uri="{FF2B5EF4-FFF2-40B4-BE49-F238E27FC236}">
+                <a16:creationId xmlns:a16="http://schemas.microsoft.com/office/drawing/2014/main" id="{FBC7328E-1571-719D-BC99-8654EF33FE4D}"/>
+              </a:ext>
+            </a:extLst>
+          </p:cNvPr>
+          <p:cNvSpPr>
+            <a:spLocks noGrp="1"/>
+          </p:cNvSpPr>
+          <p:nvPr>
+            <p:ph type="title"/>
+          </p:nvPr>
+        </p:nvSpPr>
+        <p:spPr>
+          <a:xfrm>
+            <a:off x="838200" y="365125"/>
+            <a:ext cx="10515600" cy="5151755"/>
+          </a:xfrm>
+        </p:spPr>
+        <p:txBody>
+          <a:bodyPr>
+            <a:normAutofit/>
+          </a:bodyPr>
+          <a:lstStyle/>
+          <a:p>
+            <a:pPr algn="ctr"/>
+            <a:r>
+              <a:rPr lang="en-US" sz="8000" b="1">
+                <a:solidFill>
+                  <a:srgbClr val="FF0000"/>
+                </a:solidFill>
+              </a:rPr>
+              <a:t>END CASE </a:t>
+            </a:r>
+            <a:endParaRPr lang="en-US" sz="8000"/>
+          </a:p>
+        </p:txBody>
+      </p:sp>
+    </p:spTree>
+    <p:extLst>
+      <p:ext uri="{BB962C8B-B14F-4D97-AF65-F5344CB8AC3E}">
+        <p14:creationId xmlns:p14="http://schemas.microsoft.com/office/powerpoint/2010/main" val="3202700173"/>
+      </p:ext>
+    </p:extLst>
+  </p:cSld>
+  <p:clrMapOvr>
+    <a:masterClrMapping/>
+  </p:clrMapOvr>
+</p:sld>
+</file>
+
+<file path=ppt/slides/slide145.xml><?xml version="1.0" encoding="utf-8"?>
+<p:sld xmlns:a="http://schemas.openxmlformats.org/drawingml/2006/main" xmlns:r="http://schemas.openxmlformats.org/officeDocument/2006/relationships" xmlns:p="http://schemas.openxmlformats.org/presentationml/2006/main">
+  <p:cSld>
+    <p:spTree>
+      <p:nvGrpSpPr>
+        <p:cNvPr id="1" name="">
+          <a:extLst>
+            <a:ext uri="{FF2B5EF4-FFF2-40B4-BE49-F238E27FC236}">
+              <a16:creationId xmlns:a16="http://schemas.microsoft.com/office/drawing/2014/main" id="{19DE9890-2B09-53AF-F5BC-66389EDAF25D}"/>
+            </a:ext>
+          </a:extLst>
+        </p:cNvPr>
+        <p:cNvGrpSpPr/>
+        <p:nvPr/>
+      </p:nvGrpSpPr>
+      <p:grpSpPr>
+        <a:xfrm>
+          <a:off x="0" y="0"/>
+          <a:ext cx="0" cy="0"/>
+          <a:chOff x="0" y="0"/>
+          <a:chExt cx="0" cy="0"/>
+        </a:xfrm>
+      </p:grpSpPr>
+      <p:sp>
+        <p:nvSpPr>
+          <p:cNvPr id="2" name="Title 1">
+            <a:extLst>
+              <a:ext uri="{FF2B5EF4-FFF2-40B4-BE49-F238E27FC236}">
+                <a16:creationId xmlns:a16="http://schemas.microsoft.com/office/drawing/2014/main" id="{8BD385D2-A9DB-9FDA-41E6-6580FD114BF4}"/>
+              </a:ext>
+            </a:extLst>
+          </p:cNvPr>
+          <p:cNvSpPr>
+            <a:spLocks noGrp="1"/>
+          </p:cNvSpPr>
+          <p:nvPr>
+            <p:ph type="title"/>
+          </p:nvPr>
+        </p:nvSpPr>
+        <p:spPr>
+          <a:xfrm>
+            <a:off x="838200" y="1787525"/>
+            <a:ext cx="10515600" cy="2662555"/>
+          </a:xfrm>
+        </p:spPr>
+        <p:txBody>
+          <a:bodyPr>
+            <a:noAutofit/>
+          </a:bodyPr>
+          <a:lstStyle/>
+          <a:p>
+            <a:pPr algn="ctr"/>
+            <a:r>
+              <a:rPr lang="en-US" sz="6000" b="1">
+                <a:solidFill>
+                  <a:srgbClr val="FF0000"/>
+                </a:solidFill>
+              </a:rPr>
+              <a:t>Start</a:t>
+            </a:r>
+            <a:br>
+              <a:rPr lang="en-US" sz="6000" b="1">
+                <a:solidFill>
+                  <a:srgbClr val="FF0000"/>
+                </a:solidFill>
+              </a:rPr>
+            </a:br>
+            <a:r>
+              <a:rPr lang="en-US" sz="6000" b="1">
+                <a:solidFill>
+                  <a:srgbClr val="FF0000"/>
+                </a:solidFill>
+              </a:rPr>
+              <a:t>Common Table Expression (CTE).</a:t>
+            </a:r>
+          </a:p>
+        </p:txBody>
+      </p:sp>
+    </p:spTree>
+    <p:extLst>
+      <p:ext uri="{BB962C8B-B14F-4D97-AF65-F5344CB8AC3E}">
+        <p14:creationId xmlns:p14="http://schemas.microsoft.com/office/powerpoint/2010/main" val="153199495"/>
+      </p:ext>
+    </p:extLst>
+  </p:cSld>
+  <p:clrMapOvr>
+    <a:masterClrMapping/>
+  </p:clrMapOvr>
+</p:sld>
+</file>
+
+<file path=ppt/slides/slide146.xml><?xml version="1.0" encoding="utf-8"?>
+<p:sld xmlns:a="http://schemas.openxmlformats.org/drawingml/2006/main" xmlns:r="http://schemas.openxmlformats.org/officeDocument/2006/relationships" xmlns:p="http://schemas.openxmlformats.org/presentationml/2006/main">
+  <p:cSld>
+    <p:spTree>
+      <p:nvGrpSpPr>
+        <p:cNvPr id="1" name=""/>
+        <p:cNvGrpSpPr/>
+        <p:nvPr/>
+      </p:nvGrpSpPr>
+      <p:grpSpPr>
+        <a:xfrm>
+          <a:off x="0" y="0"/>
+          <a:ext cx="0" cy="0"/>
+          <a:chOff x="0" y="0"/>
+          <a:chExt cx="0" cy="0"/>
+        </a:xfrm>
+      </p:grpSpPr>
+      <p:sp>
+        <p:nvSpPr>
+          <p:cNvPr id="2" name="Title 1">
+            <a:extLst>
+              <a:ext uri="{FF2B5EF4-FFF2-40B4-BE49-F238E27FC236}">
                 <a16:creationId xmlns:a16="http://schemas.microsoft.com/office/drawing/2014/main" id="{C9A98B2B-168F-396D-C225-69661F6428CC}"/>
               </a:ext>
             </a:extLst>
@@ -19635,7 +20501,7 @@
         <p:spPr>
           <a:xfrm>
             <a:off x="220133" y="2114467"/>
-            <a:ext cx="5603041" cy="2847000"/>
+            <a:ext cx="6573101" cy="3339904"/>
           </a:xfrm>
           <a:prstGeom prst="rect">
             <a:avLst/>
@@ -19664,8 +20530,8 @@
         </p:blipFill>
         <p:spPr>
           <a:xfrm>
-            <a:off x="6368828" y="2232418"/>
-            <a:ext cx="4092295" cy="2796782"/>
+            <a:off x="7158345" y="2114467"/>
+            <a:ext cx="4813522" cy="3289687"/>
           </a:xfrm>
           <a:prstGeom prst="rect">
             <a:avLst/>
@@ -19685,7 +20551,7 @@
 </p:sld>
 </file>
 
-<file path=ppt/slides/slide141.xml><?xml version="1.0" encoding="utf-8"?>
+<file path=ppt/slides/slide147.xml><?xml version="1.0" encoding="utf-8"?>
 <p:sld xmlns:a="http://schemas.openxmlformats.org/drawingml/2006/main" xmlns:r="http://schemas.openxmlformats.org/officeDocument/2006/relationships" xmlns:p="http://schemas.openxmlformats.org/presentationml/2006/main">
   <p:cSld>
     <p:spTree>
@@ -19840,6 +20706,36 @@
           </a:prstGeom>
         </p:spPr>
       </p:pic>
+      <p:pic>
+        <p:nvPicPr>
+          <p:cNvPr id="9" name="Picture 8">
+            <a:extLst>
+              <a:ext uri="{FF2B5EF4-FFF2-40B4-BE49-F238E27FC236}">
+                <a16:creationId xmlns:a16="http://schemas.microsoft.com/office/drawing/2014/main" id="{34CD24C7-CC2A-D730-9A6C-AD70F0ACBE4F}"/>
+              </a:ext>
+            </a:extLst>
+          </p:cNvPr>
+          <p:cNvPicPr>
+            <a:picLocks noChangeAspect="1"/>
+          </p:cNvPicPr>
+          <p:nvPr/>
+        </p:nvPicPr>
+        <p:blipFill>
+          <a:blip r:embed="rId4"/>
+          <a:stretch>
+            <a:fillRect/>
+          </a:stretch>
+        </p:blipFill>
+        <p:spPr>
+          <a:xfrm>
+            <a:off x="8781401" y="1548609"/>
+            <a:ext cx="2818210" cy="3881219"/>
+          </a:xfrm>
+          <a:prstGeom prst="rect">
+            <a:avLst/>
+          </a:prstGeom>
+        </p:spPr>
+      </p:pic>
     </p:spTree>
     <p:extLst>
       <p:ext uri="{BB962C8B-B14F-4D97-AF65-F5344CB8AC3E}">
@@ -19853,7 +20749,7 @@
 </p:sld>
 </file>
 
-<file path=ppt/slides/slide142.xml><?xml version="1.0" encoding="utf-8"?>
+<file path=ppt/slides/slide148.xml><?xml version="1.0" encoding="utf-8"?>
 <p:sld xmlns:a="http://schemas.openxmlformats.org/drawingml/2006/main" xmlns:r="http://schemas.openxmlformats.org/officeDocument/2006/relationships" xmlns:p="http://schemas.openxmlformats.org/presentationml/2006/main">
   <p:cSld>
     <p:spTree>
@@ -19944,7 +20840,7 @@
 </p:sld>
 </file>
 
-<file path=ppt/slides/slide143.xml><?xml version="1.0" encoding="utf-8"?>
+<file path=ppt/slides/slide149.xml><?xml version="1.0" encoding="utf-8"?>
 <p:sld xmlns:a="http://schemas.openxmlformats.org/drawingml/2006/main" xmlns:r="http://schemas.openxmlformats.org/officeDocument/2006/relationships" xmlns:p="http://schemas.openxmlformats.org/presentationml/2006/main">
   <p:cSld>
     <p:spTree>
@@ -20002,7 +20898,7 @@
                   <a:srgbClr val="FF0000"/>
                 </a:solidFill>
               </a:rPr>
-              <a:t>Start Outer Apply</a:t>
+              <a:t>Start Outer and cross Apply</a:t>
             </a:r>
           </a:p>
         </p:txBody>
@@ -20011,348 +20907,6 @@
     <p:extLst>
       <p:ext uri="{BB962C8B-B14F-4D97-AF65-F5344CB8AC3E}">
         <p14:creationId xmlns:p14="http://schemas.microsoft.com/office/powerpoint/2010/main" val="2886165741"/>
-      </p:ext>
-    </p:extLst>
-  </p:cSld>
-  <p:clrMapOvr>
-    <a:masterClrMapping/>
-  </p:clrMapOvr>
-</p:sld>
-</file>
-
-<file path=ppt/slides/slide144.xml><?xml version="1.0" encoding="utf-8"?>
-<p:sld xmlns:a="http://schemas.openxmlformats.org/drawingml/2006/main" xmlns:r="http://schemas.openxmlformats.org/officeDocument/2006/relationships" xmlns:p="http://schemas.openxmlformats.org/presentationml/2006/main">
-  <p:cSld>
-    <p:spTree>
-      <p:nvGrpSpPr>
-        <p:cNvPr id="1" name=""/>
-        <p:cNvGrpSpPr/>
-        <p:nvPr/>
-      </p:nvGrpSpPr>
-      <p:grpSpPr>
-        <a:xfrm>
-          <a:off x="0" y="0"/>
-          <a:ext cx="0" cy="0"/>
-          <a:chOff x="0" y="0"/>
-          <a:chExt cx="0" cy="0"/>
-        </a:xfrm>
-      </p:grpSpPr>
-      <p:sp>
-        <p:nvSpPr>
-          <p:cNvPr id="2" name="Title 1">
-            <a:extLst>
-              <a:ext uri="{FF2B5EF4-FFF2-40B4-BE49-F238E27FC236}">
-                <a16:creationId xmlns:a16="http://schemas.microsoft.com/office/drawing/2014/main" id="{FD918C99-5729-7B03-C742-BE8397016B0B}"/>
-              </a:ext>
-            </a:extLst>
-          </p:cNvPr>
-          <p:cNvSpPr>
-            <a:spLocks noGrp="1"/>
-          </p:cNvSpPr>
-          <p:nvPr>
-            <p:ph type="title"/>
-          </p:nvPr>
-        </p:nvSpPr>
-        <p:spPr>
-          <a:xfrm>
-            <a:off x="321733" y="365126"/>
-            <a:ext cx="11032067" cy="532342"/>
-          </a:xfrm>
-        </p:spPr>
-        <p:txBody>
-          <a:bodyPr>
-            <a:normAutofit fontScale="90000"/>
-          </a:bodyPr>
-          <a:lstStyle/>
-          <a:p>
-            <a:endParaRPr lang="en-US"/>
-          </a:p>
-        </p:txBody>
-      </p:sp>
-      <p:sp>
-        <p:nvSpPr>
-          <p:cNvPr id="3" name="Content Placeholder 2">
-            <a:extLst>
-              <a:ext uri="{FF2B5EF4-FFF2-40B4-BE49-F238E27FC236}">
-                <a16:creationId xmlns:a16="http://schemas.microsoft.com/office/drawing/2014/main" id="{5E2DDED7-7F3C-D858-E1FE-7A58A6ABBEC0}"/>
-              </a:ext>
-            </a:extLst>
-          </p:cNvPr>
-          <p:cNvSpPr>
-            <a:spLocks noGrp="1"/>
-          </p:cNvSpPr>
-          <p:nvPr>
-            <p:ph idx="1"/>
-          </p:nvPr>
-        </p:nvSpPr>
-        <p:spPr>
-          <a:xfrm>
-            <a:off x="321733" y="897468"/>
-            <a:ext cx="11032067" cy="5867399"/>
-          </a:xfrm>
-        </p:spPr>
-        <p:txBody>
-          <a:bodyPr>
-            <a:normAutofit/>
-          </a:bodyPr>
-          <a:lstStyle/>
-          <a:p>
-            <a:r>
-              <a:rPr lang="en-US" sz="2400"/>
-              <a:t>think of it like this:</a:t>
-            </a:r>
-          </a:p>
-          <a:p>
-            <a:pPr lvl="1"/>
-            <a:r>
-              <a:rPr lang="en-US" sz="2000"/>
-              <a:t>JOIN → Join two tables.</a:t>
-            </a:r>
-          </a:p>
-          <a:p>
-            <a:pPr lvl="1"/>
-            <a:r>
-              <a:rPr lang="en-US" sz="2000"/>
-              <a:t>APPLY → For </a:t>
-            </a:r>
-            <a:r>
-              <a:rPr lang="en-US" sz="2000" b="1"/>
-              <a:t>each row</a:t>
-            </a:r>
-            <a:r>
-              <a:rPr lang="en-US" sz="2000"/>
-              <a:t> in the left table, execute another query.</a:t>
-            </a:r>
-          </a:p>
-          <a:p>
-            <a:r>
-              <a:rPr lang="en-US" sz="2400"/>
-              <a:t>There are two types:</a:t>
-            </a:r>
-          </a:p>
-          <a:p>
-            <a:pPr lvl="1"/>
-            <a:r>
-              <a:rPr lang="en-US" sz="2000"/>
-              <a:t>CROSS APPLY → Like INNER JOIN </a:t>
-            </a:r>
-          </a:p>
-          <a:p>
-            <a:pPr lvl="1"/>
-            <a:r>
-              <a:rPr lang="en-US" sz="2000"/>
-              <a:t>OUTER APPLY → Like LEFT JOIN</a:t>
-            </a:r>
-          </a:p>
-          <a:p>
-            <a:endParaRPr lang="en-US" sz="2400"/>
-          </a:p>
-        </p:txBody>
-      </p:sp>
-      <p:pic>
-        <p:nvPicPr>
-          <p:cNvPr id="5" name="Picture 4">
-            <a:extLst>
-              <a:ext uri="{FF2B5EF4-FFF2-40B4-BE49-F238E27FC236}">
-                <a16:creationId xmlns:a16="http://schemas.microsoft.com/office/drawing/2014/main" id="{A0FEA861-4BAE-3973-63AA-29E9155BFA8B}"/>
-              </a:ext>
-            </a:extLst>
-          </p:cNvPr>
-          <p:cNvPicPr>
-            <a:picLocks noChangeAspect="1"/>
-          </p:cNvPicPr>
-          <p:nvPr/>
-        </p:nvPicPr>
-        <p:blipFill>
-          <a:blip r:embed="rId2"/>
-          <a:stretch>
-            <a:fillRect/>
-          </a:stretch>
-        </p:blipFill>
-        <p:spPr>
-          <a:xfrm>
-            <a:off x="5249333" y="2169641"/>
-            <a:ext cx="4013200" cy="4323233"/>
-          </a:xfrm>
-          <a:prstGeom prst="rect">
-            <a:avLst/>
-          </a:prstGeom>
-        </p:spPr>
-      </p:pic>
-    </p:spTree>
-    <p:extLst>
-      <p:ext uri="{BB962C8B-B14F-4D97-AF65-F5344CB8AC3E}">
-        <p14:creationId xmlns:p14="http://schemas.microsoft.com/office/powerpoint/2010/main" val="3696626895"/>
-      </p:ext>
-    </p:extLst>
-  </p:cSld>
-  <p:clrMapOvr>
-    <a:masterClrMapping/>
-  </p:clrMapOvr>
-</p:sld>
-</file>
-
-<file path=ppt/slides/slide145.xml><?xml version="1.0" encoding="utf-8"?>
-<p:sld xmlns:a="http://schemas.openxmlformats.org/drawingml/2006/main" xmlns:r="http://schemas.openxmlformats.org/officeDocument/2006/relationships" xmlns:p="http://schemas.openxmlformats.org/presentationml/2006/main">
-  <p:cSld>
-    <p:spTree>
-      <p:nvGrpSpPr>
-        <p:cNvPr id="1" name=""/>
-        <p:cNvGrpSpPr/>
-        <p:nvPr/>
-      </p:nvGrpSpPr>
-      <p:grpSpPr>
-        <a:xfrm>
-          <a:off x="0" y="0"/>
-          <a:ext cx="0" cy="0"/>
-          <a:chOff x="0" y="0"/>
-          <a:chExt cx="0" cy="0"/>
-        </a:xfrm>
-      </p:grpSpPr>
-      <p:sp>
-        <p:nvSpPr>
-          <p:cNvPr id="2" name="Title 1">
-            <a:extLst>
-              <a:ext uri="{FF2B5EF4-FFF2-40B4-BE49-F238E27FC236}">
-                <a16:creationId xmlns:a16="http://schemas.microsoft.com/office/drawing/2014/main" id="{5195D65A-D44B-1CB0-2B1E-6603D5982EBD}"/>
-              </a:ext>
-            </a:extLst>
-          </p:cNvPr>
-          <p:cNvSpPr>
-            <a:spLocks noGrp="1"/>
-          </p:cNvSpPr>
-          <p:nvPr>
-            <p:ph type="title"/>
-          </p:nvPr>
-        </p:nvSpPr>
-        <p:spPr>
-          <a:xfrm>
-            <a:off x="838200" y="365126"/>
-            <a:ext cx="10515600" cy="693208"/>
-          </a:xfrm>
-        </p:spPr>
-        <p:txBody>
-          <a:bodyPr>
-            <a:normAutofit fontScale="90000"/>
-          </a:bodyPr>
-          <a:lstStyle/>
-          <a:p>
-            <a:endParaRPr lang="en-US"/>
-          </a:p>
-        </p:txBody>
-      </p:sp>
-      <p:pic>
-        <p:nvPicPr>
-          <p:cNvPr id="5" name="Content Placeholder 4">
-            <a:extLst>
-              <a:ext uri="{FF2B5EF4-FFF2-40B4-BE49-F238E27FC236}">
-                <a16:creationId xmlns:a16="http://schemas.microsoft.com/office/drawing/2014/main" id="{42DCE179-9BDF-688B-805E-C6B47E83A0D8}"/>
-              </a:ext>
-            </a:extLst>
-          </p:cNvPr>
-          <p:cNvPicPr>
-            <a:picLocks noGrp="1" noChangeAspect="1"/>
-          </p:cNvPicPr>
-          <p:nvPr>
-            <p:ph idx="1"/>
-          </p:nvPr>
-        </p:nvPicPr>
-        <p:blipFill>
-          <a:blip r:embed="rId2"/>
-          <a:stretch>
-            <a:fillRect/>
-          </a:stretch>
-        </p:blipFill>
-        <p:spPr>
-          <a:xfrm>
-            <a:off x="737293" y="1752600"/>
-            <a:ext cx="3936307" cy="4796647"/>
-          </a:xfrm>
-          <a:prstGeom prst="rect">
-            <a:avLst/>
-          </a:prstGeom>
-        </p:spPr>
-      </p:pic>
-    </p:spTree>
-    <p:extLst>
-      <p:ext uri="{BB962C8B-B14F-4D97-AF65-F5344CB8AC3E}">
-        <p14:creationId xmlns:p14="http://schemas.microsoft.com/office/powerpoint/2010/main" val="4006573741"/>
-      </p:ext>
-    </p:extLst>
-  </p:cSld>
-  <p:clrMapOvr>
-    <a:masterClrMapping/>
-  </p:clrMapOvr>
-</p:sld>
-</file>
-
-<file path=ppt/slides/slide146.xml><?xml version="1.0" encoding="utf-8"?>
-<p:sld xmlns:a="http://schemas.openxmlformats.org/drawingml/2006/main" xmlns:r="http://schemas.openxmlformats.org/officeDocument/2006/relationships" xmlns:p="http://schemas.openxmlformats.org/presentationml/2006/main">
-  <p:cSld>
-    <p:spTree>
-      <p:nvGrpSpPr>
-        <p:cNvPr id="1" name="">
-          <a:extLst>
-            <a:ext uri="{FF2B5EF4-FFF2-40B4-BE49-F238E27FC236}">
-              <a16:creationId xmlns:a16="http://schemas.microsoft.com/office/drawing/2014/main" id="{80E84D5F-5739-0954-5933-FD886ACA26E4}"/>
-            </a:ext>
-          </a:extLst>
-        </p:cNvPr>
-        <p:cNvGrpSpPr/>
-        <p:nvPr/>
-      </p:nvGrpSpPr>
-      <p:grpSpPr>
-        <a:xfrm>
-          <a:off x="0" y="0"/>
-          <a:ext cx="0" cy="0"/>
-          <a:chOff x="0" y="0"/>
-          <a:chExt cx="0" cy="0"/>
-        </a:xfrm>
-      </p:grpSpPr>
-      <p:sp>
-        <p:nvSpPr>
-          <p:cNvPr id="2" name="Title 1">
-            <a:extLst>
-              <a:ext uri="{FF2B5EF4-FFF2-40B4-BE49-F238E27FC236}">
-                <a16:creationId xmlns:a16="http://schemas.microsoft.com/office/drawing/2014/main" id="{9644E3E6-53F1-1787-B93A-A74403FF738B}"/>
-              </a:ext>
-            </a:extLst>
-          </p:cNvPr>
-          <p:cNvSpPr>
-            <a:spLocks noGrp="1"/>
-          </p:cNvSpPr>
-          <p:nvPr>
-            <p:ph type="title"/>
-          </p:nvPr>
-        </p:nvSpPr>
-        <p:spPr>
-          <a:xfrm>
-            <a:off x="838200" y="1787525"/>
-            <a:ext cx="10515600" cy="2662555"/>
-          </a:xfrm>
-        </p:spPr>
-        <p:txBody>
-          <a:bodyPr>
-            <a:noAutofit/>
-          </a:bodyPr>
-          <a:lstStyle/>
-          <a:p>
-            <a:pPr algn="ctr"/>
-            <a:r>
-              <a:rPr lang="en-US" sz="6000" b="1">
-                <a:solidFill>
-                  <a:srgbClr val="FF0000"/>
-                </a:solidFill>
-              </a:rPr>
-              <a:t>End Outer Apply</a:t>
-            </a:r>
-          </a:p>
-        </p:txBody>
-      </p:sp>
-    </p:spTree>
-    <p:extLst>
-      <p:ext uri="{BB962C8B-B14F-4D97-AF65-F5344CB8AC3E}">
-        <p14:creationId xmlns:p14="http://schemas.microsoft.com/office/powerpoint/2010/main" val="2790246346"/>
       </p:ext>
     </p:extLst>
   </p:cSld>
@@ -20545,6 +21099,1116 @@
     <p:extLst>
       <p:ext uri="{BB962C8B-B14F-4D97-AF65-F5344CB8AC3E}">
         <p14:creationId xmlns:p14="http://schemas.microsoft.com/office/powerpoint/2010/main" val="3793665788"/>
+      </p:ext>
+    </p:extLst>
+  </p:cSld>
+  <p:clrMapOvr>
+    <a:masterClrMapping/>
+  </p:clrMapOvr>
+</p:sld>
+</file>
+
+<file path=ppt/slides/slide150.xml><?xml version="1.0" encoding="utf-8"?>
+<p:sld xmlns:a="http://schemas.openxmlformats.org/drawingml/2006/main" xmlns:r="http://schemas.openxmlformats.org/officeDocument/2006/relationships" xmlns:p="http://schemas.openxmlformats.org/presentationml/2006/main">
+  <p:cSld>
+    <p:spTree>
+      <p:nvGrpSpPr>
+        <p:cNvPr id="1" name=""/>
+        <p:cNvGrpSpPr/>
+        <p:nvPr/>
+      </p:nvGrpSpPr>
+      <p:grpSpPr>
+        <a:xfrm>
+          <a:off x="0" y="0"/>
+          <a:ext cx="0" cy="0"/>
+          <a:chOff x="0" y="0"/>
+          <a:chExt cx="0" cy="0"/>
+        </a:xfrm>
+      </p:grpSpPr>
+      <p:sp>
+        <p:nvSpPr>
+          <p:cNvPr id="2" name="Title 1">
+            <a:extLst>
+              <a:ext uri="{FF2B5EF4-FFF2-40B4-BE49-F238E27FC236}">
+                <a16:creationId xmlns:a16="http://schemas.microsoft.com/office/drawing/2014/main" id="{FD918C99-5729-7B03-C742-BE8397016B0B}"/>
+              </a:ext>
+            </a:extLst>
+          </p:cNvPr>
+          <p:cNvSpPr>
+            <a:spLocks noGrp="1"/>
+          </p:cNvSpPr>
+          <p:nvPr>
+            <p:ph type="title"/>
+          </p:nvPr>
+        </p:nvSpPr>
+        <p:spPr>
+          <a:xfrm>
+            <a:off x="321733" y="365126"/>
+            <a:ext cx="11032067" cy="532342"/>
+          </a:xfrm>
+        </p:spPr>
+        <p:txBody>
+          <a:bodyPr>
+            <a:normAutofit fontScale="90000"/>
+          </a:bodyPr>
+          <a:lstStyle/>
+          <a:p>
+            <a:r>
+              <a:rPr lang="en-US"/>
+              <a:t>What is OUTER APPLY Mechanism?</a:t>
+            </a:r>
+          </a:p>
+        </p:txBody>
+      </p:sp>
+      <p:sp>
+        <p:nvSpPr>
+          <p:cNvPr id="3" name="Content Placeholder 2">
+            <a:extLst>
+              <a:ext uri="{FF2B5EF4-FFF2-40B4-BE49-F238E27FC236}">
+                <a16:creationId xmlns:a16="http://schemas.microsoft.com/office/drawing/2014/main" id="{5E2DDED7-7F3C-D858-E1FE-7A58A6ABBEC0}"/>
+              </a:ext>
+            </a:extLst>
+          </p:cNvPr>
+          <p:cNvSpPr>
+            <a:spLocks noGrp="1"/>
+          </p:cNvSpPr>
+          <p:nvPr>
+            <p:ph idx="1"/>
+          </p:nvPr>
+        </p:nvSpPr>
+        <p:spPr>
+          <a:xfrm>
+            <a:off x="321733" y="897468"/>
+            <a:ext cx="11765492" cy="5867399"/>
+          </a:xfrm>
+        </p:spPr>
+        <p:txBody>
+          <a:bodyPr>
+            <a:normAutofit/>
+          </a:bodyPr>
+          <a:lstStyle/>
+          <a:p>
+            <a:r>
+              <a:rPr lang="en-US" sz="2400"/>
+              <a:t>Left table is executed</a:t>
+            </a:r>
+          </a:p>
+          <a:p>
+            <a:r>
+              <a:rPr lang="en-US" sz="2400"/>
+              <a:t>OUTER APPLY</a:t>
+            </a:r>
+            <a:r>
+              <a:rPr lang="en-US" sz="2000"/>
+              <a:t> executes the right-side query </a:t>
+            </a:r>
+            <a:r>
+              <a:rPr lang="en-US" sz="2000" b="1"/>
+              <a:t>once for every row</a:t>
+            </a:r>
+            <a:r>
+              <a:rPr lang="en-US" sz="2000"/>
+              <a:t> from the left-side table.</a:t>
+            </a:r>
+          </a:p>
+          <a:p>
+            <a:r>
+              <a:rPr lang="en-US" sz="2000"/>
+              <a:t>If the right-side query returns rows, they are joined.</a:t>
+            </a:r>
+          </a:p>
+          <a:p>
+            <a:r>
+              <a:rPr lang="en-US" sz="2000"/>
+              <a:t>If it returns nothing, SQL Server still returns the left row, with NULL values for the right-side columns.</a:t>
+            </a:r>
+          </a:p>
+          <a:p>
+            <a:r>
+              <a:rPr lang="en-US" sz="2000"/>
+              <a:t>It behaves similarly to a LEFT JOIN, but the right side can reference columns from the left row.</a:t>
+            </a:r>
+          </a:p>
+          <a:p>
+            <a:endParaRPr lang="en-US" sz="2000"/>
+          </a:p>
+          <a:p>
+            <a:pPr marL="0" indent="0">
+              <a:buNone/>
+            </a:pPr>
+            <a:endParaRPr lang="en-US" sz="2000"/>
+          </a:p>
+          <a:p>
+            <a:r>
+              <a:rPr lang="en-US" sz="2400"/>
+              <a:t>There are two types:</a:t>
+            </a:r>
+          </a:p>
+          <a:p>
+            <a:pPr lvl="1"/>
+            <a:r>
+              <a:rPr lang="en-US" sz="2000"/>
+              <a:t>CROSS APPLY → Like INNER JOIN </a:t>
+            </a:r>
+          </a:p>
+          <a:p>
+            <a:pPr lvl="1"/>
+            <a:r>
+              <a:rPr lang="en-US" sz="2000"/>
+              <a:t>OUTER APPLY → Like LEFT JOIN</a:t>
+            </a:r>
+          </a:p>
+          <a:p>
+            <a:endParaRPr lang="en-US" sz="2400"/>
+          </a:p>
+        </p:txBody>
+      </p:sp>
+    </p:spTree>
+    <p:extLst>
+      <p:ext uri="{BB962C8B-B14F-4D97-AF65-F5344CB8AC3E}">
+        <p14:creationId xmlns:p14="http://schemas.microsoft.com/office/powerpoint/2010/main" val="3696626895"/>
+      </p:ext>
+    </p:extLst>
+  </p:cSld>
+  <p:clrMapOvr>
+    <a:masterClrMapping/>
+  </p:clrMapOvr>
+</p:sld>
+</file>
+
+<file path=ppt/slides/slide151.xml><?xml version="1.0" encoding="utf-8"?>
+<p:sld xmlns:a="http://schemas.openxmlformats.org/drawingml/2006/main" xmlns:r="http://schemas.openxmlformats.org/officeDocument/2006/relationships" xmlns:p="http://schemas.openxmlformats.org/presentationml/2006/main">
+  <p:cSld>
+    <p:spTree>
+      <p:nvGrpSpPr>
+        <p:cNvPr id="1" name=""/>
+        <p:cNvGrpSpPr/>
+        <p:nvPr/>
+      </p:nvGrpSpPr>
+      <p:grpSpPr>
+        <a:xfrm>
+          <a:off x="0" y="0"/>
+          <a:ext cx="0" cy="0"/>
+          <a:chOff x="0" y="0"/>
+          <a:chExt cx="0" cy="0"/>
+        </a:xfrm>
+      </p:grpSpPr>
+      <p:sp>
+        <p:nvSpPr>
+          <p:cNvPr id="2" name="Title 1">
+            <a:extLst>
+              <a:ext uri="{FF2B5EF4-FFF2-40B4-BE49-F238E27FC236}">
+                <a16:creationId xmlns:a16="http://schemas.microsoft.com/office/drawing/2014/main" id="{5195D65A-D44B-1CB0-2B1E-6603D5982EBD}"/>
+              </a:ext>
+            </a:extLst>
+          </p:cNvPr>
+          <p:cNvSpPr>
+            <a:spLocks noGrp="1"/>
+          </p:cNvSpPr>
+          <p:nvPr>
+            <p:ph type="title"/>
+          </p:nvPr>
+        </p:nvSpPr>
+        <p:spPr>
+          <a:xfrm>
+            <a:off x="838200" y="365126"/>
+            <a:ext cx="10515600" cy="693208"/>
+          </a:xfrm>
+        </p:spPr>
+        <p:txBody>
+          <a:bodyPr>
+            <a:normAutofit fontScale="90000"/>
+          </a:bodyPr>
+          <a:lstStyle/>
+          <a:p>
+            <a:r>
+              <a:rPr lang="en-US"/>
+              <a:t>example</a:t>
+            </a:r>
+          </a:p>
+        </p:txBody>
+      </p:sp>
+      <p:pic>
+        <p:nvPicPr>
+          <p:cNvPr id="5" name="Content Placeholder 4">
+            <a:extLst>
+              <a:ext uri="{FF2B5EF4-FFF2-40B4-BE49-F238E27FC236}">
+                <a16:creationId xmlns:a16="http://schemas.microsoft.com/office/drawing/2014/main" id="{42DCE179-9BDF-688B-805E-C6B47E83A0D8}"/>
+              </a:ext>
+            </a:extLst>
+          </p:cNvPr>
+          <p:cNvPicPr>
+            <a:picLocks noGrp="1" noChangeAspect="1"/>
+          </p:cNvPicPr>
+          <p:nvPr>
+            <p:ph idx="1"/>
+          </p:nvPr>
+        </p:nvPicPr>
+        <p:blipFill>
+          <a:blip r:embed="rId2"/>
+          <a:stretch>
+            <a:fillRect/>
+          </a:stretch>
+        </p:blipFill>
+        <p:spPr>
+          <a:xfrm>
+            <a:off x="737293" y="1238250"/>
+            <a:ext cx="4358403" cy="5310998"/>
+          </a:xfrm>
+          <a:prstGeom prst="rect">
+            <a:avLst/>
+          </a:prstGeom>
+        </p:spPr>
+      </p:pic>
+    </p:spTree>
+    <p:extLst>
+      <p:ext uri="{BB962C8B-B14F-4D97-AF65-F5344CB8AC3E}">
+        <p14:creationId xmlns:p14="http://schemas.microsoft.com/office/powerpoint/2010/main" val="4006573741"/>
+      </p:ext>
+    </p:extLst>
+  </p:cSld>
+  <p:clrMapOvr>
+    <a:masterClrMapping/>
+  </p:clrMapOvr>
+</p:sld>
+</file>
+
+<file path=ppt/slides/slide152.xml><?xml version="1.0" encoding="utf-8"?>
+<p:sld xmlns:a="http://schemas.openxmlformats.org/drawingml/2006/main" xmlns:r="http://schemas.openxmlformats.org/officeDocument/2006/relationships" xmlns:p="http://schemas.openxmlformats.org/presentationml/2006/main">
+  <p:cSld>
+    <p:spTree>
+      <p:nvGrpSpPr>
+        <p:cNvPr id="1" name=""/>
+        <p:cNvGrpSpPr/>
+        <p:nvPr/>
+      </p:nvGrpSpPr>
+      <p:grpSpPr>
+        <a:xfrm>
+          <a:off x="0" y="0"/>
+          <a:ext cx="0" cy="0"/>
+          <a:chOff x="0" y="0"/>
+          <a:chExt cx="0" cy="0"/>
+        </a:xfrm>
+      </p:grpSpPr>
+      <p:sp>
+        <p:nvSpPr>
+          <p:cNvPr id="2" name="Title 1">
+            <a:extLst>
+              <a:ext uri="{FF2B5EF4-FFF2-40B4-BE49-F238E27FC236}">
+                <a16:creationId xmlns:a16="http://schemas.microsoft.com/office/drawing/2014/main" id="{F3169235-9920-58F7-C817-6820554201B2}"/>
+              </a:ext>
+            </a:extLst>
+          </p:cNvPr>
+          <p:cNvSpPr>
+            <a:spLocks noGrp="1"/>
+          </p:cNvSpPr>
+          <p:nvPr>
+            <p:ph type="title"/>
+          </p:nvPr>
+        </p:nvSpPr>
+        <p:spPr/>
+        <p:txBody>
+          <a:bodyPr/>
+          <a:lstStyle/>
+          <a:p>
+            <a:r>
+              <a:rPr lang="en-US"/>
+              <a:t>Cross apply</a:t>
+            </a:r>
+          </a:p>
+        </p:txBody>
+      </p:sp>
+      <p:pic>
+        <p:nvPicPr>
+          <p:cNvPr id="5" name="Content Placeholder 4">
+            <a:extLst>
+              <a:ext uri="{FF2B5EF4-FFF2-40B4-BE49-F238E27FC236}">
+                <a16:creationId xmlns:a16="http://schemas.microsoft.com/office/drawing/2014/main" id="{337C6E27-3F02-311B-AA82-6DA4EFA742E0}"/>
+              </a:ext>
+            </a:extLst>
+          </p:cNvPr>
+          <p:cNvPicPr>
+            <a:picLocks noGrp="1" noChangeAspect="1"/>
+          </p:cNvPicPr>
+          <p:nvPr>
+            <p:ph idx="1"/>
+          </p:nvPr>
+        </p:nvPicPr>
+        <p:blipFill>
+          <a:blip r:embed="rId2"/>
+          <a:stretch>
+            <a:fillRect/>
+          </a:stretch>
+        </p:blipFill>
+        <p:spPr>
+          <a:xfrm>
+            <a:off x="838200" y="1690688"/>
+            <a:ext cx="5331798" cy="3919537"/>
+          </a:xfrm>
+          <a:prstGeom prst="rect">
+            <a:avLst/>
+          </a:prstGeom>
+        </p:spPr>
+      </p:pic>
+    </p:spTree>
+    <p:extLst>
+      <p:ext uri="{BB962C8B-B14F-4D97-AF65-F5344CB8AC3E}">
+        <p14:creationId xmlns:p14="http://schemas.microsoft.com/office/powerpoint/2010/main" val="1360127564"/>
+      </p:ext>
+    </p:extLst>
+  </p:cSld>
+  <p:clrMapOvr>
+    <a:masterClrMapping/>
+  </p:clrMapOvr>
+</p:sld>
+</file>
+
+<file path=ppt/slides/slide153.xml><?xml version="1.0" encoding="utf-8"?>
+<p:sld xmlns:a="http://schemas.openxmlformats.org/drawingml/2006/main" xmlns:r="http://schemas.openxmlformats.org/officeDocument/2006/relationships" xmlns:p="http://schemas.openxmlformats.org/presentationml/2006/main">
+  <p:cSld>
+    <p:spTree>
+      <p:nvGrpSpPr>
+        <p:cNvPr id="1" name="">
+          <a:extLst>
+            <a:ext uri="{FF2B5EF4-FFF2-40B4-BE49-F238E27FC236}">
+              <a16:creationId xmlns:a16="http://schemas.microsoft.com/office/drawing/2014/main" id="{80E84D5F-5739-0954-5933-FD886ACA26E4}"/>
+            </a:ext>
+          </a:extLst>
+        </p:cNvPr>
+        <p:cNvGrpSpPr/>
+        <p:nvPr/>
+      </p:nvGrpSpPr>
+      <p:grpSpPr>
+        <a:xfrm>
+          <a:off x="0" y="0"/>
+          <a:ext cx="0" cy="0"/>
+          <a:chOff x="0" y="0"/>
+          <a:chExt cx="0" cy="0"/>
+        </a:xfrm>
+      </p:grpSpPr>
+      <p:sp>
+        <p:nvSpPr>
+          <p:cNvPr id="2" name="Title 1">
+            <a:extLst>
+              <a:ext uri="{FF2B5EF4-FFF2-40B4-BE49-F238E27FC236}">
+                <a16:creationId xmlns:a16="http://schemas.microsoft.com/office/drawing/2014/main" id="{9644E3E6-53F1-1787-B93A-A74403FF738B}"/>
+              </a:ext>
+            </a:extLst>
+          </p:cNvPr>
+          <p:cNvSpPr>
+            <a:spLocks noGrp="1"/>
+          </p:cNvSpPr>
+          <p:nvPr>
+            <p:ph type="title"/>
+          </p:nvPr>
+        </p:nvSpPr>
+        <p:spPr>
+          <a:xfrm>
+            <a:off x="838200" y="1787525"/>
+            <a:ext cx="10515600" cy="2662555"/>
+          </a:xfrm>
+        </p:spPr>
+        <p:txBody>
+          <a:bodyPr>
+            <a:noAutofit/>
+          </a:bodyPr>
+          <a:lstStyle/>
+          <a:p>
+            <a:pPr algn="ctr"/>
+            <a:r>
+              <a:rPr lang="en-US" sz="6000" b="1">
+                <a:solidFill>
+                  <a:srgbClr val="FF0000"/>
+                </a:solidFill>
+              </a:rPr>
+              <a:t>End Outer and cross Apply</a:t>
+            </a:r>
+          </a:p>
+        </p:txBody>
+      </p:sp>
+    </p:spTree>
+    <p:extLst>
+      <p:ext uri="{BB962C8B-B14F-4D97-AF65-F5344CB8AC3E}">
+        <p14:creationId xmlns:p14="http://schemas.microsoft.com/office/powerpoint/2010/main" val="2790246346"/>
+      </p:ext>
+    </p:extLst>
+  </p:cSld>
+  <p:clrMapOvr>
+    <a:masterClrMapping/>
+  </p:clrMapOvr>
+</p:sld>
+</file>
+
+<file path=ppt/slides/slide154.xml><?xml version="1.0" encoding="utf-8"?>
+<p:sld xmlns:a="http://schemas.openxmlformats.org/drawingml/2006/main" xmlns:r="http://schemas.openxmlformats.org/officeDocument/2006/relationships" xmlns:p="http://schemas.openxmlformats.org/presentationml/2006/main">
+  <p:cSld>
+    <p:spTree>
+      <p:nvGrpSpPr>
+        <p:cNvPr id="1" name="">
+          <a:extLst>
+            <a:ext uri="{FF2B5EF4-FFF2-40B4-BE49-F238E27FC236}">
+              <a16:creationId xmlns:a16="http://schemas.microsoft.com/office/drawing/2014/main" id="{1C673085-589D-F05C-F896-C1E361BD74A1}"/>
+            </a:ext>
+          </a:extLst>
+        </p:cNvPr>
+        <p:cNvGrpSpPr/>
+        <p:nvPr/>
+      </p:nvGrpSpPr>
+      <p:grpSpPr>
+        <a:xfrm>
+          <a:off x="0" y="0"/>
+          <a:ext cx="0" cy="0"/>
+          <a:chOff x="0" y="0"/>
+          <a:chExt cx="0" cy="0"/>
+        </a:xfrm>
+      </p:grpSpPr>
+      <p:sp>
+        <p:nvSpPr>
+          <p:cNvPr id="2" name="Title 1">
+            <a:extLst>
+              <a:ext uri="{FF2B5EF4-FFF2-40B4-BE49-F238E27FC236}">
+                <a16:creationId xmlns:a16="http://schemas.microsoft.com/office/drawing/2014/main" id="{AED6A216-3BA0-8847-4FA7-1C88BC1E8104}"/>
+              </a:ext>
+            </a:extLst>
+          </p:cNvPr>
+          <p:cNvSpPr>
+            <a:spLocks noGrp="1"/>
+          </p:cNvSpPr>
+          <p:nvPr>
+            <p:ph type="title"/>
+          </p:nvPr>
+        </p:nvSpPr>
+        <p:spPr>
+          <a:xfrm>
+            <a:off x="838200" y="1787525"/>
+            <a:ext cx="10515600" cy="2662555"/>
+          </a:xfrm>
+        </p:spPr>
+        <p:txBody>
+          <a:bodyPr>
+            <a:noAutofit/>
+          </a:bodyPr>
+          <a:lstStyle/>
+          <a:p>
+            <a:pPr algn="ctr"/>
+            <a:r>
+              <a:rPr lang="en-US" sz="6000" b="1">
+                <a:solidFill>
+                  <a:srgbClr val="FF0000"/>
+                </a:solidFill>
+              </a:rPr>
+              <a:t>Start Correlated vs. non-correlated subqueries</a:t>
+            </a:r>
+          </a:p>
+        </p:txBody>
+      </p:sp>
+    </p:spTree>
+    <p:extLst>
+      <p:ext uri="{BB962C8B-B14F-4D97-AF65-F5344CB8AC3E}">
+        <p14:creationId xmlns:p14="http://schemas.microsoft.com/office/powerpoint/2010/main" val="3680464010"/>
+      </p:ext>
+    </p:extLst>
+  </p:cSld>
+  <p:clrMapOvr>
+    <a:masterClrMapping/>
+  </p:clrMapOvr>
+</p:sld>
+</file>
+
+<file path=ppt/slides/slide155.xml><?xml version="1.0" encoding="utf-8"?>
+<p:sld xmlns:a="http://schemas.openxmlformats.org/drawingml/2006/main" xmlns:r="http://schemas.openxmlformats.org/officeDocument/2006/relationships" xmlns:p="http://schemas.openxmlformats.org/presentationml/2006/main">
+  <p:cSld>
+    <p:spTree>
+      <p:nvGrpSpPr>
+        <p:cNvPr id="1" name=""/>
+        <p:cNvGrpSpPr/>
+        <p:nvPr/>
+      </p:nvGrpSpPr>
+      <p:grpSpPr>
+        <a:xfrm>
+          <a:off x="0" y="0"/>
+          <a:ext cx="0" cy="0"/>
+          <a:chOff x="0" y="0"/>
+          <a:chExt cx="0" cy="0"/>
+        </a:xfrm>
+      </p:grpSpPr>
+      <p:sp>
+        <p:nvSpPr>
+          <p:cNvPr id="2" name="Title 1">
+            <a:extLst>
+              <a:ext uri="{FF2B5EF4-FFF2-40B4-BE49-F238E27FC236}">
+                <a16:creationId xmlns:a16="http://schemas.microsoft.com/office/drawing/2014/main" id="{820960EB-20E5-42C7-A751-326FF5C05A55}"/>
+              </a:ext>
+            </a:extLst>
+          </p:cNvPr>
+          <p:cNvSpPr>
+            <a:spLocks noGrp="1"/>
+          </p:cNvSpPr>
+          <p:nvPr>
+            <p:ph type="title"/>
+          </p:nvPr>
+        </p:nvSpPr>
+        <p:spPr>
+          <a:xfrm>
+            <a:off x="838200" y="18255"/>
+            <a:ext cx="10515600" cy="953295"/>
+          </a:xfrm>
+        </p:spPr>
+        <p:txBody>
+          <a:bodyPr/>
+          <a:lstStyle/>
+          <a:p>
+            <a:pPr algn="ctr"/>
+            <a:r>
+              <a:rPr lang="en-US" b="1"/>
+              <a:t>Correlated vs. non-correlated subqueries</a:t>
+            </a:r>
+          </a:p>
+        </p:txBody>
+      </p:sp>
+      <p:sp>
+        <p:nvSpPr>
+          <p:cNvPr id="3" name="Content Placeholder 2">
+            <a:extLst>
+              <a:ext uri="{FF2B5EF4-FFF2-40B4-BE49-F238E27FC236}">
+                <a16:creationId xmlns:a16="http://schemas.microsoft.com/office/drawing/2014/main" id="{4C57F8A0-41C0-2C23-075A-51ACA5506676}"/>
+              </a:ext>
+            </a:extLst>
+          </p:cNvPr>
+          <p:cNvSpPr>
+            <a:spLocks noGrp="1"/>
+          </p:cNvSpPr>
+          <p:nvPr>
+            <p:ph idx="1"/>
+          </p:nvPr>
+        </p:nvSpPr>
+        <p:spPr>
+          <a:xfrm>
+            <a:off x="321733" y="1123950"/>
+            <a:ext cx="11622617" cy="5471583"/>
+          </a:xfrm>
+        </p:spPr>
+        <p:txBody>
+          <a:bodyPr/>
+          <a:lstStyle/>
+          <a:p>
+            <a:r>
+              <a:rPr lang="en-US" b="1">
+                <a:solidFill>
+                  <a:schemeClr val="accent1">
+                    <a:lumMod val="50000"/>
+                  </a:schemeClr>
+                </a:solidFill>
+              </a:rPr>
+              <a:t>Non-correlated subquery: </a:t>
+            </a:r>
+          </a:p>
+          <a:p>
+            <a:pPr lvl="1"/>
+            <a:r>
+              <a:rPr lang="en-US"/>
+              <a:t>subquery </a:t>
+            </a:r>
+            <a:r>
+              <a:rPr lang="en-US" b="1"/>
+              <a:t>can</a:t>
+            </a:r>
+            <a:r>
+              <a:rPr lang="en-US"/>
+              <a:t> be executed first because it doesn't depend on the outer query.</a:t>
+            </a:r>
+          </a:p>
+          <a:p>
+            <a:r>
+              <a:rPr lang="en-US" b="1">
+                <a:solidFill>
+                  <a:schemeClr val="accent1">
+                    <a:lumMod val="50000"/>
+                  </a:schemeClr>
+                </a:solidFill>
+              </a:rPr>
+              <a:t>Correlated subquery</a:t>
+            </a:r>
+          </a:p>
+          <a:p>
+            <a:pPr lvl="1"/>
+            <a:r>
+              <a:rPr lang="en-US"/>
+              <a:t>depend on the outer query.</a:t>
+            </a:r>
+          </a:p>
+          <a:p>
+            <a:pPr lvl="1"/>
+            <a:endParaRPr lang="en-US"/>
+          </a:p>
+          <a:p>
+            <a:endParaRPr lang="en-US"/>
+          </a:p>
+          <a:p>
+            <a:pPr lvl="1"/>
+            <a:endParaRPr lang="en-US"/>
+          </a:p>
+          <a:p>
+            <a:r>
+              <a:rPr lang="en-US" sz="2400"/>
+              <a:t>This query is to get all customer that has orders </a:t>
+            </a:r>
+          </a:p>
+          <a:p>
+            <a:pPr lvl="1"/>
+            <a:endParaRPr lang="en-US"/>
+          </a:p>
+          <a:p>
+            <a:pPr lvl="1"/>
+            <a:endParaRPr lang="en-US"/>
+          </a:p>
+          <a:p>
+            <a:pPr lvl="1"/>
+            <a:endParaRPr lang="en-US"/>
+          </a:p>
+          <a:p>
+            <a:pPr lvl="7"/>
+            <a:endParaRPr lang="en-US"/>
+          </a:p>
+        </p:txBody>
+      </p:sp>
+      <p:pic>
+        <p:nvPicPr>
+          <p:cNvPr id="5" name="Picture 4">
+            <a:extLst>
+              <a:ext uri="{FF2B5EF4-FFF2-40B4-BE49-F238E27FC236}">
+                <a16:creationId xmlns:a16="http://schemas.microsoft.com/office/drawing/2014/main" id="{C0FBFB9E-7B44-D216-A252-2B006568A451}"/>
+              </a:ext>
+            </a:extLst>
+          </p:cNvPr>
+          <p:cNvPicPr>
+            <a:picLocks noChangeAspect="1"/>
+          </p:cNvPicPr>
+          <p:nvPr/>
+        </p:nvPicPr>
+        <p:blipFill>
+          <a:blip r:embed="rId2"/>
+          <a:stretch>
+            <a:fillRect/>
+          </a:stretch>
+        </p:blipFill>
+        <p:spPr>
+          <a:xfrm>
+            <a:off x="6919382" y="2514600"/>
+            <a:ext cx="2955337" cy="3628497"/>
+          </a:xfrm>
+          <a:prstGeom prst="rect">
+            <a:avLst/>
+          </a:prstGeom>
+        </p:spPr>
+      </p:pic>
+    </p:spTree>
+    <p:extLst>
+      <p:ext uri="{BB962C8B-B14F-4D97-AF65-F5344CB8AC3E}">
+        <p14:creationId xmlns:p14="http://schemas.microsoft.com/office/powerpoint/2010/main" val="1033283507"/>
+      </p:ext>
+    </p:extLst>
+  </p:cSld>
+  <p:clrMapOvr>
+    <a:masterClrMapping/>
+  </p:clrMapOvr>
+</p:sld>
+</file>
+
+<file path=ppt/slides/slide156.xml><?xml version="1.0" encoding="utf-8"?>
+<p:sld xmlns:a="http://schemas.openxmlformats.org/drawingml/2006/main" xmlns:r="http://schemas.openxmlformats.org/officeDocument/2006/relationships" xmlns:p="http://schemas.openxmlformats.org/presentationml/2006/main">
+  <p:cSld>
+    <p:spTree>
+      <p:nvGrpSpPr>
+        <p:cNvPr id="1" name=""/>
+        <p:cNvGrpSpPr/>
+        <p:nvPr/>
+      </p:nvGrpSpPr>
+      <p:grpSpPr>
+        <a:xfrm>
+          <a:off x="0" y="0"/>
+          <a:ext cx="0" cy="0"/>
+          <a:chOff x="0" y="0"/>
+          <a:chExt cx="0" cy="0"/>
+        </a:xfrm>
+      </p:grpSpPr>
+      <p:sp>
+        <p:nvSpPr>
+          <p:cNvPr id="2" name="Title 1">
+            <a:extLst>
+              <a:ext uri="{FF2B5EF4-FFF2-40B4-BE49-F238E27FC236}">
+                <a16:creationId xmlns:a16="http://schemas.microsoft.com/office/drawing/2014/main" id="{A161EDD7-C005-DD3F-240F-805C8F430C96}"/>
+              </a:ext>
+            </a:extLst>
+          </p:cNvPr>
+          <p:cNvSpPr>
+            <a:spLocks noGrp="1"/>
+          </p:cNvSpPr>
+          <p:nvPr>
+            <p:ph type="title"/>
+          </p:nvPr>
+        </p:nvSpPr>
+        <p:spPr/>
+        <p:txBody>
+          <a:bodyPr/>
+          <a:lstStyle/>
+          <a:p>
+            <a:endParaRPr lang="en-US"/>
+          </a:p>
+        </p:txBody>
+      </p:sp>
+      <p:sp>
+        <p:nvSpPr>
+          <p:cNvPr id="3" name="Content Placeholder 2">
+            <a:extLst>
+              <a:ext uri="{FF2B5EF4-FFF2-40B4-BE49-F238E27FC236}">
+                <a16:creationId xmlns:a16="http://schemas.microsoft.com/office/drawing/2014/main" id="{8DAB7D5C-64CA-CE0E-47B1-3EDB365B9C61}"/>
+              </a:ext>
+            </a:extLst>
+          </p:cNvPr>
+          <p:cNvSpPr>
+            <a:spLocks noGrp="1"/>
+          </p:cNvSpPr>
+          <p:nvPr>
+            <p:ph idx="1"/>
+          </p:nvPr>
+        </p:nvSpPr>
+        <p:spPr/>
+        <p:txBody>
+          <a:bodyPr/>
+          <a:lstStyle/>
+          <a:p>
+            <a:endParaRPr lang="en-US"/>
+          </a:p>
+        </p:txBody>
+      </p:sp>
+    </p:spTree>
+    <p:extLst>
+      <p:ext uri="{BB962C8B-B14F-4D97-AF65-F5344CB8AC3E}">
+        <p14:creationId xmlns:p14="http://schemas.microsoft.com/office/powerpoint/2010/main" val="960105000"/>
+      </p:ext>
+    </p:extLst>
+  </p:cSld>
+  <p:clrMapOvr>
+    <a:masterClrMapping/>
+  </p:clrMapOvr>
+</p:sld>
+</file>
+
+<file path=ppt/slides/slide157.xml><?xml version="1.0" encoding="utf-8"?>
+<p:sld xmlns:a="http://schemas.openxmlformats.org/drawingml/2006/main" xmlns:r="http://schemas.openxmlformats.org/officeDocument/2006/relationships" xmlns:p="http://schemas.openxmlformats.org/presentationml/2006/main">
+  <p:cSld>
+    <p:spTree>
+      <p:nvGrpSpPr>
+        <p:cNvPr id="1" name="">
+          <a:extLst>
+            <a:ext uri="{FF2B5EF4-FFF2-40B4-BE49-F238E27FC236}">
+              <a16:creationId xmlns:a16="http://schemas.microsoft.com/office/drawing/2014/main" id="{A957CBDA-0AB4-819E-3CBF-0B9D1DBB272D}"/>
+            </a:ext>
+          </a:extLst>
+        </p:cNvPr>
+        <p:cNvGrpSpPr/>
+        <p:nvPr/>
+      </p:nvGrpSpPr>
+      <p:grpSpPr>
+        <a:xfrm>
+          <a:off x="0" y="0"/>
+          <a:ext cx="0" cy="0"/>
+          <a:chOff x="0" y="0"/>
+          <a:chExt cx="0" cy="0"/>
+        </a:xfrm>
+      </p:grpSpPr>
+      <p:sp>
+        <p:nvSpPr>
+          <p:cNvPr id="2" name="Title 1">
+            <a:extLst>
+              <a:ext uri="{FF2B5EF4-FFF2-40B4-BE49-F238E27FC236}">
+                <a16:creationId xmlns:a16="http://schemas.microsoft.com/office/drawing/2014/main" id="{C2FE352F-A0B4-FD21-429E-2050BF3D93B5}"/>
+              </a:ext>
+            </a:extLst>
+          </p:cNvPr>
+          <p:cNvSpPr>
+            <a:spLocks noGrp="1"/>
+          </p:cNvSpPr>
+          <p:nvPr>
+            <p:ph type="title"/>
+          </p:nvPr>
+        </p:nvSpPr>
+        <p:spPr>
+          <a:xfrm>
+            <a:off x="838200" y="1787525"/>
+            <a:ext cx="10515600" cy="2662555"/>
+          </a:xfrm>
+        </p:spPr>
+        <p:txBody>
+          <a:bodyPr>
+            <a:noAutofit/>
+          </a:bodyPr>
+          <a:lstStyle/>
+          <a:p>
+            <a:pPr algn="ctr"/>
+            <a:r>
+              <a:rPr lang="en-US" sz="6000" b="1">
+                <a:solidFill>
+                  <a:srgbClr val="FF0000"/>
+                </a:solidFill>
+              </a:rPr>
+              <a:t>End Correlated vs. non-correlated subqueries</a:t>
+            </a:r>
+          </a:p>
+        </p:txBody>
+      </p:sp>
+    </p:spTree>
+    <p:extLst>
+      <p:ext uri="{BB962C8B-B14F-4D97-AF65-F5344CB8AC3E}">
+        <p14:creationId xmlns:p14="http://schemas.microsoft.com/office/powerpoint/2010/main" val="835608298"/>
+      </p:ext>
+    </p:extLst>
+  </p:cSld>
+  <p:clrMapOvr>
+    <a:masterClrMapping/>
+  </p:clrMapOvr>
+</p:sld>
+</file>
+
+<file path=ppt/slides/slide158.xml><?xml version="1.0" encoding="utf-8"?>
+<p:sld xmlns:a="http://schemas.openxmlformats.org/drawingml/2006/main" xmlns:r="http://schemas.openxmlformats.org/officeDocument/2006/relationships" xmlns:p="http://schemas.openxmlformats.org/presentationml/2006/main">
+  <p:cSld>
+    <p:spTree>
+      <p:nvGrpSpPr>
+        <p:cNvPr id="1" name="">
+          <a:extLst>
+            <a:ext uri="{FF2B5EF4-FFF2-40B4-BE49-F238E27FC236}">
+              <a16:creationId xmlns:a16="http://schemas.microsoft.com/office/drawing/2014/main" id="{D4DEBE3A-E07D-1EF7-7729-B13A7951C0EB}"/>
+            </a:ext>
+          </a:extLst>
+        </p:cNvPr>
+        <p:cNvGrpSpPr/>
+        <p:nvPr/>
+      </p:nvGrpSpPr>
+      <p:grpSpPr>
+        <a:xfrm>
+          <a:off x="0" y="0"/>
+          <a:ext cx="0" cy="0"/>
+          <a:chOff x="0" y="0"/>
+          <a:chExt cx="0" cy="0"/>
+        </a:xfrm>
+      </p:grpSpPr>
+      <p:sp>
+        <p:nvSpPr>
+          <p:cNvPr id="2" name="Title 1">
+            <a:extLst>
+              <a:ext uri="{FF2B5EF4-FFF2-40B4-BE49-F238E27FC236}">
+                <a16:creationId xmlns:a16="http://schemas.microsoft.com/office/drawing/2014/main" id="{08D510EA-E859-D1AD-9627-34E1FBF677E2}"/>
+              </a:ext>
+            </a:extLst>
+          </p:cNvPr>
+          <p:cNvSpPr>
+            <a:spLocks noGrp="1"/>
+          </p:cNvSpPr>
+          <p:nvPr>
+            <p:ph type="title"/>
+          </p:nvPr>
+        </p:nvSpPr>
+        <p:spPr>
+          <a:xfrm>
+            <a:off x="838200" y="1787525"/>
+            <a:ext cx="10515600" cy="2662555"/>
+          </a:xfrm>
+        </p:spPr>
+        <p:txBody>
+          <a:bodyPr>
+            <a:noAutofit/>
+          </a:bodyPr>
+          <a:lstStyle/>
+          <a:p>
+            <a:pPr algn="ctr"/>
+            <a:r>
+              <a:rPr lang="en-US" sz="6000" b="1">
+                <a:solidFill>
+                  <a:srgbClr val="FF0000"/>
+                </a:solidFill>
+              </a:rPr>
+              <a:t>Start Exist</a:t>
+            </a:r>
+          </a:p>
+        </p:txBody>
+      </p:sp>
+    </p:spTree>
+    <p:extLst>
+      <p:ext uri="{BB962C8B-B14F-4D97-AF65-F5344CB8AC3E}">
+        <p14:creationId xmlns:p14="http://schemas.microsoft.com/office/powerpoint/2010/main" val="549179624"/>
+      </p:ext>
+    </p:extLst>
+  </p:cSld>
+  <p:clrMapOvr>
+    <a:masterClrMapping/>
+  </p:clrMapOvr>
+</p:sld>
+</file>
+
+<file path=ppt/slides/slide159.xml><?xml version="1.0" encoding="utf-8"?>
+<p:sld xmlns:a="http://schemas.openxmlformats.org/drawingml/2006/main" xmlns:r="http://schemas.openxmlformats.org/officeDocument/2006/relationships" xmlns:p="http://schemas.openxmlformats.org/presentationml/2006/main">
+  <p:cSld>
+    <p:spTree>
+      <p:nvGrpSpPr>
+        <p:cNvPr id="1" name=""/>
+        <p:cNvGrpSpPr/>
+        <p:nvPr/>
+      </p:nvGrpSpPr>
+      <p:grpSpPr>
+        <a:xfrm>
+          <a:off x="0" y="0"/>
+          <a:ext cx="0" cy="0"/>
+          <a:chOff x="0" y="0"/>
+          <a:chExt cx="0" cy="0"/>
+        </a:xfrm>
+      </p:grpSpPr>
+      <p:sp>
+        <p:nvSpPr>
+          <p:cNvPr id="2" name="Title 1">
+            <a:extLst>
+              <a:ext uri="{FF2B5EF4-FFF2-40B4-BE49-F238E27FC236}">
+                <a16:creationId xmlns:a16="http://schemas.microsoft.com/office/drawing/2014/main" id="{280D9917-47BB-B95D-A59F-151CB6D062FC}"/>
+              </a:ext>
+            </a:extLst>
+          </p:cNvPr>
+          <p:cNvSpPr>
+            <a:spLocks noGrp="1"/>
+          </p:cNvSpPr>
+          <p:nvPr>
+            <p:ph type="title"/>
+          </p:nvPr>
+        </p:nvSpPr>
+        <p:spPr>
+          <a:xfrm>
+            <a:off x="838200" y="18256"/>
+            <a:ext cx="10515600" cy="753270"/>
+          </a:xfrm>
+        </p:spPr>
+        <p:txBody>
+          <a:bodyPr/>
+          <a:lstStyle/>
+          <a:p>
+            <a:pPr algn="ctr"/>
+            <a:r>
+              <a:rPr lang="en-US"/>
+              <a:t>Start Exists Keyword</a:t>
+            </a:r>
+          </a:p>
+        </p:txBody>
+      </p:sp>
+      <p:sp>
+        <p:nvSpPr>
+          <p:cNvPr id="3" name="Content Placeholder 2">
+            <a:extLst>
+              <a:ext uri="{FF2B5EF4-FFF2-40B4-BE49-F238E27FC236}">
+                <a16:creationId xmlns:a16="http://schemas.microsoft.com/office/drawing/2014/main" id="{405ED246-8296-ACC1-036B-C2D8365A4D1E}"/>
+              </a:ext>
+            </a:extLst>
+          </p:cNvPr>
+          <p:cNvSpPr>
+            <a:spLocks noGrp="1"/>
+          </p:cNvSpPr>
+          <p:nvPr>
+            <p:ph idx="1"/>
+          </p:nvPr>
+        </p:nvSpPr>
+        <p:spPr>
+          <a:xfrm>
+            <a:off x="495299" y="771526"/>
+            <a:ext cx="11249025" cy="5405437"/>
+          </a:xfrm>
+        </p:spPr>
+        <p:txBody>
+          <a:bodyPr>
+            <a:normAutofit/>
+          </a:bodyPr>
+          <a:lstStyle/>
+          <a:p>
+            <a:r>
+              <a:rPr lang="en-US" sz="2400"/>
+              <a:t>it is an operator used to check whether a subquery returns </a:t>
+            </a:r>
+            <a:r>
+              <a:rPr lang="en-US" sz="2400" b="1"/>
+              <a:t>at least one</a:t>
+            </a:r>
+          </a:p>
+          <a:p>
+            <a:r>
+              <a:rPr lang="en-US" sz="2400"/>
+              <a:t>if the subquery returns one or more rows → </a:t>
+            </a:r>
+            <a:r>
+              <a:rPr lang="en-US" sz="2400" b="1">
+                <a:solidFill>
+                  <a:srgbClr val="002060"/>
+                </a:solidFill>
+              </a:rPr>
+              <a:t>EXISTS is TRUE.</a:t>
+            </a:r>
+          </a:p>
+          <a:p>
+            <a:r>
+              <a:rPr lang="en-US" sz="2400"/>
+              <a:t>If the subquery returns no rows → </a:t>
+            </a:r>
+            <a:r>
+              <a:rPr lang="en-US" sz="2400">
+                <a:solidFill>
+                  <a:srgbClr val="002060"/>
+                </a:solidFill>
+              </a:rPr>
+              <a:t>EXISTS is FALSE</a:t>
+            </a:r>
+            <a:r>
+              <a:rPr lang="en-US" sz="2400"/>
+              <a:t>.</a:t>
+            </a:r>
+          </a:p>
+          <a:p>
+            <a:r>
+              <a:rPr lang="en-US" sz="2400"/>
+              <a:t>Exist stop after first match so it is good performance</a:t>
+            </a:r>
+          </a:p>
+        </p:txBody>
+      </p:sp>
+      <p:pic>
+        <p:nvPicPr>
+          <p:cNvPr id="5" name="Picture 4">
+            <a:extLst>
+              <a:ext uri="{FF2B5EF4-FFF2-40B4-BE49-F238E27FC236}">
+                <a16:creationId xmlns:a16="http://schemas.microsoft.com/office/drawing/2014/main" id="{655FB9DE-93D7-373B-E1EE-A5AB461A4992}"/>
+              </a:ext>
+            </a:extLst>
+          </p:cNvPr>
+          <p:cNvPicPr>
+            <a:picLocks noChangeAspect="1"/>
+          </p:cNvPicPr>
+          <p:nvPr/>
+        </p:nvPicPr>
+        <p:blipFill>
+          <a:blip r:embed="rId2"/>
+          <a:stretch>
+            <a:fillRect/>
+          </a:stretch>
+        </p:blipFill>
+        <p:spPr>
+          <a:xfrm>
+            <a:off x="495299" y="2786425"/>
+            <a:ext cx="7912364" cy="3261949"/>
+          </a:xfrm>
+          <a:prstGeom prst="rect">
+            <a:avLst/>
+          </a:prstGeom>
+        </p:spPr>
+      </p:pic>
+    </p:spTree>
+    <p:extLst>
+      <p:ext uri="{BB962C8B-B14F-4D97-AF65-F5344CB8AC3E}">
+        <p14:creationId xmlns:p14="http://schemas.microsoft.com/office/powerpoint/2010/main" val="1653619571"/>
       </p:ext>
     </p:extLst>
   </p:cSld>
@@ -20771,6 +22435,685 @@
     <p:extLst>
       <p:ext uri="{BB962C8B-B14F-4D97-AF65-F5344CB8AC3E}">
         <p14:creationId xmlns:p14="http://schemas.microsoft.com/office/powerpoint/2010/main" val="3966074880"/>
+      </p:ext>
+    </p:extLst>
+  </p:cSld>
+  <p:clrMapOvr>
+    <a:masterClrMapping/>
+  </p:clrMapOvr>
+</p:sld>
+</file>
+
+<file path=ppt/slides/slide160.xml><?xml version="1.0" encoding="utf-8"?>
+<p:sld xmlns:a="http://schemas.openxmlformats.org/drawingml/2006/main" xmlns:r="http://schemas.openxmlformats.org/officeDocument/2006/relationships" xmlns:p="http://schemas.openxmlformats.org/presentationml/2006/main">
+  <p:cSld>
+    <p:spTree>
+      <p:nvGrpSpPr>
+        <p:cNvPr id="1" name=""/>
+        <p:cNvGrpSpPr/>
+        <p:nvPr/>
+      </p:nvGrpSpPr>
+      <p:grpSpPr>
+        <a:xfrm>
+          <a:off x="0" y="0"/>
+          <a:ext cx="0" cy="0"/>
+          <a:chOff x="0" y="0"/>
+          <a:chExt cx="0" cy="0"/>
+        </a:xfrm>
+      </p:grpSpPr>
+      <p:sp>
+        <p:nvSpPr>
+          <p:cNvPr id="2" name="Title 1">
+            <a:extLst>
+              <a:ext uri="{FF2B5EF4-FFF2-40B4-BE49-F238E27FC236}">
+                <a16:creationId xmlns:a16="http://schemas.microsoft.com/office/drawing/2014/main" id="{C76D2EB3-1F34-850B-251B-4065CD0DCB0F}"/>
+              </a:ext>
+            </a:extLst>
+          </p:cNvPr>
+          <p:cNvSpPr>
+            <a:spLocks noGrp="1"/>
+          </p:cNvSpPr>
+          <p:nvPr>
+            <p:ph type="title"/>
+          </p:nvPr>
+        </p:nvSpPr>
+        <p:spPr>
+          <a:xfrm>
+            <a:off x="838200" y="1"/>
+            <a:ext cx="10515600" cy="609600"/>
+          </a:xfrm>
+        </p:spPr>
+        <p:txBody>
+          <a:bodyPr>
+            <a:normAutofit fontScale="90000"/>
+          </a:bodyPr>
+          <a:lstStyle/>
+          <a:p>
+            <a:r>
+              <a:rPr lang="en-US"/>
+              <a:t>Examples </a:t>
+            </a:r>
+          </a:p>
+        </p:txBody>
+      </p:sp>
+      <p:pic>
+        <p:nvPicPr>
+          <p:cNvPr id="5" name="Content Placeholder 4">
+            <a:extLst>
+              <a:ext uri="{FF2B5EF4-FFF2-40B4-BE49-F238E27FC236}">
+                <a16:creationId xmlns:a16="http://schemas.microsoft.com/office/drawing/2014/main" id="{E5279432-B7F0-FB3A-D7F4-BE86F51EF9FA}"/>
+              </a:ext>
+            </a:extLst>
+          </p:cNvPr>
+          <p:cNvPicPr>
+            <a:picLocks noGrp="1" noChangeAspect="1"/>
+          </p:cNvPicPr>
+          <p:nvPr>
+            <p:ph idx="1"/>
+          </p:nvPr>
+        </p:nvPicPr>
+        <p:blipFill>
+          <a:blip r:embed="rId2"/>
+          <a:stretch>
+            <a:fillRect/>
+          </a:stretch>
+        </p:blipFill>
+        <p:spPr>
+          <a:xfrm>
+            <a:off x="184831" y="870857"/>
+            <a:ext cx="4266433" cy="2558143"/>
+          </a:xfrm>
+          <a:prstGeom prst="rect">
+            <a:avLst/>
+          </a:prstGeom>
+        </p:spPr>
+      </p:pic>
+      <p:pic>
+        <p:nvPicPr>
+          <p:cNvPr id="7" name="Picture 6">
+            <a:extLst>
+              <a:ext uri="{FF2B5EF4-FFF2-40B4-BE49-F238E27FC236}">
+                <a16:creationId xmlns:a16="http://schemas.microsoft.com/office/drawing/2014/main" id="{637FC6E2-0921-F30C-07A2-EC544533AF0D}"/>
+              </a:ext>
+            </a:extLst>
+          </p:cNvPr>
+          <p:cNvPicPr>
+            <a:picLocks noChangeAspect="1"/>
+          </p:cNvPicPr>
+          <p:nvPr/>
+        </p:nvPicPr>
+        <p:blipFill>
+          <a:blip r:embed="rId3"/>
+          <a:stretch>
+            <a:fillRect/>
+          </a:stretch>
+        </p:blipFill>
+        <p:spPr>
+          <a:xfrm>
+            <a:off x="4515551" y="968725"/>
+            <a:ext cx="3330229" cy="2362405"/>
+          </a:xfrm>
+          <a:prstGeom prst="rect">
+            <a:avLst/>
+          </a:prstGeom>
+        </p:spPr>
+      </p:pic>
+    </p:spTree>
+    <p:extLst>
+      <p:ext uri="{BB962C8B-B14F-4D97-AF65-F5344CB8AC3E}">
+        <p14:creationId xmlns:p14="http://schemas.microsoft.com/office/powerpoint/2010/main" val="3634767879"/>
+      </p:ext>
+    </p:extLst>
+  </p:cSld>
+  <p:clrMapOvr>
+    <a:masterClrMapping/>
+  </p:clrMapOvr>
+</p:sld>
+</file>
+
+<file path=ppt/slides/slide161.xml><?xml version="1.0" encoding="utf-8"?>
+<p:sld xmlns:a="http://schemas.openxmlformats.org/drawingml/2006/main" xmlns:r="http://schemas.openxmlformats.org/officeDocument/2006/relationships" xmlns:p="http://schemas.openxmlformats.org/presentationml/2006/main">
+  <p:cSld>
+    <p:spTree>
+      <p:nvGrpSpPr>
+        <p:cNvPr id="1" name=""/>
+        <p:cNvGrpSpPr/>
+        <p:nvPr/>
+      </p:nvGrpSpPr>
+      <p:grpSpPr>
+        <a:xfrm>
+          <a:off x="0" y="0"/>
+          <a:ext cx="0" cy="0"/>
+          <a:chOff x="0" y="0"/>
+          <a:chExt cx="0" cy="0"/>
+        </a:xfrm>
+      </p:grpSpPr>
+      <p:sp>
+        <p:nvSpPr>
+          <p:cNvPr id="2" name="Title 1">
+            <a:extLst>
+              <a:ext uri="{FF2B5EF4-FFF2-40B4-BE49-F238E27FC236}">
+                <a16:creationId xmlns:a16="http://schemas.microsoft.com/office/drawing/2014/main" id="{AACCD5CA-FAD1-E5D3-B66F-94C098833CAB}"/>
+              </a:ext>
+            </a:extLst>
+          </p:cNvPr>
+          <p:cNvSpPr>
+            <a:spLocks noGrp="1"/>
+          </p:cNvSpPr>
+          <p:nvPr>
+            <p:ph type="title"/>
+          </p:nvPr>
+        </p:nvSpPr>
+        <p:spPr>
+          <a:xfrm>
+            <a:off x="838200" y="60325"/>
+            <a:ext cx="10515600" cy="879475"/>
+          </a:xfrm>
+        </p:spPr>
+        <p:txBody>
+          <a:bodyPr/>
+          <a:lstStyle/>
+          <a:p>
+            <a:endParaRPr lang="en-US"/>
+          </a:p>
+        </p:txBody>
+      </p:sp>
+      <p:pic>
+        <p:nvPicPr>
+          <p:cNvPr id="5" name="Content Placeholder 4">
+            <a:extLst>
+              <a:ext uri="{FF2B5EF4-FFF2-40B4-BE49-F238E27FC236}">
+                <a16:creationId xmlns:a16="http://schemas.microsoft.com/office/drawing/2014/main" id="{23A09D40-3646-44E0-BDF7-9807C686F5DA}"/>
+              </a:ext>
+            </a:extLst>
+          </p:cNvPr>
+          <p:cNvPicPr>
+            <a:picLocks noGrp="1" noChangeAspect="1"/>
+          </p:cNvPicPr>
+          <p:nvPr>
+            <p:ph idx="1"/>
+          </p:nvPr>
+        </p:nvPicPr>
+        <p:blipFill>
+          <a:blip r:embed="rId2"/>
+          <a:stretch>
+            <a:fillRect/>
+          </a:stretch>
+        </p:blipFill>
+        <p:spPr>
+          <a:xfrm>
+            <a:off x="101601" y="1225020"/>
+            <a:ext cx="6773333" cy="5372747"/>
+          </a:xfrm>
+          <a:prstGeom prst="rect">
+            <a:avLst/>
+          </a:prstGeom>
+        </p:spPr>
+      </p:pic>
+    </p:spTree>
+    <p:extLst>
+      <p:ext uri="{BB962C8B-B14F-4D97-AF65-F5344CB8AC3E}">
+        <p14:creationId xmlns:p14="http://schemas.microsoft.com/office/powerpoint/2010/main" val="3977498935"/>
+      </p:ext>
+    </p:extLst>
+  </p:cSld>
+  <p:clrMapOvr>
+    <a:masterClrMapping/>
+  </p:clrMapOvr>
+</p:sld>
+</file>
+
+<file path=ppt/slides/slide162.xml><?xml version="1.0" encoding="utf-8"?>
+<p:sld xmlns:a="http://schemas.openxmlformats.org/drawingml/2006/main" xmlns:r="http://schemas.openxmlformats.org/officeDocument/2006/relationships" xmlns:p="http://schemas.openxmlformats.org/presentationml/2006/main">
+  <p:cSld>
+    <p:spTree>
+      <p:nvGrpSpPr>
+        <p:cNvPr id="1" name="">
+          <a:extLst>
+            <a:ext uri="{FF2B5EF4-FFF2-40B4-BE49-F238E27FC236}">
+              <a16:creationId xmlns:a16="http://schemas.microsoft.com/office/drawing/2014/main" id="{720AB702-ADCE-A965-EF91-DDBCAFD9DC65}"/>
+            </a:ext>
+          </a:extLst>
+        </p:cNvPr>
+        <p:cNvGrpSpPr/>
+        <p:nvPr/>
+      </p:nvGrpSpPr>
+      <p:grpSpPr>
+        <a:xfrm>
+          <a:off x="0" y="0"/>
+          <a:ext cx="0" cy="0"/>
+          <a:chOff x="0" y="0"/>
+          <a:chExt cx="0" cy="0"/>
+        </a:xfrm>
+      </p:grpSpPr>
+      <p:sp>
+        <p:nvSpPr>
+          <p:cNvPr id="2" name="Title 1">
+            <a:extLst>
+              <a:ext uri="{FF2B5EF4-FFF2-40B4-BE49-F238E27FC236}">
+                <a16:creationId xmlns:a16="http://schemas.microsoft.com/office/drawing/2014/main" id="{17B86F8B-B1C7-3522-1D5E-2A1A6D751E45}"/>
+              </a:ext>
+            </a:extLst>
+          </p:cNvPr>
+          <p:cNvSpPr>
+            <a:spLocks noGrp="1"/>
+          </p:cNvSpPr>
+          <p:nvPr>
+            <p:ph type="title"/>
+          </p:nvPr>
+        </p:nvSpPr>
+        <p:spPr>
+          <a:xfrm>
+            <a:off x="838200" y="1787525"/>
+            <a:ext cx="10515600" cy="2662555"/>
+          </a:xfrm>
+        </p:spPr>
+        <p:txBody>
+          <a:bodyPr>
+            <a:noAutofit/>
+          </a:bodyPr>
+          <a:lstStyle/>
+          <a:p>
+            <a:pPr algn="ctr"/>
+            <a:r>
+              <a:rPr lang="en-US" sz="6000" b="1">
+                <a:solidFill>
+                  <a:srgbClr val="FF0000"/>
+                </a:solidFill>
+              </a:rPr>
+              <a:t>End Exist</a:t>
+            </a:r>
+          </a:p>
+        </p:txBody>
+      </p:sp>
+    </p:spTree>
+    <p:extLst>
+      <p:ext uri="{BB962C8B-B14F-4D97-AF65-F5344CB8AC3E}">
+        <p14:creationId xmlns:p14="http://schemas.microsoft.com/office/powerpoint/2010/main" val="2102247737"/>
+      </p:ext>
+    </p:extLst>
+  </p:cSld>
+  <p:clrMapOvr>
+    <a:masterClrMapping/>
+  </p:clrMapOvr>
+</p:sld>
+</file>
+
+<file path=ppt/slides/slide163.xml><?xml version="1.0" encoding="utf-8"?>
+<p:sld xmlns:a="http://schemas.openxmlformats.org/drawingml/2006/main" xmlns:r="http://schemas.openxmlformats.org/officeDocument/2006/relationships" xmlns:p="http://schemas.openxmlformats.org/presentationml/2006/main">
+  <p:cSld>
+    <p:spTree>
+      <p:nvGrpSpPr>
+        <p:cNvPr id="1" name="">
+          <a:extLst>
+            <a:ext uri="{FF2B5EF4-FFF2-40B4-BE49-F238E27FC236}">
+              <a16:creationId xmlns:a16="http://schemas.microsoft.com/office/drawing/2014/main" id="{2DF5A1CF-8A37-10DC-3635-6E4EFDE7CAB9}"/>
+            </a:ext>
+          </a:extLst>
+        </p:cNvPr>
+        <p:cNvGrpSpPr/>
+        <p:nvPr/>
+      </p:nvGrpSpPr>
+      <p:grpSpPr>
+        <a:xfrm>
+          <a:off x="0" y="0"/>
+          <a:ext cx="0" cy="0"/>
+          <a:chOff x="0" y="0"/>
+          <a:chExt cx="0" cy="0"/>
+        </a:xfrm>
+      </p:grpSpPr>
+      <p:sp>
+        <p:nvSpPr>
+          <p:cNvPr id="2" name="Title 1">
+            <a:extLst>
+              <a:ext uri="{FF2B5EF4-FFF2-40B4-BE49-F238E27FC236}">
+                <a16:creationId xmlns:a16="http://schemas.microsoft.com/office/drawing/2014/main" id="{E903A1E2-FC5A-6F56-94C4-2170DFF7A524}"/>
+              </a:ext>
+            </a:extLst>
+          </p:cNvPr>
+          <p:cNvSpPr>
+            <a:spLocks noGrp="1"/>
+          </p:cNvSpPr>
+          <p:nvPr>
+            <p:ph type="title"/>
+          </p:nvPr>
+        </p:nvSpPr>
+        <p:spPr>
+          <a:xfrm>
+            <a:off x="838200" y="1787525"/>
+            <a:ext cx="10515600" cy="2662555"/>
+          </a:xfrm>
+        </p:spPr>
+        <p:txBody>
+          <a:bodyPr>
+            <a:noAutofit/>
+          </a:bodyPr>
+          <a:lstStyle/>
+          <a:p>
+            <a:pPr algn="ctr"/>
+            <a:r>
+              <a:rPr lang="en-US" sz="6000" b="1">
+                <a:solidFill>
+                  <a:srgbClr val="FF0000"/>
+                </a:solidFill>
+              </a:rPr>
+              <a:t>Start IF</a:t>
+            </a:r>
+          </a:p>
+        </p:txBody>
+      </p:sp>
+    </p:spTree>
+    <p:extLst>
+      <p:ext uri="{BB962C8B-B14F-4D97-AF65-F5344CB8AC3E}">
+        <p14:creationId xmlns:p14="http://schemas.microsoft.com/office/powerpoint/2010/main" val="3726953179"/>
+      </p:ext>
+    </p:extLst>
+  </p:cSld>
+  <p:clrMapOvr>
+    <a:masterClrMapping/>
+  </p:clrMapOvr>
+</p:sld>
+</file>
+
+<file path=ppt/slides/slide164.xml><?xml version="1.0" encoding="utf-8"?>
+<p:sld xmlns:a="http://schemas.openxmlformats.org/drawingml/2006/main" xmlns:r="http://schemas.openxmlformats.org/officeDocument/2006/relationships" xmlns:p="http://schemas.openxmlformats.org/presentationml/2006/main">
+  <p:cSld>
+    <p:spTree>
+      <p:nvGrpSpPr>
+        <p:cNvPr id="1" name=""/>
+        <p:cNvGrpSpPr/>
+        <p:nvPr/>
+      </p:nvGrpSpPr>
+      <p:grpSpPr>
+        <a:xfrm>
+          <a:off x="0" y="0"/>
+          <a:ext cx="0" cy="0"/>
+          <a:chOff x="0" y="0"/>
+          <a:chExt cx="0" cy="0"/>
+        </a:xfrm>
+      </p:grpSpPr>
+      <p:sp>
+        <p:nvSpPr>
+          <p:cNvPr id="2" name="Title 1">
+            <a:extLst>
+              <a:ext uri="{FF2B5EF4-FFF2-40B4-BE49-F238E27FC236}">
+                <a16:creationId xmlns:a16="http://schemas.microsoft.com/office/drawing/2014/main" id="{86FB4DFC-EF2E-DADD-B402-8F6E9F1D8D5F}"/>
+              </a:ext>
+            </a:extLst>
+          </p:cNvPr>
+          <p:cNvSpPr>
+            <a:spLocks noGrp="1"/>
+          </p:cNvSpPr>
+          <p:nvPr>
+            <p:ph type="title"/>
+          </p:nvPr>
+        </p:nvSpPr>
+        <p:spPr>
+          <a:xfrm>
+            <a:off x="838200" y="0"/>
+            <a:ext cx="10515600" cy="815975"/>
+          </a:xfrm>
+        </p:spPr>
+        <p:txBody>
+          <a:bodyPr/>
+          <a:lstStyle/>
+          <a:p>
+            <a:pPr algn="ctr"/>
+            <a:r>
+              <a:rPr lang="en-US" b="1"/>
+              <a:t>if</a:t>
+            </a:r>
+          </a:p>
+        </p:txBody>
+      </p:sp>
+      <p:sp>
+        <p:nvSpPr>
+          <p:cNvPr id="7" name="Content Placeholder 6">
+            <a:extLst>
+              <a:ext uri="{FF2B5EF4-FFF2-40B4-BE49-F238E27FC236}">
+                <a16:creationId xmlns:a16="http://schemas.microsoft.com/office/drawing/2014/main" id="{7708EE6A-ABA1-23A1-E4A2-44100388BADD}"/>
+              </a:ext>
+            </a:extLst>
+          </p:cNvPr>
+          <p:cNvSpPr>
+            <a:spLocks noGrp="1"/>
+          </p:cNvSpPr>
+          <p:nvPr>
+            <p:ph idx="1"/>
+          </p:nvPr>
+        </p:nvSpPr>
+        <p:spPr>
+          <a:xfrm>
+            <a:off x="838200" y="895350"/>
+            <a:ext cx="10515600" cy="5281613"/>
+          </a:xfrm>
+        </p:spPr>
+        <p:txBody>
+          <a:bodyPr/>
+          <a:lstStyle/>
+          <a:p>
+            <a:r>
+              <a:rPr lang="en-US"/>
+              <a:t>It controls the flow of execution</a:t>
+            </a:r>
+          </a:p>
+          <a:p>
+            <a:endParaRPr lang="en-US"/>
+          </a:p>
+          <a:p>
+            <a:endParaRPr lang="en-US"/>
+          </a:p>
+          <a:p>
+            <a:endParaRPr lang="en-US"/>
+          </a:p>
+        </p:txBody>
+      </p:sp>
+      <p:pic>
+        <p:nvPicPr>
+          <p:cNvPr id="8" name="Content Placeholder 4">
+            <a:extLst>
+              <a:ext uri="{FF2B5EF4-FFF2-40B4-BE49-F238E27FC236}">
+                <a16:creationId xmlns:a16="http://schemas.microsoft.com/office/drawing/2014/main" id="{88F545DE-55D4-FB6B-E0AE-2E50C83BBDE5}"/>
+              </a:ext>
+            </a:extLst>
+          </p:cNvPr>
+          <p:cNvPicPr>
+            <a:picLocks noChangeAspect="1"/>
+          </p:cNvPicPr>
+          <p:nvPr/>
+        </p:nvPicPr>
+        <p:blipFill>
+          <a:blip r:embed="rId2"/>
+          <a:stretch>
+            <a:fillRect/>
+          </a:stretch>
+        </p:blipFill>
+        <p:spPr>
+          <a:xfrm>
+            <a:off x="838200" y="1472944"/>
+            <a:ext cx="7404939" cy="4267456"/>
+          </a:xfrm>
+          <a:prstGeom prst="rect">
+            <a:avLst/>
+          </a:prstGeom>
+        </p:spPr>
+      </p:pic>
+    </p:spTree>
+    <p:extLst>
+      <p:ext uri="{BB962C8B-B14F-4D97-AF65-F5344CB8AC3E}">
+        <p14:creationId xmlns:p14="http://schemas.microsoft.com/office/powerpoint/2010/main" val="186886566"/>
+      </p:ext>
+    </p:extLst>
+  </p:cSld>
+  <p:clrMapOvr>
+    <a:masterClrMapping/>
+  </p:clrMapOvr>
+</p:sld>
+</file>
+
+<file path=ppt/slides/slide165.xml><?xml version="1.0" encoding="utf-8"?>
+<p:sld xmlns:a="http://schemas.openxmlformats.org/drawingml/2006/main" xmlns:r="http://schemas.openxmlformats.org/officeDocument/2006/relationships" xmlns:p="http://schemas.openxmlformats.org/presentationml/2006/main">
+  <p:cSld>
+    <p:spTree>
+      <p:nvGrpSpPr>
+        <p:cNvPr id="1" name=""/>
+        <p:cNvGrpSpPr/>
+        <p:nvPr/>
+      </p:nvGrpSpPr>
+      <p:grpSpPr>
+        <a:xfrm>
+          <a:off x="0" y="0"/>
+          <a:ext cx="0" cy="0"/>
+          <a:chOff x="0" y="0"/>
+          <a:chExt cx="0" cy="0"/>
+        </a:xfrm>
+      </p:grpSpPr>
+      <p:sp>
+        <p:nvSpPr>
+          <p:cNvPr id="2" name="Title 1">
+            <a:extLst>
+              <a:ext uri="{FF2B5EF4-FFF2-40B4-BE49-F238E27FC236}">
+                <a16:creationId xmlns:a16="http://schemas.microsoft.com/office/drawing/2014/main" id="{8B8376CE-FCED-086C-6ABF-9D71A5F0593D}"/>
+              </a:ext>
+            </a:extLst>
+          </p:cNvPr>
+          <p:cNvSpPr>
+            <a:spLocks noGrp="1"/>
+          </p:cNvSpPr>
+          <p:nvPr>
+            <p:ph type="title"/>
+          </p:nvPr>
+        </p:nvSpPr>
+        <p:spPr>
+          <a:xfrm>
+            <a:off x="838199" y="0"/>
+            <a:ext cx="10515600" cy="787400"/>
+          </a:xfrm>
+        </p:spPr>
+        <p:txBody>
+          <a:bodyPr/>
+          <a:lstStyle/>
+          <a:p>
+            <a:pPr algn="ctr"/>
+            <a:r>
+              <a:rPr lang="en-US" b="1"/>
+              <a:t>IIF</a:t>
+            </a:r>
+          </a:p>
+        </p:txBody>
+      </p:sp>
+      <p:pic>
+        <p:nvPicPr>
+          <p:cNvPr id="5" name="Content Placeholder 4">
+            <a:extLst>
+              <a:ext uri="{FF2B5EF4-FFF2-40B4-BE49-F238E27FC236}">
+                <a16:creationId xmlns:a16="http://schemas.microsoft.com/office/drawing/2014/main" id="{14100F05-A03A-3C89-8DE5-F510EBDD1639}"/>
+              </a:ext>
+            </a:extLst>
+          </p:cNvPr>
+          <p:cNvPicPr>
+            <a:picLocks noGrp="1" noChangeAspect="1"/>
+          </p:cNvPicPr>
+          <p:nvPr>
+            <p:ph idx="1"/>
+          </p:nvPr>
+        </p:nvPicPr>
+        <p:blipFill>
+          <a:blip r:embed="rId2"/>
+          <a:stretch>
+            <a:fillRect/>
+          </a:stretch>
+        </p:blipFill>
+        <p:spPr>
+          <a:xfrm>
+            <a:off x="838199" y="1073149"/>
+            <a:ext cx="6995466" cy="1870075"/>
+          </a:xfrm>
+          <a:prstGeom prst="rect">
+            <a:avLst/>
+          </a:prstGeom>
+        </p:spPr>
+      </p:pic>
+    </p:spTree>
+    <p:extLst>
+      <p:ext uri="{BB962C8B-B14F-4D97-AF65-F5344CB8AC3E}">
+        <p14:creationId xmlns:p14="http://schemas.microsoft.com/office/powerpoint/2010/main" val="1101417262"/>
+      </p:ext>
+    </p:extLst>
+  </p:cSld>
+  <p:clrMapOvr>
+    <a:masterClrMapping/>
+  </p:clrMapOvr>
+</p:sld>
+</file>
+
+<file path=ppt/slides/slide166.xml><?xml version="1.0" encoding="utf-8"?>
+<p:sld xmlns:a="http://schemas.openxmlformats.org/drawingml/2006/main" xmlns:r="http://schemas.openxmlformats.org/officeDocument/2006/relationships" xmlns:p="http://schemas.openxmlformats.org/presentationml/2006/main">
+  <p:cSld>
+    <p:spTree>
+      <p:nvGrpSpPr>
+        <p:cNvPr id="1" name="">
+          <a:extLst>
+            <a:ext uri="{FF2B5EF4-FFF2-40B4-BE49-F238E27FC236}">
+              <a16:creationId xmlns:a16="http://schemas.microsoft.com/office/drawing/2014/main" id="{86240B03-D714-344F-A56E-FC3B45A2BA28}"/>
+            </a:ext>
+          </a:extLst>
+        </p:cNvPr>
+        <p:cNvGrpSpPr/>
+        <p:nvPr/>
+      </p:nvGrpSpPr>
+      <p:grpSpPr>
+        <a:xfrm>
+          <a:off x="0" y="0"/>
+          <a:ext cx="0" cy="0"/>
+          <a:chOff x="0" y="0"/>
+          <a:chExt cx="0" cy="0"/>
+        </a:xfrm>
+      </p:grpSpPr>
+      <p:sp>
+        <p:nvSpPr>
+          <p:cNvPr id="2" name="Title 1">
+            <a:extLst>
+              <a:ext uri="{FF2B5EF4-FFF2-40B4-BE49-F238E27FC236}">
+                <a16:creationId xmlns:a16="http://schemas.microsoft.com/office/drawing/2014/main" id="{CD666736-83CD-EC00-268A-803CBEF9496B}"/>
+              </a:ext>
+            </a:extLst>
+          </p:cNvPr>
+          <p:cNvSpPr>
+            <a:spLocks noGrp="1"/>
+          </p:cNvSpPr>
+          <p:nvPr>
+            <p:ph type="title"/>
+          </p:nvPr>
+        </p:nvSpPr>
+        <p:spPr>
+          <a:xfrm>
+            <a:off x="838200" y="1787525"/>
+            <a:ext cx="10515600" cy="2662555"/>
+          </a:xfrm>
+        </p:spPr>
+        <p:txBody>
+          <a:bodyPr>
+            <a:noAutofit/>
+          </a:bodyPr>
+          <a:lstStyle/>
+          <a:p>
+            <a:pPr algn="ctr"/>
+            <a:r>
+              <a:rPr lang="en-US" sz="6000" b="1">
+                <a:solidFill>
+                  <a:srgbClr val="FF0000"/>
+                </a:solidFill>
+              </a:rPr>
+              <a:t>End IF</a:t>
+            </a:r>
+          </a:p>
+        </p:txBody>
+      </p:sp>
+    </p:spTree>
+    <p:extLst>
+      <p:ext uri="{BB962C8B-B14F-4D97-AF65-F5344CB8AC3E}">
+        <p14:creationId xmlns:p14="http://schemas.microsoft.com/office/powerpoint/2010/main" val="347865220"/>
       </p:ext>
     </p:extLst>
   </p:cSld>

--- a/Dot Net/2_DB.pptx
+++ b/Dot Net/2_DB.pptx
@@ -5,7 +5,7 @@
     <p:sldMasterId id="2147483763" r:id="rId1"/>
   </p:sldMasterIdLst>
   <p:notesMasterIdLst>
-    <p:notesMasterId r:id="rId168"/>
+    <p:notesMasterId r:id="rId185"/>
   </p:notesMasterIdLst>
   <p:sldIdLst>
     <p:sldId id="256" r:id="rId2"/>
@@ -140,40 +140,57 @@
     <p:sldId id="392" r:id="rId131"/>
     <p:sldId id="393" r:id="rId132"/>
     <p:sldId id="274" r:id="rId133"/>
-    <p:sldId id="286" r:id="rId134"/>
-    <p:sldId id="339" r:id="rId135"/>
-    <p:sldId id="432" r:id="rId136"/>
-    <p:sldId id="433" r:id="rId137"/>
-    <p:sldId id="434" r:id="rId138"/>
-    <p:sldId id="435" r:id="rId139"/>
-    <p:sldId id="442" r:id="rId140"/>
-    <p:sldId id="405" r:id="rId141"/>
-    <p:sldId id="431" r:id="rId142"/>
-    <p:sldId id="408" r:id="rId143"/>
-    <p:sldId id="409" r:id="rId144"/>
-    <p:sldId id="407" r:id="rId145"/>
-    <p:sldId id="412" r:id="rId146"/>
-    <p:sldId id="414" r:id="rId147"/>
-    <p:sldId id="415" r:id="rId148"/>
-    <p:sldId id="413" r:id="rId149"/>
-    <p:sldId id="417" r:id="rId150"/>
-    <p:sldId id="419" r:id="rId151"/>
-    <p:sldId id="420" r:id="rId152"/>
-    <p:sldId id="430" r:id="rId153"/>
-    <p:sldId id="418" r:id="rId154"/>
-    <p:sldId id="425" r:id="rId155"/>
-    <p:sldId id="424" r:id="rId156"/>
-    <p:sldId id="427" r:id="rId157"/>
-    <p:sldId id="426" r:id="rId158"/>
-    <p:sldId id="422" r:id="rId159"/>
-    <p:sldId id="421" r:id="rId160"/>
-    <p:sldId id="428" r:id="rId161"/>
-    <p:sldId id="429" r:id="rId162"/>
-    <p:sldId id="423" r:id="rId163"/>
-    <p:sldId id="437" r:id="rId164"/>
-    <p:sldId id="440" r:id="rId165"/>
-    <p:sldId id="441" r:id="rId166"/>
-    <p:sldId id="439" r:id="rId167"/>
+    <p:sldId id="339" r:id="rId134"/>
+    <p:sldId id="458" r:id="rId135"/>
+    <p:sldId id="286" r:id="rId136"/>
+    <p:sldId id="460" r:id="rId137"/>
+    <p:sldId id="461" r:id="rId138"/>
+    <p:sldId id="459" r:id="rId139"/>
+    <p:sldId id="432" r:id="rId140"/>
+    <p:sldId id="433" r:id="rId141"/>
+    <p:sldId id="434" r:id="rId142"/>
+    <p:sldId id="435" r:id="rId143"/>
+    <p:sldId id="442" r:id="rId144"/>
+    <p:sldId id="405" r:id="rId145"/>
+    <p:sldId id="431" r:id="rId146"/>
+    <p:sldId id="408" r:id="rId147"/>
+    <p:sldId id="409" r:id="rId148"/>
+    <p:sldId id="407" r:id="rId149"/>
+    <p:sldId id="412" r:id="rId150"/>
+    <p:sldId id="414" r:id="rId151"/>
+    <p:sldId id="415" r:id="rId152"/>
+    <p:sldId id="413" r:id="rId153"/>
+    <p:sldId id="417" r:id="rId154"/>
+    <p:sldId id="419" r:id="rId155"/>
+    <p:sldId id="420" r:id="rId156"/>
+    <p:sldId id="430" r:id="rId157"/>
+    <p:sldId id="418" r:id="rId158"/>
+    <p:sldId id="425" r:id="rId159"/>
+    <p:sldId id="424" r:id="rId160"/>
+    <p:sldId id="427" r:id="rId161"/>
+    <p:sldId id="426" r:id="rId162"/>
+    <p:sldId id="422" r:id="rId163"/>
+    <p:sldId id="421" r:id="rId164"/>
+    <p:sldId id="428" r:id="rId165"/>
+    <p:sldId id="429" r:id="rId166"/>
+    <p:sldId id="423" r:id="rId167"/>
+    <p:sldId id="437" r:id="rId168"/>
+    <p:sldId id="440" r:id="rId169"/>
+    <p:sldId id="441" r:id="rId170"/>
+    <p:sldId id="439" r:id="rId171"/>
+    <p:sldId id="444" r:id="rId172"/>
+    <p:sldId id="446" r:id="rId173"/>
+    <p:sldId id="449" r:id="rId174"/>
+    <p:sldId id="447" r:id="rId175"/>
+    <p:sldId id="448" r:id="rId176"/>
+    <p:sldId id="450" r:id="rId177"/>
+    <p:sldId id="451" r:id="rId178"/>
+    <p:sldId id="455" r:id="rId179"/>
+    <p:sldId id="452" r:id="rId180"/>
+    <p:sldId id="453" r:id="rId181"/>
+    <p:sldId id="454" r:id="rId182"/>
+    <p:sldId id="456" r:id="rId183"/>
+    <p:sldId id="445" r:id="rId184"/>
   </p:sldIdLst>
   <p:sldSz cx="12192000" cy="6858000"/>
   <p:notesSz cx="6858000" cy="9144000"/>
@@ -362,7 +379,7 @@
           <a:p>
             <a:fld id="{47CE4E9B-B1A4-423C-87E2-9C8168E3DB1B}" type="datetimeFigureOut">
               <a:rPr lang="en-US" smtClean="0"/>
-              <a:t>7/22/2026</a:t>
+              <a:t>8/2/2026</a:t>
             </a:fld>
             <a:endParaRPr lang="en-US"/>
           </a:p>
@@ -844,7 +861,7 @@
           <a:p>
             <a:fld id="{3783D483-079C-477D-B170-494E0861DC93}" type="datetimeFigureOut">
               <a:rPr lang="en-US" smtClean="0"/>
-              <a:t>7/22/2026</a:t>
+              <a:t>8/2/2026</a:t>
             </a:fld>
             <a:endParaRPr lang="en-US"/>
           </a:p>
@@ -1014,7 +1031,7 @@
           <a:p>
             <a:fld id="{3783D483-079C-477D-B170-494E0861DC93}" type="datetimeFigureOut">
               <a:rPr lang="en-US" smtClean="0"/>
-              <a:t>7/22/2026</a:t>
+              <a:t>8/2/2026</a:t>
             </a:fld>
             <a:endParaRPr lang="en-US"/>
           </a:p>
@@ -1194,7 +1211,7 @@
           <a:p>
             <a:fld id="{3783D483-079C-477D-B170-494E0861DC93}" type="datetimeFigureOut">
               <a:rPr lang="en-US" smtClean="0"/>
-              <a:t>7/22/2026</a:t>
+              <a:t>8/2/2026</a:t>
             </a:fld>
             <a:endParaRPr lang="en-US"/>
           </a:p>
@@ -1364,7 +1381,7 @@
           <a:p>
             <a:fld id="{3783D483-079C-477D-B170-494E0861DC93}" type="datetimeFigureOut">
               <a:rPr lang="en-US" smtClean="0"/>
-              <a:t>7/22/2026</a:t>
+              <a:t>8/2/2026</a:t>
             </a:fld>
             <a:endParaRPr lang="en-US"/>
           </a:p>
@@ -1610,7 +1627,7 @@
           <a:p>
             <a:fld id="{3783D483-079C-477D-B170-494E0861DC93}" type="datetimeFigureOut">
               <a:rPr lang="en-US" smtClean="0"/>
-              <a:t>7/22/2026</a:t>
+              <a:t>8/2/2026</a:t>
             </a:fld>
             <a:endParaRPr lang="en-US"/>
           </a:p>
@@ -1842,7 +1859,7 @@
           <a:p>
             <a:fld id="{3783D483-079C-477D-B170-494E0861DC93}" type="datetimeFigureOut">
               <a:rPr lang="en-US" smtClean="0"/>
-              <a:t>7/22/2026</a:t>
+              <a:t>8/2/2026</a:t>
             </a:fld>
             <a:endParaRPr lang="en-US"/>
           </a:p>
@@ -2209,7 +2226,7 @@
           <a:p>
             <a:fld id="{3783D483-079C-477D-B170-494E0861DC93}" type="datetimeFigureOut">
               <a:rPr lang="en-US" smtClean="0"/>
-              <a:t>7/22/2026</a:t>
+              <a:t>8/2/2026</a:t>
             </a:fld>
             <a:endParaRPr lang="en-US"/>
           </a:p>
@@ -2327,7 +2344,7 @@
           <a:p>
             <a:fld id="{3783D483-079C-477D-B170-494E0861DC93}" type="datetimeFigureOut">
               <a:rPr lang="en-US" smtClean="0"/>
-              <a:t>7/22/2026</a:t>
+              <a:t>8/2/2026</a:t>
             </a:fld>
             <a:endParaRPr lang="en-US"/>
           </a:p>
@@ -2422,7 +2439,7 @@
           <a:p>
             <a:fld id="{3783D483-079C-477D-B170-494E0861DC93}" type="datetimeFigureOut">
               <a:rPr lang="en-US" smtClean="0"/>
-              <a:t>7/22/2026</a:t>
+              <a:t>8/2/2026</a:t>
             </a:fld>
             <a:endParaRPr lang="en-US"/>
           </a:p>
@@ -2699,7 +2716,7 @@
           <a:p>
             <a:fld id="{3783D483-079C-477D-B170-494E0861DC93}" type="datetimeFigureOut">
               <a:rPr lang="en-US" smtClean="0"/>
-              <a:t>7/22/2026</a:t>
+              <a:t>8/2/2026</a:t>
             </a:fld>
             <a:endParaRPr lang="en-US"/>
           </a:p>
@@ -2956,7 +2973,7 @@
           <a:p>
             <a:fld id="{3783D483-079C-477D-B170-494E0861DC93}" type="datetimeFigureOut">
               <a:rPr lang="en-US" smtClean="0"/>
-              <a:t>7/22/2026</a:t>
+              <a:t>8/2/2026</a:t>
             </a:fld>
             <a:endParaRPr lang="en-US"/>
           </a:p>
@@ -3169,7 +3186,7 @@
           <a:p>
             <a:fld id="{3783D483-079C-477D-B170-494E0861DC93}" type="datetimeFigureOut">
               <a:rPr lang="en-US" smtClean="0"/>
-              <a:t>7/22/2026</a:t>
+              <a:t>8/2/2026</a:t>
             </a:fld>
             <a:endParaRPr lang="en-US"/>
           </a:p>
@@ -18096,230 +18113,6 @@
           <p:cNvPr id="2" name="Title 1">
             <a:extLst>
               <a:ext uri="{FF2B5EF4-FFF2-40B4-BE49-F238E27FC236}">
-                <a16:creationId xmlns:a16="http://schemas.microsoft.com/office/drawing/2014/main" id="{EAFDCCA5-3134-20EC-AC3A-F126E85E8257}"/>
-              </a:ext>
-            </a:extLst>
-          </p:cNvPr>
-          <p:cNvSpPr>
-            <a:spLocks noGrp="1"/>
-          </p:cNvSpPr>
-          <p:nvPr>
-            <p:ph type="title"/>
-          </p:nvPr>
-        </p:nvSpPr>
-        <p:spPr>
-          <a:xfrm>
-            <a:off x="913795" y="0"/>
-            <a:ext cx="10353762" cy="970450"/>
-          </a:xfrm>
-        </p:spPr>
-        <p:txBody>
-          <a:bodyPr/>
-          <a:lstStyle/>
-          <a:p>
-            <a:r>
-              <a:rPr lang="en-US" dirty="0"/>
-              <a:t>Very important question</a:t>
-            </a:r>
-          </a:p>
-        </p:txBody>
-      </p:sp>
-      <p:sp>
-        <p:nvSpPr>
-          <p:cNvPr id="3" name="Content Placeholder 2">
-            <a:extLst>
-              <a:ext uri="{FF2B5EF4-FFF2-40B4-BE49-F238E27FC236}">
-                <a16:creationId xmlns:a16="http://schemas.microsoft.com/office/drawing/2014/main" id="{B81998B6-421E-F15B-B9C4-0CAA04E75971}"/>
-              </a:ext>
-            </a:extLst>
-          </p:cNvPr>
-          <p:cNvSpPr>
-            <a:spLocks noGrp="1"/>
-          </p:cNvSpPr>
-          <p:nvPr>
-            <p:ph idx="1"/>
-          </p:nvPr>
-        </p:nvSpPr>
-        <p:spPr>
-          <a:xfrm>
-            <a:off x="482321" y="970450"/>
-            <a:ext cx="11374734" cy="5440398"/>
-          </a:xfrm>
-        </p:spPr>
-        <p:txBody>
-          <a:bodyPr/>
-          <a:lstStyle/>
-          <a:p>
-            <a:r>
-              <a:rPr lang="en-US" dirty="0"/>
-              <a:t>Department (1)  student (N)</a:t>
-            </a:r>
-          </a:p>
-          <a:p>
-            <a:r>
-              <a:rPr lang="en-US" dirty="0"/>
-              <a:t>Delete department that has not student</a:t>
-            </a:r>
-          </a:p>
-          <a:p>
-            <a:pPr lvl="1"/>
-            <a:r>
-              <a:rPr lang="en-US" dirty="0"/>
-              <a:t>Delete from department where dep_id not in (select distinct dep_id from student)</a:t>
-            </a:r>
-          </a:p>
-          <a:p>
-            <a:pPr lvl="1"/>
-            <a:r>
-              <a:rPr lang="en-US" dirty="0"/>
-              <a:t>Another solution</a:t>
-            </a:r>
-          </a:p>
-          <a:p>
-            <a:pPr lvl="2"/>
-            <a:r>
-              <a:rPr lang="en-US" sz="1800" dirty="0"/>
-              <a:t>delete </a:t>
-            </a:r>
-            <a:r>
-              <a:rPr lang="en-US" sz="1800" b="1" dirty="0">
-                <a:solidFill>
-                  <a:srgbClr val="00B0F0"/>
-                </a:solidFill>
-              </a:rPr>
-              <a:t>DEPARTMENT11</a:t>
-            </a:r>
-          </a:p>
-          <a:p>
-            <a:pPr marL="756000" lvl="2" indent="0">
-              <a:buNone/>
-            </a:pPr>
-            <a:r>
-              <a:rPr lang="en-US" sz="1800" dirty="0"/>
-              <a:t>		from DEPARTMENT11 D</a:t>
-            </a:r>
-          </a:p>
-          <a:p>
-            <a:pPr marL="756000" lvl="2" indent="0">
-              <a:buNone/>
-            </a:pPr>
-            <a:r>
-              <a:rPr lang="en-US" sz="1800" dirty="0"/>
-              <a:t>		left join Student11 S on D.dep_id = S.dep_id</a:t>
-            </a:r>
-          </a:p>
-          <a:p>
-            <a:pPr marL="756000" lvl="2" indent="0">
-              <a:buNone/>
-            </a:pPr>
-            <a:r>
-              <a:rPr lang="en-US" sz="1800" dirty="0"/>
-              <a:t>		where S.dep_id is null</a:t>
-            </a:r>
-          </a:p>
-          <a:p>
-            <a:r>
-              <a:rPr lang="en-US" dirty="0"/>
-              <a:t>Delete department == delete from department</a:t>
-            </a:r>
-          </a:p>
-          <a:p>
-            <a:r>
-              <a:rPr lang="en-US" dirty="0"/>
-              <a:t>Another solution</a:t>
-            </a:r>
-          </a:p>
-          <a:p>
-            <a:pPr lvl="1"/>
-            <a:r>
-              <a:rPr lang="en-US" dirty="0"/>
-              <a:t>DELETE D FROM Department D LEFT JOIN Student S </a:t>
-            </a:r>
-          </a:p>
-          <a:p>
-            <a:pPr marL="450000" lvl="1" indent="0">
-              <a:buNone/>
-            </a:pPr>
-            <a:r>
-              <a:rPr lang="en-US" dirty="0"/>
-              <a:t>		ON </a:t>
-            </a:r>
-            <a:r>
-              <a:rPr lang="en-US" dirty="0" err="1"/>
-              <a:t>D.Dept_Id</a:t>
-            </a:r>
-            <a:r>
-              <a:rPr lang="en-US" dirty="0"/>
-              <a:t> = </a:t>
-            </a:r>
-            <a:r>
-              <a:rPr lang="en-US" dirty="0" err="1"/>
-              <a:t>S.Dept_Id</a:t>
-            </a:r>
-            <a:endParaRPr lang="en-US" dirty="0"/>
-          </a:p>
-          <a:p>
-            <a:pPr marL="450000" lvl="1" indent="0">
-              <a:buNone/>
-            </a:pPr>
-            <a:r>
-              <a:rPr lang="en-US" dirty="0"/>
-              <a:t> 	GROUP BY </a:t>
-            </a:r>
-            <a:r>
-              <a:rPr lang="en-US" dirty="0" err="1"/>
-              <a:t>D.Dept_Id</a:t>
-            </a:r>
-            <a:r>
-              <a:rPr lang="en-US" dirty="0"/>
-              <a:t> HAVING COUNT(</a:t>
-            </a:r>
-            <a:r>
-              <a:rPr lang="en-US" dirty="0" err="1"/>
-              <a:t>S.Student_Id</a:t>
-            </a:r>
-            <a:r>
-              <a:rPr lang="en-US" dirty="0"/>
-              <a:t>) = 0;</a:t>
-            </a:r>
-          </a:p>
-        </p:txBody>
-      </p:sp>
-    </p:spTree>
-    <p:extLst>
-      <p:ext uri="{BB962C8B-B14F-4D97-AF65-F5344CB8AC3E}">
-        <p14:creationId xmlns:p14="http://schemas.microsoft.com/office/powerpoint/2010/main" val="2512639797"/>
-      </p:ext>
-    </p:extLst>
-  </p:cSld>
-  <p:clrMapOvr>
-    <a:masterClrMapping/>
-  </p:clrMapOvr>
-</p:sld>
-</file>
-
-<file path=ppt/slides/slide134.xml><?xml version="1.0" encoding="utf-8"?>
-<p:sld xmlns:a="http://schemas.openxmlformats.org/drawingml/2006/main" xmlns:r="http://schemas.openxmlformats.org/officeDocument/2006/relationships" xmlns:p="http://schemas.openxmlformats.org/presentationml/2006/main">
-  <p:cSld>
-    <p:spTree>
-      <p:nvGrpSpPr>
-        <p:cNvPr id="1" name=""/>
-        <p:cNvGrpSpPr/>
-        <p:nvPr/>
-      </p:nvGrpSpPr>
-      <p:grpSpPr>
-        <a:xfrm>
-          <a:off x="0" y="0"/>
-          <a:ext cx="0" cy="0"/>
-          <a:chOff x="0" y="0"/>
-          <a:chExt cx="0" cy="0"/>
-        </a:xfrm>
-      </p:grpSpPr>
-      <p:sp>
-        <p:nvSpPr>
-          <p:cNvPr id="2" name="Title 1">
-            <a:extLst>
-              <a:ext uri="{FF2B5EF4-FFF2-40B4-BE49-F238E27FC236}">
                 <a16:creationId xmlns:a16="http://schemas.microsoft.com/office/drawing/2014/main" id="{FE69B7E1-630D-279D-FFA8-C8414C793F33}"/>
               </a:ext>
             </a:extLst>
@@ -18506,7 +18299,671 @@
 </p:sld>
 </file>
 
+<file path=ppt/slides/slide134.xml><?xml version="1.0" encoding="utf-8"?>
+<p:sld xmlns:a="http://schemas.openxmlformats.org/drawingml/2006/main" xmlns:r="http://schemas.openxmlformats.org/officeDocument/2006/relationships" xmlns:p="http://schemas.openxmlformats.org/presentationml/2006/main">
+  <p:cSld>
+    <p:spTree>
+      <p:nvGrpSpPr>
+        <p:cNvPr id="1" name="">
+          <a:extLst>
+            <a:ext uri="{FF2B5EF4-FFF2-40B4-BE49-F238E27FC236}">
+              <a16:creationId xmlns:a16="http://schemas.microsoft.com/office/drawing/2014/main" id="{CBD89610-ECBC-BAA5-6142-0317A6141E13}"/>
+            </a:ext>
+          </a:extLst>
+        </p:cNvPr>
+        <p:cNvGrpSpPr/>
+        <p:nvPr/>
+      </p:nvGrpSpPr>
+      <p:grpSpPr>
+        <a:xfrm>
+          <a:off x="0" y="0"/>
+          <a:ext cx="0" cy="0"/>
+          <a:chOff x="0" y="0"/>
+          <a:chExt cx="0" cy="0"/>
+        </a:xfrm>
+      </p:grpSpPr>
+      <p:sp>
+        <p:nvSpPr>
+          <p:cNvPr id="2" name="Title 1">
+            <a:extLst>
+              <a:ext uri="{FF2B5EF4-FFF2-40B4-BE49-F238E27FC236}">
+                <a16:creationId xmlns:a16="http://schemas.microsoft.com/office/drawing/2014/main" id="{F93FCCA3-1426-0F86-B59D-4F421836BFE6}"/>
+              </a:ext>
+            </a:extLst>
+          </p:cNvPr>
+          <p:cNvSpPr>
+            <a:spLocks noGrp="1"/>
+          </p:cNvSpPr>
+          <p:nvPr>
+            <p:ph type="title"/>
+          </p:nvPr>
+        </p:nvSpPr>
+        <p:spPr>
+          <a:xfrm>
+            <a:off x="838200" y="1787525"/>
+            <a:ext cx="10515600" cy="2662555"/>
+          </a:xfrm>
+        </p:spPr>
+        <p:txBody>
+          <a:bodyPr>
+            <a:normAutofit/>
+          </a:bodyPr>
+          <a:lstStyle/>
+          <a:p>
+            <a:pPr algn="ctr"/>
+            <a:r>
+              <a:rPr lang="en-US" sz="8000" b="1">
+                <a:solidFill>
+                  <a:srgbClr val="FF0000"/>
+                </a:solidFill>
+              </a:rPr>
+              <a:t>Start Question </a:t>
+            </a:r>
+          </a:p>
+        </p:txBody>
+      </p:sp>
+    </p:spTree>
+    <p:extLst>
+      <p:ext uri="{BB962C8B-B14F-4D97-AF65-F5344CB8AC3E}">
+        <p14:creationId xmlns:p14="http://schemas.microsoft.com/office/powerpoint/2010/main" val="963093477"/>
+      </p:ext>
+    </p:extLst>
+  </p:cSld>
+  <p:clrMapOvr>
+    <a:masterClrMapping/>
+  </p:clrMapOvr>
+</p:sld>
+</file>
+
 <file path=ppt/slides/slide135.xml><?xml version="1.0" encoding="utf-8"?>
+<p:sld xmlns:a="http://schemas.openxmlformats.org/drawingml/2006/main" xmlns:r="http://schemas.openxmlformats.org/officeDocument/2006/relationships" xmlns:p="http://schemas.openxmlformats.org/presentationml/2006/main">
+  <p:cSld>
+    <p:spTree>
+      <p:nvGrpSpPr>
+        <p:cNvPr id="1" name=""/>
+        <p:cNvGrpSpPr/>
+        <p:nvPr/>
+      </p:nvGrpSpPr>
+      <p:grpSpPr>
+        <a:xfrm>
+          <a:off x="0" y="0"/>
+          <a:ext cx="0" cy="0"/>
+          <a:chOff x="0" y="0"/>
+          <a:chExt cx="0" cy="0"/>
+        </a:xfrm>
+      </p:grpSpPr>
+      <p:sp>
+        <p:nvSpPr>
+          <p:cNvPr id="2" name="Title 1">
+            <a:extLst>
+              <a:ext uri="{FF2B5EF4-FFF2-40B4-BE49-F238E27FC236}">
+                <a16:creationId xmlns:a16="http://schemas.microsoft.com/office/drawing/2014/main" id="{EAFDCCA5-3134-20EC-AC3A-F126E85E8257}"/>
+              </a:ext>
+            </a:extLst>
+          </p:cNvPr>
+          <p:cNvSpPr>
+            <a:spLocks noGrp="1"/>
+          </p:cNvSpPr>
+          <p:nvPr>
+            <p:ph type="title"/>
+          </p:nvPr>
+        </p:nvSpPr>
+        <p:spPr>
+          <a:xfrm>
+            <a:off x="913795" y="0"/>
+            <a:ext cx="10353762" cy="970450"/>
+          </a:xfrm>
+        </p:spPr>
+        <p:txBody>
+          <a:bodyPr/>
+          <a:lstStyle/>
+          <a:p>
+            <a:r>
+              <a:rPr lang="en-US" dirty="0"/>
+              <a:t>Very important question</a:t>
+            </a:r>
+          </a:p>
+        </p:txBody>
+      </p:sp>
+      <p:sp>
+        <p:nvSpPr>
+          <p:cNvPr id="3" name="Content Placeholder 2">
+            <a:extLst>
+              <a:ext uri="{FF2B5EF4-FFF2-40B4-BE49-F238E27FC236}">
+                <a16:creationId xmlns:a16="http://schemas.microsoft.com/office/drawing/2014/main" id="{B81998B6-421E-F15B-B9C4-0CAA04E75971}"/>
+              </a:ext>
+            </a:extLst>
+          </p:cNvPr>
+          <p:cNvSpPr>
+            <a:spLocks noGrp="1"/>
+          </p:cNvSpPr>
+          <p:nvPr>
+            <p:ph idx="1"/>
+          </p:nvPr>
+        </p:nvSpPr>
+        <p:spPr>
+          <a:xfrm>
+            <a:off x="482321" y="970450"/>
+            <a:ext cx="11374734" cy="5440398"/>
+          </a:xfrm>
+        </p:spPr>
+        <p:txBody>
+          <a:bodyPr/>
+          <a:lstStyle/>
+          <a:p>
+            <a:r>
+              <a:rPr lang="en-US" dirty="0"/>
+              <a:t>Department (1)  student (N)</a:t>
+            </a:r>
+          </a:p>
+          <a:p>
+            <a:r>
+              <a:rPr lang="en-US" dirty="0"/>
+              <a:t>Delete department that has not student</a:t>
+            </a:r>
+          </a:p>
+          <a:p>
+            <a:pPr lvl="1"/>
+            <a:r>
+              <a:rPr lang="en-US" dirty="0"/>
+              <a:t>Delete from department where dep_id not in (select distinct dep_id from student)</a:t>
+            </a:r>
+          </a:p>
+          <a:p>
+            <a:pPr lvl="1"/>
+            <a:r>
+              <a:rPr lang="en-US" dirty="0"/>
+              <a:t>Another solution</a:t>
+            </a:r>
+          </a:p>
+          <a:p>
+            <a:pPr lvl="2"/>
+            <a:r>
+              <a:rPr lang="en-US" sz="1800" dirty="0"/>
+              <a:t>delete </a:t>
+            </a:r>
+            <a:r>
+              <a:rPr lang="en-US" sz="1800" b="1" dirty="0">
+                <a:solidFill>
+                  <a:srgbClr val="00B0F0"/>
+                </a:solidFill>
+              </a:rPr>
+              <a:t>DEPARTMENT11</a:t>
+            </a:r>
+          </a:p>
+          <a:p>
+            <a:pPr marL="756000" lvl="2" indent="0">
+              <a:buNone/>
+            </a:pPr>
+            <a:r>
+              <a:rPr lang="en-US" sz="1800" dirty="0"/>
+              <a:t>		from DEPARTMENT11 D</a:t>
+            </a:r>
+          </a:p>
+          <a:p>
+            <a:pPr marL="756000" lvl="2" indent="0">
+              <a:buNone/>
+            </a:pPr>
+            <a:r>
+              <a:rPr lang="en-US" sz="1800" dirty="0"/>
+              <a:t>		left join Student11 S on D.dep_id = S.dep_id</a:t>
+            </a:r>
+          </a:p>
+          <a:p>
+            <a:pPr marL="756000" lvl="2" indent="0">
+              <a:buNone/>
+            </a:pPr>
+            <a:r>
+              <a:rPr lang="en-US" sz="1800" dirty="0"/>
+              <a:t>		where S.dep_id is null</a:t>
+            </a:r>
+          </a:p>
+          <a:p>
+            <a:r>
+              <a:rPr lang="en-US" dirty="0"/>
+              <a:t>Delete department == delete from department</a:t>
+            </a:r>
+          </a:p>
+          <a:p>
+            <a:r>
+              <a:rPr lang="en-US" dirty="0"/>
+              <a:t>Another solution</a:t>
+            </a:r>
+          </a:p>
+          <a:p>
+            <a:pPr lvl="1"/>
+            <a:r>
+              <a:rPr lang="en-US" dirty="0"/>
+              <a:t>DELETE D FROM Department D LEFT JOIN Student S </a:t>
+            </a:r>
+          </a:p>
+          <a:p>
+            <a:pPr marL="450000" lvl="1" indent="0">
+              <a:buNone/>
+            </a:pPr>
+            <a:r>
+              <a:rPr lang="en-US" dirty="0"/>
+              <a:t>		ON </a:t>
+            </a:r>
+            <a:r>
+              <a:rPr lang="en-US" dirty="0" err="1"/>
+              <a:t>D.Dept_Id</a:t>
+            </a:r>
+            <a:r>
+              <a:rPr lang="en-US" dirty="0"/>
+              <a:t> = </a:t>
+            </a:r>
+            <a:r>
+              <a:rPr lang="en-US" dirty="0" err="1"/>
+              <a:t>S.Dept_Id</a:t>
+            </a:r>
+            <a:endParaRPr lang="en-US" dirty="0"/>
+          </a:p>
+          <a:p>
+            <a:pPr marL="450000" lvl="1" indent="0">
+              <a:buNone/>
+            </a:pPr>
+            <a:r>
+              <a:rPr lang="en-US" dirty="0"/>
+              <a:t> 	GROUP BY </a:t>
+            </a:r>
+            <a:r>
+              <a:rPr lang="en-US" dirty="0" err="1"/>
+              <a:t>D.Dept_Id</a:t>
+            </a:r>
+            <a:r>
+              <a:rPr lang="en-US" dirty="0"/>
+              <a:t> HAVING COUNT(</a:t>
+            </a:r>
+            <a:r>
+              <a:rPr lang="en-US" dirty="0" err="1"/>
+              <a:t>S.Student_Id</a:t>
+            </a:r>
+            <a:r>
+              <a:rPr lang="en-US" dirty="0"/>
+              <a:t>) = 0;</a:t>
+            </a:r>
+          </a:p>
+        </p:txBody>
+      </p:sp>
+    </p:spTree>
+    <p:extLst>
+      <p:ext uri="{BB962C8B-B14F-4D97-AF65-F5344CB8AC3E}">
+        <p14:creationId xmlns:p14="http://schemas.microsoft.com/office/powerpoint/2010/main" val="2512639797"/>
+      </p:ext>
+    </p:extLst>
+  </p:cSld>
+  <p:clrMapOvr>
+    <a:masterClrMapping/>
+  </p:clrMapOvr>
+</p:sld>
+</file>
+
+<file path=ppt/slides/slide136.xml><?xml version="1.0" encoding="utf-8"?>
+<p:sld xmlns:a="http://schemas.openxmlformats.org/drawingml/2006/main" xmlns:r="http://schemas.openxmlformats.org/officeDocument/2006/relationships" xmlns:p="http://schemas.openxmlformats.org/presentationml/2006/main">
+  <p:cSld>
+    <p:spTree>
+      <p:nvGrpSpPr>
+        <p:cNvPr id="1" name=""/>
+        <p:cNvGrpSpPr/>
+        <p:nvPr/>
+      </p:nvGrpSpPr>
+      <p:grpSpPr>
+        <a:xfrm>
+          <a:off x="0" y="0"/>
+          <a:ext cx="0" cy="0"/>
+          <a:chOff x="0" y="0"/>
+          <a:chExt cx="0" cy="0"/>
+        </a:xfrm>
+      </p:grpSpPr>
+      <p:sp>
+        <p:nvSpPr>
+          <p:cNvPr id="2" name="Title 1">
+            <a:extLst>
+              <a:ext uri="{FF2B5EF4-FFF2-40B4-BE49-F238E27FC236}">
+                <a16:creationId xmlns:a16="http://schemas.microsoft.com/office/drawing/2014/main" id="{8343C4B2-006A-DF53-D1A7-CAE5626E527C}"/>
+              </a:ext>
+            </a:extLst>
+          </p:cNvPr>
+          <p:cNvSpPr>
+            <a:spLocks noGrp="1"/>
+          </p:cNvSpPr>
+          <p:nvPr>
+            <p:ph type="title"/>
+          </p:nvPr>
+        </p:nvSpPr>
+        <p:spPr>
+          <a:xfrm>
+            <a:off x="838200" y="0"/>
+            <a:ext cx="10515600" cy="681037"/>
+          </a:xfrm>
+        </p:spPr>
+        <p:txBody>
+          <a:bodyPr>
+            <a:normAutofit fontScale="90000"/>
+          </a:bodyPr>
+          <a:lstStyle/>
+          <a:p>
+            <a:r>
+              <a:rPr lang="en-US" b="1"/>
+              <a:t>requests that have exactly 3 guarantors</a:t>
+            </a:r>
+            <a:r>
+              <a:rPr lang="en-US"/>
+              <a:t>,</a:t>
+            </a:r>
+          </a:p>
+        </p:txBody>
+      </p:sp>
+      <p:pic>
+        <p:nvPicPr>
+          <p:cNvPr id="5" name="Content Placeholder 4">
+            <a:extLst>
+              <a:ext uri="{FF2B5EF4-FFF2-40B4-BE49-F238E27FC236}">
+                <a16:creationId xmlns:a16="http://schemas.microsoft.com/office/drawing/2014/main" id="{A06D1DA7-6CB1-1A7F-2248-A23959DDA755}"/>
+              </a:ext>
+            </a:extLst>
+          </p:cNvPr>
+          <p:cNvPicPr>
+            <a:picLocks noGrp="1" noChangeAspect="1"/>
+          </p:cNvPicPr>
+          <p:nvPr>
+            <p:ph idx="1"/>
+          </p:nvPr>
+        </p:nvPicPr>
+        <p:blipFill>
+          <a:blip r:embed="rId2"/>
+          <a:stretch>
+            <a:fillRect/>
+          </a:stretch>
+        </p:blipFill>
+        <p:spPr>
+          <a:xfrm>
+            <a:off x="406575" y="681037"/>
+            <a:ext cx="4004558" cy="1501709"/>
+          </a:xfrm>
+          <a:prstGeom prst="rect">
+            <a:avLst/>
+          </a:prstGeom>
+        </p:spPr>
+      </p:pic>
+      <p:pic>
+        <p:nvPicPr>
+          <p:cNvPr id="7" name="Picture 6">
+            <a:extLst>
+              <a:ext uri="{FF2B5EF4-FFF2-40B4-BE49-F238E27FC236}">
+                <a16:creationId xmlns:a16="http://schemas.microsoft.com/office/drawing/2014/main" id="{4DBA4ABC-FBAF-95DC-41B0-6F15A2B8A627}"/>
+              </a:ext>
+            </a:extLst>
+          </p:cNvPr>
+          <p:cNvPicPr>
+            <a:picLocks noChangeAspect="1"/>
+          </p:cNvPicPr>
+          <p:nvPr/>
+        </p:nvPicPr>
+        <p:blipFill>
+          <a:blip r:embed="rId3"/>
+          <a:stretch>
+            <a:fillRect/>
+          </a:stretch>
+        </p:blipFill>
+        <p:spPr>
+          <a:xfrm>
+            <a:off x="406575" y="2674971"/>
+            <a:ext cx="5037492" cy="2880090"/>
+          </a:xfrm>
+          <a:prstGeom prst="rect">
+            <a:avLst/>
+          </a:prstGeom>
+        </p:spPr>
+      </p:pic>
+      <p:pic>
+        <p:nvPicPr>
+          <p:cNvPr id="9" name="Picture 8">
+            <a:extLst>
+              <a:ext uri="{FF2B5EF4-FFF2-40B4-BE49-F238E27FC236}">
+                <a16:creationId xmlns:a16="http://schemas.microsoft.com/office/drawing/2014/main" id="{41388B5A-88D2-EC60-40A4-9E8E5AF9BDE9}"/>
+              </a:ext>
+            </a:extLst>
+          </p:cNvPr>
+          <p:cNvPicPr>
+            <a:picLocks noChangeAspect="1"/>
+          </p:cNvPicPr>
+          <p:nvPr/>
+        </p:nvPicPr>
+        <p:blipFill>
+          <a:blip r:embed="rId4"/>
+          <a:stretch>
+            <a:fillRect/>
+          </a:stretch>
+        </p:blipFill>
+        <p:spPr>
+          <a:xfrm>
+            <a:off x="5712735" y="2674971"/>
+            <a:ext cx="4184797" cy="3131545"/>
+          </a:xfrm>
+          <a:prstGeom prst="rect">
+            <a:avLst/>
+          </a:prstGeom>
+        </p:spPr>
+      </p:pic>
+    </p:spTree>
+    <p:extLst>
+      <p:ext uri="{BB962C8B-B14F-4D97-AF65-F5344CB8AC3E}">
+        <p14:creationId xmlns:p14="http://schemas.microsoft.com/office/powerpoint/2010/main" val="1014609718"/>
+      </p:ext>
+    </p:extLst>
+  </p:cSld>
+  <p:clrMapOvr>
+    <a:masterClrMapping/>
+  </p:clrMapOvr>
+</p:sld>
+</file>
+
+<file path=ppt/slides/slide137.xml><?xml version="1.0" encoding="utf-8"?>
+<p:sld xmlns:a="http://schemas.openxmlformats.org/drawingml/2006/main" xmlns:r="http://schemas.openxmlformats.org/officeDocument/2006/relationships" xmlns:p="http://schemas.openxmlformats.org/presentationml/2006/main">
+  <p:cSld>
+    <p:spTree>
+      <p:nvGrpSpPr>
+        <p:cNvPr id="1" name=""/>
+        <p:cNvGrpSpPr/>
+        <p:nvPr/>
+      </p:nvGrpSpPr>
+      <p:grpSpPr>
+        <a:xfrm>
+          <a:off x="0" y="0"/>
+          <a:ext cx="0" cy="0"/>
+          <a:chOff x="0" y="0"/>
+          <a:chExt cx="0" cy="0"/>
+        </a:xfrm>
+      </p:grpSpPr>
+      <p:sp>
+        <p:nvSpPr>
+          <p:cNvPr id="2" name="Title 1">
+            <a:extLst>
+              <a:ext uri="{FF2B5EF4-FFF2-40B4-BE49-F238E27FC236}">
+                <a16:creationId xmlns:a16="http://schemas.microsoft.com/office/drawing/2014/main" id="{B43EF63E-993C-55D5-954C-8FFFA384801D}"/>
+              </a:ext>
+            </a:extLst>
+          </p:cNvPr>
+          <p:cNvSpPr>
+            <a:spLocks noGrp="1"/>
+          </p:cNvSpPr>
+          <p:nvPr>
+            <p:ph type="title"/>
+          </p:nvPr>
+        </p:nvSpPr>
+        <p:spPr>
+          <a:xfrm>
+            <a:off x="838200" y="60326"/>
+            <a:ext cx="10515600" cy="896408"/>
+          </a:xfrm>
+        </p:spPr>
+        <p:txBody>
+          <a:bodyPr>
+            <a:normAutofit fontScale="90000"/>
+          </a:bodyPr>
+          <a:lstStyle/>
+          <a:p>
+            <a:r>
+              <a:rPr lang="en-US" b="1"/>
+              <a:t>requests that do not have a matching guarantor.</a:t>
+            </a:r>
+          </a:p>
+        </p:txBody>
+      </p:sp>
+      <p:pic>
+        <p:nvPicPr>
+          <p:cNvPr id="5" name="Content Placeholder 4">
+            <a:extLst>
+              <a:ext uri="{FF2B5EF4-FFF2-40B4-BE49-F238E27FC236}">
+                <a16:creationId xmlns:a16="http://schemas.microsoft.com/office/drawing/2014/main" id="{32D338B1-8532-CF9E-C4C0-D11537EE9B8B}"/>
+              </a:ext>
+            </a:extLst>
+          </p:cNvPr>
+          <p:cNvPicPr>
+            <a:picLocks noGrp="1" noChangeAspect="1"/>
+          </p:cNvPicPr>
+          <p:nvPr>
+            <p:ph idx="1"/>
+          </p:nvPr>
+        </p:nvPicPr>
+        <p:blipFill>
+          <a:blip r:embed="rId2"/>
+          <a:stretch>
+            <a:fillRect/>
+          </a:stretch>
+        </p:blipFill>
+        <p:spPr>
+          <a:xfrm>
+            <a:off x="474839" y="1024467"/>
+            <a:ext cx="4918427" cy="2237768"/>
+          </a:xfrm>
+          <a:prstGeom prst="rect">
+            <a:avLst/>
+          </a:prstGeom>
+        </p:spPr>
+      </p:pic>
+      <p:pic>
+        <p:nvPicPr>
+          <p:cNvPr id="7" name="Picture 6">
+            <a:extLst>
+              <a:ext uri="{FF2B5EF4-FFF2-40B4-BE49-F238E27FC236}">
+                <a16:creationId xmlns:a16="http://schemas.microsoft.com/office/drawing/2014/main" id="{E60A2EE4-4A55-3467-EF02-A4E9EA06A029}"/>
+              </a:ext>
+            </a:extLst>
+          </p:cNvPr>
+          <p:cNvPicPr>
+            <a:picLocks noChangeAspect="1"/>
+          </p:cNvPicPr>
+          <p:nvPr/>
+        </p:nvPicPr>
+        <p:blipFill>
+          <a:blip r:embed="rId3"/>
+          <a:stretch>
+            <a:fillRect/>
+          </a:stretch>
+        </p:blipFill>
+        <p:spPr>
+          <a:xfrm>
+            <a:off x="474839" y="3493715"/>
+            <a:ext cx="5341761" cy="1947891"/>
+          </a:xfrm>
+          <a:prstGeom prst="rect">
+            <a:avLst/>
+          </a:prstGeom>
+        </p:spPr>
+      </p:pic>
+    </p:spTree>
+    <p:extLst>
+      <p:ext uri="{BB962C8B-B14F-4D97-AF65-F5344CB8AC3E}">
+        <p14:creationId xmlns:p14="http://schemas.microsoft.com/office/powerpoint/2010/main" val="2047640899"/>
+      </p:ext>
+    </p:extLst>
+  </p:cSld>
+  <p:clrMapOvr>
+    <a:masterClrMapping/>
+  </p:clrMapOvr>
+</p:sld>
+</file>
+
+<file path=ppt/slides/slide138.xml><?xml version="1.0" encoding="utf-8"?>
+<p:sld xmlns:a="http://schemas.openxmlformats.org/drawingml/2006/main" xmlns:r="http://schemas.openxmlformats.org/officeDocument/2006/relationships" xmlns:p="http://schemas.openxmlformats.org/presentationml/2006/main">
+  <p:cSld>
+    <p:spTree>
+      <p:nvGrpSpPr>
+        <p:cNvPr id="1" name="">
+          <a:extLst>
+            <a:ext uri="{FF2B5EF4-FFF2-40B4-BE49-F238E27FC236}">
+              <a16:creationId xmlns:a16="http://schemas.microsoft.com/office/drawing/2014/main" id="{2015D183-D6A9-B54F-DF54-61F39311ED97}"/>
+            </a:ext>
+          </a:extLst>
+        </p:cNvPr>
+        <p:cNvGrpSpPr/>
+        <p:nvPr/>
+      </p:nvGrpSpPr>
+      <p:grpSpPr>
+        <a:xfrm>
+          <a:off x="0" y="0"/>
+          <a:ext cx="0" cy="0"/>
+          <a:chOff x="0" y="0"/>
+          <a:chExt cx="0" cy="0"/>
+        </a:xfrm>
+      </p:grpSpPr>
+      <p:sp>
+        <p:nvSpPr>
+          <p:cNvPr id="2" name="Title 1">
+            <a:extLst>
+              <a:ext uri="{FF2B5EF4-FFF2-40B4-BE49-F238E27FC236}">
+                <a16:creationId xmlns:a16="http://schemas.microsoft.com/office/drawing/2014/main" id="{80E6560B-A0A2-3FEC-C7E9-E927DC28C068}"/>
+              </a:ext>
+            </a:extLst>
+          </p:cNvPr>
+          <p:cNvSpPr>
+            <a:spLocks noGrp="1"/>
+          </p:cNvSpPr>
+          <p:nvPr>
+            <p:ph type="title"/>
+          </p:nvPr>
+        </p:nvSpPr>
+        <p:spPr>
+          <a:xfrm>
+            <a:off x="838200" y="1787525"/>
+            <a:ext cx="10515600" cy="2662555"/>
+          </a:xfrm>
+        </p:spPr>
+        <p:txBody>
+          <a:bodyPr>
+            <a:normAutofit/>
+          </a:bodyPr>
+          <a:lstStyle/>
+          <a:p>
+            <a:pPr algn="ctr"/>
+            <a:r>
+              <a:rPr lang="en-US" sz="8000" b="1">
+                <a:solidFill>
+                  <a:srgbClr val="FF0000"/>
+                </a:solidFill>
+              </a:rPr>
+              <a:t>End Question </a:t>
+            </a:r>
+          </a:p>
+        </p:txBody>
+      </p:sp>
+    </p:spTree>
+    <p:extLst>
+      <p:ext uri="{BB962C8B-B14F-4D97-AF65-F5344CB8AC3E}">
+        <p14:creationId xmlns:p14="http://schemas.microsoft.com/office/powerpoint/2010/main" val="4185511115"/>
+      </p:ext>
+    </p:extLst>
+  </p:cSld>
+  <p:clrMapOvr>
+    <a:masterClrMapping/>
+  </p:clrMapOvr>
+</p:sld>
+</file>
+
+<file path=ppt/slides/slide139.xml><?xml version="1.0" encoding="utf-8"?>
 <p:sld xmlns:a="http://schemas.openxmlformats.org/drawingml/2006/main" xmlns:r="http://schemas.openxmlformats.org/officeDocument/2006/relationships" xmlns:p="http://schemas.openxmlformats.org/presentationml/2006/main">
   <p:cSld>
     <p:spTree>
@@ -18573,700 +19030,6 @@
     <p:extLst>
       <p:ext uri="{BB962C8B-B14F-4D97-AF65-F5344CB8AC3E}">
         <p14:creationId xmlns:p14="http://schemas.microsoft.com/office/powerpoint/2010/main" val="1829582675"/>
-      </p:ext>
-    </p:extLst>
-  </p:cSld>
-  <p:clrMapOvr>
-    <a:masterClrMapping/>
-  </p:clrMapOvr>
-</p:sld>
-</file>
-
-<file path=ppt/slides/slide136.xml><?xml version="1.0" encoding="utf-8"?>
-<p:sld xmlns:a="http://schemas.openxmlformats.org/drawingml/2006/main" xmlns:r="http://schemas.openxmlformats.org/officeDocument/2006/relationships" xmlns:p="http://schemas.openxmlformats.org/presentationml/2006/main">
-  <p:cSld>
-    <p:spTree>
-      <p:nvGrpSpPr>
-        <p:cNvPr id="1" name=""/>
-        <p:cNvGrpSpPr/>
-        <p:nvPr/>
-      </p:nvGrpSpPr>
-      <p:grpSpPr>
-        <a:xfrm>
-          <a:off x="0" y="0"/>
-          <a:ext cx="0" cy="0"/>
-          <a:chOff x="0" y="0"/>
-          <a:chExt cx="0" cy="0"/>
-        </a:xfrm>
-      </p:grpSpPr>
-      <p:sp>
-        <p:nvSpPr>
-          <p:cNvPr id="2" name="Title 1">
-            <a:extLst>
-              <a:ext uri="{FF2B5EF4-FFF2-40B4-BE49-F238E27FC236}">
-                <a16:creationId xmlns:a16="http://schemas.microsoft.com/office/drawing/2014/main" id="{605A69E6-2E9C-D432-B8B8-BA15F3B4C7CE}"/>
-              </a:ext>
-            </a:extLst>
-          </p:cNvPr>
-          <p:cNvSpPr>
-            <a:spLocks noGrp="1"/>
-          </p:cNvSpPr>
-          <p:nvPr>
-            <p:ph type="title"/>
-          </p:nvPr>
-        </p:nvSpPr>
-        <p:spPr>
-          <a:xfrm>
-            <a:off x="838200" y="0"/>
-            <a:ext cx="10515600" cy="739775"/>
-          </a:xfrm>
-        </p:spPr>
-        <p:txBody>
-          <a:bodyPr/>
-          <a:lstStyle/>
-          <a:p>
-            <a:r>
-              <a:rPr lang="en-US"/>
-              <a:t>Subquery select</a:t>
-            </a:r>
-          </a:p>
-        </p:txBody>
-      </p:sp>
-      <p:sp>
-        <p:nvSpPr>
-          <p:cNvPr id="3" name="Content Placeholder 2">
-            <a:extLst>
-              <a:ext uri="{FF2B5EF4-FFF2-40B4-BE49-F238E27FC236}">
-                <a16:creationId xmlns:a16="http://schemas.microsoft.com/office/drawing/2014/main" id="{0EDBEDEF-5C07-DD63-746B-8A0750CB0331}"/>
-              </a:ext>
-            </a:extLst>
-          </p:cNvPr>
-          <p:cNvSpPr>
-            <a:spLocks noGrp="1"/>
-          </p:cNvSpPr>
-          <p:nvPr>
-            <p:ph idx="1"/>
-          </p:nvPr>
-        </p:nvSpPr>
-        <p:spPr>
-          <a:xfrm>
-            <a:off x="419100" y="739775"/>
-            <a:ext cx="10934700" cy="5437188"/>
-          </a:xfrm>
-        </p:spPr>
-        <p:txBody>
-          <a:bodyPr>
-            <a:normAutofit/>
-          </a:bodyPr>
-          <a:lstStyle/>
-          <a:p>
-            <a:r>
-              <a:rPr lang="en-US" sz="2400"/>
-              <a:t>Subquery inside the select statement also called scalar subquery</a:t>
-            </a:r>
-          </a:p>
-          <a:p>
-            <a:r>
-              <a:rPr lang="en-US" sz="2400"/>
-              <a:t>Select inside select must return one column</a:t>
-            </a:r>
-          </a:p>
-        </p:txBody>
-      </p:sp>
-      <p:pic>
-        <p:nvPicPr>
-          <p:cNvPr id="5" name="Picture 4">
-            <a:extLst>
-              <a:ext uri="{FF2B5EF4-FFF2-40B4-BE49-F238E27FC236}">
-                <a16:creationId xmlns:a16="http://schemas.microsoft.com/office/drawing/2014/main" id="{CF4A2194-47D1-D90B-CE7E-0C2754904AB8}"/>
-              </a:ext>
-            </a:extLst>
-          </p:cNvPr>
-          <p:cNvPicPr>
-            <a:picLocks noChangeAspect="1"/>
-          </p:cNvPicPr>
-          <p:nvPr/>
-        </p:nvPicPr>
-        <p:blipFill>
-          <a:blip r:embed="rId2"/>
-          <a:stretch>
-            <a:fillRect/>
-          </a:stretch>
-        </p:blipFill>
-        <p:spPr>
-          <a:xfrm>
-            <a:off x="97009" y="1560183"/>
-            <a:ext cx="4313065" cy="5200485"/>
-          </a:xfrm>
-          <a:prstGeom prst="rect">
-            <a:avLst/>
-          </a:prstGeom>
-        </p:spPr>
-      </p:pic>
-      <p:pic>
-        <p:nvPicPr>
-          <p:cNvPr id="7" name="Picture 6">
-            <a:extLst>
-              <a:ext uri="{FF2B5EF4-FFF2-40B4-BE49-F238E27FC236}">
-                <a16:creationId xmlns:a16="http://schemas.microsoft.com/office/drawing/2014/main" id="{D129E1BB-3B6A-4261-E443-184814A6F350}"/>
-              </a:ext>
-            </a:extLst>
-          </p:cNvPr>
-          <p:cNvPicPr>
-            <a:picLocks noChangeAspect="1"/>
-          </p:cNvPicPr>
-          <p:nvPr/>
-        </p:nvPicPr>
-        <p:blipFill>
-          <a:blip r:embed="rId3"/>
-          <a:stretch>
-            <a:fillRect/>
-          </a:stretch>
-        </p:blipFill>
-        <p:spPr>
-          <a:xfrm>
-            <a:off x="4501281" y="2701201"/>
-            <a:ext cx="6157193" cy="2319849"/>
-          </a:xfrm>
-          <a:prstGeom prst="rect">
-            <a:avLst/>
-          </a:prstGeom>
-        </p:spPr>
-      </p:pic>
-    </p:spTree>
-    <p:extLst>
-      <p:ext uri="{BB962C8B-B14F-4D97-AF65-F5344CB8AC3E}">
-        <p14:creationId xmlns:p14="http://schemas.microsoft.com/office/powerpoint/2010/main" val="4217834380"/>
-      </p:ext>
-    </p:extLst>
-  </p:cSld>
-  <p:clrMapOvr>
-    <a:masterClrMapping/>
-  </p:clrMapOvr>
-</p:sld>
-</file>
-
-<file path=ppt/slides/slide137.xml><?xml version="1.0" encoding="utf-8"?>
-<p:sld xmlns:a="http://schemas.openxmlformats.org/drawingml/2006/main" xmlns:r="http://schemas.openxmlformats.org/officeDocument/2006/relationships" xmlns:p="http://schemas.openxmlformats.org/presentationml/2006/main">
-  <p:cSld>
-    <p:spTree>
-      <p:nvGrpSpPr>
-        <p:cNvPr id="1" name=""/>
-        <p:cNvGrpSpPr/>
-        <p:nvPr/>
-      </p:nvGrpSpPr>
-      <p:grpSpPr>
-        <a:xfrm>
-          <a:off x="0" y="0"/>
-          <a:ext cx="0" cy="0"/>
-          <a:chOff x="0" y="0"/>
-          <a:chExt cx="0" cy="0"/>
-        </a:xfrm>
-      </p:grpSpPr>
-      <p:sp>
-        <p:nvSpPr>
-          <p:cNvPr id="2" name="Title 1">
-            <a:extLst>
-              <a:ext uri="{FF2B5EF4-FFF2-40B4-BE49-F238E27FC236}">
-                <a16:creationId xmlns:a16="http://schemas.microsoft.com/office/drawing/2014/main" id="{D0971D68-AD5A-A4E1-8CA9-4AC061B3A465}"/>
-              </a:ext>
-            </a:extLst>
-          </p:cNvPr>
-          <p:cNvSpPr>
-            <a:spLocks noGrp="1"/>
-          </p:cNvSpPr>
-          <p:nvPr>
-            <p:ph type="title"/>
-          </p:nvPr>
-        </p:nvSpPr>
-        <p:spPr>
-          <a:xfrm>
-            <a:off x="838200" y="1"/>
-            <a:ext cx="10515600" cy="609600"/>
-          </a:xfrm>
-        </p:spPr>
-        <p:txBody>
-          <a:bodyPr>
-            <a:normAutofit fontScale="90000"/>
-          </a:bodyPr>
-          <a:lstStyle/>
-          <a:p>
-            <a:r>
-              <a:rPr lang="en-US"/>
-              <a:t>Select with insert</a:t>
-            </a:r>
-          </a:p>
-        </p:txBody>
-      </p:sp>
-      <p:pic>
-        <p:nvPicPr>
-          <p:cNvPr id="5" name="Content Placeholder 4">
-            <a:extLst>
-              <a:ext uri="{FF2B5EF4-FFF2-40B4-BE49-F238E27FC236}">
-                <a16:creationId xmlns:a16="http://schemas.microsoft.com/office/drawing/2014/main" id="{6B68C869-C0DE-E101-21ED-B10A5BD88C4E}"/>
-              </a:ext>
-            </a:extLst>
-          </p:cNvPr>
-          <p:cNvPicPr>
-            <a:picLocks noGrp="1" noChangeAspect="1"/>
-          </p:cNvPicPr>
-          <p:nvPr>
-            <p:ph idx="1"/>
-          </p:nvPr>
-        </p:nvPicPr>
-        <p:blipFill>
-          <a:blip r:embed="rId2"/>
-          <a:stretch>
-            <a:fillRect/>
-          </a:stretch>
-        </p:blipFill>
-        <p:spPr>
-          <a:xfrm>
-            <a:off x="681791" y="796185"/>
-            <a:ext cx="7595434" cy="3993606"/>
-          </a:xfrm>
-          <a:prstGeom prst="rect">
-            <a:avLst/>
-          </a:prstGeom>
-        </p:spPr>
-      </p:pic>
-    </p:spTree>
-    <p:extLst>
-      <p:ext uri="{BB962C8B-B14F-4D97-AF65-F5344CB8AC3E}">
-        <p14:creationId xmlns:p14="http://schemas.microsoft.com/office/powerpoint/2010/main" val="1706348807"/>
-      </p:ext>
-    </p:extLst>
-  </p:cSld>
-  <p:clrMapOvr>
-    <a:masterClrMapping/>
-  </p:clrMapOvr>
-</p:sld>
-</file>
-
-<file path=ppt/slides/slide138.xml><?xml version="1.0" encoding="utf-8"?>
-<p:sld xmlns:a="http://schemas.openxmlformats.org/drawingml/2006/main" xmlns:r="http://schemas.openxmlformats.org/officeDocument/2006/relationships" xmlns:p="http://schemas.openxmlformats.org/presentationml/2006/main">
-  <p:cSld>
-    <p:spTree>
-      <p:nvGrpSpPr>
-        <p:cNvPr id="1" name=""/>
-        <p:cNvGrpSpPr/>
-        <p:nvPr/>
-      </p:nvGrpSpPr>
-      <p:grpSpPr>
-        <a:xfrm>
-          <a:off x="0" y="0"/>
-          <a:ext cx="0" cy="0"/>
-          <a:chOff x="0" y="0"/>
-          <a:chExt cx="0" cy="0"/>
-        </a:xfrm>
-      </p:grpSpPr>
-      <p:sp>
-        <p:nvSpPr>
-          <p:cNvPr id="2" name="Title 1">
-            <a:extLst>
-              <a:ext uri="{FF2B5EF4-FFF2-40B4-BE49-F238E27FC236}">
-                <a16:creationId xmlns:a16="http://schemas.microsoft.com/office/drawing/2014/main" id="{EBED0D0B-3E53-ADDB-DAA0-A80E7D0F1CF5}"/>
-              </a:ext>
-            </a:extLst>
-          </p:cNvPr>
-          <p:cNvSpPr>
-            <a:spLocks noGrp="1"/>
-          </p:cNvSpPr>
-          <p:nvPr>
-            <p:ph type="title"/>
-          </p:nvPr>
-        </p:nvSpPr>
-        <p:spPr/>
-        <p:txBody>
-          <a:bodyPr/>
-          <a:lstStyle/>
-          <a:p>
-            <a:r>
-              <a:rPr lang="en-US"/>
-              <a:t>Select insert join</a:t>
-            </a:r>
-          </a:p>
-        </p:txBody>
-      </p:sp>
-      <p:pic>
-        <p:nvPicPr>
-          <p:cNvPr id="5" name="Content Placeholder 4">
-            <a:extLst>
-              <a:ext uri="{FF2B5EF4-FFF2-40B4-BE49-F238E27FC236}">
-                <a16:creationId xmlns:a16="http://schemas.microsoft.com/office/drawing/2014/main" id="{1DCBC852-A487-3D6A-C494-C889594B965C}"/>
-              </a:ext>
-            </a:extLst>
-          </p:cNvPr>
-          <p:cNvPicPr>
-            <a:picLocks noGrp="1" noChangeAspect="1"/>
-          </p:cNvPicPr>
-          <p:nvPr>
-            <p:ph idx="1"/>
-          </p:nvPr>
-        </p:nvPicPr>
-        <p:blipFill>
-          <a:blip r:embed="rId2"/>
-          <a:stretch>
-            <a:fillRect/>
-          </a:stretch>
-        </p:blipFill>
-        <p:spPr>
-          <a:xfrm>
-            <a:off x="662469" y="1690688"/>
-            <a:ext cx="6890856" cy="4126782"/>
-          </a:xfrm>
-          <a:prstGeom prst="rect">
-            <a:avLst/>
-          </a:prstGeom>
-        </p:spPr>
-      </p:pic>
-    </p:spTree>
-    <p:extLst>
-      <p:ext uri="{BB962C8B-B14F-4D97-AF65-F5344CB8AC3E}">
-        <p14:creationId xmlns:p14="http://schemas.microsoft.com/office/powerpoint/2010/main" val="854464040"/>
-      </p:ext>
-    </p:extLst>
-  </p:cSld>
-  <p:clrMapOvr>
-    <a:masterClrMapping/>
-  </p:clrMapOvr>
-</p:sld>
-</file>
-
-<file path=ppt/slides/slide139.xml><?xml version="1.0" encoding="utf-8"?>
-<p:sld xmlns:a="http://schemas.openxmlformats.org/drawingml/2006/main" xmlns:r="http://schemas.openxmlformats.org/officeDocument/2006/relationships" xmlns:p="http://schemas.openxmlformats.org/presentationml/2006/main">
-  <p:cSld>
-    <p:spTree>
-      <p:nvGrpSpPr>
-        <p:cNvPr id="1" name=""/>
-        <p:cNvGrpSpPr/>
-        <p:nvPr/>
-      </p:nvGrpSpPr>
-      <p:grpSpPr>
-        <a:xfrm>
-          <a:off x="0" y="0"/>
-          <a:ext cx="0" cy="0"/>
-          <a:chOff x="0" y="0"/>
-          <a:chExt cx="0" cy="0"/>
-        </a:xfrm>
-      </p:grpSpPr>
-      <p:sp>
-        <p:nvSpPr>
-          <p:cNvPr id="2" name="Title 1">
-            <a:extLst>
-              <a:ext uri="{FF2B5EF4-FFF2-40B4-BE49-F238E27FC236}">
-                <a16:creationId xmlns:a16="http://schemas.microsoft.com/office/drawing/2014/main" id="{3832F644-88A7-C373-7644-575978A6F955}"/>
-              </a:ext>
-            </a:extLst>
-          </p:cNvPr>
-          <p:cNvSpPr>
-            <a:spLocks noGrp="1"/>
-          </p:cNvSpPr>
-          <p:nvPr>
-            <p:ph type="title"/>
-          </p:nvPr>
-        </p:nvSpPr>
-        <p:spPr>
-          <a:xfrm>
-            <a:off x="838200" y="88127"/>
-            <a:ext cx="10801350" cy="863600"/>
-          </a:xfrm>
-        </p:spPr>
-        <p:txBody>
-          <a:bodyPr/>
-          <a:lstStyle/>
-          <a:p>
-            <a:r>
-              <a:rPr lang="en-US"/>
-              <a:t>Give value to variable via select</a:t>
-            </a:r>
-          </a:p>
-        </p:txBody>
-      </p:sp>
-      <p:sp>
-        <p:nvSpPr>
-          <p:cNvPr id="5" name="TextBox 4">
-            <a:extLst>
-              <a:ext uri="{FF2B5EF4-FFF2-40B4-BE49-F238E27FC236}">
-                <a16:creationId xmlns:a16="http://schemas.microsoft.com/office/drawing/2014/main" id="{36496A97-4945-7927-ED4C-48D11FE08708}"/>
-              </a:ext>
-            </a:extLst>
-          </p:cNvPr>
-          <p:cNvSpPr txBox="1"/>
-          <p:nvPr/>
-        </p:nvSpPr>
-        <p:spPr>
-          <a:xfrm>
-            <a:off x="428624" y="1142613"/>
-            <a:ext cx="8134351" cy="369332"/>
-          </a:xfrm>
-          <a:prstGeom prst="rect">
-            <a:avLst/>
-          </a:prstGeom>
-          <a:noFill/>
-        </p:spPr>
-        <p:txBody>
-          <a:bodyPr wrap="square">
-            <a:spAutoFit/>
-          </a:bodyPr>
-          <a:lstStyle/>
-          <a:p>
-            <a:r>
-              <a:rPr lang="en-US">
-                <a:solidFill>
-                  <a:srgbClr val="0000FF"/>
-                </a:solidFill>
-                <a:latin typeface="Consolas" panose="020B0609020204030204" pitchFamily="49" charset="0"/>
-              </a:rPr>
-              <a:t>DECLARE</a:t>
-            </a:r>
-            <a:r>
-              <a:rPr lang="en-US">
-                <a:solidFill>
-                  <a:srgbClr val="000000"/>
-                </a:solidFill>
-                <a:latin typeface="Consolas" panose="020B0609020204030204" pitchFamily="49" charset="0"/>
-              </a:rPr>
-              <a:t> @CustomerId </a:t>
-            </a:r>
-            <a:r>
-              <a:rPr lang="en-US">
-                <a:solidFill>
-                  <a:srgbClr val="0000FF"/>
-                </a:solidFill>
-                <a:latin typeface="Consolas" panose="020B0609020204030204" pitchFamily="49" charset="0"/>
-              </a:rPr>
-              <a:t>DECIMAL</a:t>
-            </a:r>
-            <a:r>
-              <a:rPr lang="en-US">
-                <a:solidFill>
-                  <a:srgbClr val="808080"/>
-                </a:solidFill>
-                <a:latin typeface="Consolas" panose="020B0609020204030204" pitchFamily="49" charset="0"/>
-              </a:rPr>
-              <a:t>(</a:t>
-            </a:r>
-            <a:r>
-              <a:rPr lang="en-US">
-                <a:solidFill>
-                  <a:srgbClr val="000000"/>
-                </a:solidFill>
-                <a:latin typeface="Consolas" panose="020B0609020204030204" pitchFamily="49" charset="0"/>
-              </a:rPr>
-              <a:t>18</a:t>
-            </a:r>
-            <a:r>
-              <a:rPr lang="en-US">
-                <a:solidFill>
-                  <a:srgbClr val="808080"/>
-                </a:solidFill>
-                <a:latin typeface="Consolas" panose="020B0609020204030204" pitchFamily="49" charset="0"/>
-              </a:rPr>
-              <a:t>,</a:t>
-            </a:r>
-            <a:r>
-              <a:rPr lang="en-US">
-                <a:solidFill>
-                  <a:srgbClr val="000000"/>
-                </a:solidFill>
-                <a:latin typeface="Consolas" panose="020B0609020204030204" pitchFamily="49" charset="0"/>
-              </a:rPr>
-              <a:t>0</a:t>
-            </a:r>
-            <a:r>
-              <a:rPr lang="en-US">
-                <a:solidFill>
-                  <a:srgbClr val="808080"/>
-                </a:solidFill>
-                <a:latin typeface="Consolas" panose="020B0609020204030204" pitchFamily="49" charset="0"/>
-              </a:rPr>
-              <a:t>);</a:t>
-            </a:r>
-            <a:endParaRPr lang="en-US">
-              <a:solidFill>
-                <a:srgbClr val="000000"/>
-              </a:solidFill>
-              <a:latin typeface="Consolas" panose="020B0609020204030204" pitchFamily="49" charset="0"/>
-            </a:endParaRPr>
-          </a:p>
-        </p:txBody>
-      </p:sp>
-      <p:sp>
-        <p:nvSpPr>
-          <p:cNvPr id="7" name="TextBox 6">
-            <a:extLst>
-              <a:ext uri="{FF2B5EF4-FFF2-40B4-BE49-F238E27FC236}">
-                <a16:creationId xmlns:a16="http://schemas.microsoft.com/office/drawing/2014/main" id="{ABB313EA-F96F-37A3-6E73-DABCC1307C4A}"/>
-              </a:ext>
-            </a:extLst>
-          </p:cNvPr>
-          <p:cNvSpPr txBox="1"/>
-          <p:nvPr/>
-        </p:nvSpPr>
-        <p:spPr>
-          <a:xfrm>
-            <a:off x="428624" y="1702831"/>
-            <a:ext cx="6096000" cy="1015663"/>
-          </a:xfrm>
-          <a:prstGeom prst="rect">
-            <a:avLst/>
-          </a:prstGeom>
-          <a:noFill/>
-        </p:spPr>
-        <p:txBody>
-          <a:bodyPr wrap="square">
-            <a:spAutoFit/>
-          </a:bodyPr>
-          <a:lstStyle/>
-          <a:p>
-            <a:r>
-              <a:rPr lang="en-US" sz="2000">
-                <a:solidFill>
-                  <a:srgbClr val="0000FF"/>
-                </a:solidFill>
-                <a:latin typeface="Consolas" panose="020B0609020204030204" pitchFamily="49" charset="0"/>
-              </a:rPr>
-              <a:t>SELECT</a:t>
-            </a:r>
-            <a:r>
-              <a:rPr lang="en-US" sz="2000">
-                <a:solidFill>
-                  <a:srgbClr val="000000"/>
-                </a:solidFill>
-                <a:latin typeface="Consolas" panose="020B0609020204030204" pitchFamily="49" charset="0"/>
-              </a:rPr>
-              <a:t>  @CustomerId </a:t>
-            </a:r>
-            <a:r>
-              <a:rPr lang="en-US" sz="2000">
-                <a:solidFill>
-                  <a:srgbClr val="808080"/>
-                </a:solidFill>
-                <a:latin typeface="Consolas" panose="020B0609020204030204" pitchFamily="49" charset="0"/>
-              </a:rPr>
-              <a:t>=</a:t>
-            </a:r>
-            <a:r>
-              <a:rPr lang="en-US" sz="2000">
-                <a:solidFill>
-                  <a:srgbClr val="000000"/>
-                </a:solidFill>
-                <a:latin typeface="Consolas" panose="020B0609020204030204" pitchFamily="49" charset="0"/>
-              </a:rPr>
-              <a:t> Customer_ID</a:t>
-            </a:r>
-          </a:p>
-          <a:p>
-            <a:r>
-              <a:rPr lang="en-US" sz="2000">
-                <a:solidFill>
-                  <a:srgbClr val="0000FF"/>
-                </a:solidFill>
-                <a:latin typeface="Consolas" panose="020B0609020204030204" pitchFamily="49" charset="0"/>
-              </a:rPr>
-              <a:t>FROM</a:t>
-            </a:r>
-            <a:r>
-              <a:rPr lang="en-US" sz="2000">
-                <a:solidFill>
-                  <a:srgbClr val="000000"/>
-                </a:solidFill>
-                <a:latin typeface="Consolas" panose="020B0609020204030204" pitchFamily="49" charset="0"/>
-              </a:rPr>
-              <a:t> SMEs_prod</a:t>
-            </a:r>
-            <a:r>
-              <a:rPr lang="en-US" sz="2000">
-                <a:solidFill>
-                  <a:srgbClr val="808080"/>
-                </a:solidFill>
-                <a:latin typeface="Consolas" panose="020B0609020204030204" pitchFamily="49" charset="0"/>
-              </a:rPr>
-              <a:t>.</a:t>
-            </a:r>
-            <a:r>
-              <a:rPr lang="en-US" sz="2000">
-                <a:solidFill>
-                  <a:srgbClr val="000000"/>
-                </a:solidFill>
-                <a:latin typeface="Consolas" panose="020B0609020204030204" pitchFamily="49" charset="0"/>
-              </a:rPr>
-              <a:t>TWF</a:t>
-            </a:r>
-            <a:r>
-              <a:rPr lang="en-US" sz="2000">
-                <a:solidFill>
-                  <a:srgbClr val="808080"/>
-                </a:solidFill>
-                <a:latin typeface="Consolas" panose="020B0609020204030204" pitchFamily="49" charset="0"/>
-              </a:rPr>
-              <a:t>.</a:t>
-            </a:r>
-            <a:r>
-              <a:rPr lang="en-US" sz="2000">
-                <a:solidFill>
-                  <a:srgbClr val="000000"/>
-                </a:solidFill>
-                <a:latin typeface="Consolas" panose="020B0609020204030204" pitchFamily="49" charset="0"/>
-              </a:rPr>
-              <a:t>Flow_Customers</a:t>
-            </a:r>
-          </a:p>
-          <a:p>
-            <a:r>
-              <a:rPr lang="en-US" sz="2000">
-                <a:solidFill>
-                  <a:srgbClr val="0000FF"/>
-                </a:solidFill>
-                <a:latin typeface="Consolas" panose="020B0609020204030204" pitchFamily="49" charset="0"/>
-              </a:rPr>
-              <a:t>WHERE</a:t>
-            </a:r>
-            <a:r>
-              <a:rPr lang="en-US" sz="2000">
-                <a:solidFill>
-                  <a:srgbClr val="000000"/>
-                </a:solidFill>
-                <a:latin typeface="Consolas" panose="020B0609020204030204" pitchFamily="49" charset="0"/>
-              </a:rPr>
-              <a:t> QID </a:t>
-            </a:r>
-            <a:r>
-              <a:rPr lang="en-US" sz="2000">
-                <a:solidFill>
-                  <a:srgbClr val="808080"/>
-                </a:solidFill>
-                <a:latin typeface="Consolas" panose="020B0609020204030204" pitchFamily="49" charset="0"/>
-              </a:rPr>
-              <a:t>=</a:t>
-            </a:r>
-            <a:r>
-              <a:rPr lang="en-US" sz="2000">
-                <a:solidFill>
-                  <a:srgbClr val="000000"/>
-                </a:solidFill>
-                <a:latin typeface="Consolas" panose="020B0609020204030204" pitchFamily="49" charset="0"/>
-              </a:rPr>
-              <a:t> @QId</a:t>
-            </a:r>
-            <a:r>
-              <a:rPr lang="en-US" sz="2000">
-                <a:solidFill>
-                  <a:srgbClr val="808080"/>
-                </a:solidFill>
-                <a:latin typeface="Consolas" panose="020B0609020204030204" pitchFamily="49" charset="0"/>
-              </a:rPr>
-              <a:t>;</a:t>
-            </a:r>
-            <a:endParaRPr lang="en-US" sz="4800"/>
-          </a:p>
-        </p:txBody>
-      </p:sp>
-    </p:spTree>
-    <p:extLst>
-      <p:ext uri="{BB962C8B-B14F-4D97-AF65-F5344CB8AC3E}">
-        <p14:creationId xmlns:p14="http://schemas.microsoft.com/office/powerpoint/2010/main" val="3951763578"/>
       </p:ext>
     </p:extLst>
   </p:cSld>
@@ -19452,6 +19215,700 @@
           <p:cNvPr id="2" name="Title 1">
             <a:extLst>
               <a:ext uri="{FF2B5EF4-FFF2-40B4-BE49-F238E27FC236}">
+                <a16:creationId xmlns:a16="http://schemas.microsoft.com/office/drawing/2014/main" id="{605A69E6-2E9C-D432-B8B8-BA15F3B4C7CE}"/>
+              </a:ext>
+            </a:extLst>
+          </p:cNvPr>
+          <p:cNvSpPr>
+            <a:spLocks noGrp="1"/>
+          </p:cNvSpPr>
+          <p:nvPr>
+            <p:ph type="title"/>
+          </p:nvPr>
+        </p:nvSpPr>
+        <p:spPr>
+          <a:xfrm>
+            <a:off x="838200" y="0"/>
+            <a:ext cx="10515600" cy="739775"/>
+          </a:xfrm>
+        </p:spPr>
+        <p:txBody>
+          <a:bodyPr/>
+          <a:lstStyle/>
+          <a:p>
+            <a:r>
+              <a:rPr lang="en-US"/>
+              <a:t>Subquery select</a:t>
+            </a:r>
+          </a:p>
+        </p:txBody>
+      </p:sp>
+      <p:sp>
+        <p:nvSpPr>
+          <p:cNvPr id="3" name="Content Placeholder 2">
+            <a:extLst>
+              <a:ext uri="{FF2B5EF4-FFF2-40B4-BE49-F238E27FC236}">
+                <a16:creationId xmlns:a16="http://schemas.microsoft.com/office/drawing/2014/main" id="{0EDBEDEF-5C07-DD63-746B-8A0750CB0331}"/>
+              </a:ext>
+            </a:extLst>
+          </p:cNvPr>
+          <p:cNvSpPr>
+            <a:spLocks noGrp="1"/>
+          </p:cNvSpPr>
+          <p:nvPr>
+            <p:ph idx="1"/>
+          </p:nvPr>
+        </p:nvSpPr>
+        <p:spPr>
+          <a:xfrm>
+            <a:off x="419100" y="739775"/>
+            <a:ext cx="10934700" cy="5437188"/>
+          </a:xfrm>
+        </p:spPr>
+        <p:txBody>
+          <a:bodyPr>
+            <a:normAutofit/>
+          </a:bodyPr>
+          <a:lstStyle/>
+          <a:p>
+            <a:r>
+              <a:rPr lang="en-US" sz="2400"/>
+              <a:t>Subquery inside the select statement also called scalar subquery</a:t>
+            </a:r>
+          </a:p>
+          <a:p>
+            <a:r>
+              <a:rPr lang="en-US" sz="2400"/>
+              <a:t>Select inside select must return one column</a:t>
+            </a:r>
+          </a:p>
+        </p:txBody>
+      </p:sp>
+      <p:pic>
+        <p:nvPicPr>
+          <p:cNvPr id="5" name="Picture 4">
+            <a:extLst>
+              <a:ext uri="{FF2B5EF4-FFF2-40B4-BE49-F238E27FC236}">
+                <a16:creationId xmlns:a16="http://schemas.microsoft.com/office/drawing/2014/main" id="{CF4A2194-47D1-D90B-CE7E-0C2754904AB8}"/>
+              </a:ext>
+            </a:extLst>
+          </p:cNvPr>
+          <p:cNvPicPr>
+            <a:picLocks noChangeAspect="1"/>
+          </p:cNvPicPr>
+          <p:nvPr/>
+        </p:nvPicPr>
+        <p:blipFill>
+          <a:blip r:embed="rId2"/>
+          <a:stretch>
+            <a:fillRect/>
+          </a:stretch>
+        </p:blipFill>
+        <p:spPr>
+          <a:xfrm>
+            <a:off x="97009" y="1560183"/>
+            <a:ext cx="4313065" cy="5200485"/>
+          </a:xfrm>
+          <a:prstGeom prst="rect">
+            <a:avLst/>
+          </a:prstGeom>
+        </p:spPr>
+      </p:pic>
+      <p:pic>
+        <p:nvPicPr>
+          <p:cNvPr id="7" name="Picture 6">
+            <a:extLst>
+              <a:ext uri="{FF2B5EF4-FFF2-40B4-BE49-F238E27FC236}">
+                <a16:creationId xmlns:a16="http://schemas.microsoft.com/office/drawing/2014/main" id="{D129E1BB-3B6A-4261-E443-184814A6F350}"/>
+              </a:ext>
+            </a:extLst>
+          </p:cNvPr>
+          <p:cNvPicPr>
+            <a:picLocks noChangeAspect="1"/>
+          </p:cNvPicPr>
+          <p:nvPr/>
+        </p:nvPicPr>
+        <p:blipFill>
+          <a:blip r:embed="rId3"/>
+          <a:stretch>
+            <a:fillRect/>
+          </a:stretch>
+        </p:blipFill>
+        <p:spPr>
+          <a:xfrm>
+            <a:off x="4501281" y="2701201"/>
+            <a:ext cx="6157193" cy="2319849"/>
+          </a:xfrm>
+          <a:prstGeom prst="rect">
+            <a:avLst/>
+          </a:prstGeom>
+        </p:spPr>
+      </p:pic>
+    </p:spTree>
+    <p:extLst>
+      <p:ext uri="{BB962C8B-B14F-4D97-AF65-F5344CB8AC3E}">
+        <p14:creationId xmlns:p14="http://schemas.microsoft.com/office/powerpoint/2010/main" val="4217834380"/>
+      </p:ext>
+    </p:extLst>
+  </p:cSld>
+  <p:clrMapOvr>
+    <a:masterClrMapping/>
+  </p:clrMapOvr>
+</p:sld>
+</file>
+
+<file path=ppt/slides/slide141.xml><?xml version="1.0" encoding="utf-8"?>
+<p:sld xmlns:a="http://schemas.openxmlformats.org/drawingml/2006/main" xmlns:r="http://schemas.openxmlformats.org/officeDocument/2006/relationships" xmlns:p="http://schemas.openxmlformats.org/presentationml/2006/main">
+  <p:cSld>
+    <p:spTree>
+      <p:nvGrpSpPr>
+        <p:cNvPr id="1" name=""/>
+        <p:cNvGrpSpPr/>
+        <p:nvPr/>
+      </p:nvGrpSpPr>
+      <p:grpSpPr>
+        <a:xfrm>
+          <a:off x="0" y="0"/>
+          <a:ext cx="0" cy="0"/>
+          <a:chOff x="0" y="0"/>
+          <a:chExt cx="0" cy="0"/>
+        </a:xfrm>
+      </p:grpSpPr>
+      <p:sp>
+        <p:nvSpPr>
+          <p:cNvPr id="2" name="Title 1">
+            <a:extLst>
+              <a:ext uri="{FF2B5EF4-FFF2-40B4-BE49-F238E27FC236}">
+                <a16:creationId xmlns:a16="http://schemas.microsoft.com/office/drawing/2014/main" id="{D0971D68-AD5A-A4E1-8CA9-4AC061B3A465}"/>
+              </a:ext>
+            </a:extLst>
+          </p:cNvPr>
+          <p:cNvSpPr>
+            <a:spLocks noGrp="1"/>
+          </p:cNvSpPr>
+          <p:nvPr>
+            <p:ph type="title"/>
+          </p:nvPr>
+        </p:nvSpPr>
+        <p:spPr>
+          <a:xfrm>
+            <a:off x="838200" y="1"/>
+            <a:ext cx="10515600" cy="609600"/>
+          </a:xfrm>
+        </p:spPr>
+        <p:txBody>
+          <a:bodyPr>
+            <a:normAutofit fontScale="90000"/>
+          </a:bodyPr>
+          <a:lstStyle/>
+          <a:p>
+            <a:r>
+              <a:rPr lang="en-US"/>
+              <a:t>Select with insert</a:t>
+            </a:r>
+          </a:p>
+        </p:txBody>
+      </p:sp>
+      <p:pic>
+        <p:nvPicPr>
+          <p:cNvPr id="5" name="Content Placeholder 4">
+            <a:extLst>
+              <a:ext uri="{FF2B5EF4-FFF2-40B4-BE49-F238E27FC236}">
+                <a16:creationId xmlns:a16="http://schemas.microsoft.com/office/drawing/2014/main" id="{6B68C869-C0DE-E101-21ED-B10A5BD88C4E}"/>
+              </a:ext>
+            </a:extLst>
+          </p:cNvPr>
+          <p:cNvPicPr>
+            <a:picLocks noGrp="1" noChangeAspect="1"/>
+          </p:cNvPicPr>
+          <p:nvPr>
+            <p:ph idx="1"/>
+          </p:nvPr>
+        </p:nvPicPr>
+        <p:blipFill>
+          <a:blip r:embed="rId2"/>
+          <a:stretch>
+            <a:fillRect/>
+          </a:stretch>
+        </p:blipFill>
+        <p:spPr>
+          <a:xfrm>
+            <a:off x="681791" y="796185"/>
+            <a:ext cx="7595434" cy="3993606"/>
+          </a:xfrm>
+          <a:prstGeom prst="rect">
+            <a:avLst/>
+          </a:prstGeom>
+        </p:spPr>
+      </p:pic>
+    </p:spTree>
+    <p:extLst>
+      <p:ext uri="{BB962C8B-B14F-4D97-AF65-F5344CB8AC3E}">
+        <p14:creationId xmlns:p14="http://schemas.microsoft.com/office/powerpoint/2010/main" val="1706348807"/>
+      </p:ext>
+    </p:extLst>
+  </p:cSld>
+  <p:clrMapOvr>
+    <a:masterClrMapping/>
+  </p:clrMapOvr>
+</p:sld>
+</file>
+
+<file path=ppt/slides/slide142.xml><?xml version="1.0" encoding="utf-8"?>
+<p:sld xmlns:a="http://schemas.openxmlformats.org/drawingml/2006/main" xmlns:r="http://schemas.openxmlformats.org/officeDocument/2006/relationships" xmlns:p="http://schemas.openxmlformats.org/presentationml/2006/main">
+  <p:cSld>
+    <p:spTree>
+      <p:nvGrpSpPr>
+        <p:cNvPr id="1" name=""/>
+        <p:cNvGrpSpPr/>
+        <p:nvPr/>
+      </p:nvGrpSpPr>
+      <p:grpSpPr>
+        <a:xfrm>
+          <a:off x="0" y="0"/>
+          <a:ext cx="0" cy="0"/>
+          <a:chOff x="0" y="0"/>
+          <a:chExt cx="0" cy="0"/>
+        </a:xfrm>
+      </p:grpSpPr>
+      <p:sp>
+        <p:nvSpPr>
+          <p:cNvPr id="2" name="Title 1">
+            <a:extLst>
+              <a:ext uri="{FF2B5EF4-FFF2-40B4-BE49-F238E27FC236}">
+                <a16:creationId xmlns:a16="http://schemas.microsoft.com/office/drawing/2014/main" id="{EBED0D0B-3E53-ADDB-DAA0-A80E7D0F1CF5}"/>
+              </a:ext>
+            </a:extLst>
+          </p:cNvPr>
+          <p:cNvSpPr>
+            <a:spLocks noGrp="1"/>
+          </p:cNvSpPr>
+          <p:nvPr>
+            <p:ph type="title"/>
+          </p:nvPr>
+        </p:nvSpPr>
+        <p:spPr/>
+        <p:txBody>
+          <a:bodyPr/>
+          <a:lstStyle/>
+          <a:p>
+            <a:r>
+              <a:rPr lang="en-US"/>
+              <a:t>Select insert join</a:t>
+            </a:r>
+          </a:p>
+        </p:txBody>
+      </p:sp>
+      <p:pic>
+        <p:nvPicPr>
+          <p:cNvPr id="5" name="Content Placeholder 4">
+            <a:extLst>
+              <a:ext uri="{FF2B5EF4-FFF2-40B4-BE49-F238E27FC236}">
+                <a16:creationId xmlns:a16="http://schemas.microsoft.com/office/drawing/2014/main" id="{1DCBC852-A487-3D6A-C494-C889594B965C}"/>
+              </a:ext>
+            </a:extLst>
+          </p:cNvPr>
+          <p:cNvPicPr>
+            <a:picLocks noGrp="1" noChangeAspect="1"/>
+          </p:cNvPicPr>
+          <p:nvPr>
+            <p:ph idx="1"/>
+          </p:nvPr>
+        </p:nvPicPr>
+        <p:blipFill>
+          <a:blip r:embed="rId2"/>
+          <a:stretch>
+            <a:fillRect/>
+          </a:stretch>
+        </p:blipFill>
+        <p:spPr>
+          <a:xfrm>
+            <a:off x="662469" y="1690688"/>
+            <a:ext cx="6890856" cy="4126782"/>
+          </a:xfrm>
+          <a:prstGeom prst="rect">
+            <a:avLst/>
+          </a:prstGeom>
+        </p:spPr>
+      </p:pic>
+    </p:spTree>
+    <p:extLst>
+      <p:ext uri="{BB962C8B-B14F-4D97-AF65-F5344CB8AC3E}">
+        <p14:creationId xmlns:p14="http://schemas.microsoft.com/office/powerpoint/2010/main" val="854464040"/>
+      </p:ext>
+    </p:extLst>
+  </p:cSld>
+  <p:clrMapOvr>
+    <a:masterClrMapping/>
+  </p:clrMapOvr>
+</p:sld>
+</file>
+
+<file path=ppt/slides/slide143.xml><?xml version="1.0" encoding="utf-8"?>
+<p:sld xmlns:a="http://schemas.openxmlformats.org/drawingml/2006/main" xmlns:r="http://schemas.openxmlformats.org/officeDocument/2006/relationships" xmlns:p="http://schemas.openxmlformats.org/presentationml/2006/main">
+  <p:cSld>
+    <p:spTree>
+      <p:nvGrpSpPr>
+        <p:cNvPr id="1" name=""/>
+        <p:cNvGrpSpPr/>
+        <p:nvPr/>
+      </p:nvGrpSpPr>
+      <p:grpSpPr>
+        <a:xfrm>
+          <a:off x="0" y="0"/>
+          <a:ext cx="0" cy="0"/>
+          <a:chOff x="0" y="0"/>
+          <a:chExt cx="0" cy="0"/>
+        </a:xfrm>
+      </p:grpSpPr>
+      <p:sp>
+        <p:nvSpPr>
+          <p:cNvPr id="2" name="Title 1">
+            <a:extLst>
+              <a:ext uri="{FF2B5EF4-FFF2-40B4-BE49-F238E27FC236}">
+                <a16:creationId xmlns:a16="http://schemas.microsoft.com/office/drawing/2014/main" id="{3832F644-88A7-C373-7644-575978A6F955}"/>
+              </a:ext>
+            </a:extLst>
+          </p:cNvPr>
+          <p:cNvSpPr>
+            <a:spLocks noGrp="1"/>
+          </p:cNvSpPr>
+          <p:nvPr>
+            <p:ph type="title"/>
+          </p:nvPr>
+        </p:nvSpPr>
+        <p:spPr>
+          <a:xfrm>
+            <a:off x="838200" y="88127"/>
+            <a:ext cx="10801350" cy="863600"/>
+          </a:xfrm>
+        </p:spPr>
+        <p:txBody>
+          <a:bodyPr/>
+          <a:lstStyle/>
+          <a:p>
+            <a:r>
+              <a:rPr lang="en-US"/>
+              <a:t>Give value to variable via select</a:t>
+            </a:r>
+          </a:p>
+        </p:txBody>
+      </p:sp>
+      <p:sp>
+        <p:nvSpPr>
+          <p:cNvPr id="5" name="TextBox 4">
+            <a:extLst>
+              <a:ext uri="{FF2B5EF4-FFF2-40B4-BE49-F238E27FC236}">
+                <a16:creationId xmlns:a16="http://schemas.microsoft.com/office/drawing/2014/main" id="{36496A97-4945-7927-ED4C-48D11FE08708}"/>
+              </a:ext>
+            </a:extLst>
+          </p:cNvPr>
+          <p:cNvSpPr txBox="1"/>
+          <p:nvPr/>
+        </p:nvSpPr>
+        <p:spPr>
+          <a:xfrm>
+            <a:off x="428624" y="1142613"/>
+            <a:ext cx="8134351" cy="369332"/>
+          </a:xfrm>
+          <a:prstGeom prst="rect">
+            <a:avLst/>
+          </a:prstGeom>
+          <a:noFill/>
+        </p:spPr>
+        <p:txBody>
+          <a:bodyPr wrap="square">
+            <a:spAutoFit/>
+          </a:bodyPr>
+          <a:lstStyle/>
+          <a:p>
+            <a:r>
+              <a:rPr lang="en-US">
+                <a:solidFill>
+                  <a:srgbClr val="0000FF"/>
+                </a:solidFill>
+                <a:latin typeface="Consolas" panose="020B0609020204030204" pitchFamily="49" charset="0"/>
+              </a:rPr>
+              <a:t>DECLARE</a:t>
+            </a:r>
+            <a:r>
+              <a:rPr lang="en-US">
+                <a:solidFill>
+                  <a:srgbClr val="000000"/>
+                </a:solidFill>
+                <a:latin typeface="Consolas" panose="020B0609020204030204" pitchFamily="49" charset="0"/>
+              </a:rPr>
+              <a:t> @CustomerId </a:t>
+            </a:r>
+            <a:r>
+              <a:rPr lang="en-US">
+                <a:solidFill>
+                  <a:srgbClr val="0000FF"/>
+                </a:solidFill>
+                <a:latin typeface="Consolas" panose="020B0609020204030204" pitchFamily="49" charset="0"/>
+              </a:rPr>
+              <a:t>DECIMAL</a:t>
+            </a:r>
+            <a:r>
+              <a:rPr lang="en-US">
+                <a:solidFill>
+                  <a:srgbClr val="808080"/>
+                </a:solidFill>
+                <a:latin typeface="Consolas" panose="020B0609020204030204" pitchFamily="49" charset="0"/>
+              </a:rPr>
+              <a:t>(</a:t>
+            </a:r>
+            <a:r>
+              <a:rPr lang="en-US">
+                <a:solidFill>
+                  <a:srgbClr val="000000"/>
+                </a:solidFill>
+                <a:latin typeface="Consolas" panose="020B0609020204030204" pitchFamily="49" charset="0"/>
+              </a:rPr>
+              <a:t>18</a:t>
+            </a:r>
+            <a:r>
+              <a:rPr lang="en-US">
+                <a:solidFill>
+                  <a:srgbClr val="808080"/>
+                </a:solidFill>
+                <a:latin typeface="Consolas" panose="020B0609020204030204" pitchFamily="49" charset="0"/>
+              </a:rPr>
+              <a:t>,</a:t>
+            </a:r>
+            <a:r>
+              <a:rPr lang="en-US">
+                <a:solidFill>
+                  <a:srgbClr val="000000"/>
+                </a:solidFill>
+                <a:latin typeface="Consolas" panose="020B0609020204030204" pitchFamily="49" charset="0"/>
+              </a:rPr>
+              <a:t>0</a:t>
+            </a:r>
+            <a:r>
+              <a:rPr lang="en-US">
+                <a:solidFill>
+                  <a:srgbClr val="808080"/>
+                </a:solidFill>
+                <a:latin typeface="Consolas" panose="020B0609020204030204" pitchFamily="49" charset="0"/>
+              </a:rPr>
+              <a:t>);</a:t>
+            </a:r>
+            <a:endParaRPr lang="en-US">
+              <a:solidFill>
+                <a:srgbClr val="000000"/>
+              </a:solidFill>
+              <a:latin typeface="Consolas" panose="020B0609020204030204" pitchFamily="49" charset="0"/>
+            </a:endParaRPr>
+          </a:p>
+        </p:txBody>
+      </p:sp>
+      <p:sp>
+        <p:nvSpPr>
+          <p:cNvPr id="7" name="TextBox 6">
+            <a:extLst>
+              <a:ext uri="{FF2B5EF4-FFF2-40B4-BE49-F238E27FC236}">
+                <a16:creationId xmlns:a16="http://schemas.microsoft.com/office/drawing/2014/main" id="{ABB313EA-F96F-37A3-6E73-DABCC1307C4A}"/>
+              </a:ext>
+            </a:extLst>
+          </p:cNvPr>
+          <p:cNvSpPr txBox="1"/>
+          <p:nvPr/>
+        </p:nvSpPr>
+        <p:spPr>
+          <a:xfrm>
+            <a:off x="428624" y="1702831"/>
+            <a:ext cx="6096000" cy="1015663"/>
+          </a:xfrm>
+          <a:prstGeom prst="rect">
+            <a:avLst/>
+          </a:prstGeom>
+          <a:noFill/>
+        </p:spPr>
+        <p:txBody>
+          <a:bodyPr wrap="square">
+            <a:spAutoFit/>
+          </a:bodyPr>
+          <a:lstStyle/>
+          <a:p>
+            <a:r>
+              <a:rPr lang="en-US" sz="2000">
+                <a:solidFill>
+                  <a:srgbClr val="0000FF"/>
+                </a:solidFill>
+                <a:latin typeface="Consolas" panose="020B0609020204030204" pitchFamily="49" charset="0"/>
+              </a:rPr>
+              <a:t>SELECT</a:t>
+            </a:r>
+            <a:r>
+              <a:rPr lang="en-US" sz="2000">
+                <a:solidFill>
+                  <a:srgbClr val="000000"/>
+                </a:solidFill>
+                <a:latin typeface="Consolas" panose="020B0609020204030204" pitchFamily="49" charset="0"/>
+              </a:rPr>
+              <a:t>  @CustomerId </a:t>
+            </a:r>
+            <a:r>
+              <a:rPr lang="en-US" sz="2000">
+                <a:solidFill>
+                  <a:srgbClr val="808080"/>
+                </a:solidFill>
+                <a:latin typeface="Consolas" panose="020B0609020204030204" pitchFamily="49" charset="0"/>
+              </a:rPr>
+              <a:t>=</a:t>
+            </a:r>
+            <a:r>
+              <a:rPr lang="en-US" sz="2000">
+                <a:solidFill>
+                  <a:srgbClr val="000000"/>
+                </a:solidFill>
+                <a:latin typeface="Consolas" panose="020B0609020204030204" pitchFamily="49" charset="0"/>
+              </a:rPr>
+              <a:t> Customer_ID</a:t>
+            </a:r>
+          </a:p>
+          <a:p>
+            <a:r>
+              <a:rPr lang="en-US" sz="2000">
+                <a:solidFill>
+                  <a:srgbClr val="0000FF"/>
+                </a:solidFill>
+                <a:latin typeface="Consolas" panose="020B0609020204030204" pitchFamily="49" charset="0"/>
+              </a:rPr>
+              <a:t>FROM</a:t>
+            </a:r>
+            <a:r>
+              <a:rPr lang="en-US" sz="2000">
+                <a:solidFill>
+                  <a:srgbClr val="000000"/>
+                </a:solidFill>
+                <a:latin typeface="Consolas" panose="020B0609020204030204" pitchFamily="49" charset="0"/>
+              </a:rPr>
+              <a:t> SMEs_prod</a:t>
+            </a:r>
+            <a:r>
+              <a:rPr lang="en-US" sz="2000">
+                <a:solidFill>
+                  <a:srgbClr val="808080"/>
+                </a:solidFill>
+                <a:latin typeface="Consolas" panose="020B0609020204030204" pitchFamily="49" charset="0"/>
+              </a:rPr>
+              <a:t>.</a:t>
+            </a:r>
+            <a:r>
+              <a:rPr lang="en-US" sz="2000">
+                <a:solidFill>
+                  <a:srgbClr val="000000"/>
+                </a:solidFill>
+                <a:latin typeface="Consolas" panose="020B0609020204030204" pitchFamily="49" charset="0"/>
+              </a:rPr>
+              <a:t>TWF</a:t>
+            </a:r>
+            <a:r>
+              <a:rPr lang="en-US" sz="2000">
+                <a:solidFill>
+                  <a:srgbClr val="808080"/>
+                </a:solidFill>
+                <a:latin typeface="Consolas" panose="020B0609020204030204" pitchFamily="49" charset="0"/>
+              </a:rPr>
+              <a:t>.</a:t>
+            </a:r>
+            <a:r>
+              <a:rPr lang="en-US" sz="2000">
+                <a:solidFill>
+                  <a:srgbClr val="000000"/>
+                </a:solidFill>
+                <a:latin typeface="Consolas" panose="020B0609020204030204" pitchFamily="49" charset="0"/>
+              </a:rPr>
+              <a:t>Flow_Customers</a:t>
+            </a:r>
+          </a:p>
+          <a:p>
+            <a:r>
+              <a:rPr lang="en-US" sz="2000">
+                <a:solidFill>
+                  <a:srgbClr val="0000FF"/>
+                </a:solidFill>
+                <a:latin typeface="Consolas" panose="020B0609020204030204" pitchFamily="49" charset="0"/>
+              </a:rPr>
+              <a:t>WHERE</a:t>
+            </a:r>
+            <a:r>
+              <a:rPr lang="en-US" sz="2000">
+                <a:solidFill>
+                  <a:srgbClr val="000000"/>
+                </a:solidFill>
+                <a:latin typeface="Consolas" panose="020B0609020204030204" pitchFamily="49" charset="0"/>
+              </a:rPr>
+              <a:t> QID </a:t>
+            </a:r>
+            <a:r>
+              <a:rPr lang="en-US" sz="2000">
+                <a:solidFill>
+                  <a:srgbClr val="808080"/>
+                </a:solidFill>
+                <a:latin typeface="Consolas" panose="020B0609020204030204" pitchFamily="49" charset="0"/>
+              </a:rPr>
+              <a:t>=</a:t>
+            </a:r>
+            <a:r>
+              <a:rPr lang="en-US" sz="2000">
+                <a:solidFill>
+                  <a:srgbClr val="000000"/>
+                </a:solidFill>
+                <a:latin typeface="Consolas" panose="020B0609020204030204" pitchFamily="49" charset="0"/>
+              </a:rPr>
+              <a:t> @QId</a:t>
+            </a:r>
+            <a:r>
+              <a:rPr lang="en-US" sz="2000">
+                <a:solidFill>
+                  <a:srgbClr val="808080"/>
+                </a:solidFill>
+                <a:latin typeface="Consolas" panose="020B0609020204030204" pitchFamily="49" charset="0"/>
+              </a:rPr>
+              <a:t>;</a:t>
+            </a:r>
+            <a:endParaRPr lang="en-US" sz="4800"/>
+          </a:p>
+        </p:txBody>
+      </p:sp>
+    </p:spTree>
+    <p:extLst>
+      <p:ext uri="{BB962C8B-B14F-4D97-AF65-F5344CB8AC3E}">
+        <p14:creationId xmlns:p14="http://schemas.microsoft.com/office/powerpoint/2010/main" val="3951763578"/>
+      </p:ext>
+    </p:extLst>
+  </p:cSld>
+  <p:clrMapOvr>
+    <a:masterClrMapping/>
+  </p:clrMapOvr>
+</p:sld>
+</file>
+
+<file path=ppt/slides/slide144.xml><?xml version="1.0" encoding="utf-8"?>
+<p:sld xmlns:a="http://schemas.openxmlformats.org/drawingml/2006/main" xmlns:r="http://schemas.openxmlformats.org/officeDocument/2006/relationships" xmlns:p="http://schemas.openxmlformats.org/presentationml/2006/main">
+  <p:cSld>
+    <p:spTree>
+      <p:nvGrpSpPr>
+        <p:cNvPr id="1" name=""/>
+        <p:cNvGrpSpPr/>
+        <p:nvPr/>
+      </p:nvGrpSpPr>
+      <p:grpSpPr>
+        <a:xfrm>
+          <a:off x="0" y="0"/>
+          <a:ext cx="0" cy="0"/>
+          <a:chOff x="0" y="0"/>
+          <a:chExt cx="0" cy="0"/>
+        </a:xfrm>
+      </p:grpSpPr>
+      <p:sp>
+        <p:nvSpPr>
+          <p:cNvPr id="2" name="Title 1">
+            <a:extLst>
+              <a:ext uri="{FF2B5EF4-FFF2-40B4-BE49-F238E27FC236}">
                 <a16:creationId xmlns:a16="http://schemas.microsoft.com/office/drawing/2014/main" id="{BA575EF9-430B-0533-5963-E8AFDD00FAD5}"/>
               </a:ext>
             </a:extLst>
@@ -19500,7 +19957,7 @@
 </p:sld>
 </file>
 
-<file path=ppt/slides/slide141.xml><?xml version="1.0" encoding="utf-8"?>
+<file path=ppt/slides/slide145.xml><?xml version="1.0" encoding="utf-8"?>
 <p:sld xmlns:a="http://schemas.openxmlformats.org/drawingml/2006/main" xmlns:r="http://schemas.openxmlformats.org/officeDocument/2006/relationships" xmlns:p="http://schemas.openxmlformats.org/presentationml/2006/main">
   <p:cSld>
     <p:spTree>
@@ -19576,7 +20033,7 @@
 </p:sld>
 </file>
 
-<file path=ppt/slides/slide142.xml><?xml version="1.0" encoding="utf-8"?>
+<file path=ppt/slides/slide146.xml><?xml version="1.0" encoding="utf-8"?>
 <p:sld xmlns:a="http://schemas.openxmlformats.org/drawingml/2006/main" xmlns:r="http://schemas.openxmlformats.org/officeDocument/2006/relationships" xmlns:p="http://schemas.openxmlformats.org/presentationml/2006/main">
   <p:cSld>
     <p:spTree>
@@ -19878,7 +20335,7 @@
 </p:sld>
 </file>
 
-<file path=ppt/slides/slide143.xml><?xml version="1.0" encoding="utf-8"?>
+<file path=ppt/slides/slide147.xml><?xml version="1.0" encoding="utf-8"?>
 <p:sld xmlns:a="http://schemas.openxmlformats.org/drawingml/2006/main" xmlns:r="http://schemas.openxmlformats.org/officeDocument/2006/relationships" xmlns:p="http://schemas.openxmlformats.org/presentationml/2006/main">
   <p:cSld>
     <p:spTree>
@@ -20218,7 +20675,7 @@
 </p:sld>
 </file>
 
-<file path=ppt/slides/slide144.xml><?xml version="1.0" encoding="utf-8"?>
+<file path=ppt/slides/slide148.xml><?xml version="1.0" encoding="utf-8"?>
 <p:sld xmlns:a="http://schemas.openxmlformats.org/drawingml/2006/main" xmlns:r="http://schemas.openxmlformats.org/officeDocument/2006/relationships" xmlns:p="http://schemas.openxmlformats.org/presentationml/2006/main">
   <p:cSld>
     <p:spTree>
@@ -20289,7 +20746,7 @@
 </p:sld>
 </file>
 
-<file path=ppt/slides/slide145.xml><?xml version="1.0" encoding="utf-8"?>
+<file path=ppt/slides/slide149.xml><?xml version="1.0" encoding="utf-8"?>
 <p:sld xmlns:a="http://schemas.openxmlformats.org/drawingml/2006/main" xmlns:r="http://schemas.openxmlformats.org/officeDocument/2006/relationships" xmlns:p="http://schemas.openxmlformats.org/presentationml/2006/main">
   <p:cSld>
     <p:spTree>
@@ -20380,7 +20837,199 @@
 </p:sld>
 </file>
 
-<file path=ppt/slides/slide146.xml><?xml version="1.0" encoding="utf-8"?>
+<file path=ppt/slides/slide15.xml><?xml version="1.0" encoding="utf-8"?>
+<p:sld xmlns:a="http://schemas.openxmlformats.org/drawingml/2006/main" xmlns:r="http://schemas.openxmlformats.org/officeDocument/2006/relationships" xmlns:p="http://schemas.openxmlformats.org/presentationml/2006/main">
+  <p:cSld>
+    <p:spTree>
+      <p:nvGrpSpPr>
+        <p:cNvPr id="1" name=""/>
+        <p:cNvGrpSpPr/>
+        <p:nvPr/>
+      </p:nvGrpSpPr>
+      <p:grpSpPr>
+        <a:xfrm>
+          <a:off x="0" y="0"/>
+          <a:ext cx="0" cy="0"/>
+          <a:chOff x="0" y="0"/>
+          <a:chExt cx="0" cy="0"/>
+        </a:xfrm>
+      </p:grpSpPr>
+      <p:sp>
+        <p:nvSpPr>
+          <p:cNvPr id="2" name="Title 1">
+            <a:extLst>
+              <a:ext uri="{FF2B5EF4-FFF2-40B4-BE49-F238E27FC236}">
+                <a16:creationId xmlns:a16="http://schemas.microsoft.com/office/drawing/2014/main" id="{17780CC4-1EC9-7E08-FDB6-63C94E417296}"/>
+              </a:ext>
+            </a:extLst>
+          </p:cNvPr>
+          <p:cNvSpPr>
+            <a:spLocks noGrp="1"/>
+          </p:cNvSpPr>
+          <p:nvPr>
+            <p:ph type="title"/>
+          </p:nvPr>
+        </p:nvSpPr>
+        <p:spPr>
+          <a:xfrm>
+            <a:off x="838200" y="21230"/>
+            <a:ext cx="10515600" cy="1475974"/>
+          </a:xfrm>
+        </p:spPr>
+        <p:txBody>
+          <a:bodyPr>
+            <a:normAutofit fontScale="90000"/>
+          </a:bodyPr>
+          <a:lstStyle/>
+          <a:p>
+            <a:r>
+              <a:rPr lang="en-US" dirty="0"/>
+              <a:t>to be the owner of database </a:t>
+            </a:r>
+            <a:br>
+              <a:rPr lang="en-US" dirty="0"/>
+            </a:br>
+            <a:r>
+              <a:rPr lang="en-US" dirty="0"/>
+              <a:t>to enable editing on table structure</a:t>
+            </a:r>
+            <a:br>
+              <a:rPr lang="en-US" dirty="0"/>
+            </a:br>
+            <a:endParaRPr lang="en-US" dirty="0"/>
+          </a:p>
+        </p:txBody>
+      </p:sp>
+      <p:sp>
+        <p:nvSpPr>
+          <p:cNvPr id="3" name="Content Placeholder 2">
+            <a:extLst>
+              <a:ext uri="{FF2B5EF4-FFF2-40B4-BE49-F238E27FC236}">
+                <a16:creationId xmlns:a16="http://schemas.microsoft.com/office/drawing/2014/main" id="{C0DB84E9-43CC-4466-762E-091469CDD516}"/>
+              </a:ext>
+            </a:extLst>
+          </p:cNvPr>
+          <p:cNvSpPr>
+            <a:spLocks noGrp="1"/>
+          </p:cNvSpPr>
+          <p:nvPr>
+            <p:ph idx="1"/>
+          </p:nvPr>
+        </p:nvSpPr>
+        <p:spPr>
+          <a:xfrm>
+            <a:off x="442127" y="1326382"/>
+            <a:ext cx="11515411" cy="5235191"/>
+          </a:xfrm>
+        </p:spPr>
+        <p:txBody>
+          <a:bodyPr>
+            <a:normAutofit/>
+          </a:bodyPr>
+          <a:lstStyle/>
+          <a:p>
+            <a:r>
+              <a:rPr lang="en-US" sz="3200" dirty="0">
+                <a:solidFill>
+                  <a:srgbClr val="FF0000"/>
+                </a:solidFill>
+              </a:rPr>
+              <a:t>to be the owner of database</a:t>
+            </a:r>
+            <a:endParaRPr lang="en-US" sz="1800" dirty="0">
+              <a:solidFill>
+                <a:srgbClr val="FF0000"/>
+              </a:solidFill>
+            </a:endParaRPr>
+          </a:p>
+          <a:p>
+            <a:pPr lvl="1"/>
+            <a:r>
+              <a:rPr lang="en-US" dirty="0"/>
+              <a:t>right click on database + properties + from left select files + at owner write sa</a:t>
+            </a:r>
+            <a:endParaRPr lang="en-US" sz="2000" dirty="0"/>
+          </a:p>
+          <a:p>
+            <a:r>
+              <a:rPr lang="en-US" sz="3200" dirty="0">
+                <a:solidFill>
+                  <a:srgbClr val="FF0000"/>
+                </a:solidFill>
+              </a:rPr>
+              <a:t>to enable editing on table structure</a:t>
+            </a:r>
+          </a:p>
+          <a:p>
+            <a:pPr lvl="1"/>
+            <a:r>
+              <a:rPr lang="en-US" sz="2000" b="1" dirty="0"/>
+              <a:t>Go to tools + options + designers + remove check from prevent saving changing that require table</a:t>
+            </a:r>
+          </a:p>
+          <a:p>
+            <a:endParaRPr lang="en-US" sz="2000" dirty="0"/>
+          </a:p>
+          <a:p>
+            <a:r>
+              <a:rPr lang="en-US" sz="3200" dirty="0">
+                <a:solidFill>
+                  <a:srgbClr val="FF0000"/>
+                </a:solidFill>
+              </a:rPr>
+              <a:t>to make backup from your database</a:t>
+            </a:r>
+            <a:r>
+              <a:rPr lang="en-US" sz="2000" dirty="0"/>
+              <a:t>:</a:t>
+            </a:r>
+          </a:p>
+          <a:p>
+            <a:pPr lvl="1"/>
+            <a:r>
+              <a:rPr lang="en-US" sz="2000" b="1" dirty="0"/>
+              <a:t>right click on database + tasks + Backup + click add to choose the path of created backup + name DB file with .back</a:t>
+            </a:r>
+          </a:p>
+          <a:p>
+            <a:endParaRPr lang="en-US" sz="2000" dirty="0"/>
+          </a:p>
+          <a:p>
+            <a:r>
+              <a:rPr lang="en-US" sz="3200" dirty="0">
+                <a:solidFill>
+                  <a:srgbClr val="FF0000"/>
+                </a:solidFill>
+              </a:rPr>
+              <a:t>to restore database: </a:t>
+            </a:r>
+          </a:p>
+          <a:p>
+            <a:pPr lvl="1"/>
+            <a:r>
+              <a:rPr lang="en-US" sz="1800" b="1" dirty="0"/>
+              <a:t>right click on databases + device radio button + click on ... + add + </a:t>
+            </a:r>
+          </a:p>
+          <a:p>
+            <a:endParaRPr lang="en-US" sz="2000" dirty="0"/>
+          </a:p>
+        </p:txBody>
+      </p:sp>
+    </p:spTree>
+    <p:extLst>
+      <p:ext uri="{BB962C8B-B14F-4D97-AF65-F5344CB8AC3E}">
+        <p14:creationId xmlns:p14="http://schemas.microsoft.com/office/powerpoint/2010/main" val="3793665788"/>
+      </p:ext>
+    </p:extLst>
+  </p:cSld>
+  <p:clrMapOvr>
+    <a:masterClrMapping/>
+  </p:clrMapOvr>
+</p:sld>
+</file>
+
+<file path=ppt/slides/slide150.xml><?xml version="1.0" encoding="utf-8"?>
 <p:sld xmlns:a="http://schemas.openxmlformats.org/drawingml/2006/main" xmlns:r="http://schemas.openxmlformats.org/officeDocument/2006/relationships" xmlns:p="http://schemas.openxmlformats.org/presentationml/2006/main">
   <p:cSld>
     <p:spTree>
@@ -20551,7 +21200,7 @@
 </p:sld>
 </file>
 
-<file path=ppt/slides/slide147.xml><?xml version="1.0" encoding="utf-8"?>
+<file path=ppt/slides/slide151.xml><?xml version="1.0" encoding="utf-8"?>
 <p:sld xmlns:a="http://schemas.openxmlformats.org/drawingml/2006/main" xmlns:r="http://schemas.openxmlformats.org/officeDocument/2006/relationships" xmlns:p="http://schemas.openxmlformats.org/presentationml/2006/main">
   <p:cSld>
     <p:spTree>
@@ -20749,7 +21398,7 @@
 </p:sld>
 </file>
 
-<file path=ppt/slides/slide148.xml><?xml version="1.0" encoding="utf-8"?>
+<file path=ppt/slides/slide152.xml><?xml version="1.0" encoding="utf-8"?>
 <p:sld xmlns:a="http://schemas.openxmlformats.org/drawingml/2006/main" xmlns:r="http://schemas.openxmlformats.org/officeDocument/2006/relationships" xmlns:p="http://schemas.openxmlformats.org/presentationml/2006/main">
   <p:cSld>
     <p:spTree>
@@ -20840,7 +21489,7 @@
 </p:sld>
 </file>
 
-<file path=ppt/slides/slide149.xml><?xml version="1.0" encoding="utf-8"?>
+<file path=ppt/slides/slide153.xml><?xml version="1.0" encoding="utf-8"?>
 <p:sld xmlns:a="http://schemas.openxmlformats.org/drawingml/2006/main" xmlns:r="http://schemas.openxmlformats.org/officeDocument/2006/relationships" xmlns:p="http://schemas.openxmlformats.org/presentationml/2006/main">
   <p:cSld>
     <p:spTree>
@@ -20916,199 +21565,7 @@
 </p:sld>
 </file>
 
-<file path=ppt/slides/slide15.xml><?xml version="1.0" encoding="utf-8"?>
-<p:sld xmlns:a="http://schemas.openxmlformats.org/drawingml/2006/main" xmlns:r="http://schemas.openxmlformats.org/officeDocument/2006/relationships" xmlns:p="http://schemas.openxmlformats.org/presentationml/2006/main">
-  <p:cSld>
-    <p:spTree>
-      <p:nvGrpSpPr>
-        <p:cNvPr id="1" name=""/>
-        <p:cNvGrpSpPr/>
-        <p:nvPr/>
-      </p:nvGrpSpPr>
-      <p:grpSpPr>
-        <a:xfrm>
-          <a:off x="0" y="0"/>
-          <a:ext cx="0" cy="0"/>
-          <a:chOff x="0" y="0"/>
-          <a:chExt cx="0" cy="0"/>
-        </a:xfrm>
-      </p:grpSpPr>
-      <p:sp>
-        <p:nvSpPr>
-          <p:cNvPr id="2" name="Title 1">
-            <a:extLst>
-              <a:ext uri="{FF2B5EF4-FFF2-40B4-BE49-F238E27FC236}">
-                <a16:creationId xmlns:a16="http://schemas.microsoft.com/office/drawing/2014/main" id="{17780CC4-1EC9-7E08-FDB6-63C94E417296}"/>
-              </a:ext>
-            </a:extLst>
-          </p:cNvPr>
-          <p:cNvSpPr>
-            <a:spLocks noGrp="1"/>
-          </p:cNvSpPr>
-          <p:nvPr>
-            <p:ph type="title"/>
-          </p:nvPr>
-        </p:nvSpPr>
-        <p:spPr>
-          <a:xfrm>
-            <a:off x="838200" y="21230"/>
-            <a:ext cx="10515600" cy="1475974"/>
-          </a:xfrm>
-        </p:spPr>
-        <p:txBody>
-          <a:bodyPr>
-            <a:normAutofit fontScale="90000"/>
-          </a:bodyPr>
-          <a:lstStyle/>
-          <a:p>
-            <a:r>
-              <a:rPr lang="en-US" dirty="0"/>
-              <a:t>to be the owner of database </a:t>
-            </a:r>
-            <a:br>
-              <a:rPr lang="en-US" dirty="0"/>
-            </a:br>
-            <a:r>
-              <a:rPr lang="en-US" dirty="0"/>
-              <a:t>to enable editing on table structure</a:t>
-            </a:r>
-            <a:br>
-              <a:rPr lang="en-US" dirty="0"/>
-            </a:br>
-            <a:endParaRPr lang="en-US" dirty="0"/>
-          </a:p>
-        </p:txBody>
-      </p:sp>
-      <p:sp>
-        <p:nvSpPr>
-          <p:cNvPr id="3" name="Content Placeholder 2">
-            <a:extLst>
-              <a:ext uri="{FF2B5EF4-FFF2-40B4-BE49-F238E27FC236}">
-                <a16:creationId xmlns:a16="http://schemas.microsoft.com/office/drawing/2014/main" id="{C0DB84E9-43CC-4466-762E-091469CDD516}"/>
-              </a:ext>
-            </a:extLst>
-          </p:cNvPr>
-          <p:cNvSpPr>
-            <a:spLocks noGrp="1"/>
-          </p:cNvSpPr>
-          <p:nvPr>
-            <p:ph idx="1"/>
-          </p:nvPr>
-        </p:nvSpPr>
-        <p:spPr>
-          <a:xfrm>
-            <a:off x="442127" y="1326382"/>
-            <a:ext cx="11515411" cy="5235191"/>
-          </a:xfrm>
-        </p:spPr>
-        <p:txBody>
-          <a:bodyPr>
-            <a:normAutofit/>
-          </a:bodyPr>
-          <a:lstStyle/>
-          <a:p>
-            <a:r>
-              <a:rPr lang="en-US" sz="3200" dirty="0">
-                <a:solidFill>
-                  <a:srgbClr val="FF0000"/>
-                </a:solidFill>
-              </a:rPr>
-              <a:t>to be the owner of database</a:t>
-            </a:r>
-            <a:endParaRPr lang="en-US" sz="1800" dirty="0">
-              <a:solidFill>
-                <a:srgbClr val="FF0000"/>
-              </a:solidFill>
-            </a:endParaRPr>
-          </a:p>
-          <a:p>
-            <a:pPr lvl="1"/>
-            <a:r>
-              <a:rPr lang="en-US" dirty="0"/>
-              <a:t>right click on database + properties + from left select files + at owner write sa</a:t>
-            </a:r>
-            <a:endParaRPr lang="en-US" sz="2000" dirty="0"/>
-          </a:p>
-          <a:p>
-            <a:r>
-              <a:rPr lang="en-US" sz="3200" dirty="0">
-                <a:solidFill>
-                  <a:srgbClr val="FF0000"/>
-                </a:solidFill>
-              </a:rPr>
-              <a:t>to enable editing on table structure</a:t>
-            </a:r>
-          </a:p>
-          <a:p>
-            <a:pPr lvl="1"/>
-            <a:r>
-              <a:rPr lang="en-US" sz="2000" b="1" dirty="0"/>
-              <a:t>Go to tools + options + designers + remove check from prevent saving changing that require table</a:t>
-            </a:r>
-          </a:p>
-          <a:p>
-            <a:endParaRPr lang="en-US" sz="2000" dirty="0"/>
-          </a:p>
-          <a:p>
-            <a:r>
-              <a:rPr lang="en-US" sz="3200" dirty="0">
-                <a:solidFill>
-                  <a:srgbClr val="FF0000"/>
-                </a:solidFill>
-              </a:rPr>
-              <a:t>to make backup from your database</a:t>
-            </a:r>
-            <a:r>
-              <a:rPr lang="en-US" sz="2000" dirty="0"/>
-              <a:t>:</a:t>
-            </a:r>
-          </a:p>
-          <a:p>
-            <a:pPr lvl="1"/>
-            <a:r>
-              <a:rPr lang="en-US" sz="2000" b="1" dirty="0"/>
-              <a:t>right click on database + tasks + Backup + click add to choose the path of created backup + name DB file with .back</a:t>
-            </a:r>
-          </a:p>
-          <a:p>
-            <a:endParaRPr lang="en-US" sz="2000" dirty="0"/>
-          </a:p>
-          <a:p>
-            <a:r>
-              <a:rPr lang="en-US" sz="3200" dirty="0">
-                <a:solidFill>
-                  <a:srgbClr val="FF0000"/>
-                </a:solidFill>
-              </a:rPr>
-              <a:t>to restore database: </a:t>
-            </a:r>
-          </a:p>
-          <a:p>
-            <a:pPr lvl="1"/>
-            <a:r>
-              <a:rPr lang="en-US" sz="1800" b="1" dirty="0"/>
-              <a:t>right click on databases + device radio button + click on ... + add + </a:t>
-            </a:r>
-          </a:p>
-          <a:p>
-            <a:endParaRPr lang="en-US" sz="2000" dirty="0"/>
-          </a:p>
-        </p:txBody>
-      </p:sp>
-    </p:spTree>
-    <p:extLst>
-      <p:ext uri="{BB962C8B-B14F-4D97-AF65-F5344CB8AC3E}">
-        <p14:creationId xmlns:p14="http://schemas.microsoft.com/office/powerpoint/2010/main" val="3793665788"/>
-      </p:ext>
-    </p:extLst>
-  </p:cSld>
-  <p:clrMapOvr>
-    <a:masterClrMapping/>
-  </p:clrMapOvr>
-</p:sld>
-</file>
-
-<file path=ppt/slides/slide150.xml><?xml version="1.0" encoding="utf-8"?>
+<file path=ppt/slides/slide154.xml><?xml version="1.0" encoding="utf-8"?>
 <p:sld xmlns:a="http://schemas.openxmlformats.org/drawingml/2006/main" xmlns:r="http://schemas.openxmlformats.org/officeDocument/2006/relationships" xmlns:p="http://schemas.openxmlformats.org/presentationml/2006/main">
   <p:cSld>
     <p:spTree>
@@ -21276,7 +21733,7 @@
 </p:sld>
 </file>
 
-<file path=ppt/slides/slide151.xml><?xml version="1.0" encoding="utf-8"?>
+<file path=ppt/slides/slide155.xml><?xml version="1.0" encoding="utf-8"?>
 <p:sld xmlns:a="http://schemas.openxmlformats.org/drawingml/2006/main" xmlns:r="http://schemas.openxmlformats.org/officeDocument/2006/relationships" xmlns:p="http://schemas.openxmlformats.org/presentationml/2006/main">
   <p:cSld>
     <p:spTree>
@@ -21373,7 +21830,7 @@
 </p:sld>
 </file>
 
-<file path=ppt/slides/slide152.xml><?xml version="1.0" encoding="utf-8"?>
+<file path=ppt/slides/slide156.xml><?xml version="1.0" encoding="utf-8"?>
 <p:sld xmlns:a="http://schemas.openxmlformats.org/drawingml/2006/main" xmlns:r="http://schemas.openxmlformats.org/officeDocument/2006/relationships" xmlns:p="http://schemas.openxmlformats.org/presentationml/2006/main">
   <p:cSld>
     <p:spTree>
@@ -21463,7 +21920,7 @@
 </p:sld>
 </file>
 
-<file path=ppt/slides/slide153.xml><?xml version="1.0" encoding="utf-8"?>
+<file path=ppt/slides/slide157.xml><?xml version="1.0" encoding="utf-8"?>
 <p:sld xmlns:a="http://schemas.openxmlformats.org/drawingml/2006/main" xmlns:r="http://schemas.openxmlformats.org/officeDocument/2006/relationships" xmlns:p="http://schemas.openxmlformats.org/presentationml/2006/main">
   <p:cSld>
     <p:spTree>
@@ -21539,7 +21996,7 @@
 </p:sld>
 </file>
 
-<file path=ppt/slides/slide154.xml><?xml version="1.0" encoding="utf-8"?>
+<file path=ppt/slides/slide158.xml><?xml version="1.0" encoding="utf-8"?>
 <p:sld xmlns:a="http://schemas.openxmlformats.org/drawingml/2006/main" xmlns:r="http://schemas.openxmlformats.org/officeDocument/2006/relationships" xmlns:p="http://schemas.openxmlformats.org/presentationml/2006/main">
   <p:cSld>
     <p:spTree>
@@ -21615,7 +22072,7 @@
 </p:sld>
 </file>
 
-<file path=ppt/slides/slide155.xml><?xml version="1.0" encoding="utf-8"?>
+<file path=ppt/slides/slide159.xml><?xml version="1.0" encoding="utf-8"?>
 <p:sld xmlns:a="http://schemas.openxmlformats.org/drawingml/2006/main" xmlns:r="http://schemas.openxmlformats.org/officeDocument/2006/relationships" xmlns:p="http://schemas.openxmlformats.org/presentationml/2006/main">
   <p:cSld>
     <p:spTree>
@@ -21806,409 +22263,6 @@
     <p:extLst>
       <p:ext uri="{BB962C8B-B14F-4D97-AF65-F5344CB8AC3E}">
         <p14:creationId xmlns:p14="http://schemas.microsoft.com/office/powerpoint/2010/main" val="1033283507"/>
-      </p:ext>
-    </p:extLst>
-  </p:cSld>
-  <p:clrMapOvr>
-    <a:masterClrMapping/>
-  </p:clrMapOvr>
-</p:sld>
-</file>
-
-<file path=ppt/slides/slide156.xml><?xml version="1.0" encoding="utf-8"?>
-<p:sld xmlns:a="http://schemas.openxmlformats.org/drawingml/2006/main" xmlns:r="http://schemas.openxmlformats.org/officeDocument/2006/relationships" xmlns:p="http://schemas.openxmlformats.org/presentationml/2006/main">
-  <p:cSld>
-    <p:spTree>
-      <p:nvGrpSpPr>
-        <p:cNvPr id="1" name=""/>
-        <p:cNvGrpSpPr/>
-        <p:nvPr/>
-      </p:nvGrpSpPr>
-      <p:grpSpPr>
-        <a:xfrm>
-          <a:off x="0" y="0"/>
-          <a:ext cx="0" cy="0"/>
-          <a:chOff x="0" y="0"/>
-          <a:chExt cx="0" cy="0"/>
-        </a:xfrm>
-      </p:grpSpPr>
-      <p:sp>
-        <p:nvSpPr>
-          <p:cNvPr id="2" name="Title 1">
-            <a:extLst>
-              <a:ext uri="{FF2B5EF4-FFF2-40B4-BE49-F238E27FC236}">
-                <a16:creationId xmlns:a16="http://schemas.microsoft.com/office/drawing/2014/main" id="{A161EDD7-C005-DD3F-240F-805C8F430C96}"/>
-              </a:ext>
-            </a:extLst>
-          </p:cNvPr>
-          <p:cNvSpPr>
-            <a:spLocks noGrp="1"/>
-          </p:cNvSpPr>
-          <p:nvPr>
-            <p:ph type="title"/>
-          </p:nvPr>
-        </p:nvSpPr>
-        <p:spPr/>
-        <p:txBody>
-          <a:bodyPr/>
-          <a:lstStyle/>
-          <a:p>
-            <a:endParaRPr lang="en-US"/>
-          </a:p>
-        </p:txBody>
-      </p:sp>
-      <p:sp>
-        <p:nvSpPr>
-          <p:cNvPr id="3" name="Content Placeholder 2">
-            <a:extLst>
-              <a:ext uri="{FF2B5EF4-FFF2-40B4-BE49-F238E27FC236}">
-                <a16:creationId xmlns:a16="http://schemas.microsoft.com/office/drawing/2014/main" id="{8DAB7D5C-64CA-CE0E-47B1-3EDB365B9C61}"/>
-              </a:ext>
-            </a:extLst>
-          </p:cNvPr>
-          <p:cNvSpPr>
-            <a:spLocks noGrp="1"/>
-          </p:cNvSpPr>
-          <p:nvPr>
-            <p:ph idx="1"/>
-          </p:nvPr>
-        </p:nvSpPr>
-        <p:spPr/>
-        <p:txBody>
-          <a:bodyPr/>
-          <a:lstStyle/>
-          <a:p>
-            <a:endParaRPr lang="en-US"/>
-          </a:p>
-        </p:txBody>
-      </p:sp>
-    </p:spTree>
-    <p:extLst>
-      <p:ext uri="{BB962C8B-B14F-4D97-AF65-F5344CB8AC3E}">
-        <p14:creationId xmlns:p14="http://schemas.microsoft.com/office/powerpoint/2010/main" val="960105000"/>
-      </p:ext>
-    </p:extLst>
-  </p:cSld>
-  <p:clrMapOvr>
-    <a:masterClrMapping/>
-  </p:clrMapOvr>
-</p:sld>
-</file>
-
-<file path=ppt/slides/slide157.xml><?xml version="1.0" encoding="utf-8"?>
-<p:sld xmlns:a="http://schemas.openxmlformats.org/drawingml/2006/main" xmlns:r="http://schemas.openxmlformats.org/officeDocument/2006/relationships" xmlns:p="http://schemas.openxmlformats.org/presentationml/2006/main">
-  <p:cSld>
-    <p:spTree>
-      <p:nvGrpSpPr>
-        <p:cNvPr id="1" name="">
-          <a:extLst>
-            <a:ext uri="{FF2B5EF4-FFF2-40B4-BE49-F238E27FC236}">
-              <a16:creationId xmlns:a16="http://schemas.microsoft.com/office/drawing/2014/main" id="{A957CBDA-0AB4-819E-3CBF-0B9D1DBB272D}"/>
-            </a:ext>
-          </a:extLst>
-        </p:cNvPr>
-        <p:cNvGrpSpPr/>
-        <p:nvPr/>
-      </p:nvGrpSpPr>
-      <p:grpSpPr>
-        <a:xfrm>
-          <a:off x="0" y="0"/>
-          <a:ext cx="0" cy="0"/>
-          <a:chOff x="0" y="0"/>
-          <a:chExt cx="0" cy="0"/>
-        </a:xfrm>
-      </p:grpSpPr>
-      <p:sp>
-        <p:nvSpPr>
-          <p:cNvPr id="2" name="Title 1">
-            <a:extLst>
-              <a:ext uri="{FF2B5EF4-FFF2-40B4-BE49-F238E27FC236}">
-                <a16:creationId xmlns:a16="http://schemas.microsoft.com/office/drawing/2014/main" id="{C2FE352F-A0B4-FD21-429E-2050BF3D93B5}"/>
-              </a:ext>
-            </a:extLst>
-          </p:cNvPr>
-          <p:cNvSpPr>
-            <a:spLocks noGrp="1"/>
-          </p:cNvSpPr>
-          <p:nvPr>
-            <p:ph type="title"/>
-          </p:nvPr>
-        </p:nvSpPr>
-        <p:spPr>
-          <a:xfrm>
-            <a:off x="838200" y="1787525"/>
-            <a:ext cx="10515600" cy="2662555"/>
-          </a:xfrm>
-        </p:spPr>
-        <p:txBody>
-          <a:bodyPr>
-            <a:noAutofit/>
-          </a:bodyPr>
-          <a:lstStyle/>
-          <a:p>
-            <a:pPr algn="ctr"/>
-            <a:r>
-              <a:rPr lang="en-US" sz="6000" b="1">
-                <a:solidFill>
-                  <a:srgbClr val="FF0000"/>
-                </a:solidFill>
-              </a:rPr>
-              <a:t>End Correlated vs. non-correlated subqueries</a:t>
-            </a:r>
-          </a:p>
-        </p:txBody>
-      </p:sp>
-    </p:spTree>
-    <p:extLst>
-      <p:ext uri="{BB962C8B-B14F-4D97-AF65-F5344CB8AC3E}">
-        <p14:creationId xmlns:p14="http://schemas.microsoft.com/office/powerpoint/2010/main" val="835608298"/>
-      </p:ext>
-    </p:extLst>
-  </p:cSld>
-  <p:clrMapOvr>
-    <a:masterClrMapping/>
-  </p:clrMapOvr>
-</p:sld>
-</file>
-
-<file path=ppt/slides/slide158.xml><?xml version="1.0" encoding="utf-8"?>
-<p:sld xmlns:a="http://schemas.openxmlformats.org/drawingml/2006/main" xmlns:r="http://schemas.openxmlformats.org/officeDocument/2006/relationships" xmlns:p="http://schemas.openxmlformats.org/presentationml/2006/main">
-  <p:cSld>
-    <p:spTree>
-      <p:nvGrpSpPr>
-        <p:cNvPr id="1" name="">
-          <a:extLst>
-            <a:ext uri="{FF2B5EF4-FFF2-40B4-BE49-F238E27FC236}">
-              <a16:creationId xmlns:a16="http://schemas.microsoft.com/office/drawing/2014/main" id="{D4DEBE3A-E07D-1EF7-7729-B13A7951C0EB}"/>
-            </a:ext>
-          </a:extLst>
-        </p:cNvPr>
-        <p:cNvGrpSpPr/>
-        <p:nvPr/>
-      </p:nvGrpSpPr>
-      <p:grpSpPr>
-        <a:xfrm>
-          <a:off x="0" y="0"/>
-          <a:ext cx="0" cy="0"/>
-          <a:chOff x="0" y="0"/>
-          <a:chExt cx="0" cy="0"/>
-        </a:xfrm>
-      </p:grpSpPr>
-      <p:sp>
-        <p:nvSpPr>
-          <p:cNvPr id="2" name="Title 1">
-            <a:extLst>
-              <a:ext uri="{FF2B5EF4-FFF2-40B4-BE49-F238E27FC236}">
-                <a16:creationId xmlns:a16="http://schemas.microsoft.com/office/drawing/2014/main" id="{08D510EA-E859-D1AD-9627-34E1FBF677E2}"/>
-              </a:ext>
-            </a:extLst>
-          </p:cNvPr>
-          <p:cNvSpPr>
-            <a:spLocks noGrp="1"/>
-          </p:cNvSpPr>
-          <p:nvPr>
-            <p:ph type="title"/>
-          </p:nvPr>
-        </p:nvSpPr>
-        <p:spPr>
-          <a:xfrm>
-            <a:off x="838200" y="1787525"/>
-            <a:ext cx="10515600" cy="2662555"/>
-          </a:xfrm>
-        </p:spPr>
-        <p:txBody>
-          <a:bodyPr>
-            <a:noAutofit/>
-          </a:bodyPr>
-          <a:lstStyle/>
-          <a:p>
-            <a:pPr algn="ctr"/>
-            <a:r>
-              <a:rPr lang="en-US" sz="6000" b="1">
-                <a:solidFill>
-                  <a:srgbClr val="FF0000"/>
-                </a:solidFill>
-              </a:rPr>
-              <a:t>Start Exist</a:t>
-            </a:r>
-          </a:p>
-        </p:txBody>
-      </p:sp>
-    </p:spTree>
-    <p:extLst>
-      <p:ext uri="{BB962C8B-B14F-4D97-AF65-F5344CB8AC3E}">
-        <p14:creationId xmlns:p14="http://schemas.microsoft.com/office/powerpoint/2010/main" val="549179624"/>
-      </p:ext>
-    </p:extLst>
-  </p:cSld>
-  <p:clrMapOvr>
-    <a:masterClrMapping/>
-  </p:clrMapOvr>
-</p:sld>
-</file>
-
-<file path=ppt/slides/slide159.xml><?xml version="1.0" encoding="utf-8"?>
-<p:sld xmlns:a="http://schemas.openxmlformats.org/drawingml/2006/main" xmlns:r="http://schemas.openxmlformats.org/officeDocument/2006/relationships" xmlns:p="http://schemas.openxmlformats.org/presentationml/2006/main">
-  <p:cSld>
-    <p:spTree>
-      <p:nvGrpSpPr>
-        <p:cNvPr id="1" name=""/>
-        <p:cNvGrpSpPr/>
-        <p:nvPr/>
-      </p:nvGrpSpPr>
-      <p:grpSpPr>
-        <a:xfrm>
-          <a:off x="0" y="0"/>
-          <a:ext cx="0" cy="0"/>
-          <a:chOff x="0" y="0"/>
-          <a:chExt cx="0" cy="0"/>
-        </a:xfrm>
-      </p:grpSpPr>
-      <p:sp>
-        <p:nvSpPr>
-          <p:cNvPr id="2" name="Title 1">
-            <a:extLst>
-              <a:ext uri="{FF2B5EF4-FFF2-40B4-BE49-F238E27FC236}">
-                <a16:creationId xmlns:a16="http://schemas.microsoft.com/office/drawing/2014/main" id="{280D9917-47BB-B95D-A59F-151CB6D062FC}"/>
-              </a:ext>
-            </a:extLst>
-          </p:cNvPr>
-          <p:cNvSpPr>
-            <a:spLocks noGrp="1"/>
-          </p:cNvSpPr>
-          <p:nvPr>
-            <p:ph type="title"/>
-          </p:nvPr>
-        </p:nvSpPr>
-        <p:spPr>
-          <a:xfrm>
-            <a:off x="838200" y="18256"/>
-            <a:ext cx="10515600" cy="753270"/>
-          </a:xfrm>
-        </p:spPr>
-        <p:txBody>
-          <a:bodyPr/>
-          <a:lstStyle/>
-          <a:p>
-            <a:pPr algn="ctr"/>
-            <a:r>
-              <a:rPr lang="en-US"/>
-              <a:t>Start Exists Keyword</a:t>
-            </a:r>
-          </a:p>
-        </p:txBody>
-      </p:sp>
-      <p:sp>
-        <p:nvSpPr>
-          <p:cNvPr id="3" name="Content Placeholder 2">
-            <a:extLst>
-              <a:ext uri="{FF2B5EF4-FFF2-40B4-BE49-F238E27FC236}">
-                <a16:creationId xmlns:a16="http://schemas.microsoft.com/office/drawing/2014/main" id="{405ED246-8296-ACC1-036B-C2D8365A4D1E}"/>
-              </a:ext>
-            </a:extLst>
-          </p:cNvPr>
-          <p:cNvSpPr>
-            <a:spLocks noGrp="1"/>
-          </p:cNvSpPr>
-          <p:nvPr>
-            <p:ph idx="1"/>
-          </p:nvPr>
-        </p:nvSpPr>
-        <p:spPr>
-          <a:xfrm>
-            <a:off x="495299" y="771526"/>
-            <a:ext cx="11249025" cy="5405437"/>
-          </a:xfrm>
-        </p:spPr>
-        <p:txBody>
-          <a:bodyPr>
-            <a:normAutofit/>
-          </a:bodyPr>
-          <a:lstStyle/>
-          <a:p>
-            <a:r>
-              <a:rPr lang="en-US" sz="2400"/>
-              <a:t>it is an operator used to check whether a subquery returns </a:t>
-            </a:r>
-            <a:r>
-              <a:rPr lang="en-US" sz="2400" b="1"/>
-              <a:t>at least one</a:t>
-            </a:r>
-          </a:p>
-          <a:p>
-            <a:r>
-              <a:rPr lang="en-US" sz="2400"/>
-              <a:t>if the subquery returns one or more rows → </a:t>
-            </a:r>
-            <a:r>
-              <a:rPr lang="en-US" sz="2400" b="1">
-                <a:solidFill>
-                  <a:srgbClr val="002060"/>
-                </a:solidFill>
-              </a:rPr>
-              <a:t>EXISTS is TRUE.</a:t>
-            </a:r>
-          </a:p>
-          <a:p>
-            <a:r>
-              <a:rPr lang="en-US" sz="2400"/>
-              <a:t>If the subquery returns no rows → </a:t>
-            </a:r>
-            <a:r>
-              <a:rPr lang="en-US" sz="2400">
-                <a:solidFill>
-                  <a:srgbClr val="002060"/>
-                </a:solidFill>
-              </a:rPr>
-              <a:t>EXISTS is FALSE</a:t>
-            </a:r>
-            <a:r>
-              <a:rPr lang="en-US" sz="2400"/>
-              <a:t>.</a:t>
-            </a:r>
-          </a:p>
-          <a:p>
-            <a:r>
-              <a:rPr lang="en-US" sz="2400"/>
-              <a:t>Exist stop after first match so it is good performance</a:t>
-            </a:r>
-          </a:p>
-        </p:txBody>
-      </p:sp>
-      <p:pic>
-        <p:nvPicPr>
-          <p:cNvPr id="5" name="Picture 4">
-            <a:extLst>
-              <a:ext uri="{FF2B5EF4-FFF2-40B4-BE49-F238E27FC236}">
-                <a16:creationId xmlns:a16="http://schemas.microsoft.com/office/drawing/2014/main" id="{655FB9DE-93D7-373B-E1EE-A5AB461A4992}"/>
-              </a:ext>
-            </a:extLst>
-          </p:cNvPr>
-          <p:cNvPicPr>
-            <a:picLocks noChangeAspect="1"/>
-          </p:cNvPicPr>
-          <p:nvPr/>
-        </p:nvPicPr>
-        <p:blipFill>
-          <a:blip r:embed="rId2"/>
-          <a:stretch>
-            <a:fillRect/>
-          </a:stretch>
-        </p:blipFill>
-        <p:spPr>
-          <a:xfrm>
-            <a:off x="495299" y="2786425"/>
-            <a:ext cx="7912364" cy="3261949"/>
-          </a:xfrm>
-          <a:prstGeom prst="rect">
-            <a:avLst/>
-          </a:prstGeom>
-        </p:spPr>
-      </p:pic>
-    </p:spTree>
-    <p:extLst>
-      <p:ext uri="{BB962C8B-B14F-4D97-AF65-F5344CB8AC3E}">
-        <p14:creationId xmlns:p14="http://schemas.microsoft.com/office/powerpoint/2010/main" val="1653619571"/>
       </p:ext>
     </p:extLst>
   </p:cSld>
@@ -22466,6 +22520,409 @@
           <p:cNvPr id="2" name="Title 1">
             <a:extLst>
               <a:ext uri="{FF2B5EF4-FFF2-40B4-BE49-F238E27FC236}">
+                <a16:creationId xmlns:a16="http://schemas.microsoft.com/office/drawing/2014/main" id="{A161EDD7-C005-DD3F-240F-805C8F430C96}"/>
+              </a:ext>
+            </a:extLst>
+          </p:cNvPr>
+          <p:cNvSpPr>
+            <a:spLocks noGrp="1"/>
+          </p:cNvSpPr>
+          <p:nvPr>
+            <p:ph type="title"/>
+          </p:nvPr>
+        </p:nvSpPr>
+        <p:spPr/>
+        <p:txBody>
+          <a:bodyPr/>
+          <a:lstStyle/>
+          <a:p>
+            <a:endParaRPr lang="en-US"/>
+          </a:p>
+        </p:txBody>
+      </p:sp>
+      <p:sp>
+        <p:nvSpPr>
+          <p:cNvPr id="3" name="Content Placeholder 2">
+            <a:extLst>
+              <a:ext uri="{FF2B5EF4-FFF2-40B4-BE49-F238E27FC236}">
+                <a16:creationId xmlns:a16="http://schemas.microsoft.com/office/drawing/2014/main" id="{8DAB7D5C-64CA-CE0E-47B1-3EDB365B9C61}"/>
+              </a:ext>
+            </a:extLst>
+          </p:cNvPr>
+          <p:cNvSpPr>
+            <a:spLocks noGrp="1"/>
+          </p:cNvSpPr>
+          <p:nvPr>
+            <p:ph idx="1"/>
+          </p:nvPr>
+        </p:nvSpPr>
+        <p:spPr/>
+        <p:txBody>
+          <a:bodyPr/>
+          <a:lstStyle/>
+          <a:p>
+            <a:endParaRPr lang="en-US"/>
+          </a:p>
+        </p:txBody>
+      </p:sp>
+    </p:spTree>
+    <p:extLst>
+      <p:ext uri="{BB962C8B-B14F-4D97-AF65-F5344CB8AC3E}">
+        <p14:creationId xmlns:p14="http://schemas.microsoft.com/office/powerpoint/2010/main" val="960105000"/>
+      </p:ext>
+    </p:extLst>
+  </p:cSld>
+  <p:clrMapOvr>
+    <a:masterClrMapping/>
+  </p:clrMapOvr>
+</p:sld>
+</file>
+
+<file path=ppt/slides/slide161.xml><?xml version="1.0" encoding="utf-8"?>
+<p:sld xmlns:a="http://schemas.openxmlformats.org/drawingml/2006/main" xmlns:r="http://schemas.openxmlformats.org/officeDocument/2006/relationships" xmlns:p="http://schemas.openxmlformats.org/presentationml/2006/main">
+  <p:cSld>
+    <p:spTree>
+      <p:nvGrpSpPr>
+        <p:cNvPr id="1" name="">
+          <a:extLst>
+            <a:ext uri="{FF2B5EF4-FFF2-40B4-BE49-F238E27FC236}">
+              <a16:creationId xmlns:a16="http://schemas.microsoft.com/office/drawing/2014/main" id="{A957CBDA-0AB4-819E-3CBF-0B9D1DBB272D}"/>
+            </a:ext>
+          </a:extLst>
+        </p:cNvPr>
+        <p:cNvGrpSpPr/>
+        <p:nvPr/>
+      </p:nvGrpSpPr>
+      <p:grpSpPr>
+        <a:xfrm>
+          <a:off x="0" y="0"/>
+          <a:ext cx="0" cy="0"/>
+          <a:chOff x="0" y="0"/>
+          <a:chExt cx="0" cy="0"/>
+        </a:xfrm>
+      </p:grpSpPr>
+      <p:sp>
+        <p:nvSpPr>
+          <p:cNvPr id="2" name="Title 1">
+            <a:extLst>
+              <a:ext uri="{FF2B5EF4-FFF2-40B4-BE49-F238E27FC236}">
+                <a16:creationId xmlns:a16="http://schemas.microsoft.com/office/drawing/2014/main" id="{C2FE352F-A0B4-FD21-429E-2050BF3D93B5}"/>
+              </a:ext>
+            </a:extLst>
+          </p:cNvPr>
+          <p:cNvSpPr>
+            <a:spLocks noGrp="1"/>
+          </p:cNvSpPr>
+          <p:nvPr>
+            <p:ph type="title"/>
+          </p:nvPr>
+        </p:nvSpPr>
+        <p:spPr>
+          <a:xfrm>
+            <a:off x="838200" y="1787525"/>
+            <a:ext cx="10515600" cy="2662555"/>
+          </a:xfrm>
+        </p:spPr>
+        <p:txBody>
+          <a:bodyPr>
+            <a:noAutofit/>
+          </a:bodyPr>
+          <a:lstStyle/>
+          <a:p>
+            <a:pPr algn="ctr"/>
+            <a:r>
+              <a:rPr lang="en-US" sz="6000" b="1">
+                <a:solidFill>
+                  <a:srgbClr val="FF0000"/>
+                </a:solidFill>
+              </a:rPr>
+              <a:t>End Correlated vs. non-correlated subqueries</a:t>
+            </a:r>
+          </a:p>
+        </p:txBody>
+      </p:sp>
+    </p:spTree>
+    <p:extLst>
+      <p:ext uri="{BB962C8B-B14F-4D97-AF65-F5344CB8AC3E}">
+        <p14:creationId xmlns:p14="http://schemas.microsoft.com/office/powerpoint/2010/main" val="835608298"/>
+      </p:ext>
+    </p:extLst>
+  </p:cSld>
+  <p:clrMapOvr>
+    <a:masterClrMapping/>
+  </p:clrMapOvr>
+</p:sld>
+</file>
+
+<file path=ppt/slides/slide162.xml><?xml version="1.0" encoding="utf-8"?>
+<p:sld xmlns:a="http://schemas.openxmlformats.org/drawingml/2006/main" xmlns:r="http://schemas.openxmlformats.org/officeDocument/2006/relationships" xmlns:p="http://schemas.openxmlformats.org/presentationml/2006/main">
+  <p:cSld>
+    <p:spTree>
+      <p:nvGrpSpPr>
+        <p:cNvPr id="1" name="">
+          <a:extLst>
+            <a:ext uri="{FF2B5EF4-FFF2-40B4-BE49-F238E27FC236}">
+              <a16:creationId xmlns:a16="http://schemas.microsoft.com/office/drawing/2014/main" id="{D4DEBE3A-E07D-1EF7-7729-B13A7951C0EB}"/>
+            </a:ext>
+          </a:extLst>
+        </p:cNvPr>
+        <p:cNvGrpSpPr/>
+        <p:nvPr/>
+      </p:nvGrpSpPr>
+      <p:grpSpPr>
+        <a:xfrm>
+          <a:off x="0" y="0"/>
+          <a:ext cx="0" cy="0"/>
+          <a:chOff x="0" y="0"/>
+          <a:chExt cx="0" cy="0"/>
+        </a:xfrm>
+      </p:grpSpPr>
+      <p:sp>
+        <p:nvSpPr>
+          <p:cNvPr id="2" name="Title 1">
+            <a:extLst>
+              <a:ext uri="{FF2B5EF4-FFF2-40B4-BE49-F238E27FC236}">
+                <a16:creationId xmlns:a16="http://schemas.microsoft.com/office/drawing/2014/main" id="{08D510EA-E859-D1AD-9627-34E1FBF677E2}"/>
+              </a:ext>
+            </a:extLst>
+          </p:cNvPr>
+          <p:cNvSpPr>
+            <a:spLocks noGrp="1"/>
+          </p:cNvSpPr>
+          <p:nvPr>
+            <p:ph type="title"/>
+          </p:nvPr>
+        </p:nvSpPr>
+        <p:spPr>
+          <a:xfrm>
+            <a:off x="838200" y="1787525"/>
+            <a:ext cx="10515600" cy="2662555"/>
+          </a:xfrm>
+        </p:spPr>
+        <p:txBody>
+          <a:bodyPr>
+            <a:noAutofit/>
+          </a:bodyPr>
+          <a:lstStyle/>
+          <a:p>
+            <a:pPr algn="ctr"/>
+            <a:r>
+              <a:rPr lang="en-US" sz="6000" b="1">
+                <a:solidFill>
+                  <a:srgbClr val="FF0000"/>
+                </a:solidFill>
+              </a:rPr>
+              <a:t>Start Exist</a:t>
+            </a:r>
+          </a:p>
+        </p:txBody>
+      </p:sp>
+    </p:spTree>
+    <p:extLst>
+      <p:ext uri="{BB962C8B-B14F-4D97-AF65-F5344CB8AC3E}">
+        <p14:creationId xmlns:p14="http://schemas.microsoft.com/office/powerpoint/2010/main" val="549179624"/>
+      </p:ext>
+    </p:extLst>
+  </p:cSld>
+  <p:clrMapOvr>
+    <a:masterClrMapping/>
+  </p:clrMapOvr>
+</p:sld>
+</file>
+
+<file path=ppt/slides/slide163.xml><?xml version="1.0" encoding="utf-8"?>
+<p:sld xmlns:a="http://schemas.openxmlformats.org/drawingml/2006/main" xmlns:r="http://schemas.openxmlformats.org/officeDocument/2006/relationships" xmlns:p="http://schemas.openxmlformats.org/presentationml/2006/main">
+  <p:cSld>
+    <p:spTree>
+      <p:nvGrpSpPr>
+        <p:cNvPr id="1" name=""/>
+        <p:cNvGrpSpPr/>
+        <p:nvPr/>
+      </p:nvGrpSpPr>
+      <p:grpSpPr>
+        <a:xfrm>
+          <a:off x="0" y="0"/>
+          <a:ext cx="0" cy="0"/>
+          <a:chOff x="0" y="0"/>
+          <a:chExt cx="0" cy="0"/>
+        </a:xfrm>
+      </p:grpSpPr>
+      <p:sp>
+        <p:nvSpPr>
+          <p:cNvPr id="2" name="Title 1">
+            <a:extLst>
+              <a:ext uri="{FF2B5EF4-FFF2-40B4-BE49-F238E27FC236}">
+                <a16:creationId xmlns:a16="http://schemas.microsoft.com/office/drawing/2014/main" id="{280D9917-47BB-B95D-A59F-151CB6D062FC}"/>
+              </a:ext>
+            </a:extLst>
+          </p:cNvPr>
+          <p:cNvSpPr>
+            <a:spLocks noGrp="1"/>
+          </p:cNvSpPr>
+          <p:nvPr>
+            <p:ph type="title"/>
+          </p:nvPr>
+        </p:nvSpPr>
+        <p:spPr>
+          <a:xfrm>
+            <a:off x="838200" y="18256"/>
+            <a:ext cx="10515600" cy="753270"/>
+          </a:xfrm>
+        </p:spPr>
+        <p:txBody>
+          <a:bodyPr/>
+          <a:lstStyle/>
+          <a:p>
+            <a:pPr algn="ctr"/>
+            <a:r>
+              <a:rPr lang="en-US"/>
+              <a:t>Start Exists Keyword</a:t>
+            </a:r>
+          </a:p>
+        </p:txBody>
+      </p:sp>
+      <p:sp>
+        <p:nvSpPr>
+          <p:cNvPr id="3" name="Content Placeholder 2">
+            <a:extLst>
+              <a:ext uri="{FF2B5EF4-FFF2-40B4-BE49-F238E27FC236}">
+                <a16:creationId xmlns:a16="http://schemas.microsoft.com/office/drawing/2014/main" id="{405ED246-8296-ACC1-036B-C2D8365A4D1E}"/>
+              </a:ext>
+            </a:extLst>
+          </p:cNvPr>
+          <p:cNvSpPr>
+            <a:spLocks noGrp="1"/>
+          </p:cNvSpPr>
+          <p:nvPr>
+            <p:ph idx="1"/>
+          </p:nvPr>
+        </p:nvSpPr>
+        <p:spPr>
+          <a:xfrm>
+            <a:off x="495299" y="771526"/>
+            <a:ext cx="11249025" cy="5405437"/>
+          </a:xfrm>
+        </p:spPr>
+        <p:txBody>
+          <a:bodyPr>
+            <a:normAutofit/>
+          </a:bodyPr>
+          <a:lstStyle/>
+          <a:p>
+            <a:r>
+              <a:rPr lang="en-US" sz="2400"/>
+              <a:t>it is an operator used to check whether a subquery returns </a:t>
+            </a:r>
+            <a:r>
+              <a:rPr lang="en-US" sz="2400" b="1"/>
+              <a:t>at least one</a:t>
+            </a:r>
+          </a:p>
+          <a:p>
+            <a:r>
+              <a:rPr lang="en-US" sz="2400"/>
+              <a:t>if the subquery returns one or more rows → </a:t>
+            </a:r>
+            <a:r>
+              <a:rPr lang="en-US" sz="2400" b="1">
+                <a:solidFill>
+                  <a:srgbClr val="002060"/>
+                </a:solidFill>
+              </a:rPr>
+              <a:t>EXISTS is TRUE.</a:t>
+            </a:r>
+          </a:p>
+          <a:p>
+            <a:r>
+              <a:rPr lang="en-US" sz="2400"/>
+              <a:t>If the subquery returns no rows → </a:t>
+            </a:r>
+            <a:r>
+              <a:rPr lang="en-US" sz="2400">
+                <a:solidFill>
+                  <a:srgbClr val="002060"/>
+                </a:solidFill>
+              </a:rPr>
+              <a:t>EXISTS is FALSE</a:t>
+            </a:r>
+            <a:r>
+              <a:rPr lang="en-US" sz="2400"/>
+              <a:t>.</a:t>
+            </a:r>
+          </a:p>
+          <a:p>
+            <a:r>
+              <a:rPr lang="en-US" sz="2400"/>
+              <a:t>Exist stop after first match so it is good performance</a:t>
+            </a:r>
+          </a:p>
+        </p:txBody>
+      </p:sp>
+      <p:pic>
+        <p:nvPicPr>
+          <p:cNvPr id="5" name="Picture 4">
+            <a:extLst>
+              <a:ext uri="{FF2B5EF4-FFF2-40B4-BE49-F238E27FC236}">
+                <a16:creationId xmlns:a16="http://schemas.microsoft.com/office/drawing/2014/main" id="{655FB9DE-93D7-373B-E1EE-A5AB461A4992}"/>
+              </a:ext>
+            </a:extLst>
+          </p:cNvPr>
+          <p:cNvPicPr>
+            <a:picLocks noChangeAspect="1"/>
+          </p:cNvPicPr>
+          <p:nvPr/>
+        </p:nvPicPr>
+        <p:blipFill>
+          <a:blip r:embed="rId2"/>
+          <a:stretch>
+            <a:fillRect/>
+          </a:stretch>
+        </p:blipFill>
+        <p:spPr>
+          <a:xfrm>
+            <a:off x="495299" y="2786425"/>
+            <a:ext cx="7912364" cy="3261949"/>
+          </a:xfrm>
+          <a:prstGeom prst="rect">
+            <a:avLst/>
+          </a:prstGeom>
+        </p:spPr>
+      </p:pic>
+    </p:spTree>
+    <p:extLst>
+      <p:ext uri="{BB962C8B-B14F-4D97-AF65-F5344CB8AC3E}">
+        <p14:creationId xmlns:p14="http://schemas.microsoft.com/office/powerpoint/2010/main" val="1653619571"/>
+      </p:ext>
+    </p:extLst>
+  </p:cSld>
+  <p:clrMapOvr>
+    <a:masterClrMapping/>
+  </p:clrMapOvr>
+</p:sld>
+</file>
+
+<file path=ppt/slides/slide164.xml><?xml version="1.0" encoding="utf-8"?>
+<p:sld xmlns:a="http://schemas.openxmlformats.org/drawingml/2006/main" xmlns:r="http://schemas.openxmlformats.org/officeDocument/2006/relationships" xmlns:p="http://schemas.openxmlformats.org/presentationml/2006/main">
+  <p:cSld>
+    <p:spTree>
+      <p:nvGrpSpPr>
+        <p:cNvPr id="1" name=""/>
+        <p:cNvGrpSpPr/>
+        <p:nvPr/>
+      </p:nvGrpSpPr>
+      <p:grpSpPr>
+        <a:xfrm>
+          <a:off x="0" y="0"/>
+          <a:ext cx="0" cy="0"/>
+          <a:chOff x="0" y="0"/>
+          <a:chExt cx="0" cy="0"/>
+        </a:xfrm>
+      </p:grpSpPr>
+      <p:sp>
+        <p:nvSpPr>
+          <p:cNvPr id="2" name="Title 1">
+            <a:extLst>
+              <a:ext uri="{FF2B5EF4-FFF2-40B4-BE49-F238E27FC236}">
                 <a16:creationId xmlns:a16="http://schemas.microsoft.com/office/drawing/2014/main" id="{C76D2EB3-1F34-850B-251B-4065CD0DCB0F}"/>
               </a:ext>
             </a:extLst>
@@ -22571,7 +23028,7 @@
 </p:sld>
 </file>
 
-<file path=ppt/slides/slide161.xml><?xml version="1.0" encoding="utf-8"?>
+<file path=ppt/slides/slide165.xml><?xml version="1.0" encoding="utf-8"?>
 <p:sld xmlns:a="http://schemas.openxmlformats.org/drawingml/2006/main" xmlns:r="http://schemas.openxmlformats.org/officeDocument/2006/relationships" xmlns:p="http://schemas.openxmlformats.org/presentationml/2006/main">
   <p:cSld>
     <p:spTree>
@@ -22663,7 +23120,7 @@
 </p:sld>
 </file>
 
-<file path=ppt/slides/slide162.xml><?xml version="1.0" encoding="utf-8"?>
+<file path=ppt/slides/slide166.xml><?xml version="1.0" encoding="utf-8"?>
 <p:sld xmlns:a="http://schemas.openxmlformats.org/drawingml/2006/main" xmlns:r="http://schemas.openxmlformats.org/officeDocument/2006/relationships" xmlns:p="http://schemas.openxmlformats.org/presentationml/2006/main">
   <p:cSld>
     <p:spTree>
@@ -22739,7 +23196,7 @@
 </p:sld>
 </file>
 
-<file path=ppt/slides/slide163.xml><?xml version="1.0" encoding="utf-8"?>
+<file path=ppt/slides/slide167.xml><?xml version="1.0" encoding="utf-8"?>
 <p:sld xmlns:a="http://schemas.openxmlformats.org/drawingml/2006/main" xmlns:r="http://schemas.openxmlformats.org/officeDocument/2006/relationships" xmlns:p="http://schemas.openxmlformats.org/presentationml/2006/main">
   <p:cSld>
     <p:spTree>
@@ -22815,7 +23272,7 @@
 </p:sld>
 </file>
 
-<file path=ppt/slides/slide164.xml><?xml version="1.0" encoding="utf-8"?>
+<file path=ppt/slides/slide168.xml><?xml version="1.0" encoding="utf-8"?>
 <p:sld xmlns:a="http://schemas.openxmlformats.org/drawingml/2006/main" xmlns:r="http://schemas.openxmlformats.org/officeDocument/2006/relationships" xmlns:p="http://schemas.openxmlformats.org/presentationml/2006/main">
   <p:cSld>
     <p:spTree>
@@ -22951,7 +23408,7 @@
 </p:sld>
 </file>
 
-<file path=ppt/slides/slide165.xml><?xml version="1.0" encoding="utf-8"?>
+<file path=ppt/slides/slide169.xml><?xml version="1.0" encoding="utf-8"?>
 <p:sld xmlns:a="http://schemas.openxmlformats.org/drawingml/2006/main" xmlns:r="http://schemas.openxmlformats.org/officeDocument/2006/relationships" xmlns:p="http://schemas.openxmlformats.org/presentationml/2006/main">
   <p:cSld>
     <p:spTree>
@@ -23038,82 +23495,6 @@
     <p:extLst>
       <p:ext uri="{BB962C8B-B14F-4D97-AF65-F5344CB8AC3E}">
         <p14:creationId xmlns:p14="http://schemas.microsoft.com/office/powerpoint/2010/main" val="1101417262"/>
-      </p:ext>
-    </p:extLst>
-  </p:cSld>
-  <p:clrMapOvr>
-    <a:masterClrMapping/>
-  </p:clrMapOvr>
-</p:sld>
-</file>
-
-<file path=ppt/slides/slide166.xml><?xml version="1.0" encoding="utf-8"?>
-<p:sld xmlns:a="http://schemas.openxmlformats.org/drawingml/2006/main" xmlns:r="http://schemas.openxmlformats.org/officeDocument/2006/relationships" xmlns:p="http://schemas.openxmlformats.org/presentationml/2006/main">
-  <p:cSld>
-    <p:spTree>
-      <p:nvGrpSpPr>
-        <p:cNvPr id="1" name="">
-          <a:extLst>
-            <a:ext uri="{FF2B5EF4-FFF2-40B4-BE49-F238E27FC236}">
-              <a16:creationId xmlns:a16="http://schemas.microsoft.com/office/drawing/2014/main" id="{86240B03-D714-344F-A56E-FC3B45A2BA28}"/>
-            </a:ext>
-          </a:extLst>
-        </p:cNvPr>
-        <p:cNvGrpSpPr/>
-        <p:nvPr/>
-      </p:nvGrpSpPr>
-      <p:grpSpPr>
-        <a:xfrm>
-          <a:off x="0" y="0"/>
-          <a:ext cx="0" cy="0"/>
-          <a:chOff x="0" y="0"/>
-          <a:chExt cx="0" cy="0"/>
-        </a:xfrm>
-      </p:grpSpPr>
-      <p:sp>
-        <p:nvSpPr>
-          <p:cNvPr id="2" name="Title 1">
-            <a:extLst>
-              <a:ext uri="{FF2B5EF4-FFF2-40B4-BE49-F238E27FC236}">
-                <a16:creationId xmlns:a16="http://schemas.microsoft.com/office/drawing/2014/main" id="{CD666736-83CD-EC00-268A-803CBEF9496B}"/>
-              </a:ext>
-            </a:extLst>
-          </p:cNvPr>
-          <p:cNvSpPr>
-            <a:spLocks noGrp="1"/>
-          </p:cNvSpPr>
-          <p:nvPr>
-            <p:ph type="title"/>
-          </p:nvPr>
-        </p:nvSpPr>
-        <p:spPr>
-          <a:xfrm>
-            <a:off x="838200" y="1787525"/>
-            <a:ext cx="10515600" cy="2662555"/>
-          </a:xfrm>
-        </p:spPr>
-        <p:txBody>
-          <a:bodyPr>
-            <a:noAutofit/>
-          </a:bodyPr>
-          <a:lstStyle/>
-          <a:p>
-            <a:pPr algn="ctr"/>
-            <a:r>
-              <a:rPr lang="en-US" sz="6000" b="1">
-                <a:solidFill>
-                  <a:srgbClr val="FF0000"/>
-                </a:solidFill>
-              </a:rPr>
-              <a:t>End IF</a:t>
-            </a:r>
-          </a:p>
-        </p:txBody>
-      </p:sp>
-    </p:spTree>
-    <p:extLst>
-      <p:ext uri="{BB962C8B-B14F-4D97-AF65-F5344CB8AC3E}">
-        <p14:creationId xmlns:p14="http://schemas.microsoft.com/office/powerpoint/2010/main" val="347865220"/>
       </p:ext>
     </p:extLst>
   </p:cSld>
@@ -23406,6 +23787,1064 @@
     <p:extLst>
       <p:ext uri="{BB962C8B-B14F-4D97-AF65-F5344CB8AC3E}">
         <p14:creationId xmlns:p14="http://schemas.microsoft.com/office/powerpoint/2010/main" val="1615261720"/>
+      </p:ext>
+    </p:extLst>
+  </p:cSld>
+  <p:clrMapOvr>
+    <a:masterClrMapping/>
+  </p:clrMapOvr>
+</p:sld>
+</file>
+
+<file path=ppt/slides/slide170.xml><?xml version="1.0" encoding="utf-8"?>
+<p:sld xmlns:a="http://schemas.openxmlformats.org/drawingml/2006/main" xmlns:r="http://schemas.openxmlformats.org/officeDocument/2006/relationships" xmlns:p="http://schemas.openxmlformats.org/presentationml/2006/main">
+  <p:cSld>
+    <p:spTree>
+      <p:nvGrpSpPr>
+        <p:cNvPr id="1" name="">
+          <a:extLst>
+            <a:ext uri="{FF2B5EF4-FFF2-40B4-BE49-F238E27FC236}">
+              <a16:creationId xmlns:a16="http://schemas.microsoft.com/office/drawing/2014/main" id="{86240B03-D714-344F-A56E-FC3B45A2BA28}"/>
+            </a:ext>
+          </a:extLst>
+        </p:cNvPr>
+        <p:cNvGrpSpPr/>
+        <p:nvPr/>
+      </p:nvGrpSpPr>
+      <p:grpSpPr>
+        <a:xfrm>
+          <a:off x="0" y="0"/>
+          <a:ext cx="0" cy="0"/>
+          <a:chOff x="0" y="0"/>
+          <a:chExt cx="0" cy="0"/>
+        </a:xfrm>
+      </p:grpSpPr>
+      <p:sp>
+        <p:nvSpPr>
+          <p:cNvPr id="2" name="Title 1">
+            <a:extLst>
+              <a:ext uri="{FF2B5EF4-FFF2-40B4-BE49-F238E27FC236}">
+                <a16:creationId xmlns:a16="http://schemas.microsoft.com/office/drawing/2014/main" id="{CD666736-83CD-EC00-268A-803CBEF9496B}"/>
+              </a:ext>
+            </a:extLst>
+          </p:cNvPr>
+          <p:cNvSpPr>
+            <a:spLocks noGrp="1"/>
+          </p:cNvSpPr>
+          <p:nvPr>
+            <p:ph type="title"/>
+          </p:nvPr>
+        </p:nvSpPr>
+        <p:spPr>
+          <a:xfrm>
+            <a:off x="838200" y="1787525"/>
+            <a:ext cx="10515600" cy="2662555"/>
+          </a:xfrm>
+        </p:spPr>
+        <p:txBody>
+          <a:bodyPr>
+            <a:noAutofit/>
+          </a:bodyPr>
+          <a:lstStyle/>
+          <a:p>
+            <a:pPr algn="ctr"/>
+            <a:r>
+              <a:rPr lang="en-US" sz="6000" b="1">
+                <a:solidFill>
+                  <a:srgbClr val="FF0000"/>
+                </a:solidFill>
+              </a:rPr>
+              <a:t>End IF</a:t>
+            </a:r>
+          </a:p>
+        </p:txBody>
+      </p:sp>
+    </p:spTree>
+    <p:extLst>
+      <p:ext uri="{BB962C8B-B14F-4D97-AF65-F5344CB8AC3E}">
+        <p14:creationId xmlns:p14="http://schemas.microsoft.com/office/powerpoint/2010/main" val="347865220"/>
+      </p:ext>
+    </p:extLst>
+  </p:cSld>
+  <p:clrMapOvr>
+    <a:masterClrMapping/>
+  </p:clrMapOvr>
+</p:sld>
+</file>
+
+<file path=ppt/slides/slide171.xml><?xml version="1.0" encoding="utf-8"?>
+<p:sld xmlns:a="http://schemas.openxmlformats.org/drawingml/2006/main" xmlns:r="http://schemas.openxmlformats.org/officeDocument/2006/relationships" xmlns:p="http://schemas.openxmlformats.org/presentationml/2006/main">
+  <p:cSld>
+    <p:spTree>
+      <p:nvGrpSpPr>
+        <p:cNvPr id="1" name="">
+          <a:extLst>
+            <a:ext uri="{FF2B5EF4-FFF2-40B4-BE49-F238E27FC236}">
+              <a16:creationId xmlns:a16="http://schemas.microsoft.com/office/drawing/2014/main" id="{49A59814-D490-6EA4-C356-481D6DB0A5C7}"/>
+            </a:ext>
+          </a:extLst>
+        </p:cNvPr>
+        <p:cNvGrpSpPr/>
+        <p:nvPr/>
+      </p:nvGrpSpPr>
+      <p:grpSpPr>
+        <a:xfrm>
+          <a:off x="0" y="0"/>
+          <a:ext cx="0" cy="0"/>
+          <a:chOff x="0" y="0"/>
+          <a:chExt cx="0" cy="0"/>
+        </a:xfrm>
+      </p:grpSpPr>
+      <p:sp>
+        <p:nvSpPr>
+          <p:cNvPr id="2" name="Title 1">
+            <a:extLst>
+              <a:ext uri="{FF2B5EF4-FFF2-40B4-BE49-F238E27FC236}">
+                <a16:creationId xmlns:a16="http://schemas.microsoft.com/office/drawing/2014/main" id="{506F8D5E-3BFC-F7C9-FD19-7B0FD20A86D5}"/>
+              </a:ext>
+            </a:extLst>
+          </p:cNvPr>
+          <p:cNvSpPr>
+            <a:spLocks noGrp="1"/>
+          </p:cNvSpPr>
+          <p:nvPr>
+            <p:ph type="title"/>
+          </p:nvPr>
+        </p:nvSpPr>
+        <p:spPr>
+          <a:xfrm>
+            <a:off x="838200" y="2184400"/>
+            <a:ext cx="10515600" cy="2091267"/>
+          </a:xfrm>
+        </p:spPr>
+        <p:txBody>
+          <a:bodyPr>
+            <a:normAutofit/>
+          </a:bodyPr>
+          <a:lstStyle/>
+          <a:p>
+            <a:pPr algn="ctr"/>
+            <a:r>
+              <a:rPr lang="en-US" sz="5400" b="1">
+                <a:solidFill>
+                  <a:srgbClr val="FF0000"/>
+                </a:solidFill>
+              </a:rPr>
+              <a:t>Start query expressions</a:t>
+            </a:r>
+          </a:p>
+        </p:txBody>
+      </p:sp>
+    </p:spTree>
+    <p:extLst>
+      <p:ext uri="{BB962C8B-B14F-4D97-AF65-F5344CB8AC3E}">
+        <p14:creationId xmlns:p14="http://schemas.microsoft.com/office/powerpoint/2010/main" val="1917108979"/>
+      </p:ext>
+    </p:extLst>
+  </p:cSld>
+  <p:clrMapOvr>
+    <a:masterClrMapping/>
+  </p:clrMapOvr>
+</p:sld>
+</file>
+
+<file path=ppt/slides/slide172.xml><?xml version="1.0" encoding="utf-8"?>
+<p:sld xmlns:a="http://schemas.openxmlformats.org/drawingml/2006/main" xmlns:r="http://schemas.openxmlformats.org/officeDocument/2006/relationships" xmlns:p="http://schemas.openxmlformats.org/presentationml/2006/main">
+  <p:cSld>
+    <p:spTree>
+      <p:nvGrpSpPr>
+        <p:cNvPr id="1" name=""/>
+        <p:cNvGrpSpPr/>
+        <p:nvPr/>
+      </p:nvGrpSpPr>
+      <p:grpSpPr>
+        <a:xfrm>
+          <a:off x="0" y="0"/>
+          <a:ext cx="0" cy="0"/>
+          <a:chOff x="0" y="0"/>
+          <a:chExt cx="0" cy="0"/>
+        </a:xfrm>
+      </p:grpSpPr>
+      <p:sp>
+        <p:nvSpPr>
+          <p:cNvPr id="2" name="Title 1">
+            <a:extLst>
+              <a:ext uri="{FF2B5EF4-FFF2-40B4-BE49-F238E27FC236}">
+                <a16:creationId xmlns:a16="http://schemas.microsoft.com/office/drawing/2014/main" id="{64318416-195B-CDB6-E2ED-B7A3D1304DBD}"/>
+              </a:ext>
+            </a:extLst>
+          </p:cNvPr>
+          <p:cNvSpPr>
+            <a:spLocks noGrp="1"/>
+          </p:cNvSpPr>
+          <p:nvPr>
+            <p:ph type="title"/>
+          </p:nvPr>
+        </p:nvSpPr>
+        <p:spPr>
+          <a:xfrm>
+            <a:off x="838200" y="76200"/>
+            <a:ext cx="10515600" cy="1100668"/>
+          </a:xfrm>
+        </p:spPr>
+        <p:txBody>
+          <a:bodyPr/>
+          <a:lstStyle/>
+          <a:p>
+            <a:pPr algn="ctr"/>
+            <a:r>
+              <a:rPr lang="en-US" b="1"/>
+              <a:t>Select</a:t>
+            </a:r>
+          </a:p>
+        </p:txBody>
+      </p:sp>
+      <p:pic>
+        <p:nvPicPr>
+          <p:cNvPr id="5" name="Content Placeholder 4">
+            <a:extLst>
+              <a:ext uri="{FF2B5EF4-FFF2-40B4-BE49-F238E27FC236}">
+                <a16:creationId xmlns:a16="http://schemas.microsoft.com/office/drawing/2014/main" id="{0F927A6D-4C0C-2A66-1A49-C0FFC8BA04A5}"/>
+              </a:ext>
+            </a:extLst>
+          </p:cNvPr>
+          <p:cNvPicPr>
+            <a:picLocks noGrp="1" noChangeAspect="1"/>
+          </p:cNvPicPr>
+          <p:nvPr>
+            <p:ph idx="1"/>
+          </p:nvPr>
+        </p:nvPicPr>
+        <p:blipFill>
+          <a:blip r:embed="rId2"/>
+          <a:stretch>
+            <a:fillRect/>
+          </a:stretch>
+        </p:blipFill>
+        <p:spPr>
+          <a:xfrm>
+            <a:off x="1225429" y="1625136"/>
+            <a:ext cx="4150904" cy="4810499"/>
+          </a:xfrm>
+          <a:prstGeom prst="rect">
+            <a:avLst/>
+          </a:prstGeom>
+        </p:spPr>
+      </p:pic>
+    </p:spTree>
+    <p:extLst>
+      <p:ext uri="{BB962C8B-B14F-4D97-AF65-F5344CB8AC3E}">
+        <p14:creationId xmlns:p14="http://schemas.microsoft.com/office/powerpoint/2010/main" val="2594346854"/>
+      </p:ext>
+    </p:extLst>
+  </p:cSld>
+  <p:clrMapOvr>
+    <a:masterClrMapping/>
+  </p:clrMapOvr>
+</p:sld>
+</file>
+
+<file path=ppt/slides/slide173.xml><?xml version="1.0" encoding="utf-8"?>
+<p:sld xmlns:a="http://schemas.openxmlformats.org/drawingml/2006/main" xmlns:r="http://schemas.openxmlformats.org/officeDocument/2006/relationships" xmlns:p="http://schemas.openxmlformats.org/presentationml/2006/main">
+  <p:cSld>
+    <p:spTree>
+      <p:nvGrpSpPr>
+        <p:cNvPr id="1" name=""/>
+        <p:cNvGrpSpPr/>
+        <p:nvPr/>
+      </p:nvGrpSpPr>
+      <p:grpSpPr>
+        <a:xfrm>
+          <a:off x="0" y="0"/>
+          <a:ext cx="0" cy="0"/>
+          <a:chOff x="0" y="0"/>
+          <a:chExt cx="0" cy="0"/>
+        </a:xfrm>
+      </p:grpSpPr>
+      <p:sp>
+        <p:nvSpPr>
+          <p:cNvPr id="2" name="Title 1">
+            <a:extLst>
+              <a:ext uri="{FF2B5EF4-FFF2-40B4-BE49-F238E27FC236}">
+                <a16:creationId xmlns:a16="http://schemas.microsoft.com/office/drawing/2014/main" id="{16D2B9F2-F905-4F46-0336-F06D8CBA9959}"/>
+              </a:ext>
+            </a:extLst>
+          </p:cNvPr>
+          <p:cNvSpPr>
+            <a:spLocks noGrp="1"/>
+          </p:cNvSpPr>
+          <p:nvPr>
+            <p:ph type="title"/>
+          </p:nvPr>
+        </p:nvSpPr>
+        <p:spPr>
+          <a:xfrm>
+            <a:off x="838200" y="0"/>
+            <a:ext cx="10515600" cy="557741"/>
+          </a:xfrm>
+        </p:spPr>
+        <p:txBody>
+          <a:bodyPr>
+            <a:normAutofit fontScale="90000"/>
+          </a:bodyPr>
+          <a:lstStyle/>
+          <a:p>
+            <a:r>
+              <a:rPr lang="en-US"/>
+              <a:t>SELECT specific columns</a:t>
+            </a:r>
+          </a:p>
+        </p:txBody>
+      </p:sp>
+      <p:pic>
+        <p:nvPicPr>
+          <p:cNvPr id="5" name="Content Placeholder 4">
+            <a:extLst>
+              <a:ext uri="{FF2B5EF4-FFF2-40B4-BE49-F238E27FC236}">
+                <a16:creationId xmlns:a16="http://schemas.microsoft.com/office/drawing/2014/main" id="{1C4C3F06-6E3B-3F99-84D5-61B2D3A40221}"/>
+              </a:ext>
+            </a:extLst>
+          </p:cNvPr>
+          <p:cNvPicPr>
+            <a:picLocks noGrp="1" noChangeAspect="1"/>
+          </p:cNvPicPr>
+          <p:nvPr>
+            <p:ph idx="1"/>
+          </p:nvPr>
+        </p:nvPicPr>
+        <p:blipFill>
+          <a:blip r:embed="rId2"/>
+          <a:stretch>
+            <a:fillRect/>
+          </a:stretch>
+        </p:blipFill>
+        <p:spPr>
+          <a:xfrm>
+            <a:off x="254000" y="814908"/>
+            <a:ext cx="3048000" cy="1985978"/>
+          </a:xfrm>
+          <a:prstGeom prst="rect">
+            <a:avLst/>
+          </a:prstGeom>
+        </p:spPr>
+      </p:pic>
+      <p:pic>
+        <p:nvPicPr>
+          <p:cNvPr id="9" name="Picture 8">
+            <a:extLst>
+              <a:ext uri="{FF2B5EF4-FFF2-40B4-BE49-F238E27FC236}">
+                <a16:creationId xmlns:a16="http://schemas.microsoft.com/office/drawing/2014/main" id="{833D7501-B35C-705B-9A28-92EB276A223E}"/>
+              </a:ext>
+            </a:extLst>
+          </p:cNvPr>
+          <p:cNvPicPr>
+            <a:picLocks noChangeAspect="1"/>
+          </p:cNvPicPr>
+          <p:nvPr/>
+        </p:nvPicPr>
+        <p:blipFill>
+          <a:blip r:embed="rId3"/>
+          <a:stretch>
+            <a:fillRect/>
+          </a:stretch>
+        </p:blipFill>
+        <p:spPr>
+          <a:xfrm>
+            <a:off x="3380665" y="620661"/>
+            <a:ext cx="2283535" cy="2374472"/>
+          </a:xfrm>
+          <a:prstGeom prst="rect">
+            <a:avLst/>
+          </a:prstGeom>
+        </p:spPr>
+      </p:pic>
+    </p:spTree>
+    <p:extLst>
+      <p:ext uri="{BB962C8B-B14F-4D97-AF65-F5344CB8AC3E}">
+        <p14:creationId xmlns:p14="http://schemas.microsoft.com/office/powerpoint/2010/main" val="2126545097"/>
+      </p:ext>
+    </p:extLst>
+  </p:cSld>
+  <p:clrMapOvr>
+    <a:masterClrMapping/>
+  </p:clrMapOvr>
+</p:sld>
+</file>
+
+<file path=ppt/slides/slide174.xml><?xml version="1.0" encoding="utf-8"?>
+<p:sld xmlns:a="http://schemas.openxmlformats.org/drawingml/2006/main" xmlns:r="http://schemas.openxmlformats.org/officeDocument/2006/relationships" xmlns:p="http://schemas.openxmlformats.org/presentationml/2006/main">
+  <p:cSld>
+    <p:spTree>
+      <p:nvGrpSpPr>
+        <p:cNvPr id="1" name=""/>
+        <p:cNvGrpSpPr/>
+        <p:nvPr/>
+      </p:nvGrpSpPr>
+      <p:grpSpPr>
+        <a:xfrm>
+          <a:off x="0" y="0"/>
+          <a:ext cx="0" cy="0"/>
+          <a:chOff x="0" y="0"/>
+          <a:chExt cx="0" cy="0"/>
+        </a:xfrm>
+      </p:grpSpPr>
+      <p:sp>
+        <p:nvSpPr>
+          <p:cNvPr id="2" name="Title 1">
+            <a:extLst>
+              <a:ext uri="{FF2B5EF4-FFF2-40B4-BE49-F238E27FC236}">
+                <a16:creationId xmlns:a16="http://schemas.microsoft.com/office/drawing/2014/main" id="{FB63AA11-FA45-8C80-942B-EC8A31F7CA66}"/>
+              </a:ext>
+            </a:extLst>
+          </p:cNvPr>
+          <p:cNvSpPr>
+            <a:spLocks noGrp="1"/>
+          </p:cNvSpPr>
+          <p:nvPr>
+            <p:ph type="title"/>
+          </p:nvPr>
+        </p:nvSpPr>
+        <p:spPr>
+          <a:xfrm>
+            <a:off x="838200" y="365126"/>
+            <a:ext cx="10515600" cy="862542"/>
+          </a:xfrm>
+        </p:spPr>
+        <p:txBody>
+          <a:bodyPr/>
+          <a:lstStyle/>
+          <a:p>
+            <a:r>
+              <a:rPr lang="en-US"/>
+              <a:t>Where</a:t>
+            </a:r>
+          </a:p>
+        </p:txBody>
+      </p:sp>
+      <p:pic>
+        <p:nvPicPr>
+          <p:cNvPr id="5" name="Content Placeholder 4">
+            <a:extLst>
+              <a:ext uri="{FF2B5EF4-FFF2-40B4-BE49-F238E27FC236}">
+                <a16:creationId xmlns:a16="http://schemas.microsoft.com/office/drawing/2014/main" id="{A3F32F1D-200A-FBE3-AA92-CAE82F51A6B2}"/>
+              </a:ext>
+            </a:extLst>
+          </p:cNvPr>
+          <p:cNvPicPr>
+            <a:picLocks noGrp="1" noChangeAspect="1"/>
+          </p:cNvPicPr>
+          <p:nvPr>
+            <p:ph idx="1"/>
+          </p:nvPr>
+        </p:nvPicPr>
+        <p:blipFill>
+          <a:blip r:embed="rId2"/>
+          <a:stretch>
+            <a:fillRect/>
+          </a:stretch>
+        </p:blipFill>
+        <p:spPr>
+          <a:xfrm>
+            <a:off x="1558614" y="1794718"/>
+            <a:ext cx="3047253" cy="4924039"/>
+          </a:xfrm>
+          <a:prstGeom prst="rect">
+            <a:avLst/>
+          </a:prstGeom>
+        </p:spPr>
+      </p:pic>
+    </p:spTree>
+    <p:extLst>
+      <p:ext uri="{BB962C8B-B14F-4D97-AF65-F5344CB8AC3E}">
+        <p14:creationId xmlns:p14="http://schemas.microsoft.com/office/powerpoint/2010/main" val="2477047081"/>
+      </p:ext>
+    </p:extLst>
+  </p:cSld>
+  <p:clrMapOvr>
+    <a:masterClrMapping/>
+  </p:clrMapOvr>
+</p:sld>
+</file>
+
+<file path=ppt/slides/slide175.xml><?xml version="1.0" encoding="utf-8"?>
+<p:sld xmlns:a="http://schemas.openxmlformats.org/drawingml/2006/main" xmlns:r="http://schemas.openxmlformats.org/officeDocument/2006/relationships" xmlns:p="http://schemas.openxmlformats.org/presentationml/2006/main">
+  <p:cSld>
+    <p:spTree>
+      <p:nvGrpSpPr>
+        <p:cNvPr id="1" name=""/>
+        <p:cNvGrpSpPr/>
+        <p:nvPr/>
+      </p:nvGrpSpPr>
+      <p:grpSpPr>
+        <a:xfrm>
+          <a:off x="0" y="0"/>
+          <a:ext cx="0" cy="0"/>
+          <a:chOff x="0" y="0"/>
+          <a:chExt cx="0" cy="0"/>
+        </a:xfrm>
+      </p:grpSpPr>
+      <p:sp>
+        <p:nvSpPr>
+          <p:cNvPr id="2" name="Title 1">
+            <a:extLst>
+              <a:ext uri="{FF2B5EF4-FFF2-40B4-BE49-F238E27FC236}">
+                <a16:creationId xmlns:a16="http://schemas.microsoft.com/office/drawing/2014/main" id="{65BE9BAD-4B82-C58B-D2F5-0EC1A9E97633}"/>
+              </a:ext>
+            </a:extLst>
+          </p:cNvPr>
+          <p:cNvSpPr>
+            <a:spLocks noGrp="1"/>
+          </p:cNvSpPr>
+          <p:nvPr>
+            <p:ph type="title"/>
+          </p:nvPr>
+        </p:nvSpPr>
+        <p:spPr>
+          <a:xfrm>
+            <a:off x="838200" y="101601"/>
+            <a:ext cx="10515600" cy="804332"/>
+          </a:xfrm>
+        </p:spPr>
+        <p:txBody>
+          <a:bodyPr>
+            <a:normAutofit/>
+          </a:bodyPr>
+          <a:lstStyle/>
+          <a:p>
+            <a:r>
+              <a:rPr lang="en-US" b="1"/>
+              <a:t>Order by</a:t>
+            </a:r>
+          </a:p>
+        </p:txBody>
+      </p:sp>
+      <p:pic>
+        <p:nvPicPr>
+          <p:cNvPr id="5" name="Content Placeholder 4">
+            <a:extLst>
+              <a:ext uri="{FF2B5EF4-FFF2-40B4-BE49-F238E27FC236}">
+                <a16:creationId xmlns:a16="http://schemas.microsoft.com/office/drawing/2014/main" id="{FE4C9FA0-0766-43F0-96B5-51B69F84792B}"/>
+              </a:ext>
+            </a:extLst>
+          </p:cNvPr>
+          <p:cNvPicPr>
+            <a:picLocks noGrp="1" noChangeAspect="1"/>
+          </p:cNvPicPr>
+          <p:nvPr>
+            <p:ph idx="1"/>
+          </p:nvPr>
+        </p:nvPicPr>
+        <p:blipFill>
+          <a:blip r:embed="rId2"/>
+          <a:stretch>
+            <a:fillRect/>
+          </a:stretch>
+        </p:blipFill>
+        <p:spPr>
+          <a:xfrm>
+            <a:off x="766871" y="1461557"/>
+            <a:ext cx="3153195" cy="5213282"/>
+          </a:xfrm>
+          <a:prstGeom prst="rect">
+            <a:avLst/>
+          </a:prstGeom>
+        </p:spPr>
+      </p:pic>
+    </p:spTree>
+    <p:extLst>
+      <p:ext uri="{BB962C8B-B14F-4D97-AF65-F5344CB8AC3E}">
+        <p14:creationId xmlns:p14="http://schemas.microsoft.com/office/powerpoint/2010/main" val="2317461779"/>
+      </p:ext>
+    </p:extLst>
+  </p:cSld>
+  <p:clrMapOvr>
+    <a:masterClrMapping/>
+  </p:clrMapOvr>
+</p:sld>
+</file>
+
+<file path=ppt/slides/slide176.xml><?xml version="1.0" encoding="utf-8"?>
+<p:sld xmlns:a="http://schemas.openxmlformats.org/drawingml/2006/main" xmlns:r="http://schemas.openxmlformats.org/officeDocument/2006/relationships" xmlns:p="http://schemas.openxmlformats.org/presentationml/2006/main">
+  <p:cSld>
+    <p:spTree>
+      <p:nvGrpSpPr>
+        <p:cNvPr id="1" name=""/>
+        <p:cNvGrpSpPr/>
+        <p:nvPr/>
+      </p:nvGrpSpPr>
+      <p:grpSpPr>
+        <a:xfrm>
+          <a:off x="0" y="0"/>
+          <a:ext cx="0" cy="0"/>
+          <a:chOff x="0" y="0"/>
+          <a:chExt cx="0" cy="0"/>
+        </a:xfrm>
+      </p:grpSpPr>
+      <p:sp>
+        <p:nvSpPr>
+          <p:cNvPr id="2" name="Title 1">
+            <a:extLst>
+              <a:ext uri="{FF2B5EF4-FFF2-40B4-BE49-F238E27FC236}">
+                <a16:creationId xmlns:a16="http://schemas.microsoft.com/office/drawing/2014/main" id="{4A09BBA7-FB99-4E4B-D73F-A8747BF5650D}"/>
+              </a:ext>
+            </a:extLst>
+          </p:cNvPr>
+          <p:cNvSpPr>
+            <a:spLocks noGrp="1"/>
+          </p:cNvSpPr>
+          <p:nvPr>
+            <p:ph type="title"/>
+          </p:nvPr>
+        </p:nvSpPr>
+        <p:spPr/>
+        <p:txBody>
+          <a:bodyPr/>
+          <a:lstStyle/>
+          <a:p>
+            <a:r>
+              <a:rPr lang="en-US"/>
+              <a:t>JOIN</a:t>
+            </a:r>
+          </a:p>
+        </p:txBody>
+      </p:sp>
+      <p:pic>
+        <p:nvPicPr>
+          <p:cNvPr id="9" name="Content Placeholder 8">
+            <a:extLst>
+              <a:ext uri="{FF2B5EF4-FFF2-40B4-BE49-F238E27FC236}">
+                <a16:creationId xmlns:a16="http://schemas.microsoft.com/office/drawing/2014/main" id="{81F8FD2D-A2E3-5D44-F6DF-BB06E60E366C}"/>
+              </a:ext>
+            </a:extLst>
+          </p:cNvPr>
+          <p:cNvPicPr>
+            <a:picLocks noGrp="1" noChangeAspect="1"/>
+          </p:cNvPicPr>
+          <p:nvPr>
+            <p:ph idx="1"/>
+          </p:nvPr>
+        </p:nvPicPr>
+        <p:blipFill>
+          <a:blip r:embed="rId2"/>
+          <a:stretch>
+            <a:fillRect/>
+          </a:stretch>
+        </p:blipFill>
+        <p:spPr>
+          <a:xfrm>
+            <a:off x="518650" y="1598019"/>
+            <a:ext cx="3373222" cy="2994816"/>
+          </a:xfrm>
+          <a:prstGeom prst="rect">
+            <a:avLst/>
+          </a:prstGeom>
+        </p:spPr>
+      </p:pic>
+      <p:pic>
+        <p:nvPicPr>
+          <p:cNvPr id="11" name="Picture 10">
+            <a:extLst>
+              <a:ext uri="{FF2B5EF4-FFF2-40B4-BE49-F238E27FC236}">
+                <a16:creationId xmlns:a16="http://schemas.microsoft.com/office/drawing/2014/main" id="{93FC7FF0-B21F-00B4-DA8B-9E679C95C330}"/>
+              </a:ext>
+            </a:extLst>
+          </p:cNvPr>
+          <p:cNvPicPr>
+            <a:picLocks noChangeAspect="1"/>
+          </p:cNvPicPr>
+          <p:nvPr/>
+        </p:nvPicPr>
+        <p:blipFill>
+          <a:blip r:embed="rId3"/>
+          <a:stretch>
+            <a:fillRect/>
+          </a:stretch>
+        </p:blipFill>
+        <p:spPr>
+          <a:xfrm>
+            <a:off x="4602834" y="1475626"/>
+            <a:ext cx="3483812" cy="3028640"/>
+          </a:xfrm>
+          <a:prstGeom prst="rect">
+            <a:avLst/>
+          </a:prstGeom>
+        </p:spPr>
+      </p:pic>
+      <p:pic>
+        <p:nvPicPr>
+          <p:cNvPr id="13" name="Picture 12">
+            <a:extLst>
+              <a:ext uri="{FF2B5EF4-FFF2-40B4-BE49-F238E27FC236}">
+                <a16:creationId xmlns:a16="http://schemas.microsoft.com/office/drawing/2014/main" id="{59D6D97D-DBDF-218D-BB91-4FBE47DF1A06}"/>
+              </a:ext>
+            </a:extLst>
+          </p:cNvPr>
+          <p:cNvPicPr>
+            <a:picLocks noChangeAspect="1"/>
+          </p:cNvPicPr>
+          <p:nvPr/>
+        </p:nvPicPr>
+        <p:blipFill>
+          <a:blip r:embed="rId4"/>
+          <a:stretch>
+            <a:fillRect/>
+          </a:stretch>
+        </p:blipFill>
+        <p:spPr>
+          <a:xfrm>
+            <a:off x="8797608" y="1074329"/>
+            <a:ext cx="1531725" cy="4709342"/>
+          </a:xfrm>
+          <a:prstGeom prst="rect">
+            <a:avLst/>
+          </a:prstGeom>
+        </p:spPr>
+      </p:pic>
+    </p:spTree>
+    <p:extLst>
+      <p:ext uri="{BB962C8B-B14F-4D97-AF65-F5344CB8AC3E}">
+        <p14:creationId xmlns:p14="http://schemas.microsoft.com/office/powerpoint/2010/main" val="2379152543"/>
+      </p:ext>
+    </p:extLst>
+  </p:cSld>
+  <p:clrMapOvr>
+    <a:masterClrMapping/>
+  </p:clrMapOvr>
+</p:sld>
+</file>
+
+<file path=ppt/slides/slide177.xml><?xml version="1.0" encoding="utf-8"?>
+<p:sld xmlns:a="http://schemas.openxmlformats.org/drawingml/2006/main" xmlns:r="http://schemas.openxmlformats.org/officeDocument/2006/relationships" xmlns:p="http://schemas.openxmlformats.org/presentationml/2006/main">
+  <p:cSld>
+    <p:spTree>
+      <p:nvGrpSpPr>
+        <p:cNvPr id="1" name=""/>
+        <p:cNvGrpSpPr/>
+        <p:nvPr/>
+      </p:nvGrpSpPr>
+      <p:grpSpPr>
+        <a:xfrm>
+          <a:off x="0" y="0"/>
+          <a:ext cx="0" cy="0"/>
+          <a:chOff x="0" y="0"/>
+          <a:chExt cx="0" cy="0"/>
+        </a:xfrm>
+      </p:grpSpPr>
+      <p:sp>
+        <p:nvSpPr>
+          <p:cNvPr id="2" name="Title 1">
+            <a:extLst>
+              <a:ext uri="{FF2B5EF4-FFF2-40B4-BE49-F238E27FC236}">
+                <a16:creationId xmlns:a16="http://schemas.microsoft.com/office/drawing/2014/main" id="{FF0BDA50-A82C-B9F5-0D30-136A6F391BF6}"/>
+              </a:ext>
+            </a:extLst>
+          </p:cNvPr>
+          <p:cNvSpPr>
+            <a:spLocks noGrp="1"/>
+          </p:cNvSpPr>
+          <p:nvPr>
+            <p:ph type="title"/>
+          </p:nvPr>
+        </p:nvSpPr>
+        <p:spPr>
+          <a:xfrm>
+            <a:off x="838200" y="38629"/>
+            <a:ext cx="10515600" cy="642408"/>
+          </a:xfrm>
+        </p:spPr>
+        <p:txBody>
+          <a:bodyPr>
+            <a:normAutofit fontScale="90000"/>
+          </a:bodyPr>
+          <a:lstStyle/>
+          <a:p>
+            <a:r>
+              <a:rPr lang="en-US"/>
+              <a:t>Left Join</a:t>
+            </a:r>
+          </a:p>
+        </p:txBody>
+      </p:sp>
+      <p:pic>
+        <p:nvPicPr>
+          <p:cNvPr id="5" name="Content Placeholder 4">
+            <a:extLst>
+              <a:ext uri="{FF2B5EF4-FFF2-40B4-BE49-F238E27FC236}">
+                <a16:creationId xmlns:a16="http://schemas.microsoft.com/office/drawing/2014/main" id="{2FD04594-A71F-9809-2B2A-44C041FE8FEA}"/>
+              </a:ext>
+            </a:extLst>
+          </p:cNvPr>
+          <p:cNvPicPr>
+            <a:picLocks noGrp="1" noChangeAspect="1"/>
+          </p:cNvPicPr>
+          <p:nvPr>
+            <p:ph idx="1"/>
+          </p:nvPr>
+        </p:nvPicPr>
+        <p:blipFill>
+          <a:blip r:embed="rId2"/>
+          <a:stretch>
+            <a:fillRect/>
+          </a:stretch>
+        </p:blipFill>
+        <p:spPr>
+          <a:xfrm>
+            <a:off x="1803400" y="681037"/>
+            <a:ext cx="2721425" cy="2348781"/>
+          </a:xfrm>
+          <a:prstGeom prst="rect">
+            <a:avLst/>
+          </a:prstGeom>
+        </p:spPr>
+      </p:pic>
+      <p:pic>
+        <p:nvPicPr>
+          <p:cNvPr id="7" name="Picture 6">
+            <a:extLst>
+              <a:ext uri="{FF2B5EF4-FFF2-40B4-BE49-F238E27FC236}">
+                <a16:creationId xmlns:a16="http://schemas.microsoft.com/office/drawing/2014/main" id="{9747C8AE-944D-1C2D-6269-C710C7DD4925}"/>
+              </a:ext>
+            </a:extLst>
+          </p:cNvPr>
+          <p:cNvPicPr>
+            <a:picLocks noChangeAspect="1"/>
+          </p:cNvPicPr>
+          <p:nvPr/>
+        </p:nvPicPr>
+        <p:blipFill>
+          <a:blip r:embed="rId3"/>
+          <a:stretch>
+            <a:fillRect/>
+          </a:stretch>
+        </p:blipFill>
+        <p:spPr>
+          <a:xfrm>
+            <a:off x="5063160" y="420348"/>
+            <a:ext cx="3554020" cy="3220027"/>
+          </a:xfrm>
+          <a:prstGeom prst="rect">
+            <a:avLst/>
+          </a:prstGeom>
+        </p:spPr>
+      </p:pic>
+      <p:pic>
+        <p:nvPicPr>
+          <p:cNvPr id="9" name="Picture 8">
+            <a:extLst>
+              <a:ext uri="{FF2B5EF4-FFF2-40B4-BE49-F238E27FC236}">
+                <a16:creationId xmlns:a16="http://schemas.microsoft.com/office/drawing/2014/main" id="{C7892792-A3D5-B244-2B65-803DC21AFCA2}"/>
+              </a:ext>
+            </a:extLst>
+          </p:cNvPr>
+          <p:cNvPicPr>
+            <a:picLocks noChangeAspect="1"/>
+          </p:cNvPicPr>
+          <p:nvPr/>
+        </p:nvPicPr>
+        <p:blipFill>
+          <a:blip r:embed="rId4"/>
+          <a:stretch>
+            <a:fillRect/>
+          </a:stretch>
+        </p:blipFill>
+        <p:spPr>
+          <a:xfrm>
+            <a:off x="2499554" y="3672226"/>
+            <a:ext cx="6280951" cy="2765426"/>
+          </a:xfrm>
+          <a:prstGeom prst="rect">
+            <a:avLst/>
+          </a:prstGeom>
+        </p:spPr>
+      </p:pic>
+    </p:spTree>
+    <p:extLst>
+      <p:ext uri="{BB962C8B-B14F-4D97-AF65-F5344CB8AC3E}">
+        <p14:creationId xmlns:p14="http://schemas.microsoft.com/office/powerpoint/2010/main" val="2039206459"/>
+      </p:ext>
+    </p:extLst>
+  </p:cSld>
+  <p:clrMapOvr>
+    <a:masterClrMapping/>
+  </p:clrMapOvr>
+</p:sld>
+</file>
+
+<file path=ppt/slides/slide178.xml><?xml version="1.0" encoding="utf-8"?>
+<p:sld xmlns:a="http://schemas.openxmlformats.org/drawingml/2006/main" xmlns:r="http://schemas.openxmlformats.org/officeDocument/2006/relationships" xmlns:p="http://schemas.openxmlformats.org/presentationml/2006/main">
+  <p:cSld>
+    <p:spTree>
+      <p:nvGrpSpPr>
+        <p:cNvPr id="1" name=""/>
+        <p:cNvGrpSpPr/>
+        <p:nvPr/>
+      </p:nvGrpSpPr>
+      <p:grpSpPr>
+        <a:xfrm>
+          <a:off x="0" y="0"/>
+          <a:ext cx="0" cy="0"/>
+          <a:chOff x="0" y="0"/>
+          <a:chExt cx="0" cy="0"/>
+        </a:xfrm>
+      </p:grpSpPr>
+      <p:pic>
+        <p:nvPicPr>
+          <p:cNvPr id="5" name="Content Placeholder 4">
+            <a:extLst>
+              <a:ext uri="{FF2B5EF4-FFF2-40B4-BE49-F238E27FC236}">
+                <a16:creationId xmlns:a16="http://schemas.microsoft.com/office/drawing/2014/main" id="{0A6AF35B-1A75-A533-4CB7-3ABA650BBE2F}"/>
+              </a:ext>
+            </a:extLst>
+          </p:cNvPr>
+          <p:cNvPicPr>
+            <a:picLocks noGrp="1" noChangeAspect="1"/>
+          </p:cNvPicPr>
+          <p:nvPr>
+            <p:ph idx="1"/>
+          </p:nvPr>
+        </p:nvPicPr>
+        <p:blipFill>
+          <a:blip r:embed="rId2"/>
+          <a:stretch>
+            <a:fillRect/>
+          </a:stretch>
+        </p:blipFill>
+        <p:spPr>
+          <a:xfrm>
+            <a:off x="206472" y="420162"/>
+            <a:ext cx="3722062" cy="4181971"/>
+          </a:xfrm>
+          <a:prstGeom prst="rect">
+            <a:avLst/>
+          </a:prstGeom>
+        </p:spPr>
+      </p:pic>
+      <p:pic>
+        <p:nvPicPr>
+          <p:cNvPr id="7" name="Picture 6">
+            <a:extLst>
+              <a:ext uri="{FF2B5EF4-FFF2-40B4-BE49-F238E27FC236}">
+                <a16:creationId xmlns:a16="http://schemas.microsoft.com/office/drawing/2014/main" id="{7A29C6ED-E6D9-E5FE-BF9A-8C0C3D147F27}"/>
+              </a:ext>
+            </a:extLst>
+          </p:cNvPr>
+          <p:cNvPicPr>
+            <a:picLocks noChangeAspect="1"/>
+          </p:cNvPicPr>
+          <p:nvPr/>
+        </p:nvPicPr>
+        <p:blipFill>
+          <a:blip r:embed="rId3"/>
+          <a:stretch>
+            <a:fillRect/>
+          </a:stretch>
+        </p:blipFill>
+        <p:spPr>
+          <a:xfrm>
+            <a:off x="4401667" y="1094124"/>
+            <a:ext cx="4208931" cy="3740252"/>
+          </a:xfrm>
+          <a:prstGeom prst="rect">
+            <a:avLst/>
+          </a:prstGeom>
+        </p:spPr>
+      </p:pic>
+    </p:spTree>
+    <p:extLst>
+      <p:ext uri="{BB962C8B-B14F-4D97-AF65-F5344CB8AC3E}">
+        <p14:creationId xmlns:p14="http://schemas.microsoft.com/office/powerpoint/2010/main" val="908833130"/>
+      </p:ext>
+    </p:extLst>
+  </p:cSld>
+  <p:clrMapOvr>
+    <a:masterClrMapping/>
+  </p:clrMapOvr>
+</p:sld>
+</file>
+
+<file path=ppt/slides/slide179.xml><?xml version="1.0" encoding="utf-8"?>
+<p:sld xmlns:a="http://schemas.openxmlformats.org/drawingml/2006/main" xmlns:r="http://schemas.openxmlformats.org/officeDocument/2006/relationships" xmlns:p="http://schemas.openxmlformats.org/presentationml/2006/main">
+  <p:cSld>
+    <p:spTree>
+      <p:nvGrpSpPr>
+        <p:cNvPr id="1" name=""/>
+        <p:cNvGrpSpPr/>
+        <p:nvPr/>
+      </p:nvGrpSpPr>
+      <p:grpSpPr>
+        <a:xfrm>
+          <a:off x="0" y="0"/>
+          <a:ext cx="0" cy="0"/>
+          <a:chOff x="0" y="0"/>
+          <a:chExt cx="0" cy="0"/>
+        </a:xfrm>
+      </p:grpSpPr>
+      <p:pic>
+        <p:nvPicPr>
+          <p:cNvPr id="5" name="Content Placeholder 4">
+            <a:extLst>
+              <a:ext uri="{FF2B5EF4-FFF2-40B4-BE49-F238E27FC236}">
+                <a16:creationId xmlns:a16="http://schemas.microsoft.com/office/drawing/2014/main" id="{55FA9A2F-90B9-A768-E413-F3E26AA3F49D}"/>
+              </a:ext>
+            </a:extLst>
+          </p:cNvPr>
+          <p:cNvPicPr>
+            <a:picLocks noGrp="1" noChangeAspect="1"/>
+          </p:cNvPicPr>
+          <p:nvPr>
+            <p:ph idx="1"/>
+          </p:nvPr>
+        </p:nvPicPr>
+        <p:blipFill>
+          <a:blip r:embed="rId2"/>
+          <a:stretch>
+            <a:fillRect/>
+          </a:stretch>
+        </p:blipFill>
+        <p:spPr>
+          <a:xfrm>
+            <a:off x="560830" y="438659"/>
+            <a:ext cx="3934970" cy="5818207"/>
+          </a:xfrm>
+          <a:prstGeom prst="rect">
+            <a:avLst/>
+          </a:prstGeom>
+        </p:spPr>
+      </p:pic>
+      <p:pic>
+        <p:nvPicPr>
+          <p:cNvPr id="7" name="Picture 6">
+            <a:extLst>
+              <a:ext uri="{FF2B5EF4-FFF2-40B4-BE49-F238E27FC236}">
+                <a16:creationId xmlns:a16="http://schemas.microsoft.com/office/drawing/2014/main" id="{FD6FCA4B-CB19-612B-C5FA-947F8A4D275D}"/>
+              </a:ext>
+            </a:extLst>
+          </p:cNvPr>
+          <p:cNvPicPr>
+            <a:picLocks noChangeAspect="1"/>
+          </p:cNvPicPr>
+          <p:nvPr/>
+        </p:nvPicPr>
+        <p:blipFill>
+          <a:blip r:embed="rId3"/>
+          <a:stretch>
+            <a:fillRect/>
+          </a:stretch>
+        </p:blipFill>
+        <p:spPr>
+          <a:xfrm>
+            <a:off x="4946550" y="337699"/>
+            <a:ext cx="2859720" cy="5919167"/>
+          </a:xfrm>
+          <a:prstGeom prst="rect">
+            <a:avLst/>
+          </a:prstGeom>
+        </p:spPr>
+      </p:pic>
+    </p:spTree>
+    <p:extLst>
+      <p:ext uri="{BB962C8B-B14F-4D97-AF65-F5344CB8AC3E}">
+        <p14:creationId xmlns:p14="http://schemas.microsoft.com/office/powerpoint/2010/main" val="3457037017"/>
       </p:ext>
     </p:extLst>
   </p:cSld>
@@ -23588,6 +25027,388 @@
     <p:extLst>
       <p:ext uri="{BB962C8B-B14F-4D97-AF65-F5344CB8AC3E}">
         <p14:creationId xmlns:p14="http://schemas.microsoft.com/office/powerpoint/2010/main" val="928585490"/>
+      </p:ext>
+    </p:extLst>
+  </p:cSld>
+  <p:clrMapOvr>
+    <a:masterClrMapping/>
+  </p:clrMapOvr>
+</p:sld>
+</file>
+
+<file path=ppt/slides/slide180.xml><?xml version="1.0" encoding="utf-8"?>
+<p:sld xmlns:a="http://schemas.openxmlformats.org/drawingml/2006/main" xmlns:r="http://schemas.openxmlformats.org/officeDocument/2006/relationships" xmlns:p="http://schemas.openxmlformats.org/presentationml/2006/main">
+  <p:cSld>
+    <p:spTree>
+      <p:nvGrpSpPr>
+        <p:cNvPr id="1" name=""/>
+        <p:cNvGrpSpPr/>
+        <p:nvPr/>
+      </p:nvGrpSpPr>
+      <p:grpSpPr>
+        <a:xfrm>
+          <a:off x="0" y="0"/>
+          <a:ext cx="0" cy="0"/>
+          <a:chOff x="0" y="0"/>
+          <a:chExt cx="0" cy="0"/>
+        </a:xfrm>
+      </p:grpSpPr>
+      <p:pic>
+        <p:nvPicPr>
+          <p:cNvPr id="5" name="Content Placeholder 4">
+            <a:extLst>
+              <a:ext uri="{FF2B5EF4-FFF2-40B4-BE49-F238E27FC236}">
+                <a16:creationId xmlns:a16="http://schemas.microsoft.com/office/drawing/2014/main" id="{200741D5-3A5B-CCE5-FAE6-B7172AFD97F8}"/>
+              </a:ext>
+            </a:extLst>
+          </p:cNvPr>
+          <p:cNvPicPr>
+            <a:picLocks noGrp="1" noChangeAspect="1"/>
+          </p:cNvPicPr>
+          <p:nvPr>
+            <p:ph idx="1"/>
+          </p:nvPr>
+        </p:nvPicPr>
+        <p:blipFill>
+          <a:blip r:embed="rId2"/>
+          <a:stretch>
+            <a:fillRect/>
+          </a:stretch>
+        </p:blipFill>
+        <p:spPr>
+          <a:xfrm>
+            <a:off x="0" y="-73411"/>
+            <a:ext cx="3942488" cy="3426210"/>
+          </a:xfrm>
+          <a:prstGeom prst="rect">
+            <a:avLst/>
+          </a:prstGeom>
+        </p:spPr>
+      </p:pic>
+      <p:pic>
+        <p:nvPicPr>
+          <p:cNvPr id="7" name="Picture 6">
+            <a:extLst>
+              <a:ext uri="{FF2B5EF4-FFF2-40B4-BE49-F238E27FC236}">
+                <a16:creationId xmlns:a16="http://schemas.microsoft.com/office/drawing/2014/main" id="{70123043-DFE3-1D63-7D98-A3BD548C561F}"/>
+              </a:ext>
+            </a:extLst>
+          </p:cNvPr>
+          <p:cNvPicPr>
+            <a:picLocks noChangeAspect="1"/>
+          </p:cNvPicPr>
+          <p:nvPr/>
+        </p:nvPicPr>
+        <p:blipFill>
+          <a:blip r:embed="rId3"/>
+          <a:stretch>
+            <a:fillRect/>
+          </a:stretch>
+        </p:blipFill>
+        <p:spPr>
+          <a:xfrm>
+            <a:off x="246466" y="3203291"/>
+            <a:ext cx="5105383" cy="2206908"/>
+          </a:xfrm>
+          <a:prstGeom prst="rect">
+            <a:avLst/>
+          </a:prstGeom>
+        </p:spPr>
+      </p:pic>
+      <p:pic>
+        <p:nvPicPr>
+          <p:cNvPr id="9" name="Picture 8">
+            <a:extLst>
+              <a:ext uri="{FF2B5EF4-FFF2-40B4-BE49-F238E27FC236}">
+                <a16:creationId xmlns:a16="http://schemas.microsoft.com/office/drawing/2014/main" id="{1CEAD337-0D37-1DD9-726B-75F1EB9573E5}"/>
+              </a:ext>
+            </a:extLst>
+          </p:cNvPr>
+          <p:cNvPicPr>
+            <a:picLocks noChangeAspect="1"/>
+          </p:cNvPicPr>
+          <p:nvPr/>
+        </p:nvPicPr>
+        <p:blipFill>
+          <a:blip r:embed="rId4"/>
+          <a:stretch>
+            <a:fillRect/>
+          </a:stretch>
+        </p:blipFill>
+        <p:spPr>
+          <a:xfrm>
+            <a:off x="6019971" y="753761"/>
+            <a:ext cx="3974133" cy="4842706"/>
+          </a:xfrm>
+          <a:prstGeom prst="rect">
+            <a:avLst/>
+          </a:prstGeom>
+        </p:spPr>
+      </p:pic>
+    </p:spTree>
+    <p:extLst>
+      <p:ext uri="{BB962C8B-B14F-4D97-AF65-F5344CB8AC3E}">
+        <p14:creationId xmlns:p14="http://schemas.microsoft.com/office/powerpoint/2010/main" val="2096309273"/>
+      </p:ext>
+    </p:extLst>
+  </p:cSld>
+  <p:clrMapOvr>
+    <a:masterClrMapping/>
+  </p:clrMapOvr>
+</p:sld>
+</file>
+
+<file path=ppt/slides/slide181.xml><?xml version="1.0" encoding="utf-8"?>
+<p:sld xmlns:a="http://schemas.openxmlformats.org/drawingml/2006/main" xmlns:r="http://schemas.openxmlformats.org/officeDocument/2006/relationships" xmlns:p="http://schemas.openxmlformats.org/presentationml/2006/main">
+  <p:cSld>
+    <p:spTree>
+      <p:nvGrpSpPr>
+        <p:cNvPr id="1" name=""/>
+        <p:cNvGrpSpPr/>
+        <p:nvPr/>
+      </p:nvGrpSpPr>
+      <p:grpSpPr>
+        <a:xfrm>
+          <a:off x="0" y="0"/>
+          <a:ext cx="0" cy="0"/>
+          <a:chOff x="0" y="0"/>
+          <a:chExt cx="0" cy="0"/>
+        </a:xfrm>
+      </p:grpSpPr>
+      <p:pic>
+        <p:nvPicPr>
+          <p:cNvPr id="5" name="Content Placeholder 4">
+            <a:extLst>
+              <a:ext uri="{FF2B5EF4-FFF2-40B4-BE49-F238E27FC236}">
+                <a16:creationId xmlns:a16="http://schemas.microsoft.com/office/drawing/2014/main" id="{97D35EED-F9D1-26B1-BA32-6D9145F8448D}"/>
+              </a:ext>
+            </a:extLst>
+          </p:cNvPr>
+          <p:cNvPicPr>
+            <a:picLocks noGrp="1" noChangeAspect="1"/>
+          </p:cNvPicPr>
+          <p:nvPr>
+            <p:ph idx="1"/>
+          </p:nvPr>
+        </p:nvPicPr>
+        <p:blipFill>
+          <a:blip r:embed="rId2"/>
+          <a:stretch>
+            <a:fillRect/>
+          </a:stretch>
+        </p:blipFill>
+        <p:spPr>
+          <a:xfrm>
+            <a:off x="208542" y="1233921"/>
+            <a:ext cx="5609697" cy="3101012"/>
+          </a:xfrm>
+          <a:prstGeom prst="rect">
+            <a:avLst/>
+          </a:prstGeom>
+        </p:spPr>
+      </p:pic>
+      <p:pic>
+        <p:nvPicPr>
+          <p:cNvPr id="7" name="Picture 6">
+            <a:extLst>
+              <a:ext uri="{FF2B5EF4-FFF2-40B4-BE49-F238E27FC236}">
+                <a16:creationId xmlns:a16="http://schemas.microsoft.com/office/drawing/2014/main" id="{7178C6EB-5F3D-2508-96D3-8FACC7241C17}"/>
+              </a:ext>
+            </a:extLst>
+          </p:cNvPr>
+          <p:cNvPicPr>
+            <a:picLocks noChangeAspect="1"/>
+          </p:cNvPicPr>
+          <p:nvPr/>
+        </p:nvPicPr>
+        <p:blipFill>
+          <a:blip r:embed="rId3"/>
+          <a:stretch>
+            <a:fillRect/>
+          </a:stretch>
+        </p:blipFill>
+        <p:spPr>
+          <a:xfrm>
+            <a:off x="6155872" y="1504854"/>
+            <a:ext cx="5146592" cy="3101012"/>
+          </a:xfrm>
+          <a:prstGeom prst="rect">
+            <a:avLst/>
+          </a:prstGeom>
+        </p:spPr>
+      </p:pic>
+    </p:spTree>
+    <p:extLst>
+      <p:ext uri="{BB962C8B-B14F-4D97-AF65-F5344CB8AC3E}">
+        <p14:creationId xmlns:p14="http://schemas.microsoft.com/office/powerpoint/2010/main" val="3537278701"/>
+      </p:ext>
+    </p:extLst>
+  </p:cSld>
+  <p:clrMapOvr>
+    <a:masterClrMapping/>
+  </p:clrMapOvr>
+</p:sld>
+</file>
+
+<file path=ppt/slides/slide182.xml><?xml version="1.0" encoding="utf-8"?>
+<p:sld xmlns:a="http://schemas.openxmlformats.org/drawingml/2006/main" xmlns:r="http://schemas.openxmlformats.org/officeDocument/2006/relationships" xmlns:p="http://schemas.openxmlformats.org/presentationml/2006/main">
+  <p:cSld>
+    <p:spTree>
+      <p:nvGrpSpPr>
+        <p:cNvPr id="1" name=""/>
+        <p:cNvGrpSpPr/>
+        <p:nvPr/>
+      </p:nvGrpSpPr>
+      <p:grpSpPr>
+        <a:xfrm>
+          <a:off x="0" y="0"/>
+          <a:ext cx="0" cy="0"/>
+          <a:chOff x="0" y="0"/>
+          <a:chExt cx="0" cy="0"/>
+        </a:xfrm>
+      </p:grpSpPr>
+      <p:pic>
+        <p:nvPicPr>
+          <p:cNvPr id="5" name="Content Placeholder 4">
+            <a:extLst>
+              <a:ext uri="{FF2B5EF4-FFF2-40B4-BE49-F238E27FC236}">
+                <a16:creationId xmlns:a16="http://schemas.microsoft.com/office/drawing/2014/main" id="{C192263F-BF10-4F55-B364-098C8CA007FB}"/>
+              </a:ext>
+            </a:extLst>
+          </p:cNvPr>
+          <p:cNvPicPr>
+            <a:picLocks noGrp="1" noChangeAspect="1"/>
+          </p:cNvPicPr>
+          <p:nvPr>
+            <p:ph idx="1"/>
+          </p:nvPr>
+        </p:nvPicPr>
+        <p:blipFill>
+          <a:blip r:embed="rId2"/>
+          <a:stretch>
+            <a:fillRect/>
+          </a:stretch>
+        </p:blipFill>
+        <p:spPr>
+          <a:xfrm>
+            <a:off x="256745" y="545928"/>
+            <a:ext cx="5136521" cy="3255631"/>
+          </a:xfrm>
+          <a:prstGeom prst="rect">
+            <a:avLst/>
+          </a:prstGeom>
+        </p:spPr>
+      </p:pic>
+      <p:pic>
+        <p:nvPicPr>
+          <p:cNvPr id="7" name="Picture 6">
+            <a:extLst>
+              <a:ext uri="{FF2B5EF4-FFF2-40B4-BE49-F238E27FC236}">
+                <a16:creationId xmlns:a16="http://schemas.microsoft.com/office/drawing/2014/main" id="{BF25013B-91BF-1A33-7252-1C5A1A16E246}"/>
+              </a:ext>
+            </a:extLst>
+          </p:cNvPr>
+          <p:cNvPicPr>
+            <a:picLocks noChangeAspect="1"/>
+          </p:cNvPicPr>
+          <p:nvPr/>
+        </p:nvPicPr>
+        <p:blipFill>
+          <a:blip r:embed="rId3"/>
+          <a:stretch>
+            <a:fillRect/>
+          </a:stretch>
+        </p:blipFill>
+        <p:spPr>
+          <a:xfrm>
+            <a:off x="5207635" y="1157358"/>
+            <a:ext cx="5672031" cy="2756501"/>
+          </a:xfrm>
+          <a:prstGeom prst="rect">
+            <a:avLst/>
+          </a:prstGeom>
+        </p:spPr>
+      </p:pic>
+    </p:spTree>
+    <p:extLst>
+      <p:ext uri="{BB962C8B-B14F-4D97-AF65-F5344CB8AC3E}">
+        <p14:creationId xmlns:p14="http://schemas.microsoft.com/office/powerpoint/2010/main" val="1432332681"/>
+      </p:ext>
+    </p:extLst>
+  </p:cSld>
+  <p:clrMapOvr>
+    <a:masterClrMapping/>
+  </p:clrMapOvr>
+</p:sld>
+</file>
+
+<file path=ppt/slides/slide183.xml><?xml version="1.0" encoding="utf-8"?>
+<p:sld xmlns:a="http://schemas.openxmlformats.org/drawingml/2006/main" xmlns:r="http://schemas.openxmlformats.org/officeDocument/2006/relationships" xmlns:p="http://schemas.openxmlformats.org/presentationml/2006/main">
+  <p:cSld>
+    <p:spTree>
+      <p:nvGrpSpPr>
+        <p:cNvPr id="1" name="">
+          <a:extLst>
+            <a:ext uri="{FF2B5EF4-FFF2-40B4-BE49-F238E27FC236}">
+              <a16:creationId xmlns:a16="http://schemas.microsoft.com/office/drawing/2014/main" id="{82E06334-A1C2-C5DD-0C8D-34B9C8F343A6}"/>
+            </a:ext>
+          </a:extLst>
+        </p:cNvPr>
+        <p:cNvGrpSpPr/>
+        <p:nvPr/>
+      </p:nvGrpSpPr>
+      <p:grpSpPr>
+        <a:xfrm>
+          <a:off x="0" y="0"/>
+          <a:ext cx="0" cy="0"/>
+          <a:chOff x="0" y="0"/>
+          <a:chExt cx="0" cy="0"/>
+        </a:xfrm>
+      </p:grpSpPr>
+      <p:sp>
+        <p:nvSpPr>
+          <p:cNvPr id="2" name="Title 1">
+            <a:extLst>
+              <a:ext uri="{FF2B5EF4-FFF2-40B4-BE49-F238E27FC236}">
+                <a16:creationId xmlns:a16="http://schemas.microsoft.com/office/drawing/2014/main" id="{8B260B31-D6E9-4F7A-F5A1-DD268E99A000}"/>
+              </a:ext>
+            </a:extLst>
+          </p:cNvPr>
+          <p:cNvSpPr>
+            <a:spLocks noGrp="1"/>
+          </p:cNvSpPr>
+          <p:nvPr>
+            <p:ph type="title"/>
+          </p:nvPr>
+        </p:nvSpPr>
+        <p:spPr>
+          <a:xfrm>
+            <a:off x="838200" y="2184400"/>
+            <a:ext cx="10515600" cy="2091267"/>
+          </a:xfrm>
+        </p:spPr>
+        <p:txBody>
+          <a:bodyPr>
+            <a:normAutofit/>
+          </a:bodyPr>
+          <a:lstStyle/>
+          <a:p>
+            <a:pPr algn="ctr"/>
+            <a:r>
+              <a:rPr lang="en-US" sz="5400" b="1">
+                <a:solidFill>
+                  <a:srgbClr val="FF0000"/>
+                </a:solidFill>
+              </a:rPr>
+              <a:t>End query expressions</a:t>
+            </a:r>
+          </a:p>
+        </p:txBody>
+      </p:sp>
+    </p:spTree>
+    <p:extLst>
+      <p:ext uri="{BB962C8B-B14F-4D97-AF65-F5344CB8AC3E}">
+        <p14:creationId xmlns:p14="http://schemas.microsoft.com/office/powerpoint/2010/main" val="2260002056"/>
       </p:ext>
     </p:extLst>
   </p:cSld>
